--- a/전기버스_충전운영_건국대미팅_2026-10-08.pptx
+++ b/전기버스_충전운영_건국대미팅_2026-10-08.pptx
@@ -2,17 +2,17 @@
 <file path=ppt/presentation.xml><?xml version="1.0" encoding="utf-8"?>
 <p:presentation xmlns:p="http://schemas.openxmlformats.org/presentationml/2006/main">
   <p:sldMasterIdLst>
-    <p:sldMasterId xmlns:r="http://schemas.openxmlformats.org/officeDocument/2006/relationships" id="2147483648" r:id="R781694483ef844f0"/>
+    <p:sldMasterId xmlns:r="http://schemas.openxmlformats.org/officeDocument/2006/relationships" id="2147483648" r:id="Ra8b961f743f94ed5"/>
   </p:sldMasterIdLst>
   <p:notesMasterIdLst>
-    <p:notesMasterId xmlns:r="http://schemas.openxmlformats.org/officeDocument/2006/relationships" r:id="R8ee01206f8084f84"/>
+    <p:notesMasterId xmlns:r="http://schemas.openxmlformats.org/officeDocument/2006/relationships" r:id="R5745133564994f86"/>
   </p:notesMasterIdLst>
   <p:sldIdLst>
-    <p:sldId xmlns:r="http://schemas.openxmlformats.org/officeDocument/2006/relationships" id="256" r:id="R8dce4c5d4af74230"/>
-    <p:sldId xmlns:r="http://schemas.openxmlformats.org/officeDocument/2006/relationships" id="257" r:id="R33e894dd32604ced"/>
-    <p:sldId xmlns:r="http://schemas.openxmlformats.org/officeDocument/2006/relationships" id="258" r:id="Rb38eb5abe5e941f1"/>
-    <p:sldId xmlns:r="http://schemas.openxmlformats.org/officeDocument/2006/relationships" id="259" r:id="R565c193a4e074d8e"/>
-    <p:sldId xmlns:r="http://schemas.openxmlformats.org/officeDocument/2006/relationships" id="260" r:id="R81d816d05e05495f"/>
+    <p:sldId xmlns:r="http://schemas.openxmlformats.org/officeDocument/2006/relationships" id="256" r:id="R23a31b314bd64ba2"/>
+    <p:sldId xmlns:r="http://schemas.openxmlformats.org/officeDocument/2006/relationships" id="257" r:id="Ra1e4f1f30a8342ad"/>
+    <p:sldId xmlns:r="http://schemas.openxmlformats.org/officeDocument/2006/relationships" id="258" r:id="R3b65b1caffae4c97"/>
+    <p:sldId xmlns:r="http://schemas.openxmlformats.org/officeDocument/2006/relationships" id="259" r:id="R2313c5abebe04647"/>
+    <p:sldId xmlns:r="http://schemas.openxmlformats.org/officeDocument/2006/relationships" id="260" r:id="R5daabef7e031438b"/>
   </p:sldIdLst>
   <p:sldSz cx="12192000" cy="6858000"/>
   <p:notesSz cx="6858000" cy="9144000"/>
@@ -451,12 +451,12 @@
           </a:p>
           <a:p xmlns:a="http://schemas.openxmlformats.org/drawingml/2006/main">
             <a:r>
-              <a:t>제가 하려는 연구는 충전기가 부족할 때 전기버스가 얼마나 기다리고, 그 대기 때문에 출발이 얼마나 늦어지는지를 시뮬레이션으로 확인하는 것입니다.</a:t>
-            </a:r>
-          </a:p>
-          <a:p xmlns:a="http://schemas.openxmlformats.org/drawingml/2006/main">
-            <a:r>
-              <a:t>단순히 충전기를 많이 설치하는 답만 보는 것이 아니라, 충전 순서와 지연이 생겼을 때의 운영 방법까지 같이 비교하려고 합니다.</a:t>
+              <a:t>오늘은 선행연구를 자세히 설명하기보다 제가 현재 어떤 연구 문제를 생각하고 있고, 앞으로 어떤 방법으로 구체화하려는지 말씀드린 뒤 의견을 받고 싶습니다.</a:t>
+            </a:r>
+          </a:p>
+          <a:p xmlns:a="http://schemas.openxmlformats.org/drawingml/2006/main">
+            <a:r>
+              <a:t>아직 데이터 선정, 실제 시뮬레이션과 알고리즘은 확정하거나 완료하지 않았습니다.</a:t>
             </a:r>
           </a:p>
         </p:txBody>
@@ -531,12 +531,17 @@
           </a:p>
           <a:p xmlns:a="http://schemas.openxmlformats.org/drawingml/2006/main">
             <a:r>
-              <a:t>Wang 논문은 같은 버스가 연속으로 수행하는 두 운행 사이의 쉬는 시간을 충전 가능 시간으로 사용합니다. 여러 버스가 충전기를 같이 써도 시간이 겹치지 않게 배정합니다.</a:t>
-            </a:r>
-          </a:p>
-          <a:p xmlns:a="http://schemas.openxmlformats.org/drawingml/2006/main">
-            <a:r>
-              <a:t>다만 다음 출발을 늦추지 않는 충전만 선택합니다. 저는 충전기가 부족해서 그 시간을 넘겼을 때 실제 출발이 얼마나 늦고, 같은 버스의 뒤 운행까지 어떻게 밀리는지를 추가로 보려고 합니다.</a:t>
+              <a:t>제가 현재 정리한 문제는 공유 충전기의 대기가 실제 버스 출발 지연으로 이어질 수 있다는 점입니다.</a:t>
+            </a:r>
+          </a:p>
+          <a:p xmlns:a="http://schemas.openxmlformats.org/drawingml/2006/main">
+            <a:r>
+              <a:t>그래서 충전기가 부족한 상황에서 시설을 얼마나 두고 어떤 순서로 충전하며, 지연이 생겼을 때 운행을 어떻게 조정해야 하는지를 보고 싶습니다.</a:t>
+            </a:r>
+          </a:p>
+          <a:p xmlns:a="http://schemas.openxmlformats.org/drawingml/2006/main">
+            <a:r>
+              <a:t>이 문장은 아직 연구 목적 초안이므로 오늘 자문을 받고 범위를 더 좁히려고 합니다.</a:t>
             </a:r>
           </a:p>
         </p:txBody>
@@ -611,17 +616,17 @@
           </a:p>
           <a:p xmlns:a="http://schemas.openxmlformats.org/drawingml/2006/main">
             <a:r>
-              <a:t>연구 목적은 정해진 운행을 최대한 지키면서 필요한 충전시설과 운영 방법을 같이 찾는 것입니다.</a:t>
-            </a:r>
-          </a:p>
-          <a:p xmlns:a="http://schemas.openxmlformats.org/drawingml/2006/main">
-            <a:r>
-              <a:t>첫째는 충전기 수와 출력, 둘째는 어떤 버스를 언제 충전할지, 셋째는 지연이 생겼을 때 배차를 어떻게 조정할지를 비교합니다.</a:t>
-            </a:r>
-          </a:p>
-          <a:p xmlns:a="http://schemas.openxmlformats.org/drawingml/2006/main">
-            <a:r>
-              <a:t>충전기를 많이 놓으면 지연이 줄어드는 것은 당연하기 때문에, 어느 정도 시설에서 어떤 충전·운영 방법을 써야 피해를 줄일 수 있는지를 결과로 보여주려고 합니다.</a:t>
+              <a:t>현재 완료된 것은 연구 문제와 목적 초안을 정리한 것입니다.</a:t>
+            </a:r>
+          </a:p>
+          <a:p xmlns:a="http://schemas.openxmlformats.org/drawingml/2006/main">
+            <a:r>
+              <a:t>GTFS와 BIS를 같이 쓰는 방향을 생각했지만 사용할 노선과 기간을 정하지 않았고, 실제 데이터를 넣은 시뮬레이션도 아직 없습니다.</a:t>
+            </a:r>
+          </a:p>
+          <a:p xmlns:a="http://schemas.openxmlformats.org/drawingml/2006/main">
+            <a:r>
+              <a:t>충전 알고리즘도 도착 즉시 충전과 출발시간 우선 충전을 후보로 생각한 단계입니다. 기존 시험 코드는 구조 확인용이며 연구 결과로 사용한 상태가 아닙니다.</a:t>
             </a:r>
           </a:p>
         </p:txBody>
@@ -696,17 +701,17 @@
           </a:p>
           <a:p xmlns:a="http://schemas.openxmlformats.org/drawingml/2006/main">
             <a:r>
-              <a:t>GTFS에서는 예정된 노선과 시간표를 가져오고, BIS에서는 실제 정류장 사이 이동시간을 가져옵니다. 먼저 GTFS만으로 같은 차량의 운행을 이어 붙이고, 이후 BIS를 연결해 실제 이동 차이를 넣습니다.</a:t>
-            </a:r>
-          </a:p>
-          <a:p xmlns:a="http://schemas.openxmlformats.org/drawingml/2006/main">
-            <a:r>
-              <a:t>시뮬레이션은 DTUMOS Energy에서 작은 시험 모듈로 만든 뒤 잘 작동하면 본 DTUMOS로 옮기겠습니다.</a:t>
-            </a:r>
-          </a:p>
-          <a:p xmlns:a="http://schemas.openxmlformats.org/drawingml/2006/main">
-            <a:r>
-              <a:t>처음에는 노선 하나, 버스 세 대 정도와 충전기 한 대만 두고, 도착 즉시 충전과 다음 출발시간을 고려한 충전을 비교합니다.</a:t>
+              <a:t>자문을 받은 뒤 첫 사이클은 노선 하나를 정하고, 버스 세 대 정도와 충전기 한 대의 작은 예제를 만드는 것으로 생각하고 있습니다.</a:t>
+            </a:r>
+          </a:p>
+          <a:p xmlns:a="http://schemas.openxmlformats.org/drawingml/2006/main">
+            <a:r>
+              <a:t>도착 즉시 충전을 기준으로 둔 뒤 다음 출발시간이 가까운 버스를 먼저 충전하는 방법과 비교하려고 합니다.</a:t>
+            </a:r>
+          </a:p>
+          <a:p xmlns:a="http://schemas.openxmlformats.org/drawingml/2006/main">
+            <a:r>
+              <a:t>다만 데이터 범위, 시뮬레이션의 현실성 수준과 알고리즘 시작점을 아직 정하지 못해 이 부분을 자문받고 싶습니다.</a:t>
             </a:r>
           </a:p>
         </p:txBody>
@@ -781,17 +786,17 @@
           </a:p>
           <a:p xmlns:a="http://schemas.openxmlformats.org/drawingml/2006/main">
             <a:r>
-              <a:t>앞으로는 선행연구를 보고 남은 문제를 찾은 다음, 연구 목적과 필요한 데이터·시뮬레이션을 정하고 결과의 의미를 해석하는 과정을 계속 반복하겠습니다.</a:t>
-            </a:r>
-          </a:p>
-          <a:p xmlns:a="http://schemas.openxmlformats.org/drawingml/2006/main">
-            <a:r>
-              <a:t>당장 할 일은 핵심 논문 네 편 비교, GTFS와 BIS 연결, 버스 세 대의 작은 예제 실행, 그리고 충전 방법과 충전기 조건 비교입니다.</a:t>
-            </a:r>
-          </a:p>
-          <a:p xmlns:a="http://schemas.openxmlformats.org/drawingml/2006/main">
-            <a:r>
-              <a:t>현재는 질문과 시험 코드가 정리된 단계이고 실제 서울시 자료 결과는 아직 없습니다. 내일 미팅에서는 이 범위와 우선순위가 맞는지 확인받겠습니다.</a:t>
+              <a:t>현재 가장 자문받고 싶은 내용은 네 가지입니다.</a:t>
+            </a:r>
+          </a:p>
+          <a:p xmlns:a="http://schemas.openxmlformats.org/drawingml/2006/main">
+            <a:r>
+              <a:t>첫째는 GTFS와 BIS를 함께 사용하는 데이터 방향, 둘째는 작은 시뮬레이션의 적절한 범위입니다.</a:t>
+            </a:r>
+          </a:p>
+          <a:p xmlns:a="http://schemas.openxmlformats.org/drawingml/2006/main">
+            <a:r>
+              <a:t>셋째는 단순 충전 규칙과 최적화 중 어디서 시작할지, 넷째는 현재 생각한 연구 범위를 어떻게 좁힐지입니다.</a:t>
             </a:r>
           </a:p>
         </p:txBody>
@@ -859,7 +864,7 @@
   </p:cSld>
   <p:clrMap bg1="lt1" tx1="dk1" bg2="lt2" tx2="dk2" accent1="accent1" accent2="accent2" accent3="accent3" accent4="accent4" accent5="accent5" accent6="accent6" hlink="hlink" folHlink="folHlink"/>
   <p:sldLayoutIdLst>
-    <p:sldLayoutId xmlns:r="http://schemas.openxmlformats.org/officeDocument/2006/relationships" id="2147483649" r:id="R2c69449599c54aa3"/>
+    <p:sldLayoutId xmlns:r="http://schemas.openxmlformats.org/officeDocument/2006/relationships" id="2147483649" r:id="R20de749a2a2d4a5a"/>
   </p:sldLayoutIdLst>
   <p:txStyles>
     <p:titleStyle>
@@ -1410,7 +1415,7 @@
           <p:cNvPr id="7" name="">
             <a:extLst xmlns:a="http://schemas.openxmlformats.org/drawingml/2006/main">
               <a:ext uri="{FF2B5EF4-FFF2-40B4-BE49-F238E27FC236}">
-                <a16:creationId xmlns:a16="http://schemas.microsoft.com/office/drawing/2014/main" id="{7A015599-5154-49D5-B0A0-6ACCB521B23A}"/>
+                <a16:creationId xmlns:a16="http://schemas.microsoft.com/office/drawing/2014/main" id="{A6C6479C-2AEA-43A1-8432-F6AA37092C0B}"/>
               </a:ext>
             </a:extLst>
           </p:cNvPr>
@@ -1422,7 +1427,7 @@
         <p:spPr>
           <a:xfrm xmlns:a="http://schemas.openxmlformats.org/drawingml/2006/main">
             <a:off x="742950" y="1628775"/>
-            <a:ext cx="9525000" cy="647700"/>
+            <a:ext cx="10287000" cy="647700"/>
           </a:xfrm>
           <a:prstGeom xmlns:a="http://schemas.openxmlformats.org/drawingml/2006/main" prst="rect">
             <a:avLst/>
@@ -1461,7 +1466,7 @@
                 <a:ea typeface="Pretendard Medium"/>
                 <a:cs typeface="Pretendard Medium"/>
               </a:rPr>
-              <a:t>전기버스 충전 운영 연구 구상</a:t>
+              <a:t>전기버스 충전 운영 연구계획 자문</a:t>
             </a:r>
           </a:p>
         </p:txBody>
@@ -1471,7 +1476,7 @@
           <p:cNvPr id="2" name="">
             <a:extLst xmlns:a="http://schemas.openxmlformats.org/drawingml/2006/main">
               <a:ext uri="{FF2B5EF4-FFF2-40B4-BE49-F238E27FC236}">
-                <a16:creationId xmlns:a16="http://schemas.microsoft.com/office/drawing/2014/main" id="{5656D70A-DCE4-4987-BB3A-BDF7B998DA6D}"/>
+                <a16:creationId xmlns:a16="http://schemas.microsoft.com/office/drawing/2014/main" id="{827B4CDD-C319-4D79-A4D5-C7E7EA72F412}"/>
               </a:ext>
             </a:extLst>
           </p:cNvPr>
@@ -1522,7 +1527,7 @@
                 <a:ea typeface="Pretendard"/>
                 <a:cs typeface="Pretendard"/>
               </a:rPr>
-              <a:t>GTFS·BIS 기반 DTUMOS Energy 시험 구현</a:t>
+              <a:t>현재 연구 방향과 방법론 설계를 위한 의견 요청</a:t>
             </a:r>
           </a:p>
         </p:txBody>
@@ -1532,7 +1537,7 @@
           <p:cNvPr id="3" name="">
             <a:extLst xmlns:a="http://schemas.openxmlformats.org/drawingml/2006/main">
               <a:ext uri="{FF2B5EF4-FFF2-40B4-BE49-F238E27FC236}">
-                <a16:creationId xmlns:a16="http://schemas.microsoft.com/office/drawing/2014/main" id="{974D1993-560B-45C1-B06B-01F623C05DC5}"/>
+                <a16:creationId xmlns:a16="http://schemas.microsoft.com/office/drawing/2014/main" id="{0F6A0BFC-58B0-4CAF-BA3E-537398971C70}"/>
               </a:ext>
             </a:extLst>
           </p:cNvPr>
@@ -1563,7 +1568,7 @@
           <p:cNvPr id="4" name="">
             <a:extLst xmlns:a="http://schemas.openxmlformats.org/drawingml/2006/main">
               <a:ext uri="{FF2B5EF4-FFF2-40B4-BE49-F238E27FC236}">
-                <a16:creationId xmlns:a16="http://schemas.microsoft.com/office/drawing/2014/main" id="{A44C25B3-30E1-4AE4-8ED5-C5C203419A95}"/>
+                <a16:creationId xmlns:a16="http://schemas.microsoft.com/office/drawing/2014/main" id="{FA654419-2168-448A-ABA3-CA67B7154957}"/>
               </a:ext>
             </a:extLst>
           </p:cNvPr>
@@ -1575,7 +1580,7 @@
         <p:spPr>
           <a:xfrm xmlns:a="http://schemas.openxmlformats.org/drawingml/2006/main">
             <a:off x="762000" y="3476625"/>
-            <a:ext cx="10001250" cy="857250"/>
+            <a:ext cx="10191750" cy="895350"/>
           </a:xfrm>
           <a:prstGeom xmlns:a="http://schemas.openxmlformats.org/drawingml/2006/main" prst="rect">
             <a:avLst/>
@@ -1596,7 +1601,7 @@
                 <a:spcPct val="112000"/>
               </a:lnSpc>
               <a:buNone/>
-              <a:defRPr sz="1800" b="1">
+              <a:defRPr sz="1875" b="1">
                 <a:solidFill>
                   <a:srgbClr val="222222"/>
                 </a:solidFill>
@@ -1606,7 +1611,7 @@
               </a:defRPr>
             </a:pPr>
             <a:r>
-              <a:rPr sz="1800" b="1">
+              <a:rPr sz="1875" b="1">
                 <a:solidFill>
                   <a:srgbClr val="222222"/>
                 </a:solidFill>
@@ -1614,7 +1619,7 @@
                 <a:ea typeface="Pretendard Medium"/>
                 <a:cs typeface="Pretendard Medium"/>
               </a:rPr>
-              <a:t>충전기가 부족할 때 생기는 대기와 출발 지연을 줄이기 위해</a:t>
+              <a:t>연구 문제와 목적을 정리한 단계이며,</a:t>
             </a:r>
           </a:p>
           <a:p xmlns:a="http://schemas.openxmlformats.org/drawingml/2006/main">
@@ -1623,7 +1628,7 @@
                 <a:spcPct val="112000"/>
               </a:lnSpc>
               <a:buNone/>
-              <a:defRPr sz="1800" b="1">
+              <a:defRPr sz="1875" b="1">
                 <a:solidFill>
                   <a:srgbClr val="222222"/>
                 </a:solidFill>
@@ -1633,7 +1638,7 @@
               </a:defRPr>
             </a:pPr>
             <a:r>
-              <a:rPr sz="1800" b="1">
+              <a:rPr sz="1875" b="1">
                 <a:solidFill>
                   <a:srgbClr val="222222"/>
                 </a:solidFill>
@@ -1641,7 +1646,7 @@
                 <a:ea typeface="Pretendard Medium"/>
                 <a:cs typeface="Pretendard Medium"/>
               </a:rPr>
-              <a:t>충전시설·충전 방법·운영 방법을 함께 비교</a:t>
+              <a:t>데이터·시뮬레이션·알고리즘 방향을 자문받고자 합니다.</a:t>
             </a:r>
           </a:p>
         </p:txBody>
@@ -1651,7 +1656,7 @@
           <p:cNvPr id="5" name="">
             <a:extLst xmlns:a="http://schemas.openxmlformats.org/drawingml/2006/main">
               <a:ext uri="{FF2B5EF4-FFF2-40B4-BE49-F238E27FC236}">
-                <a16:creationId xmlns:a16="http://schemas.microsoft.com/office/drawing/2014/main" id="{8F5CFB68-8138-4C45-8BD5-BE46B9C0B90A}"/>
+                <a16:creationId xmlns:a16="http://schemas.microsoft.com/office/drawing/2014/main" id="{1C73D411-8919-4D72-A17C-D76EB7D2BA7C}"/>
               </a:ext>
             </a:extLst>
           </p:cNvPr>
@@ -1712,7 +1717,7 @@
           <p:cNvPr id="6" name="">
             <a:extLst xmlns:a="http://schemas.openxmlformats.org/drawingml/2006/main">
               <a:ext uri="{FF2B5EF4-FFF2-40B4-BE49-F238E27FC236}">
-                <a16:creationId xmlns:a16="http://schemas.microsoft.com/office/drawing/2014/main" id="{246102D4-861D-4A1C-94AC-97A013FE4762}"/>
+                <a16:creationId xmlns:a16="http://schemas.microsoft.com/office/drawing/2014/main" id="{08270085-FB60-482D-804B-146BDEC7B0A5}"/>
               </a:ext>
             </a:extLst>
           </p:cNvPr>
@@ -1771,7 +1776,7 @@
     </p:spTree>
     <p:extLst>
       <p:ext uri="{BB962C8B-B14F-4D97-AF65-F5344CB8AC3E}">
-        <p14:creationId xmlns:p14="http://schemas.microsoft.com/office/powerpoint/2010/main" val="2029323874"/>
+        <p14:creationId xmlns:p14="http://schemas.microsoft.com/office/powerpoint/2010/main" val="573552428"/>
       </p:ext>
     </p:extLst>
   </p:cSld>
@@ -1799,10 +1804,10 @@
       </p:grpSpPr>
       <p:sp>
         <p:nvSpPr>
-          <p:cNvPr id="17" name="">
+          <p:cNvPr id="13" name="">
             <a:extLst xmlns:a="http://schemas.openxmlformats.org/drawingml/2006/main">
               <a:ext uri="{FF2B5EF4-FFF2-40B4-BE49-F238E27FC236}">
-                <a16:creationId xmlns:a16="http://schemas.microsoft.com/office/drawing/2014/main" id="{1752A5B1-CB84-4E50-87A8-8EE8EA468550}"/>
+                <a16:creationId xmlns:a16="http://schemas.microsoft.com/office/drawing/2014/main" id="{863BF747-7C7A-40D0-871C-B3CA8D33082D}"/>
               </a:ext>
             </a:extLst>
           </p:cNvPr>
@@ -1853,7 +1858,7 @@
                 <a:ea typeface="Pretendard Medium"/>
                 <a:cs typeface="Pretendard Medium"/>
               </a:rPr>
-              <a:t>1. 선행연구에서 남은 문제</a:t>
+              <a:t>현재 정리한 연구 방향</a:t>
             </a:r>
           </a:p>
         </p:txBody>
@@ -1863,7 +1868,7 @@
           <p:cNvPr id="2" name="">
             <a:extLst xmlns:a="http://schemas.openxmlformats.org/drawingml/2006/main">
               <a:ext uri="{FF2B5EF4-FFF2-40B4-BE49-F238E27FC236}">
-                <a16:creationId xmlns:a16="http://schemas.microsoft.com/office/drawing/2014/main" id="{4DC1C5D5-CC77-45B4-96D4-6FBC27B893A6}"/>
+                <a16:creationId xmlns:a16="http://schemas.microsoft.com/office/drawing/2014/main" id="{EBA37D60-FC3D-49D9-894B-6C0FE36D5169}"/>
               </a:ext>
             </a:extLst>
           </p:cNvPr>
@@ -1914,7 +1919,7 @@
                 <a:ea typeface="Pretendard"/>
                 <a:cs typeface="Pretendard"/>
               </a:rPr>
-              <a:t>선행연구 → 빈틈</a:t>
+              <a:t>연구 문제와 목적</a:t>
             </a:r>
           </a:p>
         </p:txBody>
@@ -1924,7 +1929,7 @@
           <p:cNvPr id="3" name="">
             <a:extLst xmlns:a="http://schemas.openxmlformats.org/drawingml/2006/main">
               <a:ext uri="{FF2B5EF4-FFF2-40B4-BE49-F238E27FC236}">
-                <a16:creationId xmlns:a16="http://schemas.microsoft.com/office/drawing/2014/main" id="{2E2B0D15-4D85-4382-B85B-6A9E2C6EEE34}"/>
+                <a16:creationId xmlns:a16="http://schemas.microsoft.com/office/drawing/2014/main" id="{4CF81D49-24A8-490A-A532-A68E08D2661C}"/>
               </a:ext>
             </a:extLst>
           </p:cNvPr>
@@ -1975,7 +1980,7 @@
                 <a:ea typeface="Pretendard"/>
                 <a:cs typeface="Pretendard"/>
               </a:rPr>
-              <a:t>Wang et al. (2017), Transportation Research Part E 100, 115–132.</a:t>
+              <a:t>2026-10-07 개인미팅에서 정리한 연구 구상.</a:t>
             </a:r>
           </a:p>
         </p:txBody>
@@ -1985,7 +1990,7 @@
           <p:cNvPr id="4" name="">
             <a:extLst xmlns:a="http://schemas.openxmlformats.org/drawingml/2006/main">
               <a:ext uri="{FF2B5EF4-FFF2-40B4-BE49-F238E27FC236}">
-                <a16:creationId xmlns:a16="http://schemas.microsoft.com/office/drawing/2014/main" id="{2E675F90-138A-4EFB-9C6E-EA4C7AA7B1D2}"/>
+                <a16:creationId xmlns:a16="http://schemas.microsoft.com/office/drawing/2014/main" id="{F813C807-BD0E-4398-94C7-A01F6CDB43A4}"/>
               </a:ext>
             </a:extLst>
           </p:cNvPr>
@@ -2046,7 +2051,7 @@
           <p:cNvPr id="5" name="">
             <a:extLst xmlns:a="http://schemas.openxmlformats.org/drawingml/2006/main">
               <a:ext uri="{FF2B5EF4-FFF2-40B4-BE49-F238E27FC236}">
-                <a16:creationId xmlns:a16="http://schemas.microsoft.com/office/drawing/2014/main" id="{DD01F6BD-C755-48E4-BDEA-76C030B7854C}"/>
+                <a16:creationId xmlns:a16="http://schemas.microsoft.com/office/drawing/2014/main" id="{F4A8EE87-D24A-46D6-AFA1-A891C2F7D5C0}"/>
               </a:ext>
             </a:extLst>
           </p:cNvPr>
@@ -2057,8 +2062,8 @@
         </p:nvSpPr>
         <p:spPr>
           <a:xfrm xmlns:a="http://schemas.openxmlformats.org/drawingml/2006/main">
-            <a:off x="685800" y="1381125"/>
-            <a:ext cx="4857750" cy="266700"/>
+            <a:off x="685800" y="1428750"/>
+            <a:ext cx="2000250" cy="285750"/>
           </a:xfrm>
           <a:prstGeom xmlns:a="http://schemas.openxmlformats.org/drawingml/2006/main" prst="rect">
             <a:avLst/>
@@ -2097,7 +2102,7 @@
                 <a:ea typeface="Pretendard Medium"/>
                 <a:cs typeface="Pretendard Medium"/>
               </a:rPr>
-              <a:t>Wang (2017)에서 가져올 부분</a:t>
+              <a:t>문제 상황</a:t>
             </a:r>
           </a:p>
         </p:txBody>
@@ -2107,7 +2112,7 @@
           <p:cNvPr id="6" name="">
             <a:extLst xmlns:a="http://schemas.openxmlformats.org/drawingml/2006/main">
               <a:ext uri="{FF2B5EF4-FFF2-40B4-BE49-F238E27FC236}">
-                <a16:creationId xmlns:a16="http://schemas.microsoft.com/office/drawing/2014/main" id="{E15B6136-6668-4570-89A3-62841F258ADE}"/>
+                <a16:creationId xmlns:a16="http://schemas.microsoft.com/office/drawing/2014/main" id="{6DB004BE-BAF4-4A8C-9968-02211302B45D}"/>
               </a:ext>
             </a:extLst>
           </p:cNvPr>
@@ -2118,8 +2123,8 @@
         </p:nvSpPr>
         <p:spPr>
           <a:xfrm xmlns:a="http://schemas.openxmlformats.org/drawingml/2006/main">
-            <a:off x="685800" y="1790700"/>
-            <a:ext cx="4857750" cy="1428750"/>
+            <a:off x="685800" y="1857375"/>
+            <a:ext cx="10820400" cy="1381125"/>
           </a:xfrm>
           <a:prstGeom xmlns:a="http://schemas.openxmlformats.org/drawingml/2006/main" prst="rect">
             <a:avLst/>
@@ -2140,39 +2145,39 @@
                 <a:spcPct val="108000"/>
               </a:lnSpc>
               <a:spcAft>
-                <a:spcPts val="800"/>
+                <a:spcPts val="900"/>
               </a:spcAft>
               <a:buNone/>
-              <a:defRPr sz="1350" b="0">
-                <a:solidFill>
-                  <a:srgbClr val="222222"/>
-                </a:solidFill>
-                <a:latin typeface="Pretendard"/>
-                <a:ea typeface="Pretendard"/>
-                <a:cs typeface="Pretendard"/>
-              </a:defRPr>
-            </a:pPr>
-            <a:r>
-              <a:rPr sz="1350" b="1">
-                <a:solidFill>
-                  <a:srgbClr val="222222"/>
-                </a:solidFill>
-                <a:latin typeface="Pretendard"/>
-                <a:ea typeface="Pretendard"/>
-                <a:cs typeface="Pretendard"/>
-              </a:rPr>
-              <a:t>운행 사이 시간: </a:t>
-            </a:r>
-            <a:r>
-              <a:rPr sz="1350">
-                <a:solidFill>
-                  <a:srgbClr val="222222"/>
-                </a:solidFill>
-                <a:latin typeface="Pretendard"/>
-                <a:ea typeface="Pretendard"/>
-                <a:cs typeface="Pretendard"/>
-              </a:rPr>
-              <a:t>앞 운행 종료부터 다음 운행 출발 전까지 충전</a:t>
+              <a:defRPr sz="1425" b="0">
+                <a:solidFill>
+                  <a:srgbClr val="222222"/>
+                </a:solidFill>
+                <a:latin typeface="Pretendard"/>
+                <a:ea typeface="Pretendard"/>
+                <a:cs typeface="Pretendard"/>
+              </a:defRPr>
+            </a:pPr>
+            <a:r>
+              <a:rPr sz="1425" b="1">
+                <a:solidFill>
+                  <a:srgbClr val="222222"/>
+                </a:solidFill>
+                <a:latin typeface="Pretendard"/>
+                <a:ea typeface="Pretendard"/>
+                <a:cs typeface="Pretendard"/>
+              </a:rPr>
+              <a:t>운행 사이 충전: </a:t>
+            </a:r>
+            <a:r>
+              <a:rPr sz="1425">
+                <a:solidFill>
+                  <a:srgbClr val="222222"/>
+                </a:solidFill>
+                <a:latin typeface="Pretendard"/>
+                <a:ea typeface="Pretendard"/>
+                <a:cs typeface="Pretendard"/>
+              </a:rPr>
+              <a:t>버스는 앞 운행을 마친 뒤 다음 출발 전까지 충전해야 함</a:t>
             </a:r>
           </a:p>
           <a:p xmlns:a="http://schemas.openxmlformats.org/drawingml/2006/main">
@@ -2181,20 +2186,20 @@
                 <a:spcPct val="108000"/>
               </a:lnSpc>
               <a:spcAft>
-                <a:spcPts val="800"/>
+                <a:spcPts val="900"/>
               </a:spcAft>
               <a:buNone/>
-              <a:defRPr sz="1350" b="0">
-                <a:solidFill>
-                  <a:srgbClr val="222222"/>
-                </a:solidFill>
-                <a:latin typeface="Pretendard"/>
-                <a:ea typeface="Pretendard"/>
-                <a:cs typeface="Pretendard"/>
-              </a:defRPr>
-            </a:pPr>
-            <a:r>
-              <a:rPr sz="1350" b="1">
+              <a:defRPr sz="1425" b="0">
+                <a:solidFill>
+                  <a:srgbClr val="222222"/>
+                </a:solidFill>
+                <a:latin typeface="Pretendard"/>
+                <a:ea typeface="Pretendard"/>
+                <a:cs typeface="Pretendard"/>
+              </a:defRPr>
+            </a:pPr>
+            <a:r>
+              <a:rPr sz="1425" b="1">
                 <a:solidFill>
                   <a:srgbClr val="222222"/>
                 </a:solidFill>
@@ -2205,15 +2210,15 @@
               <a:t>공유 충전기: </a:t>
             </a:r>
             <a:r>
-              <a:rPr sz="1350">
-                <a:solidFill>
-                  <a:srgbClr val="222222"/>
-                </a:solidFill>
-                <a:latin typeface="Pretendard"/>
-                <a:ea typeface="Pretendard"/>
-                <a:cs typeface="Pretendard"/>
-              </a:rPr>
-              <a:t>여러 버스의 충전시간이 겹치지 않게 배정</a:t>
+              <a:rPr sz="1425">
+                <a:solidFill>
+                  <a:srgbClr val="222222"/>
+                </a:solidFill>
+                <a:latin typeface="Pretendard"/>
+                <a:ea typeface="Pretendard"/>
+                <a:cs typeface="Pretendard"/>
+              </a:rPr>
+              <a:t>여러 버스가 같은 충전기를 사용하면 대기가 생길 수 있음</a:t>
             </a:r>
           </a:p>
           <a:p xmlns:a="http://schemas.openxmlformats.org/drawingml/2006/main">
@@ -2222,39 +2227,39 @@
                 <a:spcPct val="108000"/>
               </a:lnSpc>
               <a:spcAft>
-                <a:spcPts val="800"/>
+                <a:spcPts val="900"/>
               </a:spcAft>
               <a:buNone/>
-              <a:defRPr sz="1350" b="0">
-                <a:solidFill>
-                  <a:srgbClr val="222222"/>
-                </a:solidFill>
-                <a:latin typeface="Pretendard"/>
-                <a:ea typeface="Pretendard"/>
-                <a:cs typeface="Pretendard"/>
-              </a:defRPr>
-            </a:pPr>
-            <a:r>
-              <a:rPr sz="1350" b="1">
-                <a:solidFill>
-                  <a:srgbClr val="222222"/>
-                </a:solidFill>
-                <a:latin typeface="Pretendard"/>
-                <a:ea typeface="Pretendard"/>
-                <a:cs typeface="Pretendard"/>
-              </a:rPr>
-              <a:t>기준: </a:t>
-            </a:r>
-            <a:r>
-              <a:rPr sz="1350">
-                <a:solidFill>
-                  <a:srgbClr val="222222"/>
-                </a:solidFill>
-                <a:latin typeface="Pretendard"/>
-                <a:ea typeface="Pretendard"/>
-                <a:cs typeface="Pretendard"/>
-              </a:rPr>
-              <a:t>다음 운행을 늦추지 않는 충전계획만 선택</a:t>
+              <a:defRPr sz="1425" b="0">
+                <a:solidFill>
+                  <a:srgbClr val="222222"/>
+                </a:solidFill>
+                <a:latin typeface="Pretendard"/>
+                <a:ea typeface="Pretendard"/>
+                <a:cs typeface="Pretendard"/>
+              </a:defRPr>
+            </a:pPr>
+            <a:r>
+              <a:rPr sz="1425" b="1">
+                <a:solidFill>
+                  <a:srgbClr val="222222"/>
+                </a:solidFill>
+                <a:latin typeface="Pretendard"/>
+                <a:ea typeface="Pretendard"/>
+                <a:cs typeface="Pretendard"/>
+              </a:rPr>
+              <a:t>운행 영향: </a:t>
+            </a:r>
+            <a:r>
+              <a:rPr sz="1425">
+                <a:solidFill>
+                  <a:srgbClr val="222222"/>
+                </a:solidFill>
+                <a:latin typeface="Pretendard"/>
+                <a:ea typeface="Pretendard"/>
+                <a:cs typeface="Pretendard"/>
+              </a:rPr>
+              <a:t>충전이 늦게 끝나면 다음 출발과 뒤 운행까지 밀릴 수 있음</a:t>
             </a:r>
           </a:p>
         </p:txBody>
@@ -2264,7 +2269,7 @@
           <p:cNvPr id="7" name="">
             <a:extLst xmlns:a="http://schemas.openxmlformats.org/drawingml/2006/main">
               <a:ext uri="{FF2B5EF4-FFF2-40B4-BE49-F238E27FC236}">
-                <a16:creationId xmlns:a16="http://schemas.microsoft.com/office/drawing/2014/main" id="{22D3499E-B3CA-457A-9B92-B221ADECDF64}"/>
+                <a16:creationId xmlns:a16="http://schemas.microsoft.com/office/drawing/2014/main" id="{6223EC68-DAEF-4344-B4B3-9D6DBB538BEF}"/>
               </a:ext>
             </a:extLst>
           </p:cNvPr>
@@ -2275,8 +2280,39 @@
         </p:nvSpPr>
         <p:spPr>
           <a:xfrm xmlns:a="http://schemas.openxmlformats.org/drawingml/2006/main">
-            <a:off x="6648450" y="1381125"/>
-            <a:ext cx="4857750" cy="266700"/>
+            <a:off x="685800" y="3514725"/>
+            <a:ext cx="10820400" cy="0"/>
+          </a:xfrm>
+          <a:prstGeom xmlns:a="http://schemas.openxmlformats.org/drawingml/2006/main" prst="line">
+            <a:avLst/>
+          </a:prstGeom>
+          <a:noFill xmlns:a="http://schemas.openxmlformats.org/drawingml/2006/main"/>
+          <a:ln xmlns:a="http://schemas.openxmlformats.org/drawingml/2006/main" w="9525">
+            <a:solidFill>
+              <a:srgbClr val="B8B8B8"/>
+            </a:solidFill>
+            <a:prstDash val="solid"/>
+          </a:ln>
+        </p:spPr>
+      </p:sp>
+      <p:sp>
+        <p:nvSpPr>
+          <p:cNvPr id="8" name="">
+            <a:extLst xmlns:a="http://schemas.openxmlformats.org/drawingml/2006/main">
+              <a:ext uri="{FF2B5EF4-FFF2-40B4-BE49-F238E27FC236}">
+                <a16:creationId xmlns:a16="http://schemas.microsoft.com/office/drawing/2014/main" id="{336366C3-3774-4562-952A-38C18D2A1264}"/>
+              </a:ext>
+            </a:extLst>
+          </p:cNvPr>
+          <p:cNvSpPr>
+            <a:spLocks xmlns:a="http://schemas.openxmlformats.org/drawingml/2006/main" noGrp="1"/>
+          </p:cNvSpPr>
+          <p:nvPr/>
+        </p:nvSpPr>
+        <p:spPr>
+          <a:xfrm xmlns:a="http://schemas.openxmlformats.org/drawingml/2006/main">
+            <a:off x="685800" y="3857625"/>
+            <a:ext cx="2095500" cy="285750"/>
           </a:xfrm>
           <a:prstGeom xmlns:a="http://schemas.openxmlformats.org/drawingml/2006/main" prst="rect">
             <a:avLst/>
@@ -2315,17 +2351,17 @@
                 <a:ea typeface="Pretendard Medium"/>
                 <a:cs typeface="Pretendard Medium"/>
               </a:rPr>
-              <a:t>내가 추가로 보고 싶은 부분</a:t>
-            </a:r>
-          </a:p>
-        </p:txBody>
-      </p:sp>
-      <p:sp>
-        <p:nvSpPr>
-          <p:cNvPr id="8" name="">
+              <a:t>현재 연구 질문</a:t>
+            </a:r>
+          </a:p>
+        </p:txBody>
+      </p:sp>
+      <p:sp>
+        <p:nvSpPr>
+          <p:cNvPr id="9" name="">
             <a:extLst xmlns:a="http://schemas.openxmlformats.org/drawingml/2006/main">
               <a:ext uri="{FF2B5EF4-FFF2-40B4-BE49-F238E27FC236}">
-                <a16:creationId xmlns:a16="http://schemas.microsoft.com/office/drawing/2014/main" id="{11722ED9-F7A3-4057-ADD8-F3DA9A0374C5}"/>
+                <a16:creationId xmlns:a16="http://schemas.microsoft.com/office/drawing/2014/main" id="{AF3220D5-A741-48F5-99C9-58AD064C0562}"/>
               </a:ext>
             </a:extLst>
           </p:cNvPr>
@@ -2336,8 +2372,8 @@
         </p:nvSpPr>
         <p:spPr>
           <a:xfrm xmlns:a="http://schemas.openxmlformats.org/drawingml/2006/main">
-            <a:off x="6648450" y="1790700"/>
-            <a:ext cx="4857750" cy="1428750"/>
+            <a:off x="685800" y="4267200"/>
+            <a:ext cx="10820400" cy="628650"/>
           </a:xfrm>
           <a:prstGeom xmlns:a="http://schemas.openxmlformats.org/drawingml/2006/main" prst="rect">
             <a:avLst/>
@@ -2348,141 +2384,167 @@
           </a:ln>
         </p:spPr>
         <p:txBody>
+          <a:bodyPr xmlns:a="http://schemas.openxmlformats.org/drawingml/2006/main" wrap="square" lIns="0" tIns="0" rIns="0" bIns="0" anchor="ctr">
+            <a:noAutofit/>
+          </a:bodyPr>
+          <a:lstStyle xmlns:a="http://schemas.openxmlformats.org/drawingml/2006/main"/>
+          <a:p xmlns:a="http://schemas.openxmlformats.org/drawingml/2006/main">
+            <a:pPr algn="l">
+              <a:lnSpc>
+                <a:spcPct val="108000"/>
+              </a:lnSpc>
+              <a:buNone/>
+              <a:defRPr sz="1875" b="1">
+                <a:solidFill>
+                  <a:srgbClr val="000000"/>
+                </a:solidFill>
+                <a:latin typeface="Pretendard Medium"/>
+                <a:ea typeface="Pretendard Medium"/>
+                <a:cs typeface="Pretendard Medium"/>
+              </a:defRPr>
+            </a:pPr>
+            <a:r>
+              <a:rPr sz="1875" b="1">
+                <a:solidFill>
+                  <a:srgbClr val="000000"/>
+                </a:solidFill>
+                <a:latin typeface="Pretendard Medium"/>
+                <a:ea typeface="Pretendard Medium"/>
+                <a:cs typeface="Pretendard Medium"/>
+              </a:rPr>
+              <a:t>충전기가 부족해 출발 지연이 생길 때, 충전시설과 충전·운영 방법을 어떻게 정해야 운행 피해를 줄일 수 있는가?</a:t>
+            </a:r>
+          </a:p>
+        </p:txBody>
+      </p:sp>
+      <p:sp>
+        <p:nvSpPr>
+          <p:cNvPr id="10" name="">
+            <a:extLst xmlns:a="http://schemas.openxmlformats.org/drawingml/2006/main">
+              <a:ext uri="{FF2B5EF4-FFF2-40B4-BE49-F238E27FC236}">
+                <a16:creationId xmlns:a16="http://schemas.microsoft.com/office/drawing/2014/main" id="{9C37BEF1-AA6F-45C7-A8D5-1341A36DF6EE}"/>
+              </a:ext>
+            </a:extLst>
+          </p:cNvPr>
+          <p:cNvSpPr>
+            <a:spLocks xmlns:a="http://schemas.openxmlformats.org/drawingml/2006/main" noGrp="1"/>
+          </p:cNvSpPr>
+          <p:nvPr/>
+        </p:nvSpPr>
+        <p:spPr>
+          <a:xfrm xmlns:a="http://schemas.openxmlformats.org/drawingml/2006/main">
+            <a:off x="685800" y="5248275"/>
+            <a:ext cx="1714500" cy="266700"/>
+          </a:xfrm>
+          <a:prstGeom xmlns:a="http://schemas.openxmlformats.org/drawingml/2006/main" prst="rect">
+            <a:avLst/>
+          </a:prstGeom>
+          <a:noFill xmlns:a="http://schemas.openxmlformats.org/drawingml/2006/main"/>
+          <a:ln xmlns:a="http://schemas.openxmlformats.org/drawingml/2006/main" w="0">
+            <a:noFill/>
+          </a:ln>
+        </p:spPr>
+        <p:txBody>
           <a:bodyPr xmlns:a="http://schemas.openxmlformats.org/drawingml/2006/main" wrap="square" lIns="0" tIns="0" rIns="0" bIns="0" anchor="t">
             <a:noAutofit/>
           </a:bodyPr>
           <a:lstStyle xmlns:a="http://schemas.openxmlformats.org/drawingml/2006/main"/>
           <a:p xmlns:a="http://schemas.openxmlformats.org/drawingml/2006/main">
-            <a:pPr marL="203200" indent="-127000" algn="l">
+            <a:pPr algn="l">
               <a:lnSpc>
                 <a:spcPct val="108000"/>
               </a:lnSpc>
-              <a:spcAft>
-                <a:spcPts val="800"/>
-              </a:spcAft>
               <a:buNone/>
-              <a:defRPr sz="1350" b="0">
-                <a:solidFill>
-                  <a:srgbClr val="222222"/>
-                </a:solidFill>
-                <a:latin typeface="Pretendard"/>
-                <a:ea typeface="Pretendard"/>
-                <a:cs typeface="Pretendard"/>
-              </a:defRPr>
-            </a:pPr>
-            <a:r>
-              <a:rPr sz="1350" b="1">
-                <a:solidFill>
-                  <a:srgbClr val="222222"/>
-                </a:solidFill>
-                <a:latin typeface="Pretendard"/>
-                <a:ea typeface="Pretendard"/>
-                <a:cs typeface="Pretendard"/>
-              </a:rPr>
-              <a:t>충전기 부족: </a:t>
-            </a:r>
-            <a:r>
-              <a:rPr sz="1350">
-                <a:solidFill>
-                  <a:srgbClr val="222222"/>
-                </a:solidFill>
-                <a:latin typeface="Pretendard"/>
-                <a:ea typeface="Pretendard"/>
-                <a:cs typeface="Pretendard"/>
-              </a:rPr>
-              <a:t>대기가 운행 사이 시간을 넘으면 출발이 늦어짐</a:t>
-            </a:r>
-          </a:p>
-          <a:p xmlns:a="http://schemas.openxmlformats.org/drawingml/2006/main">
-            <a:pPr marL="203200" indent="-127000" algn="l">
+              <a:defRPr sz="1425" b="1">
+                <a:solidFill>
+                  <a:srgbClr val="222222"/>
+                </a:solidFill>
+                <a:latin typeface="Pretendard Medium"/>
+                <a:ea typeface="Pretendard Medium"/>
+                <a:cs typeface="Pretendard Medium"/>
+              </a:defRPr>
+            </a:pPr>
+            <a:r>
+              <a:rPr sz="1425" b="1">
+                <a:solidFill>
+                  <a:srgbClr val="222222"/>
+                </a:solidFill>
+                <a:latin typeface="Pretendard Medium"/>
+                <a:ea typeface="Pretendard Medium"/>
+                <a:cs typeface="Pretendard Medium"/>
+              </a:rPr>
+              <a:t>연구 목적 초안</a:t>
+            </a:r>
+          </a:p>
+        </p:txBody>
+      </p:sp>
+      <p:sp>
+        <p:nvSpPr>
+          <p:cNvPr id="11" name="">
+            <a:extLst xmlns:a="http://schemas.openxmlformats.org/drawingml/2006/main">
+              <a:ext uri="{FF2B5EF4-FFF2-40B4-BE49-F238E27FC236}">
+                <a16:creationId xmlns:a16="http://schemas.microsoft.com/office/drawing/2014/main" id="{6E17E7FF-B71C-4A8D-B21F-20937B71B4FC}"/>
+              </a:ext>
+            </a:extLst>
+          </p:cNvPr>
+          <p:cNvSpPr>
+            <a:spLocks xmlns:a="http://schemas.openxmlformats.org/drawingml/2006/main" noGrp="1"/>
+          </p:cNvSpPr>
+          <p:nvPr/>
+        </p:nvSpPr>
+        <p:spPr>
+          <a:xfrm xmlns:a="http://schemas.openxmlformats.org/drawingml/2006/main">
+            <a:off x="2419350" y="5210175"/>
+            <a:ext cx="9086850" cy="361950"/>
+          </a:xfrm>
+          <a:prstGeom xmlns:a="http://schemas.openxmlformats.org/drawingml/2006/main" prst="rect">
+            <a:avLst/>
+          </a:prstGeom>
+          <a:noFill xmlns:a="http://schemas.openxmlformats.org/drawingml/2006/main"/>
+          <a:ln xmlns:a="http://schemas.openxmlformats.org/drawingml/2006/main" w="0">
+            <a:noFill/>
+          </a:ln>
+        </p:spPr>
+        <p:txBody>
+          <a:bodyPr xmlns:a="http://schemas.openxmlformats.org/drawingml/2006/main" wrap="square" lIns="0" tIns="0" rIns="0" bIns="0" anchor="ctr">
+            <a:noAutofit/>
+          </a:bodyPr>
+          <a:lstStyle xmlns:a="http://schemas.openxmlformats.org/drawingml/2006/main"/>
+          <a:p xmlns:a="http://schemas.openxmlformats.org/drawingml/2006/main">
+            <a:pPr algn="l">
               <a:lnSpc>
                 <a:spcPct val="108000"/>
               </a:lnSpc>
-              <a:spcAft>
-                <a:spcPts val="800"/>
-              </a:spcAft>
               <a:buNone/>
-              <a:defRPr sz="1350" b="0">
-                <a:solidFill>
-                  <a:srgbClr val="222222"/>
-                </a:solidFill>
-                <a:latin typeface="Pretendard"/>
-                <a:ea typeface="Pretendard"/>
-                <a:cs typeface="Pretendard"/>
-              </a:defRPr>
-            </a:pPr>
-            <a:r>
-              <a:rPr sz="1350" b="1">
-                <a:solidFill>
-                  <a:srgbClr val="222222"/>
-                </a:solidFill>
-                <a:latin typeface="Pretendard"/>
-                <a:ea typeface="Pretendard"/>
-                <a:cs typeface="Pretendard"/>
-              </a:rPr>
-              <a:t>연속 지연: </a:t>
-            </a:r>
-            <a:r>
-              <a:rPr sz="1350">
-                <a:solidFill>
-                  <a:srgbClr val="222222"/>
-                </a:solidFill>
-                <a:latin typeface="Pretendard"/>
-                <a:ea typeface="Pretendard"/>
-                <a:cs typeface="Pretendard"/>
-              </a:rPr>
-              <a:t>한 번의 지연이 같은 차량의 뒤 운행까지 이어짐</a:t>
-            </a:r>
-          </a:p>
-          <a:p xmlns:a="http://schemas.openxmlformats.org/drawingml/2006/main">
-            <a:pPr marL="203200" indent="-127000" algn="l">
-              <a:lnSpc>
-                <a:spcPct val="108000"/>
-              </a:lnSpc>
-              <a:spcAft>
-                <a:spcPts val="800"/>
-              </a:spcAft>
-              <a:buNone/>
-              <a:defRPr sz="1350" b="0">
-                <a:solidFill>
-                  <a:srgbClr val="222222"/>
-                </a:solidFill>
-                <a:latin typeface="Pretendard"/>
-                <a:ea typeface="Pretendard"/>
-                <a:cs typeface="Pretendard"/>
-              </a:defRPr>
-            </a:pPr>
-            <a:r>
-              <a:rPr sz="1350" b="1">
-                <a:solidFill>
-                  <a:srgbClr val="222222"/>
-                </a:solidFill>
-                <a:latin typeface="Pretendard"/>
-                <a:ea typeface="Pretendard"/>
-                <a:cs typeface="Pretendard"/>
-              </a:rPr>
-              <a:t>대안 비교: </a:t>
-            </a:r>
-            <a:r>
-              <a:rPr sz="1350">
-                <a:solidFill>
-                  <a:srgbClr val="222222"/>
-                </a:solidFill>
-                <a:latin typeface="Pretendard"/>
-                <a:ea typeface="Pretendard"/>
-                <a:cs typeface="Pretendard"/>
-              </a:rPr>
-              <a:t>충전기·충전 순서·배차 운영으로 피해를 줄임</a:t>
-            </a:r>
-          </a:p>
-        </p:txBody>
-      </p:sp>
-      <p:sp>
-        <p:nvSpPr>
-          <p:cNvPr id="9" name="">
+              <a:defRPr sz="1500" b="0">
+                <a:solidFill>
+                  <a:srgbClr val="222222"/>
+                </a:solidFill>
+                <a:latin typeface="Pretendard"/>
+                <a:ea typeface="Pretendard"/>
+                <a:cs typeface="Pretendard"/>
+              </a:defRPr>
+            </a:pPr>
+            <a:r>
+              <a:rPr sz="1500" b="0">
+                <a:solidFill>
+                  <a:srgbClr val="222222"/>
+                </a:solidFill>
+                <a:latin typeface="Pretendard"/>
+                <a:ea typeface="Pretendard"/>
+                <a:cs typeface="Pretendard"/>
+              </a:rPr>
+              <a:t>정해진 운행을 최대한 지키면서 필요한 충전시설 규모와 운영 방법을 비교</a:t>
+            </a:r>
+          </a:p>
+        </p:txBody>
+      </p:sp>
+      <p:sp>
+        <p:nvSpPr>
+          <p:cNvPr id="12" name="">
             <a:extLst xmlns:a="http://schemas.openxmlformats.org/drawingml/2006/main">
               <a:ext uri="{FF2B5EF4-FFF2-40B4-BE49-F238E27FC236}">
-                <a16:creationId xmlns:a16="http://schemas.microsoft.com/office/drawing/2014/main" id="{27F16025-F7E9-461E-8C3D-E1566D220388}"/>
+                <a16:creationId xmlns:a16="http://schemas.microsoft.com/office/drawing/2014/main" id="{CD68AF57-90CA-4086-9325-8066943AFBDF}"/>
               </a:ext>
             </a:extLst>
           </p:cNvPr>
@@ -2493,458 +2555,8 @@
         </p:nvSpPr>
         <p:spPr>
           <a:xfrm xmlns:a="http://schemas.openxmlformats.org/drawingml/2006/main">
-            <a:off x="895350" y="3829050"/>
-            <a:ext cx="2190750" cy="781050"/>
-          </a:xfrm>
-          <a:prstGeom xmlns:a="http://schemas.openxmlformats.org/drawingml/2006/main" prst="rect">
-            <a:avLst/>
-          </a:prstGeom>
-          <a:solidFill xmlns:a="http://schemas.openxmlformats.org/drawingml/2006/main">
-            <a:srgbClr val="FFFFFF"/>
-          </a:solidFill>
-          <a:ln xmlns:a="http://schemas.openxmlformats.org/drawingml/2006/main" w="9525">
-            <a:solidFill>
-              <a:srgbClr val="B8B8B8"/>
-            </a:solidFill>
-            <a:prstDash val="solid"/>
-          </a:ln>
-        </p:spPr>
-        <p:txBody>
-          <a:bodyPr xmlns:a="http://schemas.openxmlformats.org/drawingml/2006/main" lIns="114300" tIns="76200" rIns="114300" bIns="76200" anchor="ctr">
-            <a:noAutofit/>
-          </a:bodyPr>
-          <a:lstStyle xmlns:a="http://schemas.openxmlformats.org/drawingml/2006/main"/>
-          <a:p xmlns:a="http://schemas.openxmlformats.org/drawingml/2006/main">
-            <a:pPr algn="ctr">
-              <a:lnSpc>
-                <a:spcPct val="105000"/>
-              </a:lnSpc>
-              <a:buNone/>
-              <a:defRPr sz="1275">
-                <a:solidFill>
-                  <a:srgbClr val="222222"/>
-                </a:solidFill>
-                <a:latin typeface="Pretendard"/>
-                <a:ea typeface="Pretendard"/>
-                <a:cs typeface="Pretendard"/>
-              </a:defRPr>
-            </a:pPr>
-            <a:r>
-              <a:rPr sz="1275" b="1">
-                <a:solidFill>
-                  <a:srgbClr val="222222"/>
-                </a:solidFill>
-                <a:latin typeface="Pretendard"/>
-                <a:ea typeface="Pretendard"/>
-                <a:cs typeface="Pretendard"/>
-              </a:rPr>
-              <a:t>앞 운행 종료</a:t>
-            </a:r>
-          </a:p>
-          <a:p xmlns:a="http://schemas.openxmlformats.org/drawingml/2006/main">
-            <a:pPr algn="ctr">
-              <a:lnSpc>
-                <a:spcPct val="105000"/>
-              </a:lnSpc>
-              <a:buNone/>
-              <a:defRPr sz="1275">
-                <a:solidFill>
-                  <a:srgbClr val="222222"/>
-                </a:solidFill>
-                <a:latin typeface="Pretendard"/>
-                <a:ea typeface="Pretendard"/>
-                <a:cs typeface="Pretendard"/>
-              </a:defRPr>
-            </a:pPr>
-            <a:r>
-              <a:rPr sz="1275">
-                <a:solidFill>
-                  <a:srgbClr val="222222"/>
-                </a:solidFill>
-                <a:latin typeface="Pretendard"/>
-                <a:ea typeface="Pretendard"/>
-                <a:cs typeface="Pretendard"/>
-              </a:rPr>
-              <a:t>버스가 차고지에 도착</a:t>
-            </a:r>
-          </a:p>
-        </p:txBody>
-      </p:sp>
-      <p:sp>
-        <p:nvSpPr>
-          <p:cNvPr id="10" name="">
-            <a:extLst xmlns:a="http://schemas.openxmlformats.org/drawingml/2006/main">
-              <a:ext uri="{FF2B5EF4-FFF2-40B4-BE49-F238E27FC236}">
-                <a16:creationId xmlns:a16="http://schemas.microsoft.com/office/drawing/2014/main" id="{45604280-D350-4C79-968E-1014938E8D7C}"/>
-              </a:ext>
-            </a:extLst>
-          </p:cNvPr>
-          <p:cNvSpPr>
-            <a:spLocks xmlns:a="http://schemas.openxmlformats.org/drawingml/2006/main" noGrp="1"/>
-          </p:cNvSpPr>
-          <p:nvPr/>
-        </p:nvSpPr>
-        <p:spPr>
-          <a:xfrm xmlns:a="http://schemas.openxmlformats.org/drawingml/2006/main">
-            <a:off x="3590925" y="3829050"/>
-            <a:ext cx="2190750" cy="781050"/>
-          </a:xfrm>
-          <a:prstGeom xmlns:a="http://schemas.openxmlformats.org/drawingml/2006/main" prst="rect">
-            <a:avLst/>
-          </a:prstGeom>
-          <a:solidFill xmlns:a="http://schemas.openxmlformats.org/drawingml/2006/main">
-            <a:srgbClr val="F2F2F2"/>
-          </a:solidFill>
-          <a:ln xmlns:a="http://schemas.openxmlformats.org/drawingml/2006/main" w="15240">
-            <a:solidFill>
-              <a:srgbClr val="000000"/>
-            </a:solidFill>
-            <a:prstDash val="solid"/>
-          </a:ln>
-        </p:spPr>
-        <p:txBody>
-          <a:bodyPr xmlns:a="http://schemas.openxmlformats.org/drawingml/2006/main" lIns="114300" tIns="76200" rIns="114300" bIns="76200" anchor="ctr">
-            <a:noAutofit/>
-          </a:bodyPr>
-          <a:lstStyle xmlns:a="http://schemas.openxmlformats.org/drawingml/2006/main"/>
-          <a:p xmlns:a="http://schemas.openxmlformats.org/drawingml/2006/main">
-            <a:pPr algn="ctr">
-              <a:lnSpc>
-                <a:spcPct val="105000"/>
-              </a:lnSpc>
-              <a:buNone/>
-              <a:defRPr sz="1275">
-                <a:solidFill>
-                  <a:srgbClr val="222222"/>
-                </a:solidFill>
-                <a:latin typeface="Pretendard"/>
-                <a:ea typeface="Pretendard"/>
-                <a:cs typeface="Pretendard"/>
-              </a:defRPr>
-            </a:pPr>
-            <a:r>
-              <a:rPr sz="1275" b="1">
-                <a:solidFill>
-                  <a:srgbClr val="222222"/>
-                </a:solidFill>
-                <a:latin typeface="Pretendard"/>
-                <a:ea typeface="Pretendard"/>
-                <a:cs typeface="Pretendard"/>
-              </a:rPr>
-              <a:t>충전 대기·충전</a:t>
-            </a:r>
-          </a:p>
-          <a:p xmlns:a="http://schemas.openxmlformats.org/drawingml/2006/main">
-            <a:pPr algn="ctr">
-              <a:lnSpc>
-                <a:spcPct val="105000"/>
-              </a:lnSpc>
-              <a:buNone/>
-              <a:defRPr sz="1275">
-                <a:solidFill>
-                  <a:srgbClr val="222222"/>
-                </a:solidFill>
-                <a:latin typeface="Pretendard"/>
-                <a:ea typeface="Pretendard"/>
-                <a:cs typeface="Pretendard"/>
-              </a:defRPr>
-            </a:pPr>
-            <a:r>
-              <a:rPr sz="1275">
-                <a:solidFill>
-                  <a:srgbClr val="222222"/>
-                </a:solidFill>
-                <a:latin typeface="Pretendard"/>
-                <a:ea typeface="Pretendard"/>
-                <a:cs typeface="Pretendard"/>
-              </a:rPr>
-              <a:t>공유 충전기 사용</a:t>
-            </a:r>
-          </a:p>
-        </p:txBody>
-      </p:sp>
-      <p:sp>
-        <p:nvSpPr>
-          <p:cNvPr id="11" name="">
-            <a:extLst xmlns:a="http://schemas.openxmlformats.org/drawingml/2006/main">
-              <a:ext uri="{FF2B5EF4-FFF2-40B4-BE49-F238E27FC236}">
-                <a16:creationId xmlns:a16="http://schemas.microsoft.com/office/drawing/2014/main" id="{C0A393A4-54BD-4CC7-9586-704AD781A981}"/>
-              </a:ext>
-            </a:extLst>
-          </p:cNvPr>
-          <p:cNvSpPr>
-            <a:spLocks xmlns:a="http://schemas.openxmlformats.org/drawingml/2006/main" noGrp="1"/>
-          </p:cNvSpPr>
-          <p:nvPr/>
-        </p:nvSpPr>
-        <p:spPr>
-          <a:xfrm xmlns:a="http://schemas.openxmlformats.org/drawingml/2006/main">
-            <a:off x="6286500" y="3829050"/>
-            <a:ext cx="2190750" cy="781050"/>
-          </a:xfrm>
-          <a:prstGeom xmlns:a="http://schemas.openxmlformats.org/drawingml/2006/main" prst="rect">
-            <a:avLst/>
-          </a:prstGeom>
-          <a:solidFill xmlns:a="http://schemas.openxmlformats.org/drawingml/2006/main">
-            <a:srgbClr val="F2F2F2"/>
-          </a:solidFill>
-          <a:ln xmlns:a="http://schemas.openxmlformats.org/drawingml/2006/main" w="15240">
-            <a:solidFill>
-              <a:srgbClr val="000000"/>
-            </a:solidFill>
-            <a:prstDash val="solid"/>
-          </a:ln>
-        </p:spPr>
-        <p:txBody>
-          <a:bodyPr xmlns:a="http://schemas.openxmlformats.org/drawingml/2006/main" lIns="114300" tIns="76200" rIns="114300" bIns="76200" anchor="ctr">
-            <a:noAutofit/>
-          </a:bodyPr>
-          <a:lstStyle xmlns:a="http://schemas.openxmlformats.org/drawingml/2006/main"/>
-          <a:p xmlns:a="http://schemas.openxmlformats.org/drawingml/2006/main">
-            <a:pPr algn="ctr">
-              <a:lnSpc>
-                <a:spcPct val="105000"/>
-              </a:lnSpc>
-              <a:buNone/>
-              <a:defRPr sz="1275">
-                <a:solidFill>
-                  <a:srgbClr val="222222"/>
-                </a:solidFill>
-                <a:latin typeface="Pretendard"/>
-                <a:ea typeface="Pretendard"/>
-                <a:cs typeface="Pretendard"/>
-              </a:defRPr>
-            </a:pPr>
-            <a:r>
-              <a:rPr sz="1275" b="1">
-                <a:solidFill>
-                  <a:srgbClr val="222222"/>
-                </a:solidFill>
-                <a:latin typeface="Pretendard"/>
-                <a:ea typeface="Pretendard"/>
-                <a:cs typeface="Pretendard"/>
-              </a:rPr>
-              <a:t>다음 출발</a:t>
-            </a:r>
-          </a:p>
-          <a:p xmlns:a="http://schemas.openxmlformats.org/drawingml/2006/main">
-            <a:pPr algn="ctr">
-              <a:lnSpc>
-                <a:spcPct val="105000"/>
-              </a:lnSpc>
-              <a:buNone/>
-              <a:defRPr sz="1275">
-                <a:solidFill>
-                  <a:srgbClr val="222222"/>
-                </a:solidFill>
-                <a:latin typeface="Pretendard"/>
-                <a:ea typeface="Pretendard"/>
-                <a:cs typeface="Pretendard"/>
-              </a:defRPr>
-            </a:pPr>
-            <a:r>
-              <a:rPr sz="1275">
-                <a:solidFill>
-                  <a:srgbClr val="222222"/>
-                </a:solidFill>
-                <a:latin typeface="Pretendard"/>
-                <a:ea typeface="Pretendard"/>
-                <a:cs typeface="Pretendard"/>
-              </a:rPr>
-              <a:t>예정시각을 넘을 수 있음</a:t>
-            </a:r>
-          </a:p>
-        </p:txBody>
-      </p:sp>
-      <p:sp>
-        <p:nvSpPr>
-          <p:cNvPr id="12" name="">
-            <a:extLst xmlns:a="http://schemas.openxmlformats.org/drawingml/2006/main">
-              <a:ext uri="{FF2B5EF4-FFF2-40B4-BE49-F238E27FC236}">
-                <a16:creationId xmlns:a16="http://schemas.microsoft.com/office/drawing/2014/main" id="{2BCC887B-1125-4250-9AB1-5FF4FDA90FB4}"/>
-              </a:ext>
-            </a:extLst>
-          </p:cNvPr>
-          <p:cNvSpPr>
-            <a:spLocks xmlns:a="http://schemas.openxmlformats.org/drawingml/2006/main" noGrp="1"/>
-          </p:cNvSpPr>
-          <p:nvPr/>
-        </p:nvSpPr>
-        <p:spPr>
-          <a:xfrm xmlns:a="http://schemas.openxmlformats.org/drawingml/2006/main">
-            <a:off x="8982075" y="3829050"/>
-            <a:ext cx="2190750" cy="781050"/>
-          </a:xfrm>
-          <a:prstGeom xmlns:a="http://schemas.openxmlformats.org/drawingml/2006/main" prst="rect">
-            <a:avLst/>
-          </a:prstGeom>
-          <a:solidFill xmlns:a="http://schemas.openxmlformats.org/drawingml/2006/main">
-            <a:srgbClr val="F2F2F2"/>
-          </a:solidFill>
-          <a:ln xmlns:a="http://schemas.openxmlformats.org/drawingml/2006/main" w="15240">
-            <a:solidFill>
-              <a:srgbClr val="000000"/>
-            </a:solidFill>
-            <a:prstDash val="solid"/>
-          </a:ln>
-        </p:spPr>
-        <p:txBody>
-          <a:bodyPr xmlns:a="http://schemas.openxmlformats.org/drawingml/2006/main" lIns="114300" tIns="76200" rIns="114300" bIns="76200" anchor="ctr">
-            <a:noAutofit/>
-          </a:bodyPr>
-          <a:lstStyle xmlns:a="http://schemas.openxmlformats.org/drawingml/2006/main"/>
-          <a:p xmlns:a="http://schemas.openxmlformats.org/drawingml/2006/main">
-            <a:pPr algn="ctr">
-              <a:lnSpc>
-                <a:spcPct val="105000"/>
-              </a:lnSpc>
-              <a:buNone/>
-              <a:defRPr sz="1275">
-                <a:solidFill>
-                  <a:srgbClr val="222222"/>
-                </a:solidFill>
-                <a:latin typeface="Pretendard"/>
-                <a:ea typeface="Pretendard"/>
-                <a:cs typeface="Pretendard"/>
-              </a:defRPr>
-            </a:pPr>
-            <a:r>
-              <a:rPr sz="1275" b="1">
-                <a:solidFill>
-                  <a:srgbClr val="222222"/>
-                </a:solidFill>
-                <a:latin typeface="Pretendard"/>
-                <a:ea typeface="Pretendard"/>
-                <a:cs typeface="Pretendard"/>
-              </a:rPr>
-              <a:t>뒤 운행</a:t>
-            </a:r>
-          </a:p>
-          <a:p xmlns:a="http://schemas.openxmlformats.org/drawingml/2006/main">
-            <a:pPr algn="ctr">
-              <a:lnSpc>
-                <a:spcPct val="105000"/>
-              </a:lnSpc>
-              <a:buNone/>
-              <a:defRPr sz="1275">
-                <a:solidFill>
-                  <a:srgbClr val="222222"/>
-                </a:solidFill>
-                <a:latin typeface="Pretendard"/>
-                <a:ea typeface="Pretendard"/>
-                <a:cs typeface="Pretendard"/>
-              </a:defRPr>
-            </a:pPr>
-            <a:r>
-              <a:rPr sz="1275">
-                <a:solidFill>
-                  <a:srgbClr val="222222"/>
-                </a:solidFill>
-                <a:latin typeface="Pretendard"/>
-                <a:ea typeface="Pretendard"/>
-                <a:cs typeface="Pretendard"/>
-              </a:rPr>
-              <a:t>지연이 이어질 수 있음</a:t>
-            </a:r>
-          </a:p>
-        </p:txBody>
-      </p:sp>
-      <p:cxnSp>
-        <p:nvCxnSpPr>
-          <p:cNvPr id="29" name=""/>
-          <p:cNvCxnSpPr>
-            <a:stCxn xmlns:a="http://schemas.openxmlformats.org/drawingml/2006/main" id="9" idx="3"/>
-            <a:endCxn xmlns:a="http://schemas.openxmlformats.org/drawingml/2006/main" id="10" idx="1"/>
-          </p:cNvCxnSpPr>
-          <p:nvPr/>
-        </p:nvCxnSpPr>
-        <p:spPr>
-          <a:xfrm xmlns:a="http://schemas.openxmlformats.org/drawingml/2006/main">
-            <a:off x="3086100" y="4219575"/>
-            <a:ext cx="504825" cy="0"/>
-          </a:xfrm>
-          <a:prstGeom xmlns:a="http://schemas.openxmlformats.org/drawingml/2006/main" prst="straightConnector1">
-            <a:avLst/>
-          </a:prstGeom>
-          <a:ln xmlns:a="http://schemas.openxmlformats.org/drawingml/2006/main" w="13335">
-            <a:solidFill>
-              <a:srgbClr val="666666"/>
-            </a:solidFill>
-            <a:prstDash val="solid"/>
-            <a:tailEnd type="arrow" w="sm" len="sm"/>
-          </a:ln>
-        </p:spPr>
-      </p:cxnSp>
-      <p:cxnSp>
-        <p:nvCxnSpPr>
-          <p:cNvPr id="30" name=""/>
-          <p:cNvCxnSpPr>
-            <a:stCxn xmlns:a="http://schemas.openxmlformats.org/drawingml/2006/main" id="10" idx="3"/>
-            <a:endCxn xmlns:a="http://schemas.openxmlformats.org/drawingml/2006/main" id="11" idx="1"/>
-          </p:cNvCxnSpPr>
-          <p:nvPr/>
-        </p:nvCxnSpPr>
-        <p:spPr>
-          <a:xfrm xmlns:a="http://schemas.openxmlformats.org/drawingml/2006/main">
-            <a:off x="5781675" y="4219575"/>
-            <a:ext cx="504825" cy="0"/>
-          </a:xfrm>
-          <a:prstGeom xmlns:a="http://schemas.openxmlformats.org/drawingml/2006/main" prst="straightConnector1">
-            <a:avLst/>
-          </a:prstGeom>
-          <a:ln xmlns:a="http://schemas.openxmlformats.org/drawingml/2006/main" w="13335">
-            <a:solidFill>
-              <a:srgbClr val="666666"/>
-            </a:solidFill>
-            <a:prstDash val="solid"/>
-            <a:tailEnd type="arrow" w="sm" len="sm"/>
-          </a:ln>
-        </p:spPr>
-      </p:cxnSp>
-      <p:cxnSp>
-        <p:nvCxnSpPr>
-          <p:cNvPr id="31" name=""/>
-          <p:cNvCxnSpPr>
-            <a:stCxn xmlns:a="http://schemas.openxmlformats.org/drawingml/2006/main" id="11" idx="3"/>
-            <a:endCxn xmlns:a="http://schemas.openxmlformats.org/drawingml/2006/main" id="12" idx="1"/>
-          </p:cNvCxnSpPr>
-          <p:nvPr/>
-        </p:nvCxnSpPr>
-        <p:spPr>
-          <a:xfrm xmlns:a="http://schemas.openxmlformats.org/drawingml/2006/main">
-            <a:off x="8477250" y="4219575"/>
-            <a:ext cx="504825" cy="0"/>
-          </a:xfrm>
-          <a:prstGeom xmlns:a="http://schemas.openxmlformats.org/drawingml/2006/main" prst="straightConnector1">
-            <a:avLst/>
-          </a:prstGeom>
-          <a:ln xmlns:a="http://schemas.openxmlformats.org/drawingml/2006/main" w="13335">
-            <a:solidFill>
-              <a:srgbClr val="666666"/>
-            </a:solidFill>
-            <a:prstDash val="solid"/>
-            <a:tailEnd type="arrow" w="sm" len="sm"/>
-          </a:ln>
-        </p:spPr>
-      </p:cxnSp>
-      <p:sp>
-        <p:nvSpPr>
-          <p:cNvPr id="16" name="">
-            <a:extLst xmlns:a="http://schemas.openxmlformats.org/drawingml/2006/main">
-              <a:ext uri="{FF2B5EF4-FFF2-40B4-BE49-F238E27FC236}">
-                <a16:creationId xmlns:a16="http://schemas.microsoft.com/office/drawing/2014/main" id="{6F0BA43F-0252-4E73-9360-8604CE969E1B}"/>
-              </a:ext>
-            </a:extLst>
-          </p:cNvPr>
-          <p:cNvSpPr>
-            <a:spLocks xmlns:a="http://schemas.openxmlformats.org/drawingml/2006/main" noGrp="1"/>
-          </p:cNvSpPr>
-          <p:nvPr/>
-        </p:nvSpPr>
-        <p:spPr>
-          <a:xfrm xmlns:a="http://schemas.openxmlformats.org/drawingml/2006/main">
-            <a:off x="685800" y="5257800"/>
-            <a:ext cx="10820400" cy="457200"/>
+            <a:off x="685800" y="5848350"/>
+            <a:ext cx="10820400" cy="285750"/>
           </a:xfrm>
           <a:prstGeom xmlns:a="http://schemas.openxmlformats.org/drawingml/2006/main" prst="rect">
             <a:avLst/>
@@ -2965,9 +2577,9 @@
                 <a:spcPct val="108000"/>
               </a:lnSpc>
               <a:buNone/>
-              <a:defRPr sz="1725" b="1">
-                <a:solidFill>
-                  <a:srgbClr val="222222"/>
+              <a:defRPr sz="1350" b="1">
+                <a:solidFill>
+                  <a:srgbClr val="666666"/>
                 </a:solidFill>
                 <a:latin typeface="Pretendard Medium"/>
                 <a:ea typeface="Pretendard Medium"/>
@@ -2975,15 +2587,15 @@
               </a:defRPr>
             </a:pPr>
             <a:r>
-              <a:rPr sz="1725" b="1">
-                <a:solidFill>
-                  <a:srgbClr val="222222"/>
+              <a:rPr sz="1350" b="1">
+                <a:solidFill>
+                  <a:srgbClr val="666666"/>
                 </a:solidFill>
                 <a:latin typeface="Pretendard Medium"/>
                 <a:ea typeface="Pretendard Medium"/>
                 <a:cs typeface="Pretendard Medium"/>
               </a:rPr>
-              <a:t>연구의 빈틈: 충전 대기가 실제 출발 지연으로 바뀌는 조건과 그 뒤의 대응</a:t>
+              <a:t>현재 단계: 연구 문제와 목적 초안을 정리한 상태</a:t>
             </a:r>
           </a:p>
         </p:txBody>
@@ -2991,7 +2603,7 @@
     </p:spTree>
     <p:extLst>
       <p:ext uri="{BB962C8B-B14F-4D97-AF65-F5344CB8AC3E}">
-        <p14:creationId xmlns:p14="http://schemas.microsoft.com/office/powerpoint/2010/main" val="1633004164"/>
+        <p14:creationId xmlns:p14="http://schemas.microsoft.com/office/powerpoint/2010/main" val="148630576"/>
       </p:ext>
     </p:extLst>
   </p:cSld>
@@ -3019,10 +2631,10 @@
       </p:grpSpPr>
       <p:sp>
         <p:nvSpPr>
-          <p:cNvPr id="12" name="">
+          <p:cNvPr id="8" name="">
             <a:extLst xmlns:a="http://schemas.openxmlformats.org/drawingml/2006/main">
               <a:ext uri="{FF2B5EF4-FFF2-40B4-BE49-F238E27FC236}">
-                <a16:creationId xmlns:a16="http://schemas.microsoft.com/office/drawing/2014/main" id="{682C2D34-81C4-4950-B459-009FBFC52BF8}"/>
+                <a16:creationId xmlns:a16="http://schemas.microsoft.com/office/drawing/2014/main" id="{0C028D61-3A40-419F-845B-56306058D211}"/>
               </a:ext>
             </a:extLst>
           </p:cNvPr>
@@ -3073,7 +2685,7 @@
                 <a:ea typeface="Pretendard Medium"/>
                 <a:cs typeface="Pretendard Medium"/>
               </a:rPr>
-              <a:t>2. 연구 목적과 비교할 대안</a:t>
+              <a:t>현재 진행 상태</a:t>
             </a:r>
           </a:p>
         </p:txBody>
@@ -3083,7 +2695,7 @@
           <p:cNvPr id="2" name="">
             <a:extLst xmlns:a="http://schemas.openxmlformats.org/drawingml/2006/main">
               <a:ext uri="{FF2B5EF4-FFF2-40B4-BE49-F238E27FC236}">
-                <a16:creationId xmlns:a16="http://schemas.microsoft.com/office/drawing/2014/main" id="{4CA1090F-45A5-48E1-A077-10C10D3269DD}"/>
+                <a16:creationId xmlns:a16="http://schemas.microsoft.com/office/drawing/2014/main" id="{B79A9C95-984D-4346-910C-768A4A61CE87}"/>
               </a:ext>
             </a:extLst>
           </p:cNvPr>
@@ -3134,7 +2746,7 @@
                 <a:ea typeface="Pretendard"/>
                 <a:cs typeface="Pretendard"/>
               </a:rPr>
-              <a:t>연구 목적</a:t>
+              <a:t>완료한 것과 남은 것</a:t>
             </a:r>
           </a:p>
         </p:txBody>
@@ -3144,7 +2756,7 @@
           <p:cNvPr id="3" name="">
             <a:extLst xmlns:a="http://schemas.openxmlformats.org/drawingml/2006/main">
               <a:ext uri="{FF2B5EF4-FFF2-40B4-BE49-F238E27FC236}">
-                <a16:creationId xmlns:a16="http://schemas.microsoft.com/office/drawing/2014/main" id="{B5718F66-A16C-42BC-A169-1954F80E3234}"/>
+                <a16:creationId xmlns:a16="http://schemas.microsoft.com/office/drawing/2014/main" id="{8DF1280C-9009-48D1-9A86-85A6476374F6}"/>
               </a:ext>
             </a:extLst>
           </p:cNvPr>
@@ -3195,7 +2807,7 @@
                 <a:ea typeface="Pretendard"/>
                 <a:cs typeface="Pretendard"/>
               </a:rPr>
-              <a:t>2026-10-07 개인미팅에서 정리한 연구 방향.</a:t>
+              <a:t>연구 결과가 아니라 현재 준비 상태를 정리한 표.</a:t>
             </a:r>
           </a:p>
         </p:txBody>
@@ -3205,7 +2817,7 @@
           <p:cNvPr id="4" name="">
             <a:extLst xmlns:a="http://schemas.openxmlformats.org/drawingml/2006/main">
               <a:ext uri="{FF2B5EF4-FFF2-40B4-BE49-F238E27FC236}">
-                <a16:creationId xmlns:a16="http://schemas.microsoft.com/office/drawing/2014/main" id="{C7D1FA6A-2B3E-45E1-AFD6-1263997991CD}"/>
+                <a16:creationId xmlns:a16="http://schemas.microsoft.com/office/drawing/2014/main" id="{A4448998-BFF5-461B-B307-B603B49EE003}"/>
               </a:ext>
             </a:extLst>
           </p:cNvPr>
@@ -3261,12 +2873,533 @@
           </a:p>
         </p:txBody>
       </p:sp>
-      <p:sp>
-        <p:nvSpPr>
-          <p:cNvPr id="5" name="">
+      <p:graphicFrame>
+        <p:nvGraphicFramePr>
+          <p:cNvPr id="12" name=""/>
+          <p:cNvGraphicFramePr/>
+          <p:nvPr/>
+        </p:nvGraphicFramePr>
+        <p:xfrm>
+          <a:off xmlns:a="http://schemas.openxmlformats.org/drawingml/2006/main" x="685800" y="1362075"/>
+          <a:ext xmlns:a="http://schemas.openxmlformats.org/drawingml/2006/main" cx="10820400" cy="3143250"/>
+        </p:xfrm>
+        <a:graphic xmlns:a="http://schemas.openxmlformats.org/drawingml/2006/main">
+          <a:graphicData uri="http://schemas.openxmlformats.org/drawingml/2006/table">
+            <a:tbl>
+              <a:tblPr/>
+              <a:tblGrid>
+                <a:gridCol w="1762125"/>
+                <a:gridCol w="1476375"/>
+                <a:gridCol w="7581900"/>
+              </a:tblGrid>
+              <a:tr h="400050">
+                <a:tc>
+                  <a:txBody>
+                    <a:bodyPr wrap="square" lIns="76200" tIns="38100" rIns="76200" bIns="38100">
+                      <a:noAutofit/>
+                    </a:bodyPr>
+                    <a:lstStyle/>
+                    <a:p>
+                      <a:pPr algn="ctr"/>
+                      <a:r>
+                        <a:rPr sz="1275" b="1">
+                          <a:solidFill>
+                            <a:srgbClr val="FFFFFF"/>
+                          </a:solidFill>
+                          <a:latin typeface="Pretendard Medium"/>
+                          <a:ea typeface="Pretendard Medium"/>
+                          <a:cs typeface="Pretendard Medium"/>
+                        </a:rPr>
+                        <a:t>항목</a:t>
+                      </a:r>
+                    </a:p>
+                  </a:txBody>
+                  <a:tcPr marL="91440" marR="91440" marT="45720" marB="45720" anchor="ctr">
+                    <a:solidFill>
+                      <a:srgbClr val="000000"/>
+                    </a:solidFill>
+                  </a:tcPr>
+                </a:tc>
+                <a:tc>
+                  <a:txBody>
+                    <a:bodyPr wrap="square" lIns="76200" tIns="38100" rIns="76200" bIns="38100">
+                      <a:noAutofit/>
+                    </a:bodyPr>
+                    <a:lstStyle/>
+                    <a:p>
+                      <a:pPr algn="ctr"/>
+                      <a:r>
+                        <a:rPr sz="1275" b="1">
+                          <a:solidFill>
+                            <a:srgbClr val="FFFFFF"/>
+                          </a:solidFill>
+                          <a:latin typeface="Pretendard Medium"/>
+                          <a:ea typeface="Pretendard Medium"/>
+                          <a:cs typeface="Pretendard Medium"/>
+                        </a:rPr>
+                        <a:t>현재 상태</a:t>
+                      </a:r>
+                    </a:p>
+                  </a:txBody>
+                  <a:tcPr marL="91440" marR="91440" marT="45720" marB="45720" anchor="ctr">
+                    <a:solidFill>
+                      <a:srgbClr val="000000"/>
+                    </a:solidFill>
+                  </a:tcPr>
+                </a:tc>
+                <a:tc>
+                  <a:txBody>
+                    <a:bodyPr wrap="square" lIns="76200" tIns="38100" rIns="76200" bIns="38100">
+                      <a:noAutofit/>
+                    </a:bodyPr>
+                    <a:lstStyle/>
+                    <a:p>
+                      <a:pPr algn="l"/>
+                      <a:r>
+                        <a:rPr sz="1275" b="1">
+                          <a:solidFill>
+                            <a:srgbClr val="FFFFFF"/>
+                          </a:solidFill>
+                          <a:latin typeface="Pretendard Medium"/>
+                          <a:ea typeface="Pretendard Medium"/>
+                          <a:cs typeface="Pretendard Medium"/>
+                        </a:rPr>
+                        <a:t>지금까지 한 일</a:t>
+                      </a:r>
+                    </a:p>
+                  </a:txBody>
+                  <a:tcPr marL="91440" marR="91440" marT="45720" marB="45720" anchor="ctr">
+                    <a:solidFill>
+                      <a:srgbClr val="000000"/>
+                    </a:solidFill>
+                  </a:tcPr>
+                </a:tc>
+              </a:tr>
+              <a:tr h="542925">
+                <a:tc>
+                  <a:txBody>
+                    <a:bodyPr wrap="square" lIns="76200" tIns="38100" rIns="76200" bIns="38100">
+                      <a:noAutofit/>
+                    </a:bodyPr>
+                    <a:lstStyle/>
+                    <a:p>
+                      <a:pPr algn="ctr"/>
+                      <a:r>
+                        <a:rPr sz="1290" b="1">
+                          <a:solidFill>
+                            <a:srgbClr val="222222"/>
+                          </a:solidFill>
+                          <a:latin typeface="Pretendard Medium"/>
+                          <a:ea typeface="Pretendard Medium"/>
+                          <a:cs typeface="Pretendard Medium"/>
+                        </a:rPr>
+                        <a:t>연구 방향</a:t>
+                      </a:r>
+                    </a:p>
+                  </a:txBody>
+                  <a:tcPr marL="91440" marR="91440" marT="45720" marB="45720" anchor="ctr">
+                    <a:solidFill>
+                      <a:srgbClr val="FFFFFF"/>
+                    </a:solidFill>
+                  </a:tcPr>
+                </a:tc>
+                <a:tc>
+                  <a:txBody>
+                    <a:bodyPr wrap="square" lIns="76200" tIns="38100" rIns="76200" bIns="38100">
+                      <a:noAutofit/>
+                    </a:bodyPr>
+                    <a:lstStyle/>
+                    <a:p>
+                      <a:pPr algn="ctr"/>
+                      <a:r>
+                        <a:rPr sz="1290" b="1">
+                          <a:solidFill>
+                            <a:srgbClr val="222222"/>
+                          </a:solidFill>
+                          <a:latin typeface="Pretendard Medium"/>
+                          <a:ea typeface="Pretendard Medium"/>
+                          <a:cs typeface="Pretendard Medium"/>
+                        </a:rPr>
+                        <a:t>초안 정리</a:t>
+                      </a:r>
+                    </a:p>
+                  </a:txBody>
+                  <a:tcPr marL="91440" marR="91440" marT="45720" marB="45720" anchor="ctr">
+                    <a:solidFill>
+                      <a:srgbClr val="FFFFFF"/>
+                    </a:solidFill>
+                  </a:tcPr>
+                </a:tc>
+                <a:tc>
+                  <a:txBody>
+                    <a:bodyPr wrap="square" lIns="76200" tIns="38100" rIns="76200" bIns="38100">
+                      <a:noAutofit/>
+                    </a:bodyPr>
+                    <a:lstStyle/>
+                    <a:p>
+                      <a:pPr algn="l"/>
+                      <a:r>
+                        <a:rPr sz="1290" b="0">
+                          <a:solidFill>
+                            <a:srgbClr val="222222"/>
+                          </a:solidFill>
+                          <a:latin typeface="Pretendard"/>
+                          <a:ea typeface="Pretendard"/>
+                          <a:cs typeface="Pretendard"/>
+                        </a:rPr>
+                        <a:t>충전 대기, 출발 지연과 뒤 운행의 지연을 연구 문제로 설정</a:t>
+                      </a:r>
+                    </a:p>
+                  </a:txBody>
+                  <a:tcPr marL="91440" marR="91440" marT="45720" marB="45720" anchor="ctr">
+                    <a:solidFill>
+                      <a:srgbClr val="FFFFFF"/>
+                    </a:solidFill>
+                  </a:tcPr>
+                </a:tc>
+              </a:tr>
+              <a:tr h="542925">
+                <a:tc>
+                  <a:txBody>
+                    <a:bodyPr wrap="square" lIns="76200" tIns="38100" rIns="76200" bIns="38100">
+                      <a:noAutofit/>
+                    </a:bodyPr>
+                    <a:lstStyle/>
+                    <a:p>
+                      <a:pPr algn="ctr"/>
+                      <a:r>
+                        <a:rPr sz="1290" b="1">
+                          <a:solidFill>
+                            <a:srgbClr val="222222"/>
+                          </a:solidFill>
+                          <a:latin typeface="Pretendard Medium"/>
+                          <a:ea typeface="Pretendard Medium"/>
+                          <a:cs typeface="Pretendard Medium"/>
+                        </a:rPr>
+                        <a:t>데이터</a:t>
+                      </a:r>
+                    </a:p>
+                  </a:txBody>
+                  <a:tcPr marL="91440" marR="91440" marT="45720" marB="45720" anchor="ctr">
+                    <a:solidFill>
+                      <a:srgbClr val="FFFFFF"/>
+                    </a:solidFill>
+                  </a:tcPr>
+                </a:tc>
+                <a:tc>
+                  <a:txBody>
+                    <a:bodyPr wrap="square" lIns="76200" tIns="38100" rIns="76200" bIns="38100">
+                      <a:noAutofit/>
+                    </a:bodyPr>
+                    <a:lstStyle/>
+                    <a:p>
+                      <a:pPr algn="ctr"/>
+                      <a:r>
+                        <a:rPr sz="1290" b="1">
+                          <a:solidFill>
+                            <a:srgbClr val="222222"/>
+                          </a:solidFill>
+                          <a:latin typeface="Pretendard Medium"/>
+                          <a:ea typeface="Pretendard Medium"/>
+                          <a:cs typeface="Pretendard Medium"/>
+                        </a:rPr>
+                        <a:t>미정</a:t>
+                      </a:r>
+                    </a:p>
+                  </a:txBody>
+                  <a:tcPr marL="91440" marR="91440" marT="45720" marB="45720" anchor="ctr">
+                    <a:solidFill>
+                      <a:srgbClr val="FFFFFF"/>
+                    </a:solidFill>
+                  </a:tcPr>
+                </a:tc>
+                <a:tc>
+                  <a:txBody>
+                    <a:bodyPr wrap="square" lIns="76200" tIns="38100" rIns="76200" bIns="38100">
+                      <a:noAutofit/>
+                    </a:bodyPr>
+                    <a:lstStyle/>
+                    <a:p>
+                      <a:pPr algn="l"/>
+                      <a:r>
+                        <a:rPr sz="1290" b="0">
+                          <a:solidFill>
+                            <a:srgbClr val="222222"/>
+                          </a:solidFill>
+                          <a:latin typeface="Pretendard"/>
+                          <a:ea typeface="Pretendard"/>
+                          <a:cs typeface="Pretendard"/>
+                        </a:rPr>
+                        <a:t>GTFS와 BIS를 같이 쓰는 방향만 검토</a:t>
+                      </a:r>
+                    </a:p>
+                  </a:txBody>
+                  <a:tcPr marL="91440" marR="91440" marT="45720" marB="45720" anchor="ctr">
+                    <a:solidFill>
+                      <a:srgbClr val="FFFFFF"/>
+                    </a:solidFill>
+                  </a:tcPr>
+                </a:tc>
+              </a:tr>
+              <a:tr h="542925">
+                <a:tc>
+                  <a:txBody>
+                    <a:bodyPr wrap="square" lIns="76200" tIns="38100" rIns="76200" bIns="38100">
+                      <a:noAutofit/>
+                    </a:bodyPr>
+                    <a:lstStyle/>
+                    <a:p>
+                      <a:pPr algn="ctr"/>
+                      <a:r>
+                        <a:rPr sz="1290" b="1">
+                          <a:solidFill>
+                            <a:srgbClr val="222222"/>
+                          </a:solidFill>
+                          <a:latin typeface="Pretendard Medium"/>
+                          <a:ea typeface="Pretendard Medium"/>
+                          <a:cs typeface="Pretendard Medium"/>
+                        </a:rPr>
+                        <a:t>시뮬레이션</a:t>
+                      </a:r>
+                    </a:p>
+                  </a:txBody>
+                  <a:tcPr marL="91440" marR="91440" marT="45720" marB="45720" anchor="ctr">
+                    <a:solidFill>
+                      <a:srgbClr val="FFFFFF"/>
+                    </a:solidFill>
+                  </a:tcPr>
+                </a:tc>
+                <a:tc>
+                  <a:txBody>
+                    <a:bodyPr wrap="square" lIns="76200" tIns="38100" rIns="76200" bIns="38100">
+                      <a:noAutofit/>
+                    </a:bodyPr>
+                    <a:lstStyle/>
+                    <a:p>
+                      <a:pPr algn="ctr"/>
+                      <a:r>
+                        <a:rPr sz="1290" b="1">
+                          <a:solidFill>
+                            <a:srgbClr val="222222"/>
+                          </a:solidFill>
+                          <a:latin typeface="Pretendard Medium"/>
+                          <a:ea typeface="Pretendard Medium"/>
+                          <a:cs typeface="Pretendard Medium"/>
+                        </a:rPr>
+                        <a:t>미구축</a:t>
+                      </a:r>
+                    </a:p>
+                  </a:txBody>
+                  <a:tcPr marL="91440" marR="91440" marT="45720" marB="45720" anchor="ctr">
+                    <a:solidFill>
+                      <a:srgbClr val="FFFFFF"/>
+                    </a:solidFill>
+                  </a:tcPr>
+                </a:tc>
+                <a:tc>
+                  <a:txBody>
+                    <a:bodyPr wrap="square" lIns="76200" tIns="38100" rIns="76200" bIns="38100">
+                      <a:noAutofit/>
+                    </a:bodyPr>
+                    <a:lstStyle/>
+                    <a:p>
+                      <a:pPr algn="l"/>
+                      <a:r>
+                        <a:rPr sz="1290" b="0">
+                          <a:solidFill>
+                            <a:srgbClr val="222222"/>
+                          </a:solidFill>
+                          <a:latin typeface="Pretendard"/>
+                          <a:ea typeface="Pretendard"/>
+                          <a:cs typeface="Pretendard"/>
+                        </a:rPr>
+                        <a:t>노선 1개와 소수 버스의 작은 예제 범위만 계획</a:t>
+                      </a:r>
+                    </a:p>
+                  </a:txBody>
+                  <a:tcPr marL="91440" marR="91440" marT="45720" marB="45720" anchor="ctr">
+                    <a:solidFill>
+                      <a:srgbClr val="FFFFFF"/>
+                    </a:solidFill>
+                  </a:tcPr>
+                </a:tc>
+              </a:tr>
+              <a:tr h="542925">
+                <a:tc>
+                  <a:txBody>
+                    <a:bodyPr wrap="square" lIns="76200" tIns="38100" rIns="76200" bIns="38100">
+                      <a:noAutofit/>
+                    </a:bodyPr>
+                    <a:lstStyle/>
+                    <a:p>
+                      <a:pPr algn="ctr"/>
+                      <a:r>
+                        <a:rPr sz="1290" b="1">
+                          <a:solidFill>
+                            <a:srgbClr val="222222"/>
+                          </a:solidFill>
+                          <a:latin typeface="Pretendard Medium"/>
+                          <a:ea typeface="Pretendard Medium"/>
+                          <a:cs typeface="Pretendard Medium"/>
+                        </a:rPr>
+                        <a:t>알고리즘</a:t>
+                      </a:r>
+                    </a:p>
+                  </a:txBody>
+                  <a:tcPr marL="91440" marR="91440" marT="45720" marB="45720" anchor="ctr">
+                    <a:solidFill>
+                      <a:srgbClr val="FFFFFF"/>
+                    </a:solidFill>
+                  </a:tcPr>
+                </a:tc>
+                <a:tc>
+                  <a:txBody>
+                    <a:bodyPr wrap="square" lIns="76200" tIns="38100" rIns="76200" bIns="38100">
+                      <a:noAutofit/>
+                    </a:bodyPr>
+                    <a:lstStyle/>
+                    <a:p>
+                      <a:pPr algn="ctr"/>
+                      <a:r>
+                        <a:rPr sz="1290" b="1">
+                          <a:solidFill>
+                            <a:srgbClr val="222222"/>
+                          </a:solidFill>
+                          <a:latin typeface="Pretendard Medium"/>
+                          <a:ea typeface="Pretendard Medium"/>
+                          <a:cs typeface="Pretendard Medium"/>
+                        </a:rPr>
+                        <a:t>미정</a:t>
+                      </a:r>
+                    </a:p>
+                  </a:txBody>
+                  <a:tcPr marL="91440" marR="91440" marT="45720" marB="45720" anchor="ctr">
+                    <a:solidFill>
+                      <a:srgbClr val="FFFFFF"/>
+                    </a:solidFill>
+                  </a:tcPr>
+                </a:tc>
+                <a:tc>
+                  <a:txBody>
+                    <a:bodyPr wrap="square" lIns="76200" tIns="38100" rIns="76200" bIns="38100">
+                      <a:noAutofit/>
+                    </a:bodyPr>
+                    <a:lstStyle/>
+                    <a:p>
+                      <a:pPr algn="l"/>
+                      <a:r>
+                        <a:rPr sz="1290" b="0">
+                          <a:solidFill>
+                            <a:srgbClr val="222222"/>
+                          </a:solidFill>
+                          <a:latin typeface="Pretendard"/>
+                          <a:ea typeface="Pretendard"/>
+                          <a:cs typeface="Pretendard"/>
+                        </a:rPr>
+                        <a:t>도착 즉시 충전과 출발시간 우선 충전을 비교 후보로 생각</a:t>
+                      </a:r>
+                    </a:p>
+                  </a:txBody>
+                  <a:tcPr marL="91440" marR="91440" marT="45720" marB="45720" anchor="ctr">
+                    <a:solidFill>
+                      <a:srgbClr val="FFFFFF"/>
+                    </a:solidFill>
+                  </a:tcPr>
+                </a:tc>
+              </a:tr>
+              <a:tr h="542925">
+                <a:tc>
+                  <a:txBody>
+                    <a:bodyPr wrap="square" lIns="76200" tIns="38100" rIns="76200" bIns="38100">
+                      <a:noAutofit/>
+                    </a:bodyPr>
+                    <a:lstStyle/>
+                    <a:p>
+                      <a:pPr algn="ctr"/>
+                      <a:r>
+                        <a:rPr sz="1290" b="1">
+                          <a:solidFill>
+                            <a:srgbClr val="222222"/>
+                          </a:solidFill>
+                          <a:latin typeface="Pretendard Medium"/>
+                          <a:ea typeface="Pretendard Medium"/>
+                          <a:cs typeface="Pretendard Medium"/>
+                        </a:rPr>
+                        <a:t>결과·시사점</a:t>
+                      </a:r>
+                    </a:p>
+                  </a:txBody>
+                  <a:tcPr marL="91440" marR="91440" marT="45720" marB="45720" anchor="ctr">
+                    <a:solidFill>
+                      <a:srgbClr val="FFFFFF"/>
+                    </a:solidFill>
+                  </a:tcPr>
+                </a:tc>
+                <a:tc>
+                  <a:txBody>
+                    <a:bodyPr wrap="square" lIns="76200" tIns="38100" rIns="76200" bIns="38100">
+                      <a:noAutofit/>
+                    </a:bodyPr>
+                    <a:lstStyle/>
+                    <a:p>
+                      <a:pPr algn="ctr"/>
+                      <a:r>
+                        <a:rPr sz="1290" b="1">
+                          <a:solidFill>
+                            <a:srgbClr val="222222"/>
+                          </a:solidFill>
+                          <a:latin typeface="Pretendard Medium"/>
+                          <a:ea typeface="Pretendard Medium"/>
+                          <a:cs typeface="Pretendard Medium"/>
+                        </a:rPr>
+                        <a:t>없음</a:t>
+                      </a:r>
+                    </a:p>
+                  </a:txBody>
+                  <a:tcPr marL="91440" marR="91440" marT="45720" marB="45720" anchor="ctr">
+                    <a:solidFill>
+                      <a:srgbClr val="FFFFFF"/>
+                    </a:solidFill>
+                  </a:tcPr>
+                </a:tc>
+                <a:tc>
+                  <a:txBody>
+                    <a:bodyPr wrap="square" lIns="76200" tIns="38100" rIns="76200" bIns="38100">
+                      <a:noAutofit/>
+                    </a:bodyPr>
+                    <a:lstStyle/>
+                    <a:p>
+                      <a:pPr algn="l"/>
+                      <a:r>
+                        <a:rPr sz="1290" b="0">
+                          <a:solidFill>
+                            <a:srgbClr val="222222"/>
+                          </a:solidFill>
+                          <a:latin typeface="Pretendard"/>
+                          <a:ea typeface="Pretendard"/>
+                          <a:cs typeface="Pretendard"/>
+                        </a:rPr>
+                        <a:t>실제 데이터 실험 후 해석할 예정</a:t>
+                      </a:r>
+                    </a:p>
+                  </a:txBody>
+                  <a:tcPr marL="91440" marR="91440" marT="45720" marB="45720" anchor="ctr">
+                    <a:solidFill>
+                      <a:srgbClr val="FFFFFF"/>
+                    </a:solidFill>
+                  </a:tcPr>
+                </a:tc>
+              </a:tr>
+            </a:tbl>
+          </a:graphicData>
+        </a:graphic>
+      </p:graphicFrame>
+      <p:sp>
+        <p:nvSpPr>
+          <p:cNvPr id="6" name="">
             <a:extLst xmlns:a="http://schemas.openxmlformats.org/drawingml/2006/main">
               <a:ext uri="{FF2B5EF4-FFF2-40B4-BE49-F238E27FC236}">
-                <a16:creationId xmlns:a16="http://schemas.microsoft.com/office/drawing/2014/main" id="{D6CC939F-703D-4DED-97EC-A612ADE8E159}"/>
+                <a16:creationId xmlns:a16="http://schemas.microsoft.com/office/drawing/2014/main" id="{A1A75E8D-5C21-4B43-BF9E-7CC679815457}"/>
               </a:ext>
             </a:extLst>
           </p:cNvPr>
@@ -3277,355 +3410,8 @@
         </p:nvSpPr>
         <p:spPr>
           <a:xfrm xmlns:a="http://schemas.openxmlformats.org/drawingml/2006/main">
-            <a:off x="685800" y="1352550"/>
-            <a:ext cx="10820400" cy="781050"/>
-          </a:xfrm>
-          <a:prstGeom xmlns:a="http://schemas.openxmlformats.org/drawingml/2006/main" prst="rect">
-            <a:avLst/>
-          </a:prstGeom>
-          <a:solidFill xmlns:a="http://schemas.openxmlformats.org/drawingml/2006/main">
-            <a:srgbClr val="F8F8F8"/>
-          </a:solidFill>
-          <a:ln xmlns:a="http://schemas.openxmlformats.org/drawingml/2006/main" w="9525">
-            <a:solidFill>
-              <a:srgbClr val="B8B8B8"/>
-            </a:solidFill>
-            <a:prstDash val="solid"/>
-          </a:ln>
-        </p:spPr>
-        <p:txBody>
-          <a:bodyPr xmlns:a="http://schemas.openxmlformats.org/drawingml/2006/main" lIns="190500" tIns="47625" rIns="190500" bIns="47625" anchor="ctr">
-            <a:noAutofit/>
-          </a:bodyPr>
-          <a:lstStyle xmlns:a="http://schemas.openxmlformats.org/drawingml/2006/main"/>
-          <a:p xmlns:a="http://schemas.openxmlformats.org/drawingml/2006/main">
-            <a:pPr algn="ctr">
-              <a:defRPr sz="1725" b="1">
-                <a:solidFill>
-                  <a:srgbClr val="000000"/>
-                </a:solidFill>
-                <a:latin typeface="Pretendard Medium"/>
-                <a:ea typeface="Pretendard Medium"/>
-                <a:cs typeface="Pretendard Medium"/>
-              </a:defRPr>
-            </a:pPr>
-            <a:r>
-              <a:rPr sz="1725" b="1">
-                <a:solidFill>
-                  <a:srgbClr val="000000"/>
-                </a:solidFill>
-                <a:latin typeface="Pretendard Medium"/>
-                <a:ea typeface="Pretendard Medium"/>
-                <a:cs typeface="Pretendard Medium"/>
-              </a:rPr>
-              <a:t>정해진 버스 운행을 최대한 지키면서, 필요한 충전시설의 규모와 충전·운영 방법을 함께 비교한다.</a:t>
-            </a:r>
-          </a:p>
-        </p:txBody>
-      </p:sp>
-      <p:sp>
-        <p:nvSpPr>
-          <p:cNvPr id="6" name="">
-            <a:extLst xmlns:a="http://schemas.openxmlformats.org/drawingml/2006/main">
-              <a:ext uri="{FF2B5EF4-FFF2-40B4-BE49-F238E27FC236}">
-                <a16:creationId xmlns:a16="http://schemas.microsoft.com/office/drawing/2014/main" id="{B86E2EEE-FF30-4CA9-B5CB-B6EBD0FD2B17}"/>
-              </a:ext>
-            </a:extLst>
-          </p:cNvPr>
-          <p:cNvSpPr>
-            <a:spLocks xmlns:a="http://schemas.openxmlformats.org/drawingml/2006/main" noGrp="1"/>
-          </p:cNvSpPr>
-          <p:nvPr/>
-        </p:nvSpPr>
-        <p:spPr>
-          <a:xfrm xmlns:a="http://schemas.openxmlformats.org/drawingml/2006/main">
-            <a:off x="685800" y="2686050"/>
-            <a:ext cx="3276600" cy="1866900"/>
-          </a:xfrm>
-          <a:prstGeom xmlns:a="http://schemas.openxmlformats.org/drawingml/2006/main" prst="rect">
-            <a:avLst/>
-          </a:prstGeom>
-          <a:solidFill xmlns:a="http://schemas.openxmlformats.org/drawingml/2006/main">
-            <a:srgbClr val="FFFFFF"/>
-          </a:solidFill>
-          <a:ln xmlns:a="http://schemas.openxmlformats.org/drawingml/2006/main" w="9525">
-            <a:solidFill>
-              <a:srgbClr val="B8B8B8"/>
-            </a:solidFill>
-            <a:prstDash val="solid"/>
-          </a:ln>
-        </p:spPr>
-        <p:txBody>
-          <a:bodyPr xmlns:a="http://schemas.openxmlformats.org/drawingml/2006/main" lIns="114300" tIns="76200" rIns="114300" bIns="76200" anchor="ctr">
-            <a:noAutofit/>
-          </a:bodyPr>
-          <a:lstStyle xmlns:a="http://schemas.openxmlformats.org/drawingml/2006/main"/>
-          <a:p xmlns:a="http://schemas.openxmlformats.org/drawingml/2006/main">
-            <a:pPr algn="ctr">
-              <a:lnSpc>
-                <a:spcPct val="105000"/>
-              </a:lnSpc>
-              <a:buNone/>
-              <a:defRPr sz="1275">
-                <a:solidFill>
-                  <a:srgbClr val="222222"/>
-                </a:solidFill>
-                <a:latin typeface="Pretendard"/>
-                <a:ea typeface="Pretendard"/>
-                <a:cs typeface="Pretendard"/>
-              </a:defRPr>
-            </a:pPr>
-            <a:r>
-              <a:rPr sz="1275" b="1">
-                <a:solidFill>
-                  <a:srgbClr val="222222"/>
-                </a:solidFill>
-                <a:latin typeface="Pretendard"/>
-                <a:ea typeface="Pretendard"/>
-                <a:cs typeface="Pretendard"/>
-              </a:rPr>
-              <a:t>1. 충전시설</a:t>
-            </a:r>
-          </a:p>
-          <a:p xmlns:a="http://schemas.openxmlformats.org/drawingml/2006/main">
-            <a:pPr algn="ctr">
-              <a:lnSpc>
-                <a:spcPct val="105000"/>
-              </a:lnSpc>
-              <a:buNone/>
-              <a:defRPr sz="1275">
-                <a:solidFill>
-                  <a:srgbClr val="222222"/>
-                </a:solidFill>
-                <a:latin typeface="Pretendard"/>
-                <a:ea typeface="Pretendard"/>
-                <a:cs typeface="Pretendard"/>
-              </a:defRPr>
-            </a:pPr>
-            <a:r>
-              <a:rPr sz="1275">
-                <a:solidFill>
-                  <a:srgbClr val="222222"/>
-                </a:solidFill>
-                <a:latin typeface="Pretendard"/>
-                <a:ea typeface="Pretendard"/>
-                <a:cs typeface="Pretendard"/>
-              </a:rPr>
-              <a:t>충전기 개수와 출력
-무한정 늘리는 것이 아니라
-지연을 감당할 수 있는 규모</a:t>
-            </a:r>
-          </a:p>
-        </p:txBody>
-      </p:sp>
-      <p:sp>
-        <p:nvSpPr>
-          <p:cNvPr id="7" name="">
-            <a:extLst xmlns:a="http://schemas.openxmlformats.org/drawingml/2006/main">
-              <a:ext uri="{FF2B5EF4-FFF2-40B4-BE49-F238E27FC236}">
-                <a16:creationId xmlns:a16="http://schemas.microsoft.com/office/drawing/2014/main" id="{2003F635-AD28-4C49-ACF1-8109D1C66A17}"/>
-              </a:ext>
-            </a:extLst>
-          </p:cNvPr>
-          <p:cNvSpPr>
-            <a:spLocks xmlns:a="http://schemas.openxmlformats.org/drawingml/2006/main" noGrp="1"/>
-          </p:cNvSpPr>
-          <p:nvPr/>
-        </p:nvSpPr>
-        <p:spPr>
-          <a:xfrm xmlns:a="http://schemas.openxmlformats.org/drawingml/2006/main">
-            <a:off x="4457700" y="2686050"/>
-            <a:ext cx="3276600" cy="1866900"/>
-          </a:xfrm>
-          <a:prstGeom xmlns:a="http://schemas.openxmlformats.org/drawingml/2006/main" prst="rect">
-            <a:avLst/>
-          </a:prstGeom>
-          <a:solidFill xmlns:a="http://schemas.openxmlformats.org/drawingml/2006/main">
-            <a:srgbClr val="F2F2F2"/>
-          </a:solidFill>
-          <a:ln xmlns:a="http://schemas.openxmlformats.org/drawingml/2006/main" w="15240">
-            <a:solidFill>
-              <a:srgbClr val="000000"/>
-            </a:solidFill>
-            <a:prstDash val="solid"/>
-          </a:ln>
-        </p:spPr>
-        <p:txBody>
-          <a:bodyPr xmlns:a="http://schemas.openxmlformats.org/drawingml/2006/main" lIns="114300" tIns="76200" rIns="114300" bIns="76200" anchor="ctr">
-            <a:noAutofit/>
-          </a:bodyPr>
-          <a:lstStyle xmlns:a="http://schemas.openxmlformats.org/drawingml/2006/main"/>
-          <a:p xmlns:a="http://schemas.openxmlformats.org/drawingml/2006/main">
-            <a:pPr algn="ctr">
-              <a:lnSpc>
-                <a:spcPct val="105000"/>
-              </a:lnSpc>
-              <a:buNone/>
-              <a:defRPr sz="1275">
-                <a:solidFill>
-                  <a:srgbClr val="222222"/>
-                </a:solidFill>
-                <a:latin typeface="Pretendard"/>
-                <a:ea typeface="Pretendard"/>
-                <a:cs typeface="Pretendard"/>
-              </a:defRPr>
-            </a:pPr>
-            <a:r>
-              <a:rPr sz="1275" b="1">
-                <a:solidFill>
-                  <a:srgbClr val="222222"/>
-                </a:solidFill>
-                <a:latin typeface="Pretendard"/>
-                <a:ea typeface="Pretendard"/>
-                <a:cs typeface="Pretendard"/>
-              </a:rPr>
-              <a:t>2. 충전 방법</a:t>
-            </a:r>
-          </a:p>
-          <a:p xmlns:a="http://schemas.openxmlformats.org/drawingml/2006/main">
-            <a:pPr algn="ctr">
-              <a:lnSpc>
-                <a:spcPct val="105000"/>
-              </a:lnSpc>
-              <a:buNone/>
-              <a:defRPr sz="1275">
-                <a:solidFill>
-                  <a:srgbClr val="222222"/>
-                </a:solidFill>
-                <a:latin typeface="Pretendard"/>
-                <a:ea typeface="Pretendard"/>
-                <a:cs typeface="Pretendard"/>
-              </a:defRPr>
-            </a:pPr>
-            <a:r>
-              <a:rPr sz="1275">
-                <a:solidFill>
-                  <a:srgbClr val="222222"/>
-                </a:solidFill>
-                <a:latin typeface="Pretendard"/>
-                <a:ea typeface="Pretendard"/>
-                <a:cs typeface="Pretendard"/>
-              </a:rPr>
-              <a:t>도착 즉시 충전
-다음 출발이 가까운 버스 우선
-필요한 배터리만 먼저 충전</a:t>
-            </a:r>
-          </a:p>
-        </p:txBody>
-      </p:sp>
-      <p:sp>
-        <p:nvSpPr>
-          <p:cNvPr id="8" name="">
-            <a:extLst xmlns:a="http://schemas.openxmlformats.org/drawingml/2006/main">
-              <a:ext uri="{FF2B5EF4-FFF2-40B4-BE49-F238E27FC236}">
-                <a16:creationId xmlns:a16="http://schemas.microsoft.com/office/drawing/2014/main" id="{F4B58D7B-F09C-4178-A9A7-3C7DAA753C2C}"/>
-              </a:ext>
-            </a:extLst>
-          </p:cNvPr>
-          <p:cNvSpPr>
-            <a:spLocks xmlns:a="http://schemas.openxmlformats.org/drawingml/2006/main" noGrp="1"/>
-          </p:cNvSpPr>
-          <p:nvPr/>
-        </p:nvSpPr>
-        <p:spPr>
-          <a:xfrm xmlns:a="http://schemas.openxmlformats.org/drawingml/2006/main">
-            <a:off x="8229600" y="2686050"/>
-            <a:ext cx="3276600" cy="1866900"/>
-          </a:xfrm>
-          <a:prstGeom xmlns:a="http://schemas.openxmlformats.org/drawingml/2006/main" prst="rect">
-            <a:avLst/>
-          </a:prstGeom>
-          <a:solidFill xmlns:a="http://schemas.openxmlformats.org/drawingml/2006/main">
-            <a:srgbClr val="FFFFFF"/>
-          </a:solidFill>
-          <a:ln xmlns:a="http://schemas.openxmlformats.org/drawingml/2006/main" w="9525">
-            <a:solidFill>
-              <a:srgbClr val="B8B8B8"/>
-            </a:solidFill>
-            <a:prstDash val="solid"/>
-          </a:ln>
-        </p:spPr>
-        <p:txBody>
-          <a:bodyPr xmlns:a="http://schemas.openxmlformats.org/drawingml/2006/main" lIns="114300" tIns="76200" rIns="114300" bIns="76200" anchor="ctr">
-            <a:noAutofit/>
-          </a:bodyPr>
-          <a:lstStyle xmlns:a="http://schemas.openxmlformats.org/drawingml/2006/main"/>
-          <a:p xmlns:a="http://schemas.openxmlformats.org/drawingml/2006/main">
-            <a:pPr algn="ctr">
-              <a:lnSpc>
-                <a:spcPct val="105000"/>
-              </a:lnSpc>
-              <a:buNone/>
-              <a:defRPr sz="1275">
-                <a:solidFill>
-                  <a:srgbClr val="222222"/>
-                </a:solidFill>
-                <a:latin typeface="Pretendard"/>
-                <a:ea typeface="Pretendard"/>
-                <a:cs typeface="Pretendard"/>
-              </a:defRPr>
-            </a:pPr>
-            <a:r>
-              <a:rPr sz="1275" b="1">
-                <a:solidFill>
-                  <a:srgbClr val="222222"/>
-                </a:solidFill>
-                <a:latin typeface="Pretendard"/>
-                <a:ea typeface="Pretendard"/>
-                <a:cs typeface="Pretendard"/>
-              </a:rPr>
-              <a:t>3. 운영 방법</a:t>
-            </a:r>
-          </a:p>
-          <a:p xmlns:a="http://schemas.openxmlformats.org/drawingml/2006/main">
-            <a:pPr algn="ctr">
-              <a:lnSpc>
-                <a:spcPct val="105000"/>
-              </a:lnSpc>
-              <a:buNone/>
-              <a:defRPr sz="1275">
-                <a:solidFill>
-                  <a:srgbClr val="222222"/>
-                </a:solidFill>
-                <a:latin typeface="Pretendard"/>
-                <a:ea typeface="Pretendard"/>
-                <a:cs typeface="Pretendard"/>
-              </a:defRPr>
-            </a:pPr>
-            <a:r>
-              <a:rPr sz="1275">
-                <a:solidFill>
-                  <a:srgbClr val="222222"/>
-                </a:solidFill>
-                <a:latin typeface="Pretendard"/>
-                <a:ea typeface="Pretendard"/>
-                <a:cs typeface="Pretendard"/>
-              </a:rPr>
-              <a:t>지연을 그대로 반영
-배차간격 조정
-이후 예비차 투입도 검토</a:t>
-            </a:r>
-          </a:p>
-        </p:txBody>
-      </p:sp>
-      <p:sp>
-        <p:nvSpPr>
-          <p:cNvPr id="9" name="">
-            <a:extLst xmlns:a="http://schemas.openxmlformats.org/drawingml/2006/main">
-              <a:ext uri="{FF2B5EF4-FFF2-40B4-BE49-F238E27FC236}">
-                <a16:creationId xmlns:a16="http://schemas.microsoft.com/office/drawing/2014/main" id="{E72C7585-9700-4D19-8BAF-FEC87301AFBD}"/>
-              </a:ext>
-            </a:extLst>
-          </p:cNvPr>
-          <p:cNvSpPr>
-            <a:spLocks xmlns:a="http://schemas.openxmlformats.org/drawingml/2006/main" noGrp="1"/>
-          </p:cNvSpPr>
-          <p:nvPr/>
-        </p:nvSpPr>
-        <p:spPr>
-          <a:xfrm xmlns:a="http://schemas.openxmlformats.org/drawingml/2006/main">
-            <a:off x="685800" y="5095875"/>
-            <a:ext cx="1143000" cy="247650"/>
+            <a:off x="685800" y="4905375"/>
+            <a:ext cx="2095500" cy="266700"/>
           </a:xfrm>
           <a:prstGeom xmlns:a="http://schemas.openxmlformats.org/drawingml/2006/main" prst="rect">
             <a:avLst/>
@@ -3646,7 +3432,7 @@
                 <a:spcPct val="108000"/>
               </a:lnSpc>
               <a:buNone/>
-              <a:defRPr sz="1350" b="1">
+              <a:defRPr sz="1500" b="1">
                 <a:solidFill>
                   <a:srgbClr val="222222"/>
                 </a:solidFill>
@@ -3656,7 +3442,7 @@
               </a:defRPr>
             </a:pPr>
             <a:r>
-              <a:rPr sz="1350" b="1">
+              <a:rPr sz="1500" b="1">
                 <a:solidFill>
                   <a:srgbClr val="222222"/>
                 </a:solidFill>
@@ -3664,17 +3450,17 @@
                 <a:ea typeface="Pretendard Medium"/>
                 <a:cs typeface="Pretendard Medium"/>
               </a:rPr>
-              <a:t>판단 기준</a:t>
-            </a:r>
-          </a:p>
-        </p:txBody>
-      </p:sp>
-      <p:sp>
-        <p:nvSpPr>
-          <p:cNvPr id="10" name="">
+              <a:t>현재 하고 있는 일</a:t>
+            </a:r>
+          </a:p>
+        </p:txBody>
+      </p:sp>
+      <p:sp>
+        <p:nvSpPr>
+          <p:cNvPr id="7" name="">
             <a:extLst xmlns:a="http://schemas.openxmlformats.org/drawingml/2006/main">
               <a:ext uri="{FF2B5EF4-FFF2-40B4-BE49-F238E27FC236}">
-                <a16:creationId xmlns:a16="http://schemas.microsoft.com/office/drawing/2014/main" id="{D738382D-F786-4323-8E68-CAE4CD4F3673}"/>
+                <a16:creationId xmlns:a16="http://schemas.microsoft.com/office/drawing/2014/main" id="{C3E861B3-E823-4BD8-A1BD-7E5B94A6C829}"/>
               </a:ext>
             </a:extLst>
           </p:cNvPr>
@@ -3685,8 +3471,8 @@
         </p:nvSpPr>
         <p:spPr>
           <a:xfrm xmlns:a="http://schemas.openxmlformats.org/drawingml/2006/main">
-            <a:off x="1809750" y="5057775"/>
-            <a:ext cx="9696450" cy="361950"/>
+            <a:off x="685800" y="5276850"/>
+            <a:ext cx="10820400" cy="742950"/>
           </a:xfrm>
           <a:prstGeom xmlns:a="http://schemas.openxmlformats.org/drawingml/2006/main" prst="rect">
             <a:avLst/>
@@ -3697,96 +3483,90 @@
           </a:ln>
         </p:spPr>
         <p:txBody>
-          <a:bodyPr xmlns:a="http://schemas.openxmlformats.org/drawingml/2006/main" wrap="square" lIns="0" tIns="0" rIns="0" bIns="0" anchor="ctr">
+          <a:bodyPr xmlns:a="http://schemas.openxmlformats.org/drawingml/2006/main" wrap="square" lIns="0" tIns="0" rIns="0" bIns="0" anchor="t">
             <a:noAutofit/>
           </a:bodyPr>
           <a:lstStyle xmlns:a="http://schemas.openxmlformats.org/drawingml/2006/main"/>
           <a:p xmlns:a="http://schemas.openxmlformats.org/drawingml/2006/main">
-            <a:pPr algn="l">
+            <a:pPr marL="203200" indent="-127000" algn="l">
               <a:lnSpc>
-                <a:spcPct val="108000"/>
+                <a:spcPct val="106000"/>
               </a:lnSpc>
+              <a:spcAft>
+                <a:spcPts val="900"/>
+              </a:spcAft>
               <a:buNone/>
-              <a:defRPr sz="1350" b="0">
-                <a:solidFill>
-                  <a:srgbClr val="222222"/>
-                </a:solidFill>
-                <a:latin typeface="Pretendard"/>
-                <a:ea typeface="Pretendard"/>
-                <a:cs typeface="Pretendard"/>
-              </a:defRPr>
-            </a:pPr>
-            <a:r>
-              <a:rPr sz="1350" b="0">
-                <a:solidFill>
-                  <a:srgbClr val="222222"/>
-                </a:solidFill>
-                <a:latin typeface="Pretendard"/>
-                <a:ea typeface="Pretendard"/>
-                <a:cs typeface="Pretendard"/>
-              </a:rPr>
-              <a:t>출발 지연 · 뒤 운행으로 이어진 지연 · 충전 대기 · 배차간격 · 배터리 부족 · 시설 규모</a:t>
-            </a:r>
-          </a:p>
-        </p:txBody>
-      </p:sp>
-      <p:sp>
-        <p:nvSpPr>
-          <p:cNvPr id="11" name="">
-            <a:extLst xmlns:a="http://schemas.openxmlformats.org/drawingml/2006/main">
-              <a:ext uri="{FF2B5EF4-FFF2-40B4-BE49-F238E27FC236}">
-                <a16:creationId xmlns:a16="http://schemas.microsoft.com/office/drawing/2014/main" id="{0EDFB982-AFF1-4434-B7BF-A8B1F95EC28C}"/>
-              </a:ext>
-            </a:extLst>
-          </p:cNvPr>
-          <p:cNvSpPr>
-            <a:spLocks xmlns:a="http://schemas.openxmlformats.org/drawingml/2006/main" noGrp="1"/>
-          </p:cNvSpPr>
-          <p:nvPr/>
-        </p:nvSpPr>
-        <p:spPr>
-          <a:xfrm xmlns:a="http://schemas.openxmlformats.org/drawingml/2006/main">
-            <a:off x="685800" y="5734050"/>
-            <a:ext cx="10820400" cy="342900"/>
-          </a:xfrm>
-          <a:prstGeom xmlns:a="http://schemas.openxmlformats.org/drawingml/2006/main" prst="rect">
-            <a:avLst/>
-          </a:prstGeom>
-          <a:noFill xmlns:a="http://schemas.openxmlformats.org/drawingml/2006/main"/>
-          <a:ln xmlns:a="http://schemas.openxmlformats.org/drawingml/2006/main" w="0">
-            <a:noFill/>
-          </a:ln>
-        </p:spPr>
-        <p:txBody>
-          <a:bodyPr xmlns:a="http://schemas.openxmlformats.org/drawingml/2006/main" wrap="square" lIns="0" tIns="0" rIns="0" bIns="0" anchor="ctr">
-            <a:noAutofit/>
-          </a:bodyPr>
-          <a:lstStyle xmlns:a="http://schemas.openxmlformats.org/drawingml/2006/main"/>
-          <a:p xmlns:a="http://schemas.openxmlformats.org/drawingml/2006/main">
-            <a:pPr algn="ctr">
+              <a:defRPr sz="1388" b="0">
+                <a:solidFill>
+                  <a:srgbClr val="222222"/>
+                </a:solidFill>
+                <a:latin typeface="Pretendard"/>
+                <a:ea typeface="Pretendard"/>
+                <a:cs typeface="Pretendard"/>
+              </a:defRPr>
+            </a:pPr>
+            <a:r>
+              <a:rPr sz="1388" b="1">
+                <a:solidFill>
+                  <a:srgbClr val="222222"/>
+                </a:solidFill>
+                <a:latin typeface="Pretendard"/>
+                <a:ea typeface="Pretendard"/>
+                <a:cs typeface="Pretendard"/>
+              </a:rPr>
+              <a:t>연구계획 기록: </a:t>
+            </a:r>
+            <a:r>
+              <a:rPr sz="1388">
+                <a:solidFill>
+                  <a:srgbClr val="222222"/>
+                </a:solidFill>
+                <a:latin typeface="Pretendard"/>
+                <a:ea typeface="Pretendard"/>
+                <a:cs typeface="Pretendard"/>
+              </a:rPr>
+              <a:t>DTUMOS Energy에 연구 목적과 첫 실험 범위를 문서로 정리</a:t>
+            </a:r>
+          </a:p>
+          <a:p xmlns:a="http://schemas.openxmlformats.org/drawingml/2006/main">
+            <a:pPr marL="203200" indent="-127000" algn="l">
               <a:lnSpc>
-                <a:spcPct val="108000"/>
+                <a:spcPct val="106000"/>
               </a:lnSpc>
+              <a:spcAft>
+                <a:spcPts val="900"/>
+              </a:spcAft>
               <a:buNone/>
-              <a:defRPr sz="1500" b="1">
-                <a:solidFill>
-                  <a:srgbClr val="222222"/>
-                </a:solidFill>
-                <a:latin typeface="Pretendard Medium"/>
-                <a:ea typeface="Pretendard Medium"/>
-                <a:cs typeface="Pretendard Medium"/>
-              </a:defRPr>
-            </a:pPr>
-            <a:r>
-              <a:rPr sz="1500" b="1">
-                <a:solidFill>
-                  <a:srgbClr val="222222"/>
-                </a:solidFill>
-                <a:latin typeface="Pretendard Medium"/>
-                <a:ea typeface="Pretendard Medium"/>
-                <a:cs typeface="Pretendard Medium"/>
-              </a:rPr>
-              <a:t>비용이 낮아도 출발 지연이나 배차 문제가 커지면 좋은 결과로 보지 않는다.</a:t>
+              <a:defRPr sz="1388" b="0">
+                <a:solidFill>
+                  <a:srgbClr val="222222"/>
+                </a:solidFill>
+                <a:latin typeface="Pretendard"/>
+                <a:ea typeface="Pretendard"/>
+                <a:cs typeface="Pretendard"/>
+              </a:defRPr>
+            </a:pPr>
+            <a:r>
+              <a:rPr sz="1388" b="1">
+                <a:solidFill>
+                  <a:srgbClr val="222222"/>
+                </a:solidFill>
+                <a:latin typeface="Pretendard"/>
+                <a:ea typeface="Pretendard"/>
+                <a:cs typeface="Pretendard"/>
+              </a:rPr>
+              <a:t>구현 준비: </a:t>
+            </a:r>
+            <a:r>
+              <a:rPr sz="1388">
+                <a:solidFill>
+                  <a:srgbClr val="222222"/>
+                </a:solidFill>
+                <a:latin typeface="Pretendard"/>
+                <a:ea typeface="Pretendard"/>
+                <a:cs typeface="Pretendard"/>
+              </a:rPr>
+              <a:t>기존 DTUMOS 구조와 전기버스 시험 코드를 확인하고 옮길 범위를 검토</a:t>
             </a:r>
           </a:p>
         </p:txBody>
@@ -3794,7 +3574,7 @@
     </p:spTree>
     <p:extLst>
       <p:ext uri="{BB962C8B-B14F-4D97-AF65-F5344CB8AC3E}">
-        <p14:creationId xmlns:p14="http://schemas.microsoft.com/office/powerpoint/2010/main" val="2102076360"/>
+        <p14:creationId xmlns:p14="http://schemas.microsoft.com/office/powerpoint/2010/main" val="2121934760"/>
       </p:ext>
     </p:extLst>
   </p:cSld>
@@ -3822,10 +3602,10 @@
       </p:grpSpPr>
       <p:sp>
         <p:nvSpPr>
-          <p:cNvPr id="14" name="">
+          <p:cNvPr id="18" name="">
             <a:extLst xmlns:a="http://schemas.openxmlformats.org/drawingml/2006/main">
               <a:ext uri="{FF2B5EF4-FFF2-40B4-BE49-F238E27FC236}">
-                <a16:creationId xmlns:a16="http://schemas.microsoft.com/office/drawing/2014/main" id="{EED5396B-DF3D-4C87-B10A-0BBEA676EECD}"/>
+                <a16:creationId xmlns:a16="http://schemas.microsoft.com/office/drawing/2014/main" id="{D2F8D656-B189-4593-B80C-1D3CC76A857B}"/>
               </a:ext>
             </a:extLst>
           </p:cNvPr>
@@ -3876,7 +3656,7 @@
                 <a:ea typeface="Pretendard Medium"/>
                 <a:cs typeface="Pretendard Medium"/>
               </a:rPr>
-              <a:t>3. 데이터와 시뮬레이션 방법</a:t>
+              <a:t>첫 번째 연구 사이클 계획</a:t>
             </a:r>
           </a:p>
         </p:txBody>
@@ -3886,7 +3666,7 @@
           <p:cNvPr id="2" name="">
             <a:extLst xmlns:a="http://schemas.openxmlformats.org/drawingml/2006/main">
               <a:ext uri="{FF2B5EF4-FFF2-40B4-BE49-F238E27FC236}">
-                <a16:creationId xmlns:a16="http://schemas.microsoft.com/office/drawing/2014/main" id="{53AC50F1-EEFE-4A55-9710-560FE3483F9F}"/>
+                <a16:creationId xmlns:a16="http://schemas.microsoft.com/office/drawing/2014/main" id="{51261C3C-1D0A-4762-8287-ADF45EE5312A}"/>
               </a:ext>
             </a:extLst>
           </p:cNvPr>
@@ -3937,7 +3717,7 @@
                 <a:ea typeface="Pretendard"/>
                 <a:cs typeface="Pretendard"/>
               </a:rPr>
-              <a:t>방법론</a:t>
+              <a:t>앞으로 할 일</a:t>
             </a:r>
           </a:p>
         </p:txBody>
@@ -3947,7 +3727,7 @@
           <p:cNvPr id="3" name="">
             <a:extLst xmlns:a="http://schemas.openxmlformats.org/drawingml/2006/main">
               <a:ext uri="{FF2B5EF4-FFF2-40B4-BE49-F238E27FC236}">
-                <a16:creationId xmlns:a16="http://schemas.microsoft.com/office/drawing/2014/main" id="{0C6707F1-78F2-4778-8AFD-6589570ABC97}"/>
+                <a16:creationId xmlns:a16="http://schemas.microsoft.com/office/drawing/2014/main" id="{86F03D6B-89A0-4EBE-B8F4-D40A18DE0875}"/>
               </a:ext>
             </a:extLst>
           </p:cNvPr>
@@ -3998,7 +3778,7 @@
                 <a:ea typeface="Pretendard"/>
                 <a:cs typeface="Pretendard"/>
               </a:rPr>
-              <a:t>데이터 역할과 구현 순서는 2026-10-07 개인미팅 기준.</a:t>
+              <a:t>자문을 받은 뒤 수정할 첫 실행 계획.</a:t>
             </a:r>
           </a:p>
         </p:txBody>
@@ -4008,7 +3788,7 @@
           <p:cNvPr id="4" name="">
             <a:extLst xmlns:a="http://schemas.openxmlformats.org/drawingml/2006/main">
               <a:ext uri="{FF2B5EF4-FFF2-40B4-BE49-F238E27FC236}">
-                <a16:creationId xmlns:a16="http://schemas.microsoft.com/office/drawing/2014/main" id="{58F038A1-6AC5-432F-AB9C-E24656677A30}"/>
+                <a16:creationId xmlns:a16="http://schemas.microsoft.com/office/drawing/2014/main" id="{FB61F5A3-CB30-418A-989A-DAC53CF723BE}"/>
               </a:ext>
             </a:extLst>
           </p:cNvPr>
@@ -4069,7 +3849,7 @@
           <p:cNvPr id="5" name="">
             <a:extLst xmlns:a="http://schemas.openxmlformats.org/drawingml/2006/main">
               <a:ext uri="{FF2B5EF4-FFF2-40B4-BE49-F238E27FC236}">
-                <a16:creationId xmlns:a16="http://schemas.microsoft.com/office/drawing/2014/main" id="{B1B60BFF-323E-419A-897C-0AC5DDD84D34}"/>
+                <a16:creationId xmlns:a16="http://schemas.microsoft.com/office/drawing/2014/main" id="{E8D3C0F1-FE22-439D-A1D8-978283500986}"/>
               </a:ext>
             </a:extLst>
           </p:cNvPr>
@@ -4080,8 +3860,101 @@
         </p:nvSpPr>
         <p:spPr>
           <a:xfrm xmlns:a="http://schemas.openxmlformats.org/drawingml/2006/main">
-            <a:off x="685800" y="1485900"/>
-            <a:ext cx="2857500" cy="1066800"/>
+            <a:off x="685800" y="1571625"/>
+            <a:ext cx="1809750" cy="1095375"/>
+          </a:xfrm>
+          <a:prstGeom xmlns:a="http://schemas.openxmlformats.org/drawingml/2006/main" prst="rect">
+            <a:avLst/>
+          </a:prstGeom>
+          <a:solidFill xmlns:a="http://schemas.openxmlformats.org/drawingml/2006/main">
+            <a:srgbClr val="F2F2F2"/>
+          </a:solidFill>
+          <a:ln xmlns:a="http://schemas.openxmlformats.org/drawingml/2006/main" w="15240">
+            <a:solidFill>
+              <a:srgbClr val="000000"/>
+            </a:solidFill>
+            <a:prstDash val="solid"/>
+          </a:ln>
+        </p:spPr>
+        <p:txBody>
+          <a:bodyPr xmlns:a="http://schemas.openxmlformats.org/drawingml/2006/main" lIns="95250" tIns="66675" rIns="95250" bIns="66675" anchor="ctr">
+            <a:noAutofit/>
+          </a:bodyPr>
+          <a:lstStyle xmlns:a="http://schemas.openxmlformats.org/drawingml/2006/main"/>
+          <a:p xmlns:a="http://schemas.openxmlformats.org/drawingml/2006/main">
+            <a:pPr algn="ctr">
+              <a:lnSpc>
+                <a:spcPct val="105000"/>
+              </a:lnSpc>
+              <a:buNone/>
+              <a:defRPr sz="1238">
+                <a:solidFill>
+                  <a:srgbClr val="222222"/>
+                </a:solidFill>
+                <a:latin typeface="Pretendard"/>
+                <a:ea typeface="Pretendard"/>
+                <a:cs typeface="Pretendard"/>
+              </a:defRPr>
+            </a:pPr>
+            <a:r>
+              <a:rPr sz="1238" b="1">
+                <a:solidFill>
+                  <a:srgbClr val="222222"/>
+                </a:solidFill>
+                <a:latin typeface="Pretendard"/>
+                <a:ea typeface="Pretendard"/>
+                <a:cs typeface="Pretendard"/>
+              </a:rPr>
+              <a:t>1. 데이터 선정</a:t>
+            </a:r>
+          </a:p>
+          <a:p xmlns:a="http://schemas.openxmlformats.org/drawingml/2006/main">
+            <a:pPr algn="ctr">
+              <a:lnSpc>
+                <a:spcPct val="105000"/>
+              </a:lnSpc>
+              <a:buNone/>
+              <a:defRPr sz="1238">
+                <a:solidFill>
+                  <a:srgbClr val="222222"/>
+                </a:solidFill>
+                <a:latin typeface="Pretendard"/>
+                <a:ea typeface="Pretendard"/>
+                <a:cs typeface="Pretendard"/>
+              </a:defRPr>
+            </a:pPr>
+            <a:r>
+              <a:rPr sz="1238">
+                <a:solidFill>
+                  <a:srgbClr val="222222"/>
+                </a:solidFill>
+                <a:latin typeface="Pretendard"/>
+                <a:ea typeface="Pretendard"/>
+                <a:cs typeface="Pretendard"/>
+              </a:rPr>
+              <a:t>GTFS·BIS 노선 1개</a:t>
+            </a:r>
+          </a:p>
+        </p:txBody>
+      </p:sp>
+      <p:sp>
+        <p:nvSpPr>
+          <p:cNvPr id="6" name="">
+            <a:extLst xmlns:a="http://schemas.openxmlformats.org/drawingml/2006/main">
+              <a:ext uri="{FF2B5EF4-FFF2-40B4-BE49-F238E27FC236}">
+                <a16:creationId xmlns:a16="http://schemas.microsoft.com/office/drawing/2014/main" id="{8D2839E2-1992-4B9D-A9C5-FDA2B6AC9535}"/>
+              </a:ext>
+            </a:extLst>
+          </p:cNvPr>
+          <p:cNvSpPr>
+            <a:spLocks xmlns:a="http://schemas.openxmlformats.org/drawingml/2006/main" noGrp="1"/>
+          </p:cNvSpPr>
+          <p:nvPr/>
+        </p:nvSpPr>
+        <p:spPr>
+          <a:xfrm xmlns:a="http://schemas.openxmlformats.org/drawingml/2006/main">
+            <a:off x="2876550" y="1571625"/>
+            <a:ext cx="1809750" cy="1095375"/>
           </a:xfrm>
           <a:prstGeom xmlns:a="http://schemas.openxmlformats.org/drawingml/2006/main" prst="rect">
             <a:avLst/>
@@ -4097,7 +3970,7 @@
           </a:ln>
         </p:spPr>
         <p:txBody>
-          <a:bodyPr xmlns:a="http://schemas.openxmlformats.org/drawingml/2006/main" lIns="114300" tIns="76200" rIns="114300" bIns="76200" anchor="ctr">
+          <a:bodyPr xmlns:a="http://schemas.openxmlformats.org/drawingml/2006/main" lIns="95250" tIns="66675" rIns="95250" bIns="66675" anchor="ctr">
             <a:noAutofit/>
           </a:bodyPr>
           <a:lstStyle xmlns:a="http://schemas.openxmlformats.org/drawingml/2006/main"/>
@@ -4107,25 +3980,25 @@
                 <a:spcPct val="105000"/>
               </a:lnSpc>
               <a:buNone/>
-              <a:defRPr sz="1275">
-                <a:solidFill>
-                  <a:srgbClr val="222222"/>
-                </a:solidFill>
-                <a:latin typeface="Pretendard"/>
-                <a:ea typeface="Pretendard"/>
-                <a:cs typeface="Pretendard"/>
-              </a:defRPr>
-            </a:pPr>
-            <a:r>
-              <a:rPr sz="1275" b="1">
-                <a:solidFill>
-                  <a:srgbClr val="222222"/>
-                </a:solidFill>
-                <a:latin typeface="Pretendard"/>
-                <a:ea typeface="Pretendard"/>
-                <a:cs typeface="Pretendard"/>
-              </a:rPr>
-              <a:t>GTFS</a:t>
+              <a:defRPr sz="1238">
+                <a:solidFill>
+                  <a:srgbClr val="222222"/>
+                </a:solidFill>
+                <a:latin typeface="Pretendard"/>
+                <a:ea typeface="Pretendard"/>
+                <a:cs typeface="Pretendard"/>
+              </a:defRPr>
+            </a:pPr>
+            <a:r>
+              <a:rPr sz="1238" b="1">
+                <a:solidFill>
+                  <a:srgbClr val="222222"/>
+                </a:solidFill>
+                <a:latin typeface="Pretendard"/>
+                <a:ea typeface="Pretendard"/>
+                <a:cs typeface="Pretendard"/>
+              </a:rPr>
+              <a:t>2. 기본 시뮬레이션</a:t>
             </a:r>
           </a:p>
           <a:p xmlns:a="http://schemas.openxmlformats.org/drawingml/2006/main">
@@ -4134,36 +4007,36 @@
                 <a:spcPct val="105000"/>
               </a:lnSpc>
               <a:buNone/>
-              <a:defRPr sz="1275">
-                <a:solidFill>
-                  <a:srgbClr val="222222"/>
-                </a:solidFill>
-                <a:latin typeface="Pretendard"/>
-                <a:ea typeface="Pretendard"/>
-                <a:cs typeface="Pretendard"/>
-              </a:defRPr>
-            </a:pPr>
-            <a:r>
-              <a:rPr sz="1275">
-                <a:solidFill>
-                  <a:srgbClr val="222222"/>
-                </a:solidFill>
-                <a:latin typeface="Pretendard"/>
-                <a:ea typeface="Pretendard"/>
-                <a:cs typeface="Pretendard"/>
-              </a:rPr>
-              <a:t>노선·정류장 순서
-예정 도착·출발시간</a:t>
-            </a:r>
-          </a:p>
-        </p:txBody>
-      </p:sp>
-      <p:sp>
-        <p:nvSpPr>
-          <p:cNvPr id="6" name="">
+              <a:defRPr sz="1238">
+                <a:solidFill>
+                  <a:srgbClr val="222222"/>
+                </a:solidFill>
+                <a:latin typeface="Pretendard"/>
+                <a:ea typeface="Pretendard"/>
+                <a:cs typeface="Pretendard"/>
+              </a:defRPr>
+            </a:pPr>
+            <a:r>
+              <a:rPr sz="1238">
+                <a:solidFill>
+                  <a:srgbClr val="222222"/>
+                </a:solidFill>
+                <a:latin typeface="Pretendard"/>
+                <a:ea typeface="Pretendard"/>
+                <a:cs typeface="Pretendard"/>
+              </a:rPr>
+              <a:t>버스 약 3대
+충전기 1대</a:t>
+            </a:r>
+          </a:p>
+        </p:txBody>
+      </p:sp>
+      <p:sp>
+        <p:nvSpPr>
+          <p:cNvPr id="7" name="">
             <a:extLst xmlns:a="http://schemas.openxmlformats.org/drawingml/2006/main">
               <a:ext uri="{FF2B5EF4-FFF2-40B4-BE49-F238E27FC236}">
-                <a16:creationId xmlns:a16="http://schemas.microsoft.com/office/drawing/2014/main" id="{8CEBD61D-55CB-4F31-AA97-09B955641476}"/>
+                <a16:creationId xmlns:a16="http://schemas.microsoft.com/office/drawing/2014/main" id="{94D8281E-532A-4ED6-B091-814D44A861AB}"/>
               </a:ext>
             </a:extLst>
           </p:cNvPr>
@@ -4174,8 +4047,8 @@
         </p:nvSpPr>
         <p:spPr>
           <a:xfrm xmlns:a="http://schemas.openxmlformats.org/drawingml/2006/main">
-            <a:off x="685800" y="2914650"/>
-            <a:ext cx="2857500" cy="1066800"/>
+            <a:off x="5067300" y="1571625"/>
+            <a:ext cx="1809750" cy="1095375"/>
           </a:xfrm>
           <a:prstGeom xmlns:a="http://schemas.openxmlformats.org/drawingml/2006/main" prst="rect">
             <a:avLst/>
@@ -4191,7 +4064,7 @@
           </a:ln>
         </p:spPr>
         <p:txBody>
-          <a:bodyPr xmlns:a="http://schemas.openxmlformats.org/drawingml/2006/main" lIns="114300" tIns="76200" rIns="114300" bIns="76200" anchor="ctr">
+          <a:bodyPr xmlns:a="http://schemas.openxmlformats.org/drawingml/2006/main" lIns="95250" tIns="66675" rIns="95250" bIns="66675" anchor="ctr">
             <a:noAutofit/>
           </a:bodyPr>
           <a:lstStyle xmlns:a="http://schemas.openxmlformats.org/drawingml/2006/main"/>
@@ -4201,25 +4074,25 @@
                 <a:spcPct val="105000"/>
               </a:lnSpc>
               <a:buNone/>
-              <a:defRPr sz="1275">
-                <a:solidFill>
-                  <a:srgbClr val="222222"/>
-                </a:solidFill>
-                <a:latin typeface="Pretendard"/>
-                <a:ea typeface="Pretendard"/>
-                <a:cs typeface="Pretendard"/>
-              </a:defRPr>
-            </a:pPr>
-            <a:r>
-              <a:rPr sz="1275" b="1">
-                <a:solidFill>
-                  <a:srgbClr val="222222"/>
-                </a:solidFill>
-                <a:latin typeface="Pretendard"/>
-                <a:ea typeface="Pretendard"/>
-                <a:cs typeface="Pretendard"/>
-              </a:rPr>
-              <a:t>BIS</a:t>
+              <a:defRPr sz="1238">
+                <a:solidFill>
+                  <a:srgbClr val="222222"/>
+                </a:solidFill>
+                <a:latin typeface="Pretendard"/>
+                <a:ea typeface="Pretendard"/>
+                <a:cs typeface="Pretendard"/>
+              </a:defRPr>
+            </a:pPr>
+            <a:r>
+              <a:rPr sz="1238" b="1">
+                <a:solidFill>
+                  <a:srgbClr val="222222"/>
+                </a:solidFill>
+                <a:latin typeface="Pretendard"/>
+                <a:ea typeface="Pretendard"/>
+                <a:cs typeface="Pretendard"/>
+              </a:rPr>
+              <a:t>3. 기준 충전 방법</a:t>
             </a:r>
           </a:p>
           <a:p xmlns:a="http://schemas.openxmlformats.org/drawingml/2006/main">
@@ -4228,36 +4101,35 @@
                 <a:spcPct val="105000"/>
               </a:lnSpc>
               <a:buNone/>
-              <a:defRPr sz="1275">
-                <a:solidFill>
-                  <a:srgbClr val="222222"/>
-                </a:solidFill>
-                <a:latin typeface="Pretendard"/>
-                <a:ea typeface="Pretendard"/>
-                <a:cs typeface="Pretendard"/>
-              </a:defRPr>
-            </a:pPr>
-            <a:r>
-              <a:rPr sz="1275">
-                <a:solidFill>
-                  <a:srgbClr val="222222"/>
-                </a:solidFill>
-                <a:latin typeface="Pretendard"/>
-                <a:ea typeface="Pretendard"/>
-                <a:cs typeface="Pretendard"/>
-              </a:rPr>
-              <a:t>실제 정류장 사이 이동시간
-예정 운행과 실제 운행 차이</a:t>
-            </a:r>
-          </a:p>
-        </p:txBody>
-      </p:sp>
-      <p:sp>
-        <p:nvSpPr>
-          <p:cNvPr id="7" name="">
+              <a:defRPr sz="1238">
+                <a:solidFill>
+                  <a:srgbClr val="222222"/>
+                </a:solidFill>
+                <a:latin typeface="Pretendard"/>
+                <a:ea typeface="Pretendard"/>
+                <a:cs typeface="Pretendard"/>
+              </a:defRPr>
+            </a:pPr>
+            <a:r>
+              <a:rPr sz="1238">
+                <a:solidFill>
+                  <a:srgbClr val="222222"/>
+                </a:solidFill>
+                <a:latin typeface="Pretendard"/>
+                <a:ea typeface="Pretendard"/>
+                <a:cs typeface="Pretendard"/>
+              </a:rPr>
+              <a:t>도착 즉시 충전</a:t>
+            </a:r>
+          </a:p>
+        </p:txBody>
+      </p:sp>
+      <p:sp>
+        <p:nvSpPr>
+          <p:cNvPr id="8" name="">
             <a:extLst xmlns:a="http://schemas.openxmlformats.org/drawingml/2006/main">
               <a:ext uri="{FF2B5EF4-FFF2-40B4-BE49-F238E27FC236}">
-                <a16:creationId xmlns:a16="http://schemas.microsoft.com/office/drawing/2014/main" id="{296FA208-A8C3-4AC5-BD90-C12FD2314ADB}"/>
+                <a16:creationId xmlns:a16="http://schemas.microsoft.com/office/drawing/2014/main" id="{85FC06BE-97A6-43F3-A54B-059EB7BB2167}"/>
               </a:ext>
             </a:extLst>
           </p:cNvPr>
@@ -4268,103 +4140,8 @@
         </p:nvSpPr>
         <p:spPr>
           <a:xfrm xmlns:a="http://schemas.openxmlformats.org/drawingml/2006/main">
-            <a:off x="4667250" y="2000250"/>
-            <a:ext cx="2857500" cy="1524000"/>
-          </a:xfrm>
-          <a:prstGeom xmlns:a="http://schemas.openxmlformats.org/drawingml/2006/main" prst="rect">
-            <a:avLst/>
-          </a:prstGeom>
-          <a:solidFill xmlns:a="http://schemas.openxmlformats.org/drawingml/2006/main">
-            <a:srgbClr val="F2F2F2"/>
-          </a:solidFill>
-          <a:ln xmlns:a="http://schemas.openxmlformats.org/drawingml/2006/main" w="15240">
-            <a:solidFill>
-              <a:srgbClr val="000000"/>
-            </a:solidFill>
-            <a:prstDash val="solid"/>
-          </a:ln>
-        </p:spPr>
-        <p:txBody>
-          <a:bodyPr xmlns:a="http://schemas.openxmlformats.org/drawingml/2006/main" lIns="114300" tIns="76200" rIns="114300" bIns="76200" anchor="ctr">
-            <a:noAutofit/>
-          </a:bodyPr>
-          <a:lstStyle xmlns:a="http://schemas.openxmlformats.org/drawingml/2006/main"/>
-          <a:p xmlns:a="http://schemas.openxmlformats.org/drawingml/2006/main">
-            <a:pPr algn="ctr">
-              <a:lnSpc>
-                <a:spcPct val="105000"/>
-              </a:lnSpc>
-              <a:buNone/>
-              <a:defRPr sz="1275">
-                <a:solidFill>
-                  <a:srgbClr val="222222"/>
-                </a:solidFill>
-                <a:latin typeface="Pretendard"/>
-                <a:ea typeface="Pretendard"/>
-                <a:cs typeface="Pretendard"/>
-              </a:defRPr>
-            </a:pPr>
-            <a:r>
-              <a:rPr sz="1275" b="1">
-                <a:solidFill>
-                  <a:srgbClr val="222222"/>
-                </a:solidFill>
-                <a:latin typeface="Pretendard"/>
-                <a:ea typeface="Pretendard"/>
-                <a:cs typeface="Pretendard"/>
-              </a:rPr>
-              <a:t>DTUMOS Energy 시험 구현</a:t>
-            </a:r>
-          </a:p>
-          <a:p xmlns:a="http://schemas.openxmlformats.org/drawingml/2006/main">
-            <a:pPr algn="ctr">
-              <a:lnSpc>
-                <a:spcPct val="105000"/>
-              </a:lnSpc>
-              <a:buNone/>
-              <a:defRPr sz="1275">
-                <a:solidFill>
-                  <a:srgbClr val="222222"/>
-                </a:solidFill>
-                <a:latin typeface="Pretendard"/>
-                <a:ea typeface="Pretendard"/>
-                <a:cs typeface="Pretendard"/>
-              </a:defRPr>
-            </a:pPr>
-            <a:r>
-              <a:rPr sz="1275">
-                <a:solidFill>
-                  <a:srgbClr val="222222"/>
-                </a:solidFill>
-                <a:latin typeface="Pretendard"/>
-                <a:ea typeface="Pretendard"/>
-                <a:cs typeface="Pretendard"/>
-              </a:rPr>
-              <a:t>같은 차량의 연속 운행
-배터리 감소
-공유 충전기 대기·충전</a:t>
-            </a:r>
-          </a:p>
-        </p:txBody>
-      </p:sp>
-      <p:sp>
-        <p:nvSpPr>
-          <p:cNvPr id="8" name="">
-            <a:extLst xmlns:a="http://schemas.openxmlformats.org/drawingml/2006/main">
-              <a:ext uri="{FF2B5EF4-FFF2-40B4-BE49-F238E27FC236}">
-                <a16:creationId xmlns:a16="http://schemas.microsoft.com/office/drawing/2014/main" id="{2A92C93D-7A25-4EDA-98C3-94BF202EB2C9}"/>
-              </a:ext>
-            </a:extLst>
-          </p:cNvPr>
-          <p:cNvSpPr>
-            <a:spLocks xmlns:a="http://schemas.openxmlformats.org/drawingml/2006/main" noGrp="1"/>
-          </p:cNvSpPr>
-          <p:nvPr/>
-        </p:nvSpPr>
-        <p:spPr>
-          <a:xfrm xmlns:a="http://schemas.openxmlformats.org/drawingml/2006/main">
-            <a:off x="8648700" y="2000250"/>
-            <a:ext cx="2857500" cy="1524000"/>
+            <a:off x="7258050" y="1571625"/>
+            <a:ext cx="1809750" cy="1095375"/>
           </a:xfrm>
           <a:prstGeom xmlns:a="http://schemas.openxmlformats.org/drawingml/2006/main" prst="rect">
             <a:avLst/>
@@ -4380,7 +4157,7 @@
           </a:ln>
         </p:spPr>
         <p:txBody>
-          <a:bodyPr xmlns:a="http://schemas.openxmlformats.org/drawingml/2006/main" lIns="114300" tIns="76200" rIns="114300" bIns="76200" anchor="ctr">
+          <a:bodyPr xmlns:a="http://schemas.openxmlformats.org/drawingml/2006/main" lIns="95250" tIns="66675" rIns="95250" bIns="66675" anchor="ctr">
             <a:noAutofit/>
           </a:bodyPr>
           <a:lstStyle xmlns:a="http://schemas.openxmlformats.org/drawingml/2006/main"/>
@@ -4390,25 +4167,25 @@
                 <a:spcPct val="105000"/>
               </a:lnSpc>
               <a:buNone/>
-              <a:defRPr sz="1275">
-                <a:solidFill>
-                  <a:srgbClr val="222222"/>
-                </a:solidFill>
-                <a:latin typeface="Pretendard"/>
-                <a:ea typeface="Pretendard"/>
-                <a:cs typeface="Pretendard"/>
-              </a:defRPr>
-            </a:pPr>
-            <a:r>
-              <a:rPr sz="1275" b="1">
-                <a:solidFill>
-                  <a:srgbClr val="222222"/>
-                </a:solidFill>
-                <a:latin typeface="Pretendard"/>
-                <a:ea typeface="Pretendard"/>
-                <a:cs typeface="Pretendard"/>
-              </a:rPr>
-              <a:t>비교 결과</a:t>
+              <a:defRPr sz="1238">
+                <a:solidFill>
+                  <a:srgbClr val="222222"/>
+                </a:solidFill>
+                <a:latin typeface="Pretendard"/>
+                <a:ea typeface="Pretendard"/>
+                <a:cs typeface="Pretendard"/>
+              </a:defRPr>
+            </a:pPr>
+            <a:r>
+              <a:rPr sz="1238" b="1">
+                <a:solidFill>
+                  <a:srgbClr val="222222"/>
+                </a:solidFill>
+                <a:latin typeface="Pretendard"/>
+                <a:ea typeface="Pretendard"/>
+                <a:cs typeface="Pretendard"/>
+              </a:rPr>
+              <a:t>4. 비교 방법</a:t>
             </a:r>
           </a:p>
           <a:p xmlns:a="http://schemas.openxmlformats.org/drawingml/2006/main">
@@ -4417,49 +4194,141 @@
                 <a:spcPct val="105000"/>
               </a:lnSpc>
               <a:buNone/>
-              <a:defRPr sz="1275">
-                <a:solidFill>
-                  <a:srgbClr val="222222"/>
-                </a:solidFill>
-                <a:latin typeface="Pretendard"/>
-                <a:ea typeface="Pretendard"/>
-                <a:cs typeface="Pretendard"/>
-              </a:defRPr>
-            </a:pPr>
-            <a:r>
-              <a:rPr sz="1275">
-                <a:solidFill>
-                  <a:srgbClr val="222222"/>
-                </a:solidFill>
-                <a:latin typeface="Pretendard"/>
-                <a:ea typeface="Pretendard"/>
-                <a:cs typeface="Pretendard"/>
-              </a:rPr>
-              <a:t>출발 지연과 지연 전파
-충전 대기·배터리 부족
-필요한 충전기 수·출력</a:t>
+              <a:defRPr sz="1238">
+                <a:solidFill>
+                  <a:srgbClr val="222222"/>
+                </a:solidFill>
+                <a:latin typeface="Pretendard"/>
+                <a:ea typeface="Pretendard"/>
+                <a:cs typeface="Pretendard"/>
+              </a:defRPr>
+            </a:pPr>
+            <a:r>
+              <a:rPr sz="1238">
+                <a:solidFill>
+                  <a:srgbClr val="222222"/>
+                </a:solidFill>
+                <a:latin typeface="Pretendard"/>
+                <a:ea typeface="Pretendard"/>
+                <a:cs typeface="Pretendard"/>
+              </a:rPr>
+              <a:t>다음 출발시간 우선</a:t>
+            </a:r>
+          </a:p>
+        </p:txBody>
+      </p:sp>
+      <p:sp>
+        <p:nvSpPr>
+          <p:cNvPr id="9" name="">
+            <a:extLst xmlns:a="http://schemas.openxmlformats.org/drawingml/2006/main">
+              <a:ext uri="{FF2B5EF4-FFF2-40B4-BE49-F238E27FC236}">
+                <a16:creationId xmlns:a16="http://schemas.microsoft.com/office/drawing/2014/main" id="{4E055AC4-766D-42CB-827B-2574F90775B6}"/>
+              </a:ext>
+            </a:extLst>
+          </p:cNvPr>
+          <p:cNvSpPr>
+            <a:spLocks xmlns:a="http://schemas.openxmlformats.org/drawingml/2006/main" noGrp="1"/>
+          </p:cNvSpPr>
+          <p:nvPr/>
+        </p:nvSpPr>
+        <p:spPr>
+          <a:xfrm xmlns:a="http://schemas.openxmlformats.org/drawingml/2006/main">
+            <a:off x="9448800" y="1571625"/>
+            <a:ext cx="1809750" cy="1095375"/>
+          </a:xfrm>
+          <a:prstGeom xmlns:a="http://schemas.openxmlformats.org/drawingml/2006/main" prst="rect">
+            <a:avLst/>
+          </a:prstGeom>
+          <a:solidFill xmlns:a="http://schemas.openxmlformats.org/drawingml/2006/main">
+            <a:srgbClr val="FFFFFF"/>
+          </a:solidFill>
+          <a:ln xmlns:a="http://schemas.openxmlformats.org/drawingml/2006/main" w="9525">
+            <a:solidFill>
+              <a:srgbClr val="B8B8B8"/>
+            </a:solidFill>
+            <a:prstDash val="solid"/>
+          </a:ln>
+        </p:spPr>
+        <p:txBody>
+          <a:bodyPr xmlns:a="http://schemas.openxmlformats.org/drawingml/2006/main" lIns="95250" tIns="66675" rIns="95250" bIns="66675" anchor="ctr">
+            <a:noAutofit/>
+          </a:bodyPr>
+          <a:lstStyle xmlns:a="http://schemas.openxmlformats.org/drawingml/2006/main"/>
+          <a:p xmlns:a="http://schemas.openxmlformats.org/drawingml/2006/main">
+            <a:pPr algn="ctr">
+              <a:lnSpc>
+                <a:spcPct val="105000"/>
+              </a:lnSpc>
+              <a:buNone/>
+              <a:defRPr sz="1238">
+                <a:solidFill>
+                  <a:srgbClr val="222222"/>
+                </a:solidFill>
+                <a:latin typeface="Pretendard"/>
+                <a:ea typeface="Pretendard"/>
+                <a:cs typeface="Pretendard"/>
+              </a:defRPr>
+            </a:pPr>
+            <a:r>
+              <a:rPr sz="1238" b="1">
+                <a:solidFill>
+                  <a:srgbClr val="222222"/>
+                </a:solidFill>
+                <a:latin typeface="Pretendard"/>
+                <a:ea typeface="Pretendard"/>
+                <a:cs typeface="Pretendard"/>
+              </a:rPr>
+              <a:t>5. 결과 해석</a:t>
+            </a:r>
+          </a:p>
+          <a:p xmlns:a="http://schemas.openxmlformats.org/drawingml/2006/main">
+            <a:pPr algn="ctr">
+              <a:lnSpc>
+                <a:spcPct val="105000"/>
+              </a:lnSpc>
+              <a:buNone/>
+              <a:defRPr sz="1238">
+                <a:solidFill>
+                  <a:srgbClr val="222222"/>
+                </a:solidFill>
+                <a:latin typeface="Pretendard"/>
+                <a:ea typeface="Pretendard"/>
+                <a:cs typeface="Pretendard"/>
+              </a:defRPr>
+            </a:pPr>
+            <a:r>
+              <a:rPr sz="1238">
+                <a:solidFill>
+                  <a:srgbClr val="222222"/>
+                </a:solidFill>
+                <a:latin typeface="Pretendard"/>
+                <a:ea typeface="Pretendard"/>
+                <a:cs typeface="Pretendard"/>
+              </a:rPr>
+              <a:t>지연이 생긴 이유와
+줄어든 조건 확인</a:t>
             </a:r>
           </a:p>
         </p:txBody>
       </p:sp>
       <p:cxnSp>
         <p:nvCxnSpPr>
-          <p:cNvPr id="22" name=""/>
+          <p:cNvPr id="27" name=""/>
           <p:cNvCxnSpPr>
             <a:stCxn xmlns:a="http://schemas.openxmlformats.org/drawingml/2006/main" id="5" idx="3"/>
-            <a:endCxn xmlns:a="http://schemas.openxmlformats.org/drawingml/2006/main" id="7" idx="1"/>
+            <a:endCxn xmlns:a="http://schemas.openxmlformats.org/drawingml/2006/main" id="6" idx="1"/>
           </p:cNvCxnSpPr>
           <p:nvPr/>
         </p:nvCxnSpPr>
         <p:spPr>
           <a:xfrm xmlns:a="http://schemas.openxmlformats.org/drawingml/2006/main">
-            <a:off x="3543300" y="2019300"/>
-            <a:ext cx="1123950" cy="742950"/>
+            <a:off x="2495550" y="2119313"/>
+            <a:ext cx="381000" cy="0"/>
           </a:xfrm>
           <a:prstGeom xmlns:a="http://schemas.openxmlformats.org/drawingml/2006/main" prst="straightConnector1">
             <a:avLst/>
           </a:prstGeom>
-          <a:ln xmlns:a="http://schemas.openxmlformats.org/drawingml/2006/main" w="13335">
+          <a:ln xmlns:a="http://schemas.openxmlformats.org/drawingml/2006/main" w="12383">
             <a:solidFill>
               <a:srgbClr val="666666"/>
             </a:solidFill>
@@ -4470,7 +4339,7 @@
       </p:cxnSp>
       <p:cxnSp>
         <p:nvCxnSpPr>
-          <p:cNvPr id="23" name=""/>
+          <p:cNvPr id="28" name=""/>
           <p:cNvCxnSpPr>
             <a:stCxn xmlns:a="http://schemas.openxmlformats.org/drawingml/2006/main" id="6" idx="3"/>
             <a:endCxn xmlns:a="http://schemas.openxmlformats.org/drawingml/2006/main" id="7" idx="1"/>
@@ -4478,14 +4347,14 @@
           <p:nvPr/>
         </p:nvCxnSpPr>
         <p:spPr>
-          <a:xfrm xmlns:a="http://schemas.openxmlformats.org/drawingml/2006/main" flipV="1">
-            <a:off x="3543300" y="2762250"/>
-            <a:ext cx="1123950" cy="685800"/>
+          <a:xfrm xmlns:a="http://schemas.openxmlformats.org/drawingml/2006/main">
+            <a:off x="4686300" y="2119313"/>
+            <a:ext cx="381000" cy="0"/>
           </a:xfrm>
           <a:prstGeom xmlns:a="http://schemas.openxmlformats.org/drawingml/2006/main" prst="straightConnector1">
             <a:avLst/>
           </a:prstGeom>
-          <a:ln xmlns:a="http://schemas.openxmlformats.org/drawingml/2006/main" w="13335">
+          <a:ln xmlns:a="http://schemas.openxmlformats.org/drawingml/2006/main" w="12383">
             <a:solidFill>
               <a:srgbClr val="666666"/>
             </a:solidFill>
@@ -4496,7 +4365,7 @@
       </p:cxnSp>
       <p:cxnSp>
         <p:nvCxnSpPr>
-          <p:cNvPr id="24" name=""/>
+          <p:cNvPr id="29" name=""/>
           <p:cNvCxnSpPr>
             <a:stCxn xmlns:a="http://schemas.openxmlformats.org/drawingml/2006/main" id="7" idx="3"/>
             <a:endCxn xmlns:a="http://schemas.openxmlformats.org/drawingml/2006/main" id="8" idx="1"/>
@@ -4505,13 +4374,13 @@
         </p:nvCxnSpPr>
         <p:spPr>
           <a:xfrm xmlns:a="http://schemas.openxmlformats.org/drawingml/2006/main">
-            <a:off x="7524750" y="2762250"/>
-            <a:ext cx="1123950" cy="0"/>
+            <a:off x="6877050" y="2119313"/>
+            <a:ext cx="381000" cy="0"/>
           </a:xfrm>
           <a:prstGeom xmlns:a="http://schemas.openxmlformats.org/drawingml/2006/main" prst="straightConnector1">
             <a:avLst/>
           </a:prstGeom>
-          <a:ln xmlns:a="http://schemas.openxmlformats.org/drawingml/2006/main" w="13335">
+          <a:ln xmlns:a="http://schemas.openxmlformats.org/drawingml/2006/main" w="12383">
             <a:solidFill>
               <a:srgbClr val="666666"/>
             </a:solidFill>
@@ -4520,12 +4389,38 @@
           </a:ln>
         </p:spPr>
       </p:cxnSp>
-      <p:sp>
-        <p:nvSpPr>
-          <p:cNvPr id="12" name="">
+      <p:cxnSp>
+        <p:nvCxnSpPr>
+          <p:cNvPr id="30" name=""/>
+          <p:cNvCxnSpPr>
+            <a:stCxn xmlns:a="http://schemas.openxmlformats.org/drawingml/2006/main" id="8" idx="3"/>
+            <a:endCxn xmlns:a="http://schemas.openxmlformats.org/drawingml/2006/main" id="9" idx="1"/>
+          </p:cNvCxnSpPr>
+          <p:nvPr/>
+        </p:nvCxnSpPr>
+        <p:spPr>
+          <a:xfrm xmlns:a="http://schemas.openxmlformats.org/drawingml/2006/main">
+            <a:off x="9067800" y="2119313"/>
+            <a:ext cx="381000" cy="0"/>
+          </a:xfrm>
+          <a:prstGeom xmlns:a="http://schemas.openxmlformats.org/drawingml/2006/main" prst="straightConnector1">
+            <a:avLst/>
+          </a:prstGeom>
+          <a:ln xmlns:a="http://schemas.openxmlformats.org/drawingml/2006/main" w="12383">
+            <a:solidFill>
+              <a:srgbClr val="666666"/>
+            </a:solidFill>
+            <a:prstDash val="solid"/>
+            <a:tailEnd type="arrow" w="sm" len="sm"/>
+          </a:ln>
+        </p:spPr>
+      </p:cxnSp>
+      <p:sp>
+        <p:nvSpPr>
+          <p:cNvPr id="14" name="">
             <a:extLst xmlns:a="http://schemas.openxmlformats.org/drawingml/2006/main">
               <a:ext uri="{FF2B5EF4-FFF2-40B4-BE49-F238E27FC236}">
-                <a16:creationId xmlns:a16="http://schemas.microsoft.com/office/drawing/2014/main" id="{C853C6A3-91C6-4CD9-A427-9AC8A61E82A0}"/>
+                <a16:creationId xmlns:a16="http://schemas.microsoft.com/office/drawing/2014/main" id="{589EFEFD-3442-4D64-8388-3D49E287E179}"/>
               </a:ext>
             </a:extLst>
           </p:cNvPr>
@@ -4536,8 +4431,100 @@
         </p:nvSpPr>
         <p:spPr>
           <a:xfrm xmlns:a="http://schemas.openxmlformats.org/drawingml/2006/main">
-            <a:off x="685800" y="4591050"/>
-            <a:ext cx="1809750" cy="257175"/>
+            <a:off x="685800" y="3038475"/>
+            <a:ext cx="10820400" cy="361950"/>
+          </a:xfrm>
+          <a:prstGeom xmlns:a="http://schemas.openxmlformats.org/drawingml/2006/main" prst="rect">
+            <a:avLst/>
+          </a:prstGeom>
+          <a:noFill xmlns:a="http://schemas.openxmlformats.org/drawingml/2006/main"/>
+          <a:ln xmlns:a="http://schemas.openxmlformats.org/drawingml/2006/main" w="0">
+            <a:noFill/>
+          </a:ln>
+        </p:spPr>
+        <p:txBody>
+          <a:bodyPr xmlns:a="http://schemas.openxmlformats.org/drawingml/2006/main" wrap="square" lIns="0" tIns="0" rIns="0" bIns="0" anchor="ctr">
+            <a:noAutofit/>
+          </a:bodyPr>
+          <a:lstStyle xmlns:a="http://schemas.openxmlformats.org/drawingml/2006/main"/>
+          <a:p xmlns:a="http://schemas.openxmlformats.org/drawingml/2006/main">
+            <a:pPr algn="ctr">
+              <a:lnSpc>
+                <a:spcPct val="108000"/>
+              </a:lnSpc>
+              <a:buNone/>
+              <a:defRPr sz="1500" b="1">
+                <a:solidFill>
+                  <a:srgbClr val="222222"/>
+                </a:solidFill>
+                <a:latin typeface="Pretendard Medium"/>
+                <a:ea typeface="Pretendard Medium"/>
+                <a:cs typeface="Pretendard Medium"/>
+              </a:defRPr>
+            </a:pPr>
+            <a:r>
+              <a:rPr sz="1500" b="1">
+                <a:solidFill>
+                  <a:srgbClr val="222222"/>
+                </a:solidFill>
+                <a:latin typeface="Pretendard Medium"/>
+                <a:ea typeface="Pretendard Medium"/>
+                <a:cs typeface="Pretendard Medium"/>
+              </a:rPr>
+              <a:t>첫 결과에서 부족한 점을 찾으면 다시 선행연구와 연구 질문을 확인</a:t>
+            </a:r>
+          </a:p>
+        </p:txBody>
+      </p:sp>
+      <p:sp>
+        <p:nvSpPr>
+          <p:cNvPr id="15" name="">
+            <a:extLst xmlns:a="http://schemas.openxmlformats.org/drawingml/2006/main">
+              <a:ext uri="{FF2B5EF4-FFF2-40B4-BE49-F238E27FC236}">
+                <a16:creationId xmlns:a16="http://schemas.microsoft.com/office/drawing/2014/main" id="{399B5D90-6CD2-4696-94E0-1ADCF5EFAF93}"/>
+              </a:ext>
+            </a:extLst>
+          </p:cNvPr>
+          <p:cNvSpPr>
+            <a:spLocks xmlns:a="http://schemas.openxmlformats.org/drawingml/2006/main" noGrp="1"/>
+          </p:cNvSpPr>
+          <p:nvPr/>
+        </p:nvSpPr>
+        <p:spPr>
+          <a:xfrm xmlns:a="http://schemas.openxmlformats.org/drawingml/2006/main">
+            <a:off x="685800" y="3676650"/>
+            <a:ext cx="10820400" cy="0"/>
+          </a:xfrm>
+          <a:prstGeom xmlns:a="http://schemas.openxmlformats.org/drawingml/2006/main" prst="line">
+            <a:avLst/>
+          </a:prstGeom>
+          <a:noFill xmlns:a="http://schemas.openxmlformats.org/drawingml/2006/main"/>
+          <a:ln xmlns:a="http://schemas.openxmlformats.org/drawingml/2006/main" w="9525">
+            <a:solidFill>
+              <a:srgbClr val="B8B8B8"/>
+            </a:solidFill>
+            <a:prstDash val="solid"/>
+          </a:ln>
+        </p:spPr>
+      </p:sp>
+      <p:sp>
+        <p:nvSpPr>
+          <p:cNvPr id="16" name="">
+            <a:extLst xmlns:a="http://schemas.openxmlformats.org/drawingml/2006/main">
+              <a:ext uri="{FF2B5EF4-FFF2-40B4-BE49-F238E27FC236}">
+                <a16:creationId xmlns:a16="http://schemas.microsoft.com/office/drawing/2014/main" id="{ED281928-CECB-488E-836E-77904C7762D8}"/>
+              </a:ext>
+            </a:extLst>
+          </p:cNvPr>
+          <p:cNvSpPr>
+            <a:spLocks xmlns:a="http://schemas.openxmlformats.org/drawingml/2006/main" noGrp="1"/>
+          </p:cNvSpPr>
+          <p:nvPr/>
+        </p:nvSpPr>
+        <p:spPr>
+          <a:xfrm xmlns:a="http://schemas.openxmlformats.org/drawingml/2006/main">
+            <a:off x="685800" y="4029075"/>
+            <a:ext cx="3429000" cy="285750"/>
           </a:xfrm>
           <a:prstGeom xmlns:a="http://schemas.openxmlformats.org/drawingml/2006/main" prst="rect">
             <a:avLst/>
@@ -4558,7 +4545,7 @@
                 <a:spcPct val="108000"/>
               </a:lnSpc>
               <a:buNone/>
-              <a:defRPr sz="1425" b="1">
+              <a:defRPr sz="1500" b="1">
                 <a:solidFill>
                   <a:srgbClr val="222222"/>
                 </a:solidFill>
@@ -4568,7 +4555,7 @@
               </a:defRPr>
             </a:pPr>
             <a:r>
-              <a:rPr sz="1425" b="1">
+              <a:rPr sz="1500" b="1">
                 <a:solidFill>
                   <a:srgbClr val="222222"/>
                 </a:solidFill>
@@ -4576,17 +4563,17 @@
                 <a:ea typeface="Pretendard Medium"/>
                 <a:cs typeface="Pretendard Medium"/>
               </a:rPr>
-              <a:t>첫 번째 실행 범위</a:t>
-            </a:r>
-          </a:p>
-        </p:txBody>
-      </p:sp>
-      <p:sp>
-        <p:nvSpPr>
-          <p:cNvPr id="13" name="">
+              <a:t>이 계획에서 아직 정하지 못한 것</a:t>
+            </a:r>
+          </a:p>
+        </p:txBody>
+      </p:sp>
+      <p:sp>
+        <p:nvSpPr>
+          <p:cNvPr id="17" name="">
             <a:extLst xmlns:a="http://schemas.openxmlformats.org/drawingml/2006/main">
               <a:ext uri="{FF2B5EF4-FFF2-40B4-BE49-F238E27FC236}">
-                <a16:creationId xmlns:a16="http://schemas.microsoft.com/office/drawing/2014/main" id="{8FABE928-2938-4F4C-9156-03F12044F364}"/>
+                <a16:creationId xmlns:a16="http://schemas.microsoft.com/office/drawing/2014/main" id="{96E30252-FD1B-4226-A9A0-25C0C5B1A60E}"/>
               </a:ext>
             </a:extLst>
           </p:cNvPr>
@@ -4597,8 +4584,8 @@
         </p:nvSpPr>
         <p:spPr>
           <a:xfrm xmlns:a="http://schemas.openxmlformats.org/drawingml/2006/main">
-            <a:off x="685800" y="4953000"/>
-            <a:ext cx="10820400" cy="1000125"/>
+            <a:off x="685800" y="4438650"/>
+            <a:ext cx="10820400" cy="1466850"/>
           </a:xfrm>
           <a:prstGeom xmlns:a="http://schemas.openxmlformats.org/drawingml/2006/main" prst="rect">
             <a:avLst/>
@@ -4619,39 +4606,39 @@
                 <a:spcPct val="107000"/>
               </a:lnSpc>
               <a:spcAft>
-                <a:spcPts val="800"/>
+                <a:spcPts val="900"/>
               </a:spcAft>
               <a:buNone/>
-              <a:defRPr sz="1350" b="0">
-                <a:solidFill>
-                  <a:srgbClr val="222222"/>
-                </a:solidFill>
-                <a:latin typeface="Pretendard"/>
-                <a:ea typeface="Pretendard"/>
-                <a:cs typeface="Pretendard"/>
-              </a:defRPr>
-            </a:pPr>
-            <a:r>
-              <a:rPr sz="1350" b="1">
-                <a:solidFill>
-                  <a:srgbClr val="222222"/>
-                </a:solidFill>
-                <a:latin typeface="Pretendard"/>
-                <a:ea typeface="Pretendard"/>
-                <a:cs typeface="Pretendard"/>
-              </a:rPr>
-              <a:t>작게 시작: </a:t>
-            </a:r>
-            <a:r>
-              <a:rPr sz="1350">
-                <a:solidFill>
-                  <a:srgbClr val="222222"/>
-                </a:solidFill>
-                <a:latin typeface="Pretendard"/>
-                <a:ea typeface="Pretendard"/>
-                <a:cs typeface="Pretendard"/>
-              </a:rPr>
-              <a:t>노선 1개 · 버스 약 3대 · 차고지 1곳 · 공유 충전기 1대</a:t>
+              <a:defRPr sz="1388" b="0">
+                <a:solidFill>
+                  <a:srgbClr val="222222"/>
+                </a:solidFill>
+                <a:latin typeface="Pretendard"/>
+                <a:ea typeface="Pretendard"/>
+                <a:cs typeface="Pretendard"/>
+              </a:defRPr>
+            </a:pPr>
+            <a:r>
+              <a:rPr sz="1388" b="1">
+                <a:solidFill>
+                  <a:srgbClr val="222222"/>
+                </a:solidFill>
+                <a:latin typeface="Pretendard"/>
+                <a:ea typeface="Pretendard"/>
+                <a:cs typeface="Pretendard"/>
+              </a:rPr>
+              <a:t>데이터: </a:t>
+            </a:r>
+            <a:r>
+              <a:rPr sz="1388">
+                <a:solidFill>
+                  <a:srgbClr val="222222"/>
+                </a:solidFill>
+                <a:latin typeface="Pretendard"/>
+                <a:ea typeface="Pretendard"/>
+                <a:cs typeface="Pretendard"/>
+              </a:rPr>
+              <a:t>사용할 서울시 노선, 기간, GTFS와 BIS의 연결 기준</a:t>
             </a:r>
           </a:p>
           <a:p xmlns:a="http://schemas.openxmlformats.org/drawingml/2006/main">
@@ -4660,39 +4647,39 @@
                 <a:spcPct val="107000"/>
               </a:lnSpc>
               <a:spcAft>
-                <a:spcPts val="800"/>
+                <a:spcPts val="900"/>
               </a:spcAft>
               <a:buNone/>
-              <a:defRPr sz="1350" b="0">
-                <a:solidFill>
-                  <a:srgbClr val="222222"/>
-                </a:solidFill>
-                <a:latin typeface="Pretendard"/>
-                <a:ea typeface="Pretendard"/>
-                <a:cs typeface="Pretendard"/>
-              </a:defRPr>
-            </a:pPr>
-            <a:r>
-              <a:rPr sz="1350" b="1">
-                <a:solidFill>
-                  <a:srgbClr val="222222"/>
-                </a:solidFill>
-                <a:latin typeface="Pretendard"/>
-                <a:ea typeface="Pretendard"/>
-                <a:cs typeface="Pretendard"/>
-              </a:rPr>
-              <a:t>첫 비교: </a:t>
-            </a:r>
-            <a:r>
-              <a:rPr sz="1350">
-                <a:solidFill>
-                  <a:srgbClr val="222222"/>
-                </a:solidFill>
-                <a:latin typeface="Pretendard"/>
-                <a:ea typeface="Pretendard"/>
-                <a:cs typeface="Pretendard"/>
-              </a:rPr>
-              <a:t>도착 즉시 충전 vs 다음 출발시간이 가까운 버스 우선 충전</a:t>
+              <a:defRPr sz="1388" b="0">
+                <a:solidFill>
+                  <a:srgbClr val="222222"/>
+                </a:solidFill>
+                <a:latin typeface="Pretendard"/>
+                <a:ea typeface="Pretendard"/>
+                <a:cs typeface="Pretendard"/>
+              </a:defRPr>
+            </a:pPr>
+            <a:r>
+              <a:rPr sz="1388" b="1">
+                <a:solidFill>
+                  <a:srgbClr val="222222"/>
+                </a:solidFill>
+                <a:latin typeface="Pretendard"/>
+                <a:ea typeface="Pretendard"/>
+                <a:cs typeface="Pretendard"/>
+              </a:rPr>
+              <a:t>시뮬레이션: </a:t>
+            </a:r>
+            <a:r>
+              <a:rPr sz="1388">
+                <a:solidFill>
+                  <a:srgbClr val="222222"/>
+                </a:solidFill>
+                <a:latin typeface="Pretendard"/>
+                <a:ea typeface="Pretendard"/>
+                <a:cs typeface="Pretendard"/>
+              </a:rPr>
+              <a:t>어느 수준의 실제 운행과 배터리 사용량을 반영할지</a:t>
             </a:r>
           </a:p>
           <a:p xmlns:a="http://schemas.openxmlformats.org/drawingml/2006/main">
@@ -4701,39 +4688,80 @@
                 <a:spcPct val="107000"/>
               </a:lnSpc>
               <a:spcAft>
-                <a:spcPts val="800"/>
+                <a:spcPts val="900"/>
               </a:spcAft>
               <a:buNone/>
-              <a:defRPr sz="1350" b="0">
-                <a:solidFill>
-                  <a:srgbClr val="222222"/>
-                </a:solidFill>
-                <a:latin typeface="Pretendard"/>
-                <a:ea typeface="Pretendard"/>
-                <a:cs typeface="Pretendard"/>
-              </a:defRPr>
-            </a:pPr>
-            <a:r>
-              <a:rPr sz="1350" b="1">
-                <a:solidFill>
-                  <a:srgbClr val="222222"/>
-                </a:solidFill>
-                <a:latin typeface="Pretendard"/>
-                <a:ea typeface="Pretendard"/>
-                <a:cs typeface="Pretendard"/>
-              </a:rPr>
-              <a:t>확장: </a:t>
-            </a:r>
-            <a:r>
-              <a:rPr sz="1350">
-                <a:solidFill>
-                  <a:srgbClr val="222222"/>
-                </a:solidFill>
-                <a:latin typeface="Pretendard"/>
-                <a:ea typeface="Pretendard"/>
-                <a:cs typeface="Pretendard"/>
-              </a:rPr>
-              <a:t>GTFS로 먼저 실행한 뒤 BIS 실제 이동시간을 연결</a:t>
+              <a:defRPr sz="1388" b="0">
+                <a:solidFill>
+                  <a:srgbClr val="222222"/>
+                </a:solidFill>
+                <a:latin typeface="Pretendard"/>
+                <a:ea typeface="Pretendard"/>
+                <a:cs typeface="Pretendard"/>
+              </a:defRPr>
+            </a:pPr>
+            <a:r>
+              <a:rPr sz="1388" b="1">
+                <a:solidFill>
+                  <a:srgbClr val="222222"/>
+                </a:solidFill>
+                <a:latin typeface="Pretendard"/>
+                <a:ea typeface="Pretendard"/>
+                <a:cs typeface="Pretendard"/>
+              </a:rPr>
+              <a:t>알고리즘: </a:t>
+            </a:r>
+            <a:r>
+              <a:rPr sz="1388">
+                <a:solidFill>
+                  <a:srgbClr val="222222"/>
+                </a:solidFill>
+                <a:latin typeface="Pretendard"/>
+                <a:ea typeface="Pretendard"/>
+                <a:cs typeface="Pretendard"/>
+              </a:rPr>
+              <a:t>단순 충전 규칙부터 비교할지, 처음부터 최적화 문제로 만들지</a:t>
+            </a:r>
+          </a:p>
+          <a:p xmlns:a="http://schemas.openxmlformats.org/drawingml/2006/main">
+            <a:pPr marL="203200" indent="-127000" algn="l">
+              <a:lnSpc>
+                <a:spcPct val="107000"/>
+              </a:lnSpc>
+              <a:spcAft>
+                <a:spcPts val="900"/>
+              </a:spcAft>
+              <a:buNone/>
+              <a:defRPr sz="1388" b="0">
+                <a:solidFill>
+                  <a:srgbClr val="222222"/>
+                </a:solidFill>
+                <a:latin typeface="Pretendard"/>
+                <a:ea typeface="Pretendard"/>
+                <a:cs typeface="Pretendard"/>
+              </a:defRPr>
+            </a:pPr>
+            <a:r>
+              <a:rPr sz="1388" b="1">
+                <a:solidFill>
+                  <a:srgbClr val="222222"/>
+                </a:solidFill>
+                <a:latin typeface="Pretendard"/>
+                <a:ea typeface="Pretendard"/>
+                <a:cs typeface="Pretendard"/>
+              </a:rPr>
+              <a:t>연구 범위: </a:t>
+            </a:r>
+            <a:r>
+              <a:rPr sz="1388">
+                <a:solidFill>
+                  <a:srgbClr val="222222"/>
+                </a:solidFill>
+                <a:latin typeface="Pretendard"/>
+                <a:ea typeface="Pretendard"/>
+                <a:cs typeface="Pretendard"/>
+              </a:rPr>
+              <a:t>충전시설·충전 방법·운영 방법을 모두 볼지 우선순위를 정할지</a:t>
             </a:r>
           </a:p>
         </p:txBody>
@@ -4741,7 +4769,7 @@
     </p:spTree>
     <p:extLst>
       <p:ext uri="{BB962C8B-B14F-4D97-AF65-F5344CB8AC3E}">
-        <p14:creationId xmlns:p14="http://schemas.microsoft.com/office/powerpoint/2010/main" val="477979136"/>
+        <p14:creationId xmlns:p14="http://schemas.microsoft.com/office/powerpoint/2010/main" val="476088533"/>
       </p:ext>
     </p:extLst>
   </p:cSld>
@@ -4769,10 +4797,10 @@
       </p:grpSpPr>
       <p:sp>
         <p:nvSpPr>
-          <p:cNvPr id="17" name="">
+          <p:cNvPr id="21" name="">
             <a:extLst xmlns:a="http://schemas.openxmlformats.org/drawingml/2006/main">
               <a:ext uri="{FF2B5EF4-FFF2-40B4-BE49-F238E27FC236}">
-                <a16:creationId xmlns:a16="http://schemas.microsoft.com/office/drawing/2014/main" id="{7D1A46D1-B7CC-41EB-8168-55ED8DBB1475}"/>
+                <a16:creationId xmlns:a16="http://schemas.microsoft.com/office/drawing/2014/main" id="{F8A54F43-9C02-4860-84B4-48F8545234C3}"/>
               </a:ext>
             </a:extLst>
           </p:cNvPr>
@@ -4823,7 +4851,7 @@
                 <a:ea typeface="Pretendard Medium"/>
                 <a:cs typeface="Pretendard Medium"/>
               </a:rPr>
-              <a:t>4. 연구 사이클과 바로 할 일</a:t>
+              <a:t>자문받고 싶은 내용</a:t>
             </a:r>
           </a:p>
         </p:txBody>
@@ -4833,7 +4861,7 @@
           <p:cNvPr id="2" name="">
             <a:extLst xmlns:a="http://schemas.openxmlformats.org/drawingml/2006/main">
               <a:ext uri="{FF2B5EF4-FFF2-40B4-BE49-F238E27FC236}">
-                <a16:creationId xmlns:a16="http://schemas.microsoft.com/office/drawing/2014/main" id="{D589ECB9-931E-46E0-82A6-8FBC7E4BF658}"/>
+                <a16:creationId xmlns:a16="http://schemas.microsoft.com/office/drawing/2014/main" id="{6AF50FCF-BA23-4D27-B5A8-42237D57F6F0}"/>
               </a:ext>
             </a:extLst>
           </p:cNvPr>
@@ -4884,7 +4912,7 @@
                 <a:ea typeface="Pretendard"/>
                 <a:cs typeface="Pretendard"/>
               </a:rPr>
-              <a:t>다음 단계</a:t>
+              <a:t>질문</a:t>
             </a:r>
           </a:p>
         </p:txBody>
@@ -4894,7 +4922,7 @@
           <p:cNvPr id="3" name="">
             <a:extLst xmlns:a="http://schemas.openxmlformats.org/drawingml/2006/main">
               <a:ext uri="{FF2B5EF4-FFF2-40B4-BE49-F238E27FC236}">
-                <a16:creationId xmlns:a16="http://schemas.microsoft.com/office/drawing/2014/main" id="{EB8E1312-302C-4496-BE0C-634F045FF78A}"/>
+                <a16:creationId xmlns:a16="http://schemas.microsoft.com/office/drawing/2014/main" id="{68F6DC46-A050-49CF-A0E2-C6C8C2D0710D}"/>
               </a:ext>
             </a:extLst>
           </p:cNvPr>
@@ -4945,7 +4973,7 @@
                 <a:ea typeface="Pretendard"/>
                 <a:cs typeface="Pretendard"/>
               </a:rPr>
-              <a:t>교수님 피드백을 반영한 반복 연구 과정.</a:t>
+              <a:t>연구 범위와 방법론을 구체화하기 위한 질문.</a:t>
             </a:r>
           </a:p>
         </p:txBody>
@@ -4955,7 +4983,7 @@
           <p:cNvPr id="4" name="">
             <a:extLst xmlns:a="http://schemas.openxmlformats.org/drawingml/2006/main">
               <a:ext uri="{FF2B5EF4-FFF2-40B4-BE49-F238E27FC236}">
-                <a16:creationId xmlns:a16="http://schemas.microsoft.com/office/drawing/2014/main" id="{B92E1D67-B03C-4B29-A351-B5AD5BEEBCF9}"/>
+                <a16:creationId xmlns:a16="http://schemas.microsoft.com/office/drawing/2014/main" id="{06297CAB-6914-464D-9285-443CC8F5005D}"/>
               </a:ext>
             </a:extLst>
           </p:cNvPr>
@@ -5016,7 +5044,7 @@
           <p:cNvPr id="5" name="">
             <a:extLst xmlns:a="http://schemas.openxmlformats.org/drawingml/2006/main">
               <a:ext uri="{FF2B5EF4-FFF2-40B4-BE49-F238E27FC236}">
-                <a16:creationId xmlns:a16="http://schemas.microsoft.com/office/drawing/2014/main" id="{B4D317C2-D697-4D5E-9BC9-555F3E988474}"/>
+                <a16:creationId xmlns:a16="http://schemas.microsoft.com/office/drawing/2014/main" id="{62649BDA-F1F0-4877-B44F-92FB17FBF51E}"/>
               </a:ext>
             </a:extLst>
           </p:cNvPr>
@@ -5027,15 +5055,223 @@
         </p:nvSpPr>
         <p:spPr>
           <a:xfrm xmlns:a="http://schemas.openxmlformats.org/drawingml/2006/main">
-            <a:off x="685800" y="1428750"/>
-            <a:ext cx="1809750" cy="990600"/>
+            <a:off x="685800" y="1381125"/>
+            <a:ext cx="514350" cy="590550"/>
           </a:xfrm>
           <a:prstGeom xmlns:a="http://schemas.openxmlformats.org/drawingml/2006/main" prst="rect">
             <a:avLst/>
           </a:prstGeom>
-          <a:solidFill xmlns:a="http://schemas.openxmlformats.org/drawingml/2006/main">
-            <a:srgbClr val="FFFFFF"/>
-          </a:solidFill>
+          <a:noFill xmlns:a="http://schemas.openxmlformats.org/drawingml/2006/main"/>
+          <a:ln xmlns:a="http://schemas.openxmlformats.org/drawingml/2006/main" w="0">
+            <a:noFill/>
+          </a:ln>
+        </p:spPr>
+        <p:txBody>
+          <a:bodyPr xmlns:a="http://schemas.openxmlformats.org/drawingml/2006/main" wrap="square" lIns="0" tIns="0" rIns="0" bIns="0" anchor="ctr">
+            <a:noAutofit/>
+          </a:bodyPr>
+          <a:lstStyle xmlns:a="http://schemas.openxmlformats.org/drawingml/2006/main"/>
+          <a:p xmlns:a="http://schemas.openxmlformats.org/drawingml/2006/main">
+            <a:pPr algn="ctr">
+              <a:lnSpc>
+                <a:spcPct val="108000"/>
+              </a:lnSpc>
+              <a:buNone/>
+              <a:defRPr sz="2250" b="1">
+                <a:solidFill>
+                  <a:srgbClr val="000000"/>
+                </a:solidFill>
+                <a:latin typeface="Pretendard Medium"/>
+                <a:ea typeface="Pretendard Medium"/>
+                <a:cs typeface="Pretendard Medium"/>
+              </a:defRPr>
+            </a:pPr>
+            <a:r>
+              <a:rPr sz="2250" b="1">
+                <a:solidFill>
+                  <a:srgbClr val="000000"/>
+                </a:solidFill>
+                <a:latin typeface="Pretendard Medium"/>
+                <a:ea typeface="Pretendard Medium"/>
+                <a:cs typeface="Pretendard Medium"/>
+              </a:rPr>
+              <a:t>1</a:t>
+            </a:r>
+          </a:p>
+        </p:txBody>
+      </p:sp>
+      <p:sp>
+        <p:nvSpPr>
+          <p:cNvPr id="6" name="">
+            <a:extLst xmlns:a="http://schemas.openxmlformats.org/drawingml/2006/main">
+              <a:ext uri="{FF2B5EF4-FFF2-40B4-BE49-F238E27FC236}">
+                <a16:creationId xmlns:a16="http://schemas.microsoft.com/office/drawing/2014/main" id="{B1C64AC5-7F94-4E77-A941-127C0E7443E5}"/>
+              </a:ext>
+            </a:extLst>
+          </p:cNvPr>
+          <p:cNvSpPr>
+            <a:spLocks xmlns:a="http://schemas.openxmlformats.org/drawingml/2006/main" noGrp="1"/>
+          </p:cNvSpPr>
+          <p:nvPr/>
+        </p:nvSpPr>
+        <p:spPr>
+          <a:xfrm xmlns:a="http://schemas.openxmlformats.org/drawingml/2006/main">
+            <a:off x="1409700" y="1400175"/>
+            <a:ext cx="1619250" cy="285750"/>
+          </a:xfrm>
+          <a:prstGeom xmlns:a="http://schemas.openxmlformats.org/drawingml/2006/main" prst="rect">
+            <a:avLst/>
+          </a:prstGeom>
+          <a:noFill xmlns:a="http://schemas.openxmlformats.org/drawingml/2006/main"/>
+          <a:ln xmlns:a="http://schemas.openxmlformats.org/drawingml/2006/main" w="0">
+            <a:noFill/>
+          </a:ln>
+        </p:spPr>
+        <p:txBody>
+          <a:bodyPr xmlns:a="http://schemas.openxmlformats.org/drawingml/2006/main" wrap="square" lIns="0" tIns="0" rIns="0" bIns="0" anchor="t">
+            <a:noAutofit/>
+          </a:bodyPr>
+          <a:lstStyle xmlns:a="http://schemas.openxmlformats.org/drawingml/2006/main"/>
+          <a:p xmlns:a="http://schemas.openxmlformats.org/drawingml/2006/main">
+            <a:pPr algn="l">
+              <a:lnSpc>
+                <a:spcPct val="108000"/>
+              </a:lnSpc>
+              <a:buNone/>
+              <a:defRPr sz="1500" b="1">
+                <a:solidFill>
+                  <a:srgbClr val="000000"/>
+                </a:solidFill>
+                <a:latin typeface="Pretendard Medium"/>
+                <a:ea typeface="Pretendard Medium"/>
+                <a:cs typeface="Pretendard Medium"/>
+              </a:defRPr>
+            </a:pPr>
+            <a:r>
+              <a:rPr sz="1500" b="1">
+                <a:solidFill>
+                  <a:srgbClr val="000000"/>
+                </a:solidFill>
+                <a:latin typeface="Pretendard Medium"/>
+                <a:ea typeface="Pretendard Medium"/>
+                <a:cs typeface="Pretendard Medium"/>
+              </a:rPr>
+              <a:t>데이터</a:t>
+            </a:r>
+          </a:p>
+        </p:txBody>
+      </p:sp>
+      <p:sp>
+        <p:nvSpPr>
+          <p:cNvPr id="7" name="">
+            <a:extLst xmlns:a="http://schemas.openxmlformats.org/drawingml/2006/main">
+              <a:ext uri="{FF2B5EF4-FFF2-40B4-BE49-F238E27FC236}">
+                <a16:creationId xmlns:a16="http://schemas.microsoft.com/office/drawing/2014/main" id="{EEA5F2AF-28DF-42FE-AD0D-CAFA8DC01624}"/>
+              </a:ext>
+            </a:extLst>
+          </p:cNvPr>
+          <p:cNvSpPr>
+            <a:spLocks xmlns:a="http://schemas.openxmlformats.org/drawingml/2006/main" noGrp="1"/>
+          </p:cNvSpPr>
+          <p:nvPr/>
+        </p:nvSpPr>
+        <p:spPr>
+          <a:xfrm xmlns:a="http://schemas.openxmlformats.org/drawingml/2006/main">
+            <a:off x="3048000" y="1381125"/>
+            <a:ext cx="8458200" cy="666750"/>
+          </a:xfrm>
+          <a:prstGeom xmlns:a="http://schemas.openxmlformats.org/drawingml/2006/main" prst="rect">
+            <a:avLst/>
+          </a:prstGeom>
+          <a:noFill xmlns:a="http://schemas.openxmlformats.org/drawingml/2006/main"/>
+          <a:ln xmlns:a="http://schemas.openxmlformats.org/drawingml/2006/main" w="0">
+            <a:noFill/>
+          </a:ln>
+        </p:spPr>
+        <p:txBody>
+          <a:bodyPr xmlns:a="http://schemas.openxmlformats.org/drawingml/2006/main" wrap="square" lIns="0" tIns="0" rIns="0" bIns="0" anchor="ctr">
+            <a:noAutofit/>
+          </a:bodyPr>
+          <a:lstStyle xmlns:a="http://schemas.openxmlformats.org/drawingml/2006/main"/>
+          <a:p xmlns:a="http://schemas.openxmlformats.org/drawingml/2006/main">
+            <a:pPr algn="l">
+              <a:lnSpc>
+                <a:spcPct val="108000"/>
+              </a:lnSpc>
+              <a:buNone/>
+              <a:defRPr sz="1388" b="0">
+                <a:solidFill>
+                  <a:srgbClr val="222222"/>
+                </a:solidFill>
+                <a:latin typeface="Pretendard"/>
+                <a:ea typeface="Pretendard"/>
+                <a:cs typeface="Pretendard"/>
+              </a:defRPr>
+            </a:pPr>
+            <a:r>
+              <a:rPr sz="1388" b="0">
+                <a:solidFill>
+                  <a:srgbClr val="222222"/>
+                </a:solidFill>
+                <a:latin typeface="Pretendard"/>
+                <a:ea typeface="Pretendard"/>
+                <a:cs typeface="Pretendard"/>
+              </a:rPr>
+              <a:t>GTFS와 BIS를 같이 사용하는 방향이 적절한가요?</a:t>
+            </a:r>
+          </a:p>
+          <a:p xmlns:a="http://schemas.openxmlformats.org/drawingml/2006/main">
+            <a:pPr algn="l">
+              <a:lnSpc>
+                <a:spcPct val="108000"/>
+              </a:lnSpc>
+              <a:buNone/>
+              <a:defRPr sz="1388" b="0">
+                <a:solidFill>
+                  <a:srgbClr val="222222"/>
+                </a:solidFill>
+                <a:latin typeface="Pretendard"/>
+                <a:ea typeface="Pretendard"/>
+                <a:cs typeface="Pretendard"/>
+              </a:defRPr>
+            </a:pPr>
+            <a:r>
+              <a:rPr sz="1388" b="0">
+                <a:solidFill>
+                  <a:srgbClr val="222222"/>
+                </a:solidFill>
+                <a:latin typeface="Pretendard"/>
+                <a:ea typeface="Pretendard"/>
+                <a:cs typeface="Pretendard"/>
+              </a:rPr>
+              <a:t>처음에는 어느 노선과 기간으로 시작하는 것이 좋을까요?</a:t>
+            </a:r>
+          </a:p>
+        </p:txBody>
+      </p:sp>
+      <p:sp>
+        <p:nvSpPr>
+          <p:cNvPr id="8" name="">
+            <a:extLst xmlns:a="http://schemas.openxmlformats.org/drawingml/2006/main">
+              <a:ext uri="{FF2B5EF4-FFF2-40B4-BE49-F238E27FC236}">
+                <a16:creationId xmlns:a16="http://schemas.microsoft.com/office/drawing/2014/main" id="{F2DD7AE4-09D9-43DB-8E71-F8643FC207B5}"/>
+              </a:ext>
+            </a:extLst>
+          </p:cNvPr>
+          <p:cNvSpPr>
+            <a:spLocks xmlns:a="http://schemas.openxmlformats.org/drawingml/2006/main" noGrp="1"/>
+          </p:cNvSpPr>
+          <p:nvPr/>
+        </p:nvSpPr>
+        <p:spPr>
+          <a:xfrm xmlns:a="http://schemas.openxmlformats.org/drawingml/2006/main">
+            <a:off x="1409700" y="2219325"/>
+            <a:ext cx="10096500" cy="0"/>
+          </a:xfrm>
+          <a:prstGeom xmlns:a="http://schemas.openxmlformats.org/drawingml/2006/main" prst="line">
+            <a:avLst/>
+          </a:prstGeom>
+          <a:noFill xmlns:a="http://schemas.openxmlformats.org/drawingml/2006/main"/>
           <a:ln xmlns:a="http://schemas.openxmlformats.org/drawingml/2006/main" w="9525">
             <a:solidFill>
               <a:srgbClr val="B8B8B8"/>
@@ -5043,73 +5279,13 @@
             <a:prstDash val="solid"/>
           </a:ln>
         </p:spPr>
-        <p:txBody>
-          <a:bodyPr xmlns:a="http://schemas.openxmlformats.org/drawingml/2006/main" lIns="114300" tIns="76200" rIns="114300" bIns="76200" anchor="ctr">
-            <a:noAutofit/>
-          </a:bodyPr>
-          <a:lstStyle xmlns:a="http://schemas.openxmlformats.org/drawingml/2006/main"/>
-          <a:p xmlns:a="http://schemas.openxmlformats.org/drawingml/2006/main">
-            <a:pPr algn="ctr">
-              <a:lnSpc>
-                <a:spcPct val="105000"/>
-              </a:lnSpc>
-              <a:buNone/>
-              <a:defRPr sz="1275">
-                <a:solidFill>
-                  <a:srgbClr val="222222"/>
-                </a:solidFill>
-                <a:latin typeface="Pretendard"/>
-                <a:ea typeface="Pretendard"/>
-                <a:cs typeface="Pretendard"/>
-              </a:defRPr>
-            </a:pPr>
-            <a:r>
-              <a:rPr sz="1275" b="1">
-                <a:solidFill>
-                  <a:srgbClr val="222222"/>
-                </a:solidFill>
-                <a:latin typeface="Pretendard"/>
-                <a:ea typeface="Pretendard"/>
-                <a:cs typeface="Pretendard"/>
-              </a:rPr>
-              <a:t>1. 선행연구</a:t>
-            </a:r>
-          </a:p>
-          <a:p xmlns:a="http://schemas.openxmlformats.org/drawingml/2006/main">
-            <a:pPr algn="ctr">
-              <a:lnSpc>
-                <a:spcPct val="105000"/>
-              </a:lnSpc>
-              <a:buNone/>
-              <a:defRPr sz="1275">
-                <a:solidFill>
-                  <a:srgbClr val="222222"/>
-                </a:solidFill>
-                <a:latin typeface="Pretendard"/>
-                <a:ea typeface="Pretendard"/>
-                <a:cs typeface="Pretendard"/>
-              </a:defRPr>
-            </a:pPr>
-            <a:r>
-              <a:rPr sz="1275">
-                <a:solidFill>
-                  <a:srgbClr val="222222"/>
-                </a:solidFill>
-                <a:latin typeface="Pretendard"/>
-                <a:ea typeface="Pretendard"/>
-                <a:cs typeface="Pretendard"/>
-              </a:rPr>
-              <a:t>이미 한 것 확인</a:t>
-            </a:r>
-          </a:p>
-        </p:txBody>
-      </p:sp>
-      <p:sp>
-        <p:nvSpPr>
-          <p:cNvPr id="6" name="">
+      </p:sp>
+      <p:sp>
+        <p:nvSpPr>
+          <p:cNvPr id="9" name="">
             <a:extLst xmlns:a="http://schemas.openxmlformats.org/drawingml/2006/main">
               <a:ext uri="{FF2B5EF4-FFF2-40B4-BE49-F238E27FC236}">
-                <a16:creationId xmlns:a16="http://schemas.microsoft.com/office/drawing/2014/main" id="{A50B2ED7-CD75-4D6A-B5D4-D8AB4C84C8C0}"/>
+                <a16:creationId xmlns:a16="http://schemas.microsoft.com/office/drawing/2014/main" id="{6F21C0A6-EEF2-44E4-863E-18A07A38CB1A}"/>
               </a:ext>
             </a:extLst>
           </p:cNvPr>
@@ -5120,15 +5296,223 @@
         </p:nvSpPr>
         <p:spPr>
           <a:xfrm xmlns:a="http://schemas.openxmlformats.org/drawingml/2006/main">
-            <a:off x="2876550" y="1428750"/>
-            <a:ext cx="1809750" cy="990600"/>
+            <a:off x="685800" y="2505075"/>
+            <a:ext cx="514350" cy="590550"/>
           </a:xfrm>
           <a:prstGeom xmlns:a="http://schemas.openxmlformats.org/drawingml/2006/main" prst="rect">
             <a:avLst/>
           </a:prstGeom>
-          <a:solidFill xmlns:a="http://schemas.openxmlformats.org/drawingml/2006/main">
-            <a:srgbClr val="FFFFFF"/>
-          </a:solidFill>
+          <a:noFill xmlns:a="http://schemas.openxmlformats.org/drawingml/2006/main"/>
+          <a:ln xmlns:a="http://schemas.openxmlformats.org/drawingml/2006/main" w="0">
+            <a:noFill/>
+          </a:ln>
+        </p:spPr>
+        <p:txBody>
+          <a:bodyPr xmlns:a="http://schemas.openxmlformats.org/drawingml/2006/main" wrap="square" lIns="0" tIns="0" rIns="0" bIns="0" anchor="ctr">
+            <a:noAutofit/>
+          </a:bodyPr>
+          <a:lstStyle xmlns:a="http://schemas.openxmlformats.org/drawingml/2006/main"/>
+          <a:p xmlns:a="http://schemas.openxmlformats.org/drawingml/2006/main">
+            <a:pPr algn="ctr">
+              <a:lnSpc>
+                <a:spcPct val="108000"/>
+              </a:lnSpc>
+              <a:buNone/>
+              <a:defRPr sz="2250" b="1">
+                <a:solidFill>
+                  <a:srgbClr val="000000"/>
+                </a:solidFill>
+                <a:latin typeface="Pretendard Medium"/>
+                <a:ea typeface="Pretendard Medium"/>
+                <a:cs typeface="Pretendard Medium"/>
+              </a:defRPr>
+            </a:pPr>
+            <a:r>
+              <a:rPr sz="2250" b="1">
+                <a:solidFill>
+                  <a:srgbClr val="000000"/>
+                </a:solidFill>
+                <a:latin typeface="Pretendard Medium"/>
+                <a:ea typeface="Pretendard Medium"/>
+                <a:cs typeface="Pretendard Medium"/>
+              </a:rPr>
+              <a:t>2</a:t>
+            </a:r>
+          </a:p>
+        </p:txBody>
+      </p:sp>
+      <p:sp>
+        <p:nvSpPr>
+          <p:cNvPr id="10" name="">
+            <a:extLst xmlns:a="http://schemas.openxmlformats.org/drawingml/2006/main">
+              <a:ext uri="{FF2B5EF4-FFF2-40B4-BE49-F238E27FC236}">
+                <a16:creationId xmlns:a16="http://schemas.microsoft.com/office/drawing/2014/main" id="{CF516EE7-7AD7-41E6-911F-2051E6E8287D}"/>
+              </a:ext>
+            </a:extLst>
+          </p:cNvPr>
+          <p:cNvSpPr>
+            <a:spLocks xmlns:a="http://schemas.openxmlformats.org/drawingml/2006/main" noGrp="1"/>
+          </p:cNvSpPr>
+          <p:nvPr/>
+        </p:nvSpPr>
+        <p:spPr>
+          <a:xfrm xmlns:a="http://schemas.openxmlformats.org/drawingml/2006/main">
+            <a:off x="1409700" y="2524125"/>
+            <a:ext cx="1619250" cy="285750"/>
+          </a:xfrm>
+          <a:prstGeom xmlns:a="http://schemas.openxmlformats.org/drawingml/2006/main" prst="rect">
+            <a:avLst/>
+          </a:prstGeom>
+          <a:noFill xmlns:a="http://schemas.openxmlformats.org/drawingml/2006/main"/>
+          <a:ln xmlns:a="http://schemas.openxmlformats.org/drawingml/2006/main" w="0">
+            <a:noFill/>
+          </a:ln>
+        </p:spPr>
+        <p:txBody>
+          <a:bodyPr xmlns:a="http://schemas.openxmlformats.org/drawingml/2006/main" wrap="square" lIns="0" tIns="0" rIns="0" bIns="0" anchor="t">
+            <a:noAutofit/>
+          </a:bodyPr>
+          <a:lstStyle xmlns:a="http://schemas.openxmlformats.org/drawingml/2006/main"/>
+          <a:p xmlns:a="http://schemas.openxmlformats.org/drawingml/2006/main">
+            <a:pPr algn="l">
+              <a:lnSpc>
+                <a:spcPct val="108000"/>
+              </a:lnSpc>
+              <a:buNone/>
+              <a:defRPr sz="1500" b="1">
+                <a:solidFill>
+                  <a:srgbClr val="000000"/>
+                </a:solidFill>
+                <a:latin typeface="Pretendard Medium"/>
+                <a:ea typeface="Pretendard Medium"/>
+                <a:cs typeface="Pretendard Medium"/>
+              </a:defRPr>
+            </a:pPr>
+            <a:r>
+              <a:rPr sz="1500" b="1">
+                <a:solidFill>
+                  <a:srgbClr val="000000"/>
+                </a:solidFill>
+                <a:latin typeface="Pretendard Medium"/>
+                <a:ea typeface="Pretendard Medium"/>
+                <a:cs typeface="Pretendard Medium"/>
+              </a:rPr>
+              <a:t>시뮬레이션</a:t>
+            </a:r>
+          </a:p>
+        </p:txBody>
+      </p:sp>
+      <p:sp>
+        <p:nvSpPr>
+          <p:cNvPr id="11" name="">
+            <a:extLst xmlns:a="http://schemas.openxmlformats.org/drawingml/2006/main">
+              <a:ext uri="{FF2B5EF4-FFF2-40B4-BE49-F238E27FC236}">
+                <a16:creationId xmlns:a16="http://schemas.microsoft.com/office/drawing/2014/main" id="{FF92DFD9-03A6-4600-9A13-C289313AB9AB}"/>
+              </a:ext>
+            </a:extLst>
+          </p:cNvPr>
+          <p:cNvSpPr>
+            <a:spLocks xmlns:a="http://schemas.openxmlformats.org/drawingml/2006/main" noGrp="1"/>
+          </p:cNvSpPr>
+          <p:nvPr/>
+        </p:nvSpPr>
+        <p:spPr>
+          <a:xfrm xmlns:a="http://schemas.openxmlformats.org/drawingml/2006/main">
+            <a:off x="3048000" y="2505075"/>
+            <a:ext cx="8458200" cy="666750"/>
+          </a:xfrm>
+          <a:prstGeom xmlns:a="http://schemas.openxmlformats.org/drawingml/2006/main" prst="rect">
+            <a:avLst/>
+          </a:prstGeom>
+          <a:noFill xmlns:a="http://schemas.openxmlformats.org/drawingml/2006/main"/>
+          <a:ln xmlns:a="http://schemas.openxmlformats.org/drawingml/2006/main" w="0">
+            <a:noFill/>
+          </a:ln>
+        </p:spPr>
+        <p:txBody>
+          <a:bodyPr xmlns:a="http://schemas.openxmlformats.org/drawingml/2006/main" wrap="square" lIns="0" tIns="0" rIns="0" bIns="0" anchor="ctr">
+            <a:noAutofit/>
+          </a:bodyPr>
+          <a:lstStyle xmlns:a="http://schemas.openxmlformats.org/drawingml/2006/main"/>
+          <a:p xmlns:a="http://schemas.openxmlformats.org/drawingml/2006/main">
+            <a:pPr algn="l">
+              <a:lnSpc>
+                <a:spcPct val="108000"/>
+              </a:lnSpc>
+              <a:buNone/>
+              <a:defRPr sz="1388" b="0">
+                <a:solidFill>
+                  <a:srgbClr val="222222"/>
+                </a:solidFill>
+                <a:latin typeface="Pretendard"/>
+                <a:ea typeface="Pretendard"/>
+                <a:cs typeface="Pretendard"/>
+              </a:defRPr>
+            </a:pPr>
+            <a:r>
+              <a:rPr sz="1388" b="0">
+                <a:solidFill>
+                  <a:srgbClr val="222222"/>
+                </a:solidFill>
+                <a:latin typeface="Pretendard"/>
+                <a:ea typeface="Pretendard"/>
+                <a:cs typeface="Pretendard"/>
+              </a:rPr>
+              <a:t>노선 1개, 버스 약 3대와 충전기 1대로 시작해도 될까요?</a:t>
+            </a:r>
+          </a:p>
+          <a:p xmlns:a="http://schemas.openxmlformats.org/drawingml/2006/main">
+            <a:pPr algn="l">
+              <a:lnSpc>
+                <a:spcPct val="108000"/>
+              </a:lnSpc>
+              <a:buNone/>
+              <a:defRPr sz="1388" b="0">
+                <a:solidFill>
+                  <a:srgbClr val="222222"/>
+                </a:solidFill>
+                <a:latin typeface="Pretendard"/>
+                <a:ea typeface="Pretendard"/>
+                <a:cs typeface="Pretendard"/>
+              </a:defRPr>
+            </a:pPr>
+            <a:r>
+              <a:rPr sz="1388" b="0">
+                <a:solidFill>
+                  <a:srgbClr val="222222"/>
+                </a:solidFill>
+                <a:latin typeface="Pretendard"/>
+                <a:ea typeface="Pretendard"/>
+                <a:cs typeface="Pretendard"/>
+              </a:rPr>
+              <a:t>처음부터 꼭 반영해야 할 운행 조건이 있을까요?</a:t>
+            </a:r>
+          </a:p>
+        </p:txBody>
+      </p:sp>
+      <p:sp>
+        <p:nvSpPr>
+          <p:cNvPr id="12" name="">
+            <a:extLst xmlns:a="http://schemas.openxmlformats.org/drawingml/2006/main">
+              <a:ext uri="{FF2B5EF4-FFF2-40B4-BE49-F238E27FC236}">
+                <a16:creationId xmlns:a16="http://schemas.microsoft.com/office/drawing/2014/main" id="{1FC03228-6E8E-455C-88FC-C66277A495C1}"/>
+              </a:ext>
+            </a:extLst>
+          </p:cNvPr>
+          <p:cNvSpPr>
+            <a:spLocks xmlns:a="http://schemas.openxmlformats.org/drawingml/2006/main" noGrp="1"/>
+          </p:cNvSpPr>
+          <p:nvPr/>
+        </p:nvSpPr>
+        <p:spPr>
+          <a:xfrm xmlns:a="http://schemas.openxmlformats.org/drawingml/2006/main">
+            <a:off x="1409700" y="3343275"/>
+            <a:ext cx="10096500" cy="0"/>
+          </a:xfrm>
+          <a:prstGeom xmlns:a="http://schemas.openxmlformats.org/drawingml/2006/main" prst="line">
+            <a:avLst/>
+          </a:prstGeom>
+          <a:noFill xmlns:a="http://schemas.openxmlformats.org/drawingml/2006/main"/>
           <a:ln xmlns:a="http://schemas.openxmlformats.org/drawingml/2006/main" w="9525">
             <a:solidFill>
               <a:srgbClr val="B8B8B8"/>
@@ -5136,73 +5520,13 @@
             <a:prstDash val="solid"/>
           </a:ln>
         </p:spPr>
-        <p:txBody>
-          <a:bodyPr xmlns:a="http://schemas.openxmlformats.org/drawingml/2006/main" lIns="114300" tIns="76200" rIns="114300" bIns="76200" anchor="ctr">
-            <a:noAutofit/>
-          </a:bodyPr>
-          <a:lstStyle xmlns:a="http://schemas.openxmlformats.org/drawingml/2006/main"/>
-          <a:p xmlns:a="http://schemas.openxmlformats.org/drawingml/2006/main">
-            <a:pPr algn="ctr">
-              <a:lnSpc>
-                <a:spcPct val="105000"/>
-              </a:lnSpc>
-              <a:buNone/>
-              <a:defRPr sz="1275">
-                <a:solidFill>
-                  <a:srgbClr val="222222"/>
-                </a:solidFill>
-                <a:latin typeface="Pretendard"/>
-                <a:ea typeface="Pretendard"/>
-                <a:cs typeface="Pretendard"/>
-              </a:defRPr>
-            </a:pPr>
-            <a:r>
-              <a:rPr sz="1275" b="1">
-                <a:solidFill>
-                  <a:srgbClr val="222222"/>
-                </a:solidFill>
-                <a:latin typeface="Pretendard"/>
-                <a:ea typeface="Pretendard"/>
-                <a:cs typeface="Pretendard"/>
-              </a:rPr>
-              <a:t>2. 남은 문제</a:t>
-            </a:r>
-          </a:p>
-          <a:p xmlns:a="http://schemas.openxmlformats.org/drawingml/2006/main">
-            <a:pPr algn="ctr">
-              <a:lnSpc>
-                <a:spcPct val="105000"/>
-              </a:lnSpc>
-              <a:buNone/>
-              <a:defRPr sz="1275">
-                <a:solidFill>
-                  <a:srgbClr val="222222"/>
-                </a:solidFill>
-                <a:latin typeface="Pretendard"/>
-                <a:ea typeface="Pretendard"/>
-                <a:cs typeface="Pretendard"/>
-              </a:defRPr>
-            </a:pPr>
-            <a:r>
-              <a:rPr sz="1275">
-                <a:solidFill>
-                  <a:srgbClr val="222222"/>
-                </a:solidFill>
-                <a:latin typeface="Pretendard"/>
-                <a:ea typeface="Pretendard"/>
-                <a:cs typeface="Pretendard"/>
-              </a:rPr>
-              <a:t>내가 볼 부분 정리</a:t>
-            </a:r>
-          </a:p>
-        </p:txBody>
-      </p:sp>
-      <p:sp>
-        <p:nvSpPr>
-          <p:cNvPr id="7" name="">
+      </p:sp>
+      <p:sp>
+        <p:nvSpPr>
+          <p:cNvPr id="13" name="">
             <a:extLst xmlns:a="http://schemas.openxmlformats.org/drawingml/2006/main">
               <a:ext uri="{FF2B5EF4-FFF2-40B4-BE49-F238E27FC236}">
-                <a16:creationId xmlns:a16="http://schemas.microsoft.com/office/drawing/2014/main" id="{08D77B7D-DFC7-400D-8755-94B7EB46C8DE}"/>
+                <a16:creationId xmlns:a16="http://schemas.microsoft.com/office/drawing/2014/main" id="{6AB11069-404F-439B-BA01-9FDABC75255F}"/>
               </a:ext>
             </a:extLst>
           </p:cNvPr>
@@ -5213,15 +5537,223 @@
         </p:nvSpPr>
         <p:spPr>
           <a:xfrm xmlns:a="http://schemas.openxmlformats.org/drawingml/2006/main">
-            <a:off x="5067300" y="1428750"/>
-            <a:ext cx="1809750" cy="990600"/>
+            <a:off x="685800" y="3629025"/>
+            <a:ext cx="514350" cy="590550"/>
           </a:xfrm>
           <a:prstGeom xmlns:a="http://schemas.openxmlformats.org/drawingml/2006/main" prst="rect">
             <a:avLst/>
           </a:prstGeom>
-          <a:solidFill xmlns:a="http://schemas.openxmlformats.org/drawingml/2006/main">
-            <a:srgbClr val="FFFFFF"/>
-          </a:solidFill>
+          <a:noFill xmlns:a="http://schemas.openxmlformats.org/drawingml/2006/main"/>
+          <a:ln xmlns:a="http://schemas.openxmlformats.org/drawingml/2006/main" w="0">
+            <a:noFill/>
+          </a:ln>
+        </p:spPr>
+        <p:txBody>
+          <a:bodyPr xmlns:a="http://schemas.openxmlformats.org/drawingml/2006/main" wrap="square" lIns="0" tIns="0" rIns="0" bIns="0" anchor="ctr">
+            <a:noAutofit/>
+          </a:bodyPr>
+          <a:lstStyle xmlns:a="http://schemas.openxmlformats.org/drawingml/2006/main"/>
+          <a:p xmlns:a="http://schemas.openxmlformats.org/drawingml/2006/main">
+            <a:pPr algn="ctr">
+              <a:lnSpc>
+                <a:spcPct val="108000"/>
+              </a:lnSpc>
+              <a:buNone/>
+              <a:defRPr sz="2250" b="1">
+                <a:solidFill>
+                  <a:srgbClr val="000000"/>
+                </a:solidFill>
+                <a:latin typeface="Pretendard Medium"/>
+                <a:ea typeface="Pretendard Medium"/>
+                <a:cs typeface="Pretendard Medium"/>
+              </a:defRPr>
+            </a:pPr>
+            <a:r>
+              <a:rPr sz="2250" b="1">
+                <a:solidFill>
+                  <a:srgbClr val="000000"/>
+                </a:solidFill>
+                <a:latin typeface="Pretendard Medium"/>
+                <a:ea typeface="Pretendard Medium"/>
+                <a:cs typeface="Pretendard Medium"/>
+              </a:rPr>
+              <a:t>3</a:t>
+            </a:r>
+          </a:p>
+        </p:txBody>
+      </p:sp>
+      <p:sp>
+        <p:nvSpPr>
+          <p:cNvPr id="14" name="">
+            <a:extLst xmlns:a="http://schemas.openxmlformats.org/drawingml/2006/main">
+              <a:ext uri="{FF2B5EF4-FFF2-40B4-BE49-F238E27FC236}">
+                <a16:creationId xmlns:a16="http://schemas.microsoft.com/office/drawing/2014/main" id="{89789994-0C9B-4D97-9943-E530EED4F84B}"/>
+              </a:ext>
+            </a:extLst>
+          </p:cNvPr>
+          <p:cNvSpPr>
+            <a:spLocks xmlns:a="http://schemas.openxmlformats.org/drawingml/2006/main" noGrp="1"/>
+          </p:cNvSpPr>
+          <p:nvPr/>
+        </p:nvSpPr>
+        <p:spPr>
+          <a:xfrm xmlns:a="http://schemas.openxmlformats.org/drawingml/2006/main">
+            <a:off x="1409700" y="3648075"/>
+            <a:ext cx="1619250" cy="285750"/>
+          </a:xfrm>
+          <a:prstGeom xmlns:a="http://schemas.openxmlformats.org/drawingml/2006/main" prst="rect">
+            <a:avLst/>
+          </a:prstGeom>
+          <a:noFill xmlns:a="http://schemas.openxmlformats.org/drawingml/2006/main"/>
+          <a:ln xmlns:a="http://schemas.openxmlformats.org/drawingml/2006/main" w="0">
+            <a:noFill/>
+          </a:ln>
+        </p:spPr>
+        <p:txBody>
+          <a:bodyPr xmlns:a="http://schemas.openxmlformats.org/drawingml/2006/main" wrap="square" lIns="0" tIns="0" rIns="0" bIns="0" anchor="t">
+            <a:noAutofit/>
+          </a:bodyPr>
+          <a:lstStyle xmlns:a="http://schemas.openxmlformats.org/drawingml/2006/main"/>
+          <a:p xmlns:a="http://schemas.openxmlformats.org/drawingml/2006/main">
+            <a:pPr algn="l">
+              <a:lnSpc>
+                <a:spcPct val="108000"/>
+              </a:lnSpc>
+              <a:buNone/>
+              <a:defRPr sz="1500" b="1">
+                <a:solidFill>
+                  <a:srgbClr val="000000"/>
+                </a:solidFill>
+                <a:latin typeface="Pretendard Medium"/>
+                <a:ea typeface="Pretendard Medium"/>
+                <a:cs typeface="Pretendard Medium"/>
+              </a:defRPr>
+            </a:pPr>
+            <a:r>
+              <a:rPr sz="1500" b="1">
+                <a:solidFill>
+                  <a:srgbClr val="000000"/>
+                </a:solidFill>
+                <a:latin typeface="Pretendard Medium"/>
+                <a:ea typeface="Pretendard Medium"/>
+                <a:cs typeface="Pretendard Medium"/>
+              </a:rPr>
+              <a:t>알고리즘</a:t>
+            </a:r>
+          </a:p>
+        </p:txBody>
+      </p:sp>
+      <p:sp>
+        <p:nvSpPr>
+          <p:cNvPr id="15" name="">
+            <a:extLst xmlns:a="http://schemas.openxmlformats.org/drawingml/2006/main">
+              <a:ext uri="{FF2B5EF4-FFF2-40B4-BE49-F238E27FC236}">
+                <a16:creationId xmlns:a16="http://schemas.microsoft.com/office/drawing/2014/main" id="{F04A98B0-F210-4B72-A3DF-CF966B00D0D8}"/>
+              </a:ext>
+            </a:extLst>
+          </p:cNvPr>
+          <p:cNvSpPr>
+            <a:spLocks xmlns:a="http://schemas.openxmlformats.org/drawingml/2006/main" noGrp="1"/>
+          </p:cNvSpPr>
+          <p:nvPr/>
+        </p:nvSpPr>
+        <p:spPr>
+          <a:xfrm xmlns:a="http://schemas.openxmlformats.org/drawingml/2006/main">
+            <a:off x="3048000" y="3629025"/>
+            <a:ext cx="8458200" cy="666750"/>
+          </a:xfrm>
+          <a:prstGeom xmlns:a="http://schemas.openxmlformats.org/drawingml/2006/main" prst="rect">
+            <a:avLst/>
+          </a:prstGeom>
+          <a:noFill xmlns:a="http://schemas.openxmlformats.org/drawingml/2006/main"/>
+          <a:ln xmlns:a="http://schemas.openxmlformats.org/drawingml/2006/main" w="0">
+            <a:noFill/>
+          </a:ln>
+        </p:spPr>
+        <p:txBody>
+          <a:bodyPr xmlns:a="http://schemas.openxmlformats.org/drawingml/2006/main" wrap="square" lIns="0" tIns="0" rIns="0" bIns="0" anchor="ctr">
+            <a:noAutofit/>
+          </a:bodyPr>
+          <a:lstStyle xmlns:a="http://schemas.openxmlformats.org/drawingml/2006/main"/>
+          <a:p xmlns:a="http://schemas.openxmlformats.org/drawingml/2006/main">
+            <a:pPr algn="l">
+              <a:lnSpc>
+                <a:spcPct val="108000"/>
+              </a:lnSpc>
+              <a:buNone/>
+              <a:defRPr sz="1388" b="0">
+                <a:solidFill>
+                  <a:srgbClr val="222222"/>
+                </a:solidFill>
+                <a:latin typeface="Pretendard"/>
+                <a:ea typeface="Pretendard"/>
+                <a:cs typeface="Pretendard"/>
+              </a:defRPr>
+            </a:pPr>
+            <a:r>
+              <a:rPr sz="1388" b="0">
+                <a:solidFill>
+                  <a:srgbClr val="222222"/>
+                </a:solidFill>
+                <a:latin typeface="Pretendard"/>
+                <a:ea typeface="Pretendard"/>
+                <a:cs typeface="Pretendard"/>
+              </a:rPr>
+              <a:t>도착 즉시 충전을 기준으로 단순 규칙을 먼저 비교해도 될까요?</a:t>
+            </a:r>
+          </a:p>
+          <a:p xmlns:a="http://schemas.openxmlformats.org/drawingml/2006/main">
+            <a:pPr algn="l">
+              <a:lnSpc>
+                <a:spcPct val="108000"/>
+              </a:lnSpc>
+              <a:buNone/>
+              <a:defRPr sz="1388" b="0">
+                <a:solidFill>
+                  <a:srgbClr val="222222"/>
+                </a:solidFill>
+                <a:latin typeface="Pretendard"/>
+                <a:ea typeface="Pretendard"/>
+                <a:cs typeface="Pretendard"/>
+              </a:defRPr>
+            </a:pPr>
+            <a:r>
+              <a:rPr sz="1388" b="0">
+                <a:solidFill>
+                  <a:srgbClr val="222222"/>
+                </a:solidFill>
+                <a:latin typeface="Pretendard"/>
+                <a:ea typeface="Pretendard"/>
+                <a:cs typeface="Pretendard"/>
+              </a:rPr>
+              <a:t>최적화는 어느 단계에서 시작하는 것이 좋을까요?</a:t>
+            </a:r>
+          </a:p>
+        </p:txBody>
+      </p:sp>
+      <p:sp>
+        <p:nvSpPr>
+          <p:cNvPr id="16" name="">
+            <a:extLst xmlns:a="http://schemas.openxmlformats.org/drawingml/2006/main">
+              <a:ext uri="{FF2B5EF4-FFF2-40B4-BE49-F238E27FC236}">
+                <a16:creationId xmlns:a16="http://schemas.microsoft.com/office/drawing/2014/main" id="{D5AC98FB-B768-4FDD-BB41-27599F426E8A}"/>
+              </a:ext>
+            </a:extLst>
+          </p:cNvPr>
+          <p:cNvSpPr>
+            <a:spLocks xmlns:a="http://schemas.openxmlformats.org/drawingml/2006/main" noGrp="1"/>
+          </p:cNvSpPr>
+          <p:nvPr/>
+        </p:nvSpPr>
+        <p:spPr>
+          <a:xfrm xmlns:a="http://schemas.openxmlformats.org/drawingml/2006/main">
+            <a:off x="1409700" y="4467225"/>
+            <a:ext cx="10096500" cy="0"/>
+          </a:xfrm>
+          <a:prstGeom xmlns:a="http://schemas.openxmlformats.org/drawingml/2006/main" prst="line">
+            <a:avLst/>
+          </a:prstGeom>
+          <a:noFill xmlns:a="http://schemas.openxmlformats.org/drawingml/2006/main"/>
           <a:ln xmlns:a="http://schemas.openxmlformats.org/drawingml/2006/main" w="9525">
             <a:solidFill>
               <a:srgbClr val="B8B8B8"/>
@@ -5229,73 +5761,13 @@
             <a:prstDash val="solid"/>
           </a:ln>
         </p:spPr>
-        <p:txBody>
-          <a:bodyPr xmlns:a="http://schemas.openxmlformats.org/drawingml/2006/main" lIns="114300" tIns="76200" rIns="114300" bIns="76200" anchor="ctr">
-            <a:noAutofit/>
-          </a:bodyPr>
-          <a:lstStyle xmlns:a="http://schemas.openxmlformats.org/drawingml/2006/main"/>
-          <a:p xmlns:a="http://schemas.openxmlformats.org/drawingml/2006/main">
-            <a:pPr algn="ctr">
-              <a:lnSpc>
-                <a:spcPct val="105000"/>
-              </a:lnSpc>
-              <a:buNone/>
-              <a:defRPr sz="1275">
-                <a:solidFill>
-                  <a:srgbClr val="222222"/>
-                </a:solidFill>
-                <a:latin typeface="Pretendard"/>
-                <a:ea typeface="Pretendard"/>
-                <a:cs typeface="Pretendard"/>
-              </a:defRPr>
-            </a:pPr>
-            <a:r>
-              <a:rPr sz="1275" b="1">
-                <a:solidFill>
-                  <a:srgbClr val="222222"/>
-                </a:solidFill>
-                <a:latin typeface="Pretendard"/>
-                <a:ea typeface="Pretendard"/>
-                <a:cs typeface="Pretendard"/>
-              </a:rPr>
-              <a:t>3. 연구 목적</a:t>
-            </a:r>
-          </a:p>
-          <a:p xmlns:a="http://schemas.openxmlformats.org/drawingml/2006/main">
-            <a:pPr algn="ctr">
-              <a:lnSpc>
-                <a:spcPct val="105000"/>
-              </a:lnSpc>
-              <a:buNone/>
-              <a:defRPr sz="1275">
-                <a:solidFill>
-                  <a:srgbClr val="222222"/>
-                </a:solidFill>
-                <a:latin typeface="Pretendard"/>
-                <a:ea typeface="Pretendard"/>
-                <a:cs typeface="Pretendard"/>
-              </a:defRPr>
-            </a:pPr>
-            <a:r>
-              <a:rPr sz="1275">
-                <a:solidFill>
-                  <a:srgbClr val="222222"/>
-                </a:solidFill>
-                <a:latin typeface="Pretendard"/>
-                <a:ea typeface="Pretendard"/>
-                <a:cs typeface="Pretendard"/>
-              </a:rPr>
-              <a:t>질문을 한 문장으로</a:t>
-            </a:r>
-          </a:p>
-        </p:txBody>
-      </p:sp>
-      <p:sp>
-        <p:nvSpPr>
-          <p:cNvPr id="8" name="">
+      </p:sp>
+      <p:sp>
+        <p:nvSpPr>
+          <p:cNvPr id="17" name="">
             <a:extLst xmlns:a="http://schemas.openxmlformats.org/drawingml/2006/main">
               <a:ext uri="{FF2B5EF4-FFF2-40B4-BE49-F238E27FC236}">
-                <a16:creationId xmlns:a16="http://schemas.microsoft.com/office/drawing/2014/main" id="{FD6DE3C3-EE10-46B6-AB1C-75FDA8E0330E}"/>
+                <a16:creationId xmlns:a16="http://schemas.microsoft.com/office/drawing/2014/main" id="{BF0A097F-E07C-4BF7-8BFD-63493852F36F}"/>
               </a:ext>
             </a:extLst>
           </p:cNvPr>
@@ -5306,298 +5778,8 @@
         </p:nvSpPr>
         <p:spPr>
           <a:xfrm xmlns:a="http://schemas.openxmlformats.org/drawingml/2006/main">
-            <a:off x="7258050" y="1428750"/>
-            <a:ext cx="1809750" cy="990600"/>
-          </a:xfrm>
-          <a:prstGeom xmlns:a="http://schemas.openxmlformats.org/drawingml/2006/main" prst="rect">
-            <a:avLst/>
-          </a:prstGeom>
-          <a:solidFill xmlns:a="http://schemas.openxmlformats.org/drawingml/2006/main">
-            <a:srgbClr val="FFFFFF"/>
-          </a:solidFill>
-          <a:ln xmlns:a="http://schemas.openxmlformats.org/drawingml/2006/main" w="9525">
-            <a:solidFill>
-              <a:srgbClr val="B8B8B8"/>
-            </a:solidFill>
-            <a:prstDash val="solid"/>
-          </a:ln>
-        </p:spPr>
-        <p:txBody>
-          <a:bodyPr xmlns:a="http://schemas.openxmlformats.org/drawingml/2006/main" lIns="114300" tIns="76200" rIns="114300" bIns="76200" anchor="ctr">
-            <a:noAutofit/>
-          </a:bodyPr>
-          <a:lstStyle xmlns:a="http://schemas.openxmlformats.org/drawingml/2006/main"/>
-          <a:p xmlns:a="http://schemas.openxmlformats.org/drawingml/2006/main">
-            <a:pPr algn="ctr">
-              <a:lnSpc>
-                <a:spcPct val="105000"/>
-              </a:lnSpc>
-              <a:buNone/>
-              <a:defRPr sz="1275">
-                <a:solidFill>
-                  <a:srgbClr val="222222"/>
-                </a:solidFill>
-                <a:latin typeface="Pretendard"/>
-                <a:ea typeface="Pretendard"/>
-                <a:cs typeface="Pretendard"/>
-              </a:defRPr>
-            </a:pPr>
-            <a:r>
-              <a:rPr sz="1275" b="1">
-                <a:solidFill>
-                  <a:srgbClr val="222222"/>
-                </a:solidFill>
-                <a:latin typeface="Pretendard"/>
-                <a:ea typeface="Pretendard"/>
-                <a:cs typeface="Pretendard"/>
-              </a:rPr>
-              <a:t>4. 방법</a:t>
-            </a:r>
-          </a:p>
-          <a:p xmlns:a="http://schemas.openxmlformats.org/drawingml/2006/main">
-            <a:pPr algn="ctr">
-              <a:lnSpc>
-                <a:spcPct val="105000"/>
-              </a:lnSpc>
-              <a:buNone/>
-              <a:defRPr sz="1275">
-                <a:solidFill>
-                  <a:srgbClr val="222222"/>
-                </a:solidFill>
-                <a:latin typeface="Pretendard"/>
-                <a:ea typeface="Pretendard"/>
-                <a:cs typeface="Pretendard"/>
-              </a:defRPr>
-            </a:pPr>
-            <a:r>
-              <a:rPr sz="1275">
-                <a:solidFill>
-                  <a:srgbClr val="222222"/>
-                </a:solidFill>
-                <a:latin typeface="Pretendard"/>
-                <a:ea typeface="Pretendard"/>
-                <a:cs typeface="Pretendard"/>
-              </a:rPr>
-              <a:t>데이터·시뮬레이션</a:t>
-            </a:r>
-          </a:p>
-        </p:txBody>
-      </p:sp>
-      <p:sp>
-        <p:nvSpPr>
-          <p:cNvPr id="9" name="">
-            <a:extLst xmlns:a="http://schemas.openxmlformats.org/drawingml/2006/main">
-              <a:ext uri="{FF2B5EF4-FFF2-40B4-BE49-F238E27FC236}">
-                <a16:creationId xmlns:a16="http://schemas.microsoft.com/office/drawing/2014/main" id="{5CF4325B-4C67-4922-89E0-5A2F63588715}"/>
-              </a:ext>
-            </a:extLst>
-          </p:cNvPr>
-          <p:cNvSpPr>
-            <a:spLocks xmlns:a="http://schemas.openxmlformats.org/drawingml/2006/main" noGrp="1"/>
-          </p:cNvSpPr>
-          <p:nvPr/>
-        </p:nvSpPr>
-        <p:spPr>
-          <a:xfrm xmlns:a="http://schemas.openxmlformats.org/drawingml/2006/main">
-            <a:off x="9448800" y="1428750"/>
-            <a:ext cx="1809750" cy="990600"/>
-          </a:xfrm>
-          <a:prstGeom xmlns:a="http://schemas.openxmlformats.org/drawingml/2006/main" prst="rect">
-            <a:avLst/>
-          </a:prstGeom>
-          <a:solidFill xmlns:a="http://schemas.openxmlformats.org/drawingml/2006/main">
-            <a:srgbClr val="F2F2F2"/>
-          </a:solidFill>
-          <a:ln xmlns:a="http://schemas.openxmlformats.org/drawingml/2006/main" w="15240">
-            <a:solidFill>
-              <a:srgbClr val="000000"/>
-            </a:solidFill>
-            <a:prstDash val="solid"/>
-          </a:ln>
-        </p:spPr>
-        <p:txBody>
-          <a:bodyPr xmlns:a="http://schemas.openxmlformats.org/drawingml/2006/main" lIns="114300" tIns="76200" rIns="114300" bIns="76200" anchor="ctr">
-            <a:noAutofit/>
-          </a:bodyPr>
-          <a:lstStyle xmlns:a="http://schemas.openxmlformats.org/drawingml/2006/main"/>
-          <a:p xmlns:a="http://schemas.openxmlformats.org/drawingml/2006/main">
-            <a:pPr algn="ctr">
-              <a:lnSpc>
-                <a:spcPct val="105000"/>
-              </a:lnSpc>
-              <a:buNone/>
-              <a:defRPr sz="1275">
-                <a:solidFill>
-                  <a:srgbClr val="222222"/>
-                </a:solidFill>
-                <a:latin typeface="Pretendard"/>
-                <a:ea typeface="Pretendard"/>
-                <a:cs typeface="Pretendard"/>
-              </a:defRPr>
-            </a:pPr>
-            <a:r>
-              <a:rPr sz="1275" b="1">
-                <a:solidFill>
-                  <a:srgbClr val="222222"/>
-                </a:solidFill>
-                <a:latin typeface="Pretendard"/>
-                <a:ea typeface="Pretendard"/>
-                <a:cs typeface="Pretendard"/>
-              </a:rPr>
-              <a:t>5. 결과·의미</a:t>
-            </a:r>
-          </a:p>
-          <a:p xmlns:a="http://schemas.openxmlformats.org/drawingml/2006/main">
-            <a:pPr algn="ctr">
-              <a:lnSpc>
-                <a:spcPct val="105000"/>
-              </a:lnSpc>
-              <a:buNone/>
-              <a:defRPr sz="1275">
-                <a:solidFill>
-                  <a:srgbClr val="222222"/>
-                </a:solidFill>
-                <a:latin typeface="Pretendard"/>
-                <a:ea typeface="Pretendard"/>
-                <a:cs typeface="Pretendard"/>
-              </a:defRPr>
-            </a:pPr>
-            <a:r>
-              <a:rPr sz="1275">
-                <a:solidFill>
-                  <a:srgbClr val="222222"/>
-                </a:solidFill>
-                <a:latin typeface="Pretendard"/>
-                <a:ea typeface="Pretendard"/>
-                <a:cs typeface="Pretendard"/>
-              </a:rPr>
-              <a:t>왜 그런지 설명</a:t>
-            </a:r>
-          </a:p>
-        </p:txBody>
-      </p:sp>
-      <p:cxnSp>
-        <p:nvCxnSpPr>
-          <p:cNvPr id="26" name=""/>
-          <p:cNvCxnSpPr>
-            <a:stCxn xmlns:a="http://schemas.openxmlformats.org/drawingml/2006/main" id="5" idx="3"/>
-            <a:endCxn xmlns:a="http://schemas.openxmlformats.org/drawingml/2006/main" id="6" idx="1"/>
-          </p:cNvCxnSpPr>
-          <p:nvPr/>
-        </p:nvCxnSpPr>
-        <p:spPr>
-          <a:xfrm xmlns:a="http://schemas.openxmlformats.org/drawingml/2006/main">
-            <a:off x="2495550" y="1924050"/>
-            <a:ext cx="381000" cy="0"/>
-          </a:xfrm>
-          <a:prstGeom xmlns:a="http://schemas.openxmlformats.org/drawingml/2006/main" prst="straightConnector1">
-            <a:avLst/>
-          </a:prstGeom>
-          <a:ln xmlns:a="http://schemas.openxmlformats.org/drawingml/2006/main" w="12383">
-            <a:solidFill>
-              <a:srgbClr val="666666"/>
-            </a:solidFill>
-            <a:prstDash val="solid"/>
-            <a:tailEnd type="arrow" w="sm" len="sm"/>
-          </a:ln>
-        </p:spPr>
-      </p:cxnSp>
-      <p:cxnSp>
-        <p:nvCxnSpPr>
-          <p:cNvPr id="27" name=""/>
-          <p:cNvCxnSpPr>
-            <a:stCxn xmlns:a="http://schemas.openxmlformats.org/drawingml/2006/main" id="6" idx="3"/>
-            <a:endCxn xmlns:a="http://schemas.openxmlformats.org/drawingml/2006/main" id="7" idx="1"/>
-          </p:cNvCxnSpPr>
-          <p:nvPr/>
-        </p:nvCxnSpPr>
-        <p:spPr>
-          <a:xfrm xmlns:a="http://schemas.openxmlformats.org/drawingml/2006/main">
-            <a:off x="4686300" y="1924050"/>
-            <a:ext cx="381000" cy="0"/>
-          </a:xfrm>
-          <a:prstGeom xmlns:a="http://schemas.openxmlformats.org/drawingml/2006/main" prst="straightConnector1">
-            <a:avLst/>
-          </a:prstGeom>
-          <a:ln xmlns:a="http://schemas.openxmlformats.org/drawingml/2006/main" w="12383">
-            <a:solidFill>
-              <a:srgbClr val="666666"/>
-            </a:solidFill>
-            <a:prstDash val="solid"/>
-            <a:tailEnd type="arrow" w="sm" len="sm"/>
-          </a:ln>
-        </p:spPr>
-      </p:cxnSp>
-      <p:cxnSp>
-        <p:nvCxnSpPr>
-          <p:cNvPr id="28" name=""/>
-          <p:cNvCxnSpPr>
-            <a:stCxn xmlns:a="http://schemas.openxmlformats.org/drawingml/2006/main" id="7" idx="3"/>
-            <a:endCxn xmlns:a="http://schemas.openxmlformats.org/drawingml/2006/main" id="8" idx="1"/>
-          </p:cNvCxnSpPr>
-          <p:nvPr/>
-        </p:nvCxnSpPr>
-        <p:spPr>
-          <a:xfrm xmlns:a="http://schemas.openxmlformats.org/drawingml/2006/main">
-            <a:off x="6877050" y="1924050"/>
-            <a:ext cx="381000" cy="0"/>
-          </a:xfrm>
-          <a:prstGeom xmlns:a="http://schemas.openxmlformats.org/drawingml/2006/main" prst="straightConnector1">
-            <a:avLst/>
-          </a:prstGeom>
-          <a:ln xmlns:a="http://schemas.openxmlformats.org/drawingml/2006/main" w="12383">
-            <a:solidFill>
-              <a:srgbClr val="666666"/>
-            </a:solidFill>
-            <a:prstDash val="solid"/>
-            <a:tailEnd type="arrow" w="sm" len="sm"/>
-          </a:ln>
-        </p:spPr>
-      </p:cxnSp>
-      <p:cxnSp>
-        <p:nvCxnSpPr>
-          <p:cNvPr id="29" name=""/>
-          <p:cNvCxnSpPr>
-            <a:stCxn xmlns:a="http://schemas.openxmlformats.org/drawingml/2006/main" id="8" idx="3"/>
-            <a:endCxn xmlns:a="http://schemas.openxmlformats.org/drawingml/2006/main" id="9" idx="1"/>
-          </p:cNvCxnSpPr>
-          <p:nvPr/>
-        </p:nvCxnSpPr>
-        <p:spPr>
-          <a:xfrm xmlns:a="http://schemas.openxmlformats.org/drawingml/2006/main">
-            <a:off x="9067800" y="1924050"/>
-            <a:ext cx="381000" cy="0"/>
-          </a:xfrm>
-          <a:prstGeom xmlns:a="http://schemas.openxmlformats.org/drawingml/2006/main" prst="straightConnector1">
-            <a:avLst/>
-          </a:prstGeom>
-          <a:ln xmlns:a="http://schemas.openxmlformats.org/drawingml/2006/main" w="12383">
-            <a:solidFill>
-              <a:srgbClr val="666666"/>
-            </a:solidFill>
-            <a:prstDash val="solid"/>
-            <a:tailEnd type="arrow" w="sm" len="sm"/>
-          </a:ln>
-        </p:spPr>
-      </p:cxnSp>
-      <p:sp>
-        <p:nvSpPr>
-          <p:cNvPr id="14" name="">
-            <a:extLst xmlns:a="http://schemas.openxmlformats.org/drawingml/2006/main">
-              <a:ext uri="{FF2B5EF4-FFF2-40B4-BE49-F238E27FC236}">
-                <a16:creationId xmlns:a16="http://schemas.microsoft.com/office/drawing/2014/main" id="{E3F685B9-FE69-4C42-808F-39ABFF070B30}"/>
-              </a:ext>
-            </a:extLst>
-          </p:cNvPr>
-          <p:cNvSpPr>
-            <a:spLocks xmlns:a="http://schemas.openxmlformats.org/drawingml/2006/main" noGrp="1"/>
-          </p:cNvSpPr>
-          <p:nvPr/>
-        </p:nvSpPr>
-        <p:spPr>
-          <a:xfrm xmlns:a="http://schemas.openxmlformats.org/drawingml/2006/main">
-            <a:off x="685800" y="2705100"/>
-            <a:ext cx="10820400" cy="323850"/>
+            <a:off x="685800" y="4752975"/>
+            <a:ext cx="514350" cy="590550"/>
           </a:xfrm>
           <a:prstGeom xmlns:a="http://schemas.openxmlformats.org/drawingml/2006/main" prst="rect">
             <a:avLst/>
@@ -5618,9 +5800,9 @@
                 <a:spcPct val="108000"/>
               </a:lnSpc>
               <a:buNone/>
-              <a:defRPr sz="1350" b="1">
-                <a:solidFill>
-                  <a:srgbClr val="222222"/>
+              <a:defRPr sz="2250" b="1">
+                <a:solidFill>
+                  <a:srgbClr val="000000"/>
                 </a:solidFill>
                 <a:latin typeface="Pretendard Medium"/>
                 <a:ea typeface="Pretendard Medium"/>
@@ -5628,463 +5810,25 @@
               </a:defRPr>
             </a:pPr>
             <a:r>
-              <a:rPr sz="1350" b="1">
-                <a:solidFill>
-                  <a:srgbClr val="222222"/>
+              <a:rPr sz="2250" b="1">
+                <a:solidFill>
+                  <a:srgbClr val="000000"/>
                 </a:solidFill>
                 <a:latin typeface="Pretendard Medium"/>
                 <a:ea typeface="Pretendard Medium"/>
                 <a:cs typeface="Pretendard Medium"/>
               </a:rPr>
-              <a:t>결과에서 부족한 점이 보이면 다시 선행연구로 돌아가 이 과정을 반복</a:t>
-            </a:r>
-          </a:p>
-        </p:txBody>
-      </p:sp>
-      <p:graphicFrame>
-        <p:nvGraphicFramePr>
-          <p:cNvPr id="31" name=""/>
-          <p:cNvGraphicFramePr/>
-          <p:nvPr/>
-        </p:nvGraphicFramePr>
-        <p:xfrm>
-          <a:off xmlns:a="http://schemas.openxmlformats.org/drawingml/2006/main" x="685800" y="3362325"/>
-          <a:ext xmlns:a="http://schemas.openxmlformats.org/drawingml/2006/main" cx="10820400" cy="2324100"/>
-        </p:xfrm>
-        <a:graphic xmlns:a="http://schemas.openxmlformats.org/drawingml/2006/main">
-          <a:graphicData uri="http://schemas.openxmlformats.org/drawingml/2006/table">
-            <a:tbl>
-              <a:tblPr/>
-              <a:tblGrid>
-                <a:gridCol w="904875"/>
-                <a:gridCol w="5953125"/>
-                <a:gridCol w="3962400"/>
-              </a:tblGrid>
-              <a:tr h="361950">
-                <a:tc>
-                  <a:txBody>
-                    <a:bodyPr wrap="square" lIns="76200" tIns="38100" rIns="76200" bIns="38100">
-                      <a:noAutofit/>
-                    </a:bodyPr>
-                    <a:lstStyle/>
-                    <a:p>
-                      <a:pPr algn="ctr"/>
-                      <a:r>
-                        <a:rPr sz="1200" b="1">
-                          <a:solidFill>
-                            <a:srgbClr val="FFFFFF"/>
-                          </a:solidFill>
-                          <a:latin typeface="Pretendard Medium"/>
-                          <a:ea typeface="Pretendard Medium"/>
-                          <a:cs typeface="Pretendard Medium"/>
-                        </a:rPr>
-                        <a:t>순서</a:t>
-                      </a:r>
-                    </a:p>
-                  </a:txBody>
-                  <a:tcPr marL="91440" marR="91440" marT="45720" marB="45720" anchor="ctr">
-                    <a:solidFill>
-                      <a:srgbClr val="000000"/>
-                    </a:solidFill>
-                  </a:tcPr>
-                </a:tc>
-                <a:tc>
-                  <a:txBody>
-                    <a:bodyPr wrap="square" lIns="76200" tIns="38100" rIns="76200" bIns="38100">
-                      <a:noAutofit/>
-                    </a:bodyPr>
-                    <a:lstStyle/>
-                    <a:p>
-                      <a:pPr algn="l"/>
-                      <a:r>
-                        <a:rPr sz="1200" b="1">
-                          <a:solidFill>
-                            <a:srgbClr val="FFFFFF"/>
-                          </a:solidFill>
-                          <a:latin typeface="Pretendard Medium"/>
-                          <a:ea typeface="Pretendard Medium"/>
-                          <a:cs typeface="Pretendard Medium"/>
-                        </a:rPr>
-                        <a:t>바로 할 일</a:t>
-                      </a:r>
-                    </a:p>
-                  </a:txBody>
-                  <a:tcPr marL="91440" marR="91440" marT="45720" marB="45720" anchor="ctr">
-                    <a:solidFill>
-                      <a:srgbClr val="000000"/>
-                    </a:solidFill>
-                  </a:tcPr>
-                </a:tc>
-                <a:tc>
-                  <a:txBody>
-                    <a:bodyPr wrap="square" lIns="76200" tIns="38100" rIns="76200" bIns="38100">
-                      <a:noAutofit/>
-                    </a:bodyPr>
-                    <a:lstStyle/>
-                    <a:p>
-                      <a:pPr algn="l"/>
-                      <a:r>
-                        <a:rPr sz="1200" b="1">
-                          <a:solidFill>
-                            <a:srgbClr val="FFFFFF"/>
-                          </a:solidFill>
-                          <a:latin typeface="Pretendard Medium"/>
-                          <a:ea typeface="Pretendard Medium"/>
-                          <a:cs typeface="Pretendard Medium"/>
-                        </a:rPr>
-                        <a:t>남길 결과</a:t>
-                      </a:r>
-                    </a:p>
-                  </a:txBody>
-                  <a:tcPr marL="91440" marR="91440" marT="45720" marB="45720" anchor="ctr">
-                    <a:solidFill>
-                      <a:srgbClr val="000000"/>
-                    </a:solidFill>
-                  </a:tcPr>
-                </a:tc>
-              </a:tr>
-              <a:tr h="485775">
-                <a:tc>
-                  <a:txBody>
-                    <a:bodyPr wrap="square" lIns="76200" tIns="38100" rIns="76200" bIns="38100">
-                      <a:noAutofit/>
-                    </a:bodyPr>
-                    <a:lstStyle/>
-                    <a:p>
-                      <a:pPr algn="ctr"/>
-                      <a:r>
-                        <a:rPr sz="1238" b="1">
-                          <a:solidFill>
-                            <a:srgbClr val="222222"/>
-                          </a:solidFill>
-                          <a:latin typeface="Pretendard Medium"/>
-                          <a:ea typeface="Pretendard Medium"/>
-                          <a:cs typeface="Pretendard Medium"/>
-                        </a:rPr>
-                        <a:t>1</a:t>
-                      </a:r>
-                    </a:p>
-                  </a:txBody>
-                  <a:tcPr marL="91440" marR="91440" marT="45720" marB="45720" anchor="ctr">
-                    <a:solidFill>
-                      <a:srgbClr val="FFFFFF"/>
-                    </a:solidFill>
-                  </a:tcPr>
-                </a:tc>
-                <a:tc>
-                  <a:txBody>
-                    <a:bodyPr wrap="square" lIns="76200" tIns="38100" rIns="76200" bIns="38100">
-                      <a:noAutofit/>
-                    </a:bodyPr>
-                    <a:lstStyle/>
-                    <a:p>
-                      <a:pPr algn="l"/>
-                      <a:r>
-                        <a:rPr sz="1238" b="0">
-                          <a:solidFill>
-                            <a:srgbClr val="222222"/>
-                          </a:solidFill>
-                          <a:latin typeface="Pretendard"/>
-                          <a:ea typeface="Pretendard"/>
-                          <a:cs typeface="Pretendard"/>
-                        </a:rPr>
-                        <a:t>핵심 논문 4편을 같은 형식으로 비교</a:t>
-                      </a:r>
-                    </a:p>
-                  </a:txBody>
-                  <a:tcPr marL="91440" marR="91440" marT="45720" marB="45720" anchor="ctr">
-                    <a:solidFill>
-                      <a:srgbClr val="FFFFFF"/>
-                    </a:solidFill>
-                  </a:tcPr>
-                </a:tc>
-                <a:tc>
-                  <a:txBody>
-                    <a:bodyPr wrap="square" lIns="76200" tIns="38100" rIns="76200" bIns="38100">
-                      <a:noAutofit/>
-                    </a:bodyPr>
-                    <a:lstStyle/>
-                    <a:p>
-                      <a:pPr algn="l"/>
-                      <a:r>
-                        <a:rPr sz="1238" b="0">
-                          <a:solidFill>
-                            <a:srgbClr val="222222"/>
-                          </a:solidFill>
-                          <a:latin typeface="Pretendard"/>
-                          <a:ea typeface="Pretendard"/>
-                          <a:cs typeface="Pretendard"/>
-                        </a:rPr>
-                        <a:t>논문 비교표</a:t>
-                      </a:r>
-                    </a:p>
-                  </a:txBody>
-                  <a:tcPr marL="91440" marR="91440" marT="45720" marB="45720" anchor="ctr">
-                    <a:solidFill>
-                      <a:srgbClr val="FFFFFF"/>
-                    </a:solidFill>
-                  </a:tcPr>
-                </a:tc>
-              </a:tr>
-              <a:tr h="485775">
-                <a:tc>
-                  <a:txBody>
-                    <a:bodyPr wrap="square" lIns="76200" tIns="38100" rIns="76200" bIns="38100">
-                      <a:noAutofit/>
-                    </a:bodyPr>
-                    <a:lstStyle/>
-                    <a:p>
-                      <a:pPr algn="ctr"/>
-                      <a:r>
-                        <a:rPr sz="1238" b="1">
-                          <a:solidFill>
-                            <a:srgbClr val="222222"/>
-                          </a:solidFill>
-                          <a:latin typeface="Pretendard Medium"/>
-                          <a:ea typeface="Pretendard Medium"/>
-                          <a:cs typeface="Pretendard Medium"/>
-                        </a:rPr>
-                        <a:t>2</a:t>
-                      </a:r>
-                    </a:p>
-                  </a:txBody>
-                  <a:tcPr marL="91440" marR="91440" marT="45720" marB="45720" anchor="ctr">
-                    <a:solidFill>
-                      <a:srgbClr val="FFFFFF"/>
-                    </a:solidFill>
-                  </a:tcPr>
-                </a:tc>
-                <a:tc>
-                  <a:txBody>
-                    <a:bodyPr wrap="square" lIns="76200" tIns="38100" rIns="76200" bIns="38100">
-                      <a:noAutofit/>
-                    </a:bodyPr>
-                    <a:lstStyle/>
-                    <a:p>
-                      <a:pPr algn="l"/>
-                      <a:r>
-                        <a:rPr sz="1238" b="0">
-                          <a:solidFill>
-                            <a:srgbClr val="222222"/>
-                          </a:solidFill>
-                          <a:latin typeface="Pretendard"/>
-                          <a:ea typeface="Pretendard"/>
-                          <a:cs typeface="Pretendard"/>
-                        </a:rPr>
-                        <a:t>GTFS 노선 하나와 같은 노선의 BIS 자료 연결</a:t>
-                      </a:r>
-                    </a:p>
-                  </a:txBody>
-                  <a:tcPr marL="91440" marR="91440" marT="45720" marB="45720" anchor="ctr">
-                    <a:solidFill>
-                      <a:srgbClr val="FFFFFF"/>
-                    </a:solidFill>
-                  </a:tcPr>
-                </a:tc>
-                <a:tc>
-                  <a:txBody>
-                    <a:bodyPr wrap="square" lIns="76200" tIns="38100" rIns="76200" bIns="38100">
-                      <a:noAutofit/>
-                    </a:bodyPr>
-                    <a:lstStyle/>
-                    <a:p>
-                      <a:pPr algn="l"/>
-                      <a:r>
-                        <a:rPr sz="1238" b="0">
-                          <a:solidFill>
-                            <a:srgbClr val="222222"/>
-                          </a:solidFill>
-                          <a:latin typeface="Pretendard"/>
-                          <a:ea typeface="Pretendard"/>
-                          <a:cs typeface="Pretendard"/>
-                        </a:rPr>
-                        <a:t>정류장·시간 연결표</a:t>
-                      </a:r>
-                    </a:p>
-                  </a:txBody>
-                  <a:tcPr marL="91440" marR="91440" marT="45720" marB="45720" anchor="ctr">
-                    <a:solidFill>
-                      <a:srgbClr val="FFFFFF"/>
-                    </a:solidFill>
-                  </a:tcPr>
-                </a:tc>
-              </a:tr>
-              <a:tr h="485775">
-                <a:tc>
-                  <a:txBody>
-                    <a:bodyPr wrap="square" lIns="76200" tIns="38100" rIns="76200" bIns="38100">
-                      <a:noAutofit/>
-                    </a:bodyPr>
-                    <a:lstStyle/>
-                    <a:p>
-                      <a:pPr algn="ctr"/>
-                      <a:r>
-                        <a:rPr sz="1238" b="1">
-                          <a:solidFill>
-                            <a:srgbClr val="222222"/>
-                          </a:solidFill>
-                          <a:latin typeface="Pretendard Medium"/>
-                          <a:ea typeface="Pretendard Medium"/>
-                          <a:cs typeface="Pretendard Medium"/>
-                        </a:rPr>
-                        <a:t>3</a:t>
-                      </a:r>
-                    </a:p>
-                  </a:txBody>
-                  <a:tcPr marL="91440" marR="91440" marT="45720" marB="45720" anchor="ctr">
-                    <a:solidFill>
-                      <a:srgbClr val="FFFFFF"/>
-                    </a:solidFill>
-                  </a:tcPr>
-                </a:tc>
-                <a:tc>
-                  <a:txBody>
-                    <a:bodyPr wrap="square" lIns="76200" tIns="38100" rIns="76200" bIns="38100">
-                      <a:noAutofit/>
-                    </a:bodyPr>
-                    <a:lstStyle/>
-                    <a:p>
-                      <a:pPr algn="l"/>
-                      <a:r>
-                        <a:rPr sz="1238" b="0">
-                          <a:solidFill>
-                            <a:srgbClr val="222222"/>
-                          </a:solidFill>
-                          <a:latin typeface="Pretendard"/>
-                          <a:ea typeface="Pretendard"/>
-                          <a:cs typeface="Pretendard"/>
-                        </a:rPr>
-                        <a:t>버스 약 3대와 충전기 1대 예제 실행</a:t>
-                      </a:r>
-                    </a:p>
-                  </a:txBody>
-                  <a:tcPr marL="91440" marR="91440" marT="45720" marB="45720" anchor="ctr">
-                    <a:solidFill>
-                      <a:srgbClr val="FFFFFF"/>
-                    </a:solidFill>
-                  </a:tcPr>
-                </a:tc>
-                <a:tc>
-                  <a:txBody>
-                    <a:bodyPr wrap="square" lIns="76200" tIns="38100" rIns="76200" bIns="38100">
-                      <a:noAutofit/>
-                    </a:bodyPr>
-                    <a:lstStyle/>
-                    <a:p>
-                      <a:pPr algn="l"/>
-                      <a:r>
-                        <a:rPr sz="1238" b="0">
-                          <a:solidFill>
-                            <a:srgbClr val="222222"/>
-                          </a:solidFill>
-                          <a:latin typeface="Pretendard"/>
-                          <a:ea typeface="Pretendard"/>
-                          <a:cs typeface="Pretendard"/>
-                        </a:rPr>
-                        <a:t>운행·SOC·충전 상태 기록</a:t>
-                      </a:r>
-                    </a:p>
-                  </a:txBody>
-                  <a:tcPr marL="91440" marR="91440" marT="45720" marB="45720" anchor="ctr">
-                    <a:solidFill>
-                      <a:srgbClr val="FFFFFF"/>
-                    </a:solidFill>
-                  </a:tcPr>
-                </a:tc>
-              </a:tr>
-              <a:tr h="485775">
-                <a:tc>
-                  <a:txBody>
-                    <a:bodyPr wrap="square" lIns="76200" tIns="38100" rIns="76200" bIns="38100">
-                      <a:noAutofit/>
-                    </a:bodyPr>
-                    <a:lstStyle/>
-                    <a:p>
-                      <a:pPr algn="ctr"/>
-                      <a:r>
-                        <a:rPr sz="1238" b="1">
-                          <a:solidFill>
-                            <a:srgbClr val="222222"/>
-                          </a:solidFill>
-                          <a:latin typeface="Pretendard Medium"/>
-                          <a:ea typeface="Pretendard Medium"/>
-                          <a:cs typeface="Pretendard Medium"/>
-                        </a:rPr>
-                        <a:t>4</a:t>
-                      </a:r>
-                    </a:p>
-                  </a:txBody>
-                  <a:tcPr marL="91440" marR="91440" marT="45720" marB="45720" anchor="ctr">
-                    <a:solidFill>
-                      <a:srgbClr val="FFFFFF"/>
-                    </a:solidFill>
-                  </a:tcPr>
-                </a:tc>
-                <a:tc>
-                  <a:txBody>
-                    <a:bodyPr wrap="square" lIns="76200" tIns="38100" rIns="76200" bIns="38100">
-                      <a:noAutofit/>
-                    </a:bodyPr>
-                    <a:lstStyle/>
-                    <a:p>
-                      <a:pPr algn="l"/>
-                      <a:r>
-                        <a:rPr sz="1238" b="0">
-                          <a:solidFill>
-                            <a:srgbClr val="222222"/>
-                          </a:solidFill>
-                          <a:latin typeface="Pretendard"/>
-                          <a:ea typeface="Pretendard"/>
-                          <a:cs typeface="Pretendard"/>
-                        </a:rPr>
-                        <a:t>두 충전 방법과 충전기 수·출력 비교</a:t>
-                      </a:r>
-                    </a:p>
-                  </a:txBody>
-                  <a:tcPr marL="91440" marR="91440" marT="45720" marB="45720" anchor="ctr">
-                    <a:solidFill>
-                      <a:srgbClr val="FFFFFF"/>
-                    </a:solidFill>
-                  </a:tcPr>
-                </a:tc>
-                <a:tc>
-                  <a:txBody>
-                    <a:bodyPr wrap="square" lIns="76200" tIns="38100" rIns="76200" bIns="38100">
-                      <a:noAutofit/>
-                    </a:bodyPr>
-                    <a:lstStyle/>
-                    <a:p>
-                      <a:pPr algn="l"/>
-                      <a:r>
-                        <a:rPr sz="1238" b="0">
-                          <a:solidFill>
-                            <a:srgbClr val="222222"/>
-                          </a:solidFill>
-                          <a:latin typeface="Pretendard"/>
-                          <a:ea typeface="Pretendard"/>
-                          <a:cs typeface="Pretendard"/>
-                        </a:rPr>
-                        <a:t>지연·대기·배터리 결과</a:t>
-                      </a:r>
-                    </a:p>
-                  </a:txBody>
-                  <a:tcPr marL="91440" marR="91440" marT="45720" marB="45720" anchor="ctr">
-                    <a:solidFill>
-                      <a:srgbClr val="FFFFFF"/>
-                    </a:solidFill>
-                  </a:tcPr>
-                </a:tc>
-              </a:tr>
-            </a:tbl>
-          </a:graphicData>
-        </a:graphic>
-      </p:graphicFrame>
-      <p:sp>
-        <p:nvSpPr>
-          <p:cNvPr id="16" name="">
+              <a:t>4</a:t>
+            </a:r>
+          </a:p>
+        </p:txBody>
+      </p:sp>
+      <p:sp>
+        <p:nvSpPr>
+          <p:cNvPr id="18" name="">
             <a:extLst xmlns:a="http://schemas.openxmlformats.org/drawingml/2006/main">
               <a:ext uri="{FF2B5EF4-FFF2-40B4-BE49-F238E27FC236}">
-                <a16:creationId xmlns:a16="http://schemas.microsoft.com/office/drawing/2014/main" id="{56C23C45-BF40-40E9-AC37-72160B420133}"/>
+                <a16:creationId xmlns:a16="http://schemas.microsoft.com/office/drawing/2014/main" id="{3598BD58-E873-4498-BF19-1F9214CD304E}"/>
               </a:ext>
             </a:extLst>
           </p:cNvPr>
@@ -6095,8 +5839,157 @@
         </p:nvSpPr>
         <p:spPr>
           <a:xfrm xmlns:a="http://schemas.openxmlformats.org/drawingml/2006/main">
-            <a:off x="685800" y="5905500"/>
-            <a:ext cx="10820400" cy="285750"/>
+            <a:off x="1409700" y="4772025"/>
+            <a:ext cx="1619250" cy="285750"/>
+          </a:xfrm>
+          <a:prstGeom xmlns:a="http://schemas.openxmlformats.org/drawingml/2006/main" prst="rect">
+            <a:avLst/>
+          </a:prstGeom>
+          <a:noFill xmlns:a="http://schemas.openxmlformats.org/drawingml/2006/main"/>
+          <a:ln xmlns:a="http://schemas.openxmlformats.org/drawingml/2006/main" w="0">
+            <a:noFill/>
+          </a:ln>
+        </p:spPr>
+        <p:txBody>
+          <a:bodyPr xmlns:a="http://schemas.openxmlformats.org/drawingml/2006/main" wrap="square" lIns="0" tIns="0" rIns="0" bIns="0" anchor="t">
+            <a:noAutofit/>
+          </a:bodyPr>
+          <a:lstStyle xmlns:a="http://schemas.openxmlformats.org/drawingml/2006/main"/>
+          <a:p xmlns:a="http://schemas.openxmlformats.org/drawingml/2006/main">
+            <a:pPr algn="l">
+              <a:lnSpc>
+                <a:spcPct val="108000"/>
+              </a:lnSpc>
+              <a:buNone/>
+              <a:defRPr sz="1500" b="1">
+                <a:solidFill>
+                  <a:srgbClr val="000000"/>
+                </a:solidFill>
+                <a:latin typeface="Pretendard Medium"/>
+                <a:ea typeface="Pretendard Medium"/>
+                <a:cs typeface="Pretendard Medium"/>
+              </a:defRPr>
+            </a:pPr>
+            <a:r>
+              <a:rPr sz="1500" b="1">
+                <a:solidFill>
+                  <a:srgbClr val="000000"/>
+                </a:solidFill>
+                <a:latin typeface="Pretendard Medium"/>
+                <a:ea typeface="Pretendard Medium"/>
+                <a:cs typeface="Pretendard Medium"/>
+              </a:rPr>
+              <a:t>연구 범위</a:t>
+            </a:r>
+          </a:p>
+        </p:txBody>
+      </p:sp>
+      <p:sp>
+        <p:nvSpPr>
+          <p:cNvPr id="19" name="">
+            <a:extLst xmlns:a="http://schemas.openxmlformats.org/drawingml/2006/main">
+              <a:ext uri="{FF2B5EF4-FFF2-40B4-BE49-F238E27FC236}">
+                <a16:creationId xmlns:a16="http://schemas.microsoft.com/office/drawing/2014/main" id="{A1B6B117-EC12-4FB4-8029-B29596B5C03B}"/>
+              </a:ext>
+            </a:extLst>
+          </p:cNvPr>
+          <p:cNvSpPr>
+            <a:spLocks xmlns:a="http://schemas.openxmlformats.org/drawingml/2006/main" noGrp="1"/>
+          </p:cNvSpPr>
+          <p:nvPr/>
+        </p:nvSpPr>
+        <p:spPr>
+          <a:xfrm xmlns:a="http://schemas.openxmlformats.org/drawingml/2006/main">
+            <a:off x="3048000" y="4752975"/>
+            <a:ext cx="8458200" cy="666750"/>
+          </a:xfrm>
+          <a:prstGeom xmlns:a="http://schemas.openxmlformats.org/drawingml/2006/main" prst="rect">
+            <a:avLst/>
+          </a:prstGeom>
+          <a:noFill xmlns:a="http://schemas.openxmlformats.org/drawingml/2006/main"/>
+          <a:ln xmlns:a="http://schemas.openxmlformats.org/drawingml/2006/main" w="0">
+            <a:noFill/>
+          </a:ln>
+        </p:spPr>
+        <p:txBody>
+          <a:bodyPr xmlns:a="http://schemas.openxmlformats.org/drawingml/2006/main" wrap="square" lIns="0" tIns="0" rIns="0" bIns="0" anchor="ctr">
+            <a:noAutofit/>
+          </a:bodyPr>
+          <a:lstStyle xmlns:a="http://schemas.openxmlformats.org/drawingml/2006/main"/>
+          <a:p xmlns:a="http://schemas.openxmlformats.org/drawingml/2006/main">
+            <a:pPr algn="l">
+              <a:lnSpc>
+                <a:spcPct val="108000"/>
+              </a:lnSpc>
+              <a:buNone/>
+              <a:defRPr sz="1388" b="0">
+                <a:solidFill>
+                  <a:srgbClr val="222222"/>
+                </a:solidFill>
+                <a:latin typeface="Pretendard"/>
+                <a:ea typeface="Pretendard"/>
+                <a:cs typeface="Pretendard"/>
+              </a:defRPr>
+            </a:pPr>
+            <a:r>
+              <a:rPr sz="1388" b="0">
+                <a:solidFill>
+                  <a:srgbClr val="222222"/>
+                </a:solidFill>
+                <a:latin typeface="Pretendard"/>
+                <a:ea typeface="Pretendard"/>
+                <a:cs typeface="Pretendard"/>
+              </a:rPr>
+              <a:t>충전시설·충전 방법·운영 방법을 같이 보는 범위가 너무 넓을까요?</a:t>
+            </a:r>
+          </a:p>
+          <a:p xmlns:a="http://schemas.openxmlformats.org/drawingml/2006/main">
+            <a:pPr algn="l">
+              <a:lnSpc>
+                <a:spcPct val="108000"/>
+              </a:lnSpc>
+              <a:buNone/>
+              <a:defRPr sz="1388" b="0">
+                <a:solidFill>
+                  <a:srgbClr val="222222"/>
+                </a:solidFill>
+                <a:latin typeface="Pretendard"/>
+                <a:ea typeface="Pretendard"/>
+                <a:cs typeface="Pretendard"/>
+              </a:defRPr>
+            </a:pPr>
+            <a:r>
+              <a:rPr sz="1388" b="0">
+                <a:solidFill>
+                  <a:srgbClr val="222222"/>
+                </a:solidFill>
+                <a:latin typeface="Pretendard"/>
+                <a:ea typeface="Pretendard"/>
+                <a:cs typeface="Pretendard"/>
+              </a:rPr>
+              <a:t>첫 연구에서 가장 먼저 좁혀야 할 부분은 무엇일까요?</a:t>
+            </a:r>
+          </a:p>
+        </p:txBody>
+      </p:sp>
+      <p:sp>
+        <p:nvSpPr>
+          <p:cNvPr id="20" name="">
+            <a:extLst xmlns:a="http://schemas.openxmlformats.org/drawingml/2006/main">
+              <a:ext uri="{FF2B5EF4-FFF2-40B4-BE49-F238E27FC236}">
+                <a16:creationId xmlns:a16="http://schemas.microsoft.com/office/drawing/2014/main" id="{CE3046CE-B694-47D0-8472-AEA5BD6FB15D}"/>
+              </a:ext>
+            </a:extLst>
+          </p:cNvPr>
+          <p:cNvSpPr>
+            <a:spLocks xmlns:a="http://schemas.openxmlformats.org/drawingml/2006/main" noGrp="1"/>
+          </p:cNvSpPr>
+          <p:nvPr/>
+        </p:nvSpPr>
+        <p:spPr>
+          <a:xfrm xmlns:a="http://schemas.openxmlformats.org/drawingml/2006/main">
+            <a:off x="685800" y="5876925"/>
+            <a:ext cx="10820400" cy="323850"/>
           </a:xfrm>
           <a:prstGeom xmlns:a="http://schemas.openxmlformats.org/drawingml/2006/main" prst="rect">
             <a:avLst/>
@@ -6117,7 +6010,7 @@
                 <a:spcPct val="108000"/>
               </a:lnSpc>
               <a:buNone/>
-              <a:defRPr sz="1425" b="1">
+              <a:defRPr sz="1500" b="1">
                 <a:solidFill>
                   <a:srgbClr val="222222"/>
                 </a:solidFill>
@@ -6127,7 +6020,7 @@
               </a:defRPr>
             </a:pPr>
             <a:r>
-              <a:rPr sz="1425" b="1">
+              <a:rPr sz="1500" b="1">
                 <a:solidFill>
                   <a:srgbClr val="222222"/>
                 </a:solidFill>
@@ -6135,7 +6028,7 @@
                 <a:ea typeface="Pretendard Medium"/>
                 <a:cs typeface="Pretendard Medium"/>
               </a:rPr>
-              <a:t>내일 미팅에서는 연구가 완성됐다고 말하지 않고, 질문·방법·첫 실험 범위를 확인받는다.</a:t>
+              <a:t>오늘 자문을 반영해 연구 질문과 첫 실험 범위를 다시 수정할 예정입니다.</a:t>
             </a:r>
           </a:p>
         </p:txBody>
@@ -6143,7 +6036,7 @@
     </p:spTree>
     <p:extLst>
       <p:ext uri="{BB962C8B-B14F-4D97-AF65-F5344CB8AC3E}">
-        <p14:creationId xmlns:p14="http://schemas.microsoft.com/office/powerpoint/2010/main" val="283070179"/>
+        <p14:creationId xmlns:p14="http://schemas.microsoft.com/office/powerpoint/2010/main" val="1784595215"/>
       </p:ext>
     </p:extLst>
   </p:cSld>

--- a/전기버스_충전운영_건국대미팅_2026-10-08.pptx
+++ b/전기버스_충전운영_건국대미팅_2026-10-08.pptx
@@ -2,17 +2,17 @@
 <file path=ppt/presentation.xml><?xml version="1.0" encoding="utf-8"?>
 <p:presentation xmlns:p="http://schemas.openxmlformats.org/presentationml/2006/main">
   <p:sldMasterIdLst>
-    <p:sldMasterId xmlns:r="http://schemas.openxmlformats.org/officeDocument/2006/relationships" id="2147483648" r:id="Ra8b961f743f94ed5"/>
+    <p:sldMasterId xmlns:r="http://schemas.openxmlformats.org/officeDocument/2006/relationships" id="2147483648" r:id="R34183ac1410b4baa"/>
   </p:sldMasterIdLst>
   <p:notesMasterIdLst>
-    <p:notesMasterId xmlns:r="http://schemas.openxmlformats.org/officeDocument/2006/relationships" r:id="R5745133564994f86"/>
+    <p:notesMasterId xmlns:r="http://schemas.openxmlformats.org/officeDocument/2006/relationships" r:id="R3f654eeab2f04084"/>
   </p:notesMasterIdLst>
   <p:sldIdLst>
-    <p:sldId xmlns:r="http://schemas.openxmlformats.org/officeDocument/2006/relationships" id="256" r:id="R23a31b314bd64ba2"/>
-    <p:sldId xmlns:r="http://schemas.openxmlformats.org/officeDocument/2006/relationships" id="257" r:id="Ra1e4f1f30a8342ad"/>
-    <p:sldId xmlns:r="http://schemas.openxmlformats.org/officeDocument/2006/relationships" id="258" r:id="R3b65b1caffae4c97"/>
-    <p:sldId xmlns:r="http://schemas.openxmlformats.org/officeDocument/2006/relationships" id="259" r:id="R2313c5abebe04647"/>
-    <p:sldId xmlns:r="http://schemas.openxmlformats.org/officeDocument/2006/relationships" id="260" r:id="R5daabef7e031438b"/>
+    <p:sldId xmlns:r="http://schemas.openxmlformats.org/officeDocument/2006/relationships" id="256" r:id="R25e4f22918194be3"/>
+    <p:sldId xmlns:r="http://schemas.openxmlformats.org/officeDocument/2006/relationships" id="257" r:id="R7712735403494663"/>
+    <p:sldId xmlns:r="http://schemas.openxmlformats.org/officeDocument/2006/relationships" id="258" r:id="R29157e6398424a4c"/>
+    <p:sldId xmlns:r="http://schemas.openxmlformats.org/officeDocument/2006/relationships" id="259" r:id="R1de5e7bb431348c3"/>
+    <p:sldId xmlns:r="http://schemas.openxmlformats.org/officeDocument/2006/relationships" id="260" r:id="Rd39215b5c6284ece"/>
   </p:sldIdLst>
   <p:sldSz cx="12192000" cy="6858000"/>
   <p:notesSz cx="6858000" cy="9144000"/>
@@ -451,12 +451,12 @@
           </a:p>
           <a:p xmlns:a="http://schemas.openxmlformats.org/drawingml/2006/main">
             <a:r>
-              <a:t>오늘은 선행연구를 자세히 설명하기보다 제가 현재 어떤 연구 문제를 생각하고 있고, 앞으로 어떤 방법으로 구체화하려는지 말씀드린 뒤 의견을 받고 싶습니다.</a:t>
-            </a:r>
-          </a:p>
-          <a:p xmlns:a="http://schemas.openxmlformats.org/drawingml/2006/main">
-            <a:r>
-              <a:t>아직 데이터 선정, 실제 시뮬레이션과 알고리즘은 확정하거나 완료하지 않았습니다.</a:t>
+              <a:t>현재 연구 결과가 나온 단계는 아니고, 개인미팅을 통해 연구 문제와 첫 구현 방향을 정리했습니다.</a:t>
+            </a:r>
+          </a:p>
+          <a:p xmlns:a="http://schemas.openxmlformats.org/drawingml/2006/main">
+            <a:r>
+              <a:t>오늘은 현재까지 정리한 내용을 공유하고, 건대에서 진행 중인 DTUMOS 택시 연구와 제 전기버스 연구를 어떻게 연결하면 좋을지 같이 논의하고 싶습니다.</a:t>
             </a:r>
           </a:p>
         </p:txBody>
@@ -701,7 +701,7 @@
           </a:p>
           <a:p xmlns:a="http://schemas.openxmlformats.org/drawingml/2006/main">
             <a:r>
-              <a:t>자문을 받은 뒤 첫 사이클은 노선 하나를 정하고, 버스 세 대 정도와 충전기 한 대의 작은 예제를 만드는 것으로 생각하고 있습니다.</a:t>
+              <a:t>공동연구 논의 후 첫 사이클은 노선 하나를 정하고, 버스 세 대 정도와 충전기 한 대의 작은 예제를 만드는 것으로 생각하고 있습니다.</a:t>
             </a:r>
           </a:p>
           <a:p xmlns:a="http://schemas.openxmlformats.org/drawingml/2006/main">
@@ -711,7 +711,7 @@
           </a:p>
           <a:p xmlns:a="http://schemas.openxmlformats.org/drawingml/2006/main">
             <a:r>
-              <a:t>다만 데이터 범위, 시뮬레이션의 현실성 수준과 알고리즘 시작점을 아직 정하지 못해 이 부분을 자문받고 싶습니다.</a:t>
+              <a:t>다만 데이터 범위, 시뮬레이션의 현실성 수준과 알고리즘 시작점을 아직 정하지 못해 이 부분을 함께 논의하고 싶습니다.</a:t>
             </a:r>
           </a:p>
         </p:txBody>
@@ -786,17 +786,17 @@
           </a:p>
           <a:p xmlns:a="http://schemas.openxmlformats.org/drawingml/2006/main">
             <a:r>
-              <a:t>현재 가장 자문받고 싶은 내용은 네 가지입니다.</a:t>
-            </a:r>
-          </a:p>
-          <a:p xmlns:a="http://schemas.openxmlformats.org/drawingml/2006/main">
-            <a:r>
-              <a:t>첫째는 GTFS와 BIS를 함께 사용하는 데이터 방향, 둘째는 작은 시뮬레이션의 적절한 범위입니다.</a:t>
-            </a:r>
-          </a:p>
-          <a:p xmlns:a="http://schemas.openxmlformats.org/drawingml/2006/main">
-            <a:r>
-              <a:t>셋째는 단순 충전 규칙과 최적화 중 어디서 시작할지, 넷째는 현재 생각한 연구 범위를 어떻게 좁힐지입니다.</a:t>
+              <a:t>공동연구 관점에서 함께 논의하고 싶은 내용은 네 가지입니다.</a:t>
+            </a:r>
+          </a:p>
+          <a:p xmlns:a="http://schemas.openxmlformats.org/drawingml/2006/main">
+            <a:r>
+              <a:t>첫째는 택시와 전기버스 연구가 함께 사용할 DTUMOS 구조와 평가지표입니다. 둘째는 두 연구의 데이터 범위를 어떻게 맞출지입니다.</a:t>
+            </a:r>
+          </a:p>
+          <a:p xmlns:a="http://schemas.openxmlformats.org/drawingml/2006/main">
+            <a:r>
+              <a:t>셋째는 전기버스 시험 구현과 충전 방법 비교의 순서입니다. 넷째는 공동논문의 질문과 제 전기버스 파트의 역할입니다.</a:t>
             </a:r>
           </a:p>
         </p:txBody>
@@ -864,7 +864,7 @@
   </p:cSld>
   <p:clrMap bg1="lt1" tx1="dk1" bg2="lt2" tx2="dk2" accent1="accent1" accent2="accent2" accent3="accent3" accent4="accent4" accent5="accent5" accent6="accent6" hlink="hlink" folHlink="folHlink"/>
   <p:sldLayoutIdLst>
-    <p:sldLayoutId xmlns:r="http://schemas.openxmlformats.org/officeDocument/2006/relationships" id="2147483649" r:id="R20de749a2a2d4a5a"/>
+    <p:sldLayoutId xmlns:r="http://schemas.openxmlformats.org/officeDocument/2006/relationships" id="2147483649" r:id="R250b4037da8e4de4"/>
   </p:sldLayoutIdLst>
   <p:txStyles>
     <p:titleStyle>
@@ -1415,7 +1415,7 @@
           <p:cNvPr id="7" name="">
             <a:extLst xmlns:a="http://schemas.openxmlformats.org/drawingml/2006/main">
               <a:ext uri="{FF2B5EF4-FFF2-40B4-BE49-F238E27FC236}">
-                <a16:creationId xmlns:a16="http://schemas.microsoft.com/office/drawing/2014/main" id="{A6C6479C-2AEA-43A1-8432-F6AA37092C0B}"/>
+                <a16:creationId xmlns:a16="http://schemas.microsoft.com/office/drawing/2014/main" id="{914C635D-4597-4749-8455-99BD0CBB9F3B}"/>
               </a:ext>
             </a:extLst>
           </p:cNvPr>
@@ -1466,7 +1466,7 @@
                 <a:ea typeface="Pretendard Medium"/>
                 <a:cs typeface="Pretendard Medium"/>
               </a:rPr>
-              <a:t>전기버스 충전 운영 연구계획 자문</a:t>
+              <a:t>전기버스 충전 운영 연구 진행 공유</a:t>
             </a:r>
           </a:p>
         </p:txBody>
@@ -1476,7 +1476,7 @@
           <p:cNvPr id="2" name="">
             <a:extLst xmlns:a="http://schemas.openxmlformats.org/drawingml/2006/main">
               <a:ext uri="{FF2B5EF4-FFF2-40B4-BE49-F238E27FC236}">
-                <a16:creationId xmlns:a16="http://schemas.microsoft.com/office/drawing/2014/main" id="{827B4CDD-C319-4D79-A4D5-C7E7EA72F412}"/>
+                <a16:creationId xmlns:a16="http://schemas.microsoft.com/office/drawing/2014/main" id="{DB678975-0FF4-4371-9D08-6D582F4A9D9A}"/>
               </a:ext>
             </a:extLst>
           </p:cNvPr>
@@ -1527,7 +1527,7 @@
                 <a:ea typeface="Pretendard"/>
                 <a:cs typeface="Pretendard"/>
               </a:rPr>
-              <a:t>현재 연구 방향과 방법론 설계를 위한 의견 요청</a:t>
+              <a:t>DTUMOS 공동연구 연계와 다음 단계 논의</a:t>
             </a:r>
           </a:p>
         </p:txBody>
@@ -1537,7 +1537,7 @@
           <p:cNvPr id="3" name="">
             <a:extLst xmlns:a="http://schemas.openxmlformats.org/drawingml/2006/main">
               <a:ext uri="{FF2B5EF4-FFF2-40B4-BE49-F238E27FC236}">
-                <a16:creationId xmlns:a16="http://schemas.microsoft.com/office/drawing/2014/main" id="{0F6A0BFC-58B0-4CAF-BA3E-537398971C70}"/>
+                <a16:creationId xmlns:a16="http://schemas.microsoft.com/office/drawing/2014/main" id="{B544EE49-D174-4F70-89C0-7E7AE43B8ED9}"/>
               </a:ext>
             </a:extLst>
           </p:cNvPr>
@@ -1568,7 +1568,7 @@
           <p:cNvPr id="4" name="">
             <a:extLst xmlns:a="http://schemas.openxmlformats.org/drawingml/2006/main">
               <a:ext uri="{FF2B5EF4-FFF2-40B4-BE49-F238E27FC236}">
-                <a16:creationId xmlns:a16="http://schemas.microsoft.com/office/drawing/2014/main" id="{FA654419-2168-448A-ABA3-CA67B7154957}"/>
+                <a16:creationId xmlns:a16="http://schemas.microsoft.com/office/drawing/2014/main" id="{55523741-D25D-4D12-8969-2A9BE7D709A2}"/>
               </a:ext>
             </a:extLst>
           </p:cNvPr>
@@ -1619,7 +1619,7 @@
                 <a:ea typeface="Pretendard Medium"/>
                 <a:cs typeface="Pretendard Medium"/>
               </a:rPr>
-              <a:t>연구 문제와 목적을 정리한 단계이며,</a:t>
+              <a:t>연구 문제와 첫 구현 방향을 정리한 상태이며,</a:t>
             </a:r>
           </a:p>
           <a:p xmlns:a="http://schemas.openxmlformats.org/drawingml/2006/main">
@@ -1646,7 +1646,7 @@
                 <a:ea typeface="Pretendard Medium"/>
                 <a:cs typeface="Pretendard Medium"/>
               </a:rPr>
-              <a:t>데이터·시뮬레이션·알고리즘 방향을 자문받고자 합니다.</a:t>
+              <a:t>건대의 DTUMOS 연구와 연결 방법을 함께 논의하고자 합니다.</a:t>
             </a:r>
           </a:p>
         </p:txBody>
@@ -1656,7 +1656,7 @@
           <p:cNvPr id="5" name="">
             <a:extLst xmlns:a="http://schemas.openxmlformats.org/drawingml/2006/main">
               <a:ext uri="{FF2B5EF4-FFF2-40B4-BE49-F238E27FC236}">
-                <a16:creationId xmlns:a16="http://schemas.microsoft.com/office/drawing/2014/main" id="{1C73D411-8919-4D72-A17C-D76EB7D2BA7C}"/>
+                <a16:creationId xmlns:a16="http://schemas.microsoft.com/office/drawing/2014/main" id="{C9FB2729-B563-473B-998B-1E6048F16090}"/>
               </a:ext>
             </a:extLst>
           </p:cNvPr>
@@ -1717,7 +1717,7 @@
           <p:cNvPr id="6" name="">
             <a:extLst xmlns:a="http://schemas.openxmlformats.org/drawingml/2006/main">
               <a:ext uri="{FF2B5EF4-FFF2-40B4-BE49-F238E27FC236}">
-                <a16:creationId xmlns:a16="http://schemas.microsoft.com/office/drawing/2014/main" id="{08270085-FB60-482D-804B-146BDEC7B0A5}"/>
+                <a16:creationId xmlns:a16="http://schemas.microsoft.com/office/drawing/2014/main" id="{E2D9EBA8-319C-45BC-8FA4-BBB3B957A4E4}"/>
               </a:ext>
             </a:extLst>
           </p:cNvPr>
@@ -1776,7 +1776,7 @@
     </p:spTree>
     <p:extLst>
       <p:ext uri="{BB962C8B-B14F-4D97-AF65-F5344CB8AC3E}">
-        <p14:creationId xmlns:p14="http://schemas.microsoft.com/office/powerpoint/2010/main" val="573552428"/>
+        <p14:creationId xmlns:p14="http://schemas.microsoft.com/office/powerpoint/2010/main" val="1159316653"/>
       </p:ext>
     </p:extLst>
   </p:cSld>
@@ -1807,7 +1807,7 @@
           <p:cNvPr id="13" name="">
             <a:extLst xmlns:a="http://schemas.openxmlformats.org/drawingml/2006/main">
               <a:ext uri="{FF2B5EF4-FFF2-40B4-BE49-F238E27FC236}">
-                <a16:creationId xmlns:a16="http://schemas.microsoft.com/office/drawing/2014/main" id="{863BF747-7C7A-40D0-871C-B3CA8D33082D}"/>
+                <a16:creationId xmlns:a16="http://schemas.microsoft.com/office/drawing/2014/main" id="{8CF56E7E-C54D-4A48-85A9-31CE4044BB15}"/>
               </a:ext>
             </a:extLst>
           </p:cNvPr>
@@ -1868,7 +1868,7 @@
           <p:cNvPr id="2" name="">
             <a:extLst xmlns:a="http://schemas.openxmlformats.org/drawingml/2006/main">
               <a:ext uri="{FF2B5EF4-FFF2-40B4-BE49-F238E27FC236}">
-                <a16:creationId xmlns:a16="http://schemas.microsoft.com/office/drawing/2014/main" id="{EBA37D60-FC3D-49D9-894B-6C0FE36D5169}"/>
+                <a16:creationId xmlns:a16="http://schemas.microsoft.com/office/drawing/2014/main" id="{8D690433-8224-48FA-A52A-7C4B43BD791F}"/>
               </a:ext>
             </a:extLst>
           </p:cNvPr>
@@ -1929,7 +1929,7 @@
           <p:cNvPr id="3" name="">
             <a:extLst xmlns:a="http://schemas.openxmlformats.org/drawingml/2006/main">
               <a:ext uri="{FF2B5EF4-FFF2-40B4-BE49-F238E27FC236}">
-                <a16:creationId xmlns:a16="http://schemas.microsoft.com/office/drawing/2014/main" id="{4CF81D49-24A8-490A-A532-A68E08D2661C}"/>
+                <a16:creationId xmlns:a16="http://schemas.microsoft.com/office/drawing/2014/main" id="{400DB0DB-6206-4CE8-9582-F3145C2A27D3}"/>
               </a:ext>
             </a:extLst>
           </p:cNvPr>
@@ -1990,7 +1990,7 @@
           <p:cNvPr id="4" name="">
             <a:extLst xmlns:a="http://schemas.openxmlformats.org/drawingml/2006/main">
               <a:ext uri="{FF2B5EF4-FFF2-40B4-BE49-F238E27FC236}">
-                <a16:creationId xmlns:a16="http://schemas.microsoft.com/office/drawing/2014/main" id="{F813C807-BD0E-4398-94C7-A01F6CDB43A4}"/>
+                <a16:creationId xmlns:a16="http://schemas.microsoft.com/office/drawing/2014/main" id="{3BFD7397-FB30-46F2-9FEC-870AEAF5CA55}"/>
               </a:ext>
             </a:extLst>
           </p:cNvPr>
@@ -2051,7 +2051,7 @@
           <p:cNvPr id="5" name="">
             <a:extLst xmlns:a="http://schemas.openxmlformats.org/drawingml/2006/main">
               <a:ext uri="{FF2B5EF4-FFF2-40B4-BE49-F238E27FC236}">
-                <a16:creationId xmlns:a16="http://schemas.microsoft.com/office/drawing/2014/main" id="{F4A8EE87-D24A-46D6-AFA1-A891C2F7D5C0}"/>
+                <a16:creationId xmlns:a16="http://schemas.microsoft.com/office/drawing/2014/main" id="{C5E388CA-AD59-45A1-9B8B-51ADFBF8D522}"/>
               </a:ext>
             </a:extLst>
           </p:cNvPr>
@@ -2112,7 +2112,7 @@
           <p:cNvPr id="6" name="">
             <a:extLst xmlns:a="http://schemas.openxmlformats.org/drawingml/2006/main">
               <a:ext uri="{FF2B5EF4-FFF2-40B4-BE49-F238E27FC236}">
-                <a16:creationId xmlns:a16="http://schemas.microsoft.com/office/drawing/2014/main" id="{6DB004BE-BAF4-4A8C-9968-02211302B45D}"/>
+                <a16:creationId xmlns:a16="http://schemas.microsoft.com/office/drawing/2014/main" id="{3FDF7708-E3D9-4936-9351-7B6279F3D2D5}"/>
               </a:ext>
             </a:extLst>
           </p:cNvPr>
@@ -2269,7 +2269,7 @@
           <p:cNvPr id="7" name="">
             <a:extLst xmlns:a="http://schemas.openxmlformats.org/drawingml/2006/main">
               <a:ext uri="{FF2B5EF4-FFF2-40B4-BE49-F238E27FC236}">
-                <a16:creationId xmlns:a16="http://schemas.microsoft.com/office/drawing/2014/main" id="{6223EC68-DAEF-4344-B4B3-9D6DBB538BEF}"/>
+                <a16:creationId xmlns:a16="http://schemas.microsoft.com/office/drawing/2014/main" id="{F5945EE3-63D0-4AEC-B384-2AA2303240B1}"/>
               </a:ext>
             </a:extLst>
           </p:cNvPr>
@@ -2300,7 +2300,7 @@
           <p:cNvPr id="8" name="">
             <a:extLst xmlns:a="http://schemas.openxmlformats.org/drawingml/2006/main">
               <a:ext uri="{FF2B5EF4-FFF2-40B4-BE49-F238E27FC236}">
-                <a16:creationId xmlns:a16="http://schemas.microsoft.com/office/drawing/2014/main" id="{336366C3-3774-4562-952A-38C18D2A1264}"/>
+                <a16:creationId xmlns:a16="http://schemas.microsoft.com/office/drawing/2014/main" id="{9C8C7196-1C2D-486E-8900-9229240B895A}"/>
               </a:ext>
             </a:extLst>
           </p:cNvPr>
@@ -2361,7 +2361,7 @@
           <p:cNvPr id="9" name="">
             <a:extLst xmlns:a="http://schemas.openxmlformats.org/drawingml/2006/main">
               <a:ext uri="{FF2B5EF4-FFF2-40B4-BE49-F238E27FC236}">
-                <a16:creationId xmlns:a16="http://schemas.microsoft.com/office/drawing/2014/main" id="{AF3220D5-A741-48F5-99C9-58AD064C0562}"/>
+                <a16:creationId xmlns:a16="http://schemas.microsoft.com/office/drawing/2014/main" id="{32B428A1-28F6-43B8-A308-05058A94D689}"/>
               </a:ext>
             </a:extLst>
           </p:cNvPr>
@@ -2422,7 +2422,7 @@
           <p:cNvPr id="10" name="">
             <a:extLst xmlns:a="http://schemas.openxmlformats.org/drawingml/2006/main">
               <a:ext uri="{FF2B5EF4-FFF2-40B4-BE49-F238E27FC236}">
-                <a16:creationId xmlns:a16="http://schemas.microsoft.com/office/drawing/2014/main" id="{9C37BEF1-AA6F-45C7-A8D5-1341A36DF6EE}"/>
+                <a16:creationId xmlns:a16="http://schemas.microsoft.com/office/drawing/2014/main" id="{330FC96B-E7C1-4D5C-B0ED-8653DDC3D72C}"/>
               </a:ext>
             </a:extLst>
           </p:cNvPr>
@@ -2483,7 +2483,7 @@
           <p:cNvPr id="11" name="">
             <a:extLst xmlns:a="http://schemas.openxmlformats.org/drawingml/2006/main">
               <a:ext uri="{FF2B5EF4-FFF2-40B4-BE49-F238E27FC236}">
-                <a16:creationId xmlns:a16="http://schemas.microsoft.com/office/drawing/2014/main" id="{6E17E7FF-B71C-4A8D-B21F-20937B71B4FC}"/>
+                <a16:creationId xmlns:a16="http://schemas.microsoft.com/office/drawing/2014/main" id="{AA7D6D3E-E8BB-4894-A9BD-371B100C4310}"/>
               </a:ext>
             </a:extLst>
           </p:cNvPr>
@@ -2544,7 +2544,7 @@
           <p:cNvPr id="12" name="">
             <a:extLst xmlns:a="http://schemas.openxmlformats.org/drawingml/2006/main">
               <a:ext uri="{FF2B5EF4-FFF2-40B4-BE49-F238E27FC236}">
-                <a16:creationId xmlns:a16="http://schemas.microsoft.com/office/drawing/2014/main" id="{CD68AF57-90CA-4086-9325-8066943AFBDF}"/>
+                <a16:creationId xmlns:a16="http://schemas.microsoft.com/office/drawing/2014/main" id="{13140680-BBA8-4D1F-838D-18B4A521A0F4}"/>
               </a:ext>
             </a:extLst>
           </p:cNvPr>
@@ -2603,7 +2603,7 @@
     </p:spTree>
     <p:extLst>
       <p:ext uri="{BB962C8B-B14F-4D97-AF65-F5344CB8AC3E}">
-        <p14:creationId xmlns:p14="http://schemas.microsoft.com/office/powerpoint/2010/main" val="148630576"/>
+        <p14:creationId xmlns:p14="http://schemas.microsoft.com/office/powerpoint/2010/main" val="926948398"/>
       </p:ext>
     </p:extLst>
   </p:cSld>
@@ -2634,7 +2634,7 @@
           <p:cNvPr id="8" name="">
             <a:extLst xmlns:a="http://schemas.openxmlformats.org/drawingml/2006/main">
               <a:ext uri="{FF2B5EF4-FFF2-40B4-BE49-F238E27FC236}">
-                <a16:creationId xmlns:a16="http://schemas.microsoft.com/office/drawing/2014/main" id="{0C028D61-3A40-419F-845B-56306058D211}"/>
+                <a16:creationId xmlns:a16="http://schemas.microsoft.com/office/drawing/2014/main" id="{0ECDEEFB-C017-4AF3-AC45-3C7DAA1B19BF}"/>
               </a:ext>
             </a:extLst>
           </p:cNvPr>
@@ -2695,7 +2695,7 @@
           <p:cNvPr id="2" name="">
             <a:extLst xmlns:a="http://schemas.openxmlformats.org/drawingml/2006/main">
               <a:ext uri="{FF2B5EF4-FFF2-40B4-BE49-F238E27FC236}">
-                <a16:creationId xmlns:a16="http://schemas.microsoft.com/office/drawing/2014/main" id="{B79A9C95-984D-4346-910C-768A4A61CE87}"/>
+                <a16:creationId xmlns:a16="http://schemas.microsoft.com/office/drawing/2014/main" id="{67B58328-C25B-4B1F-9907-0AAEF8FF28A1}"/>
               </a:ext>
             </a:extLst>
           </p:cNvPr>
@@ -2756,7 +2756,7 @@
           <p:cNvPr id="3" name="">
             <a:extLst xmlns:a="http://schemas.openxmlformats.org/drawingml/2006/main">
               <a:ext uri="{FF2B5EF4-FFF2-40B4-BE49-F238E27FC236}">
-                <a16:creationId xmlns:a16="http://schemas.microsoft.com/office/drawing/2014/main" id="{8DF1280C-9009-48D1-9A86-85A6476374F6}"/>
+                <a16:creationId xmlns:a16="http://schemas.microsoft.com/office/drawing/2014/main" id="{3490DEAE-5E8A-42E6-8363-C15FF437DCF0}"/>
               </a:ext>
             </a:extLst>
           </p:cNvPr>
@@ -2817,7 +2817,7 @@
           <p:cNvPr id="4" name="">
             <a:extLst xmlns:a="http://schemas.openxmlformats.org/drawingml/2006/main">
               <a:ext uri="{FF2B5EF4-FFF2-40B4-BE49-F238E27FC236}">
-                <a16:creationId xmlns:a16="http://schemas.microsoft.com/office/drawing/2014/main" id="{A4448998-BFF5-461B-B307-B603B49EE003}"/>
+                <a16:creationId xmlns:a16="http://schemas.microsoft.com/office/drawing/2014/main" id="{1DAC46AB-F596-453A-ADCB-89F018DDEFE7}"/>
               </a:ext>
             </a:extLst>
           </p:cNvPr>
@@ -3399,7 +3399,7 @@
           <p:cNvPr id="6" name="">
             <a:extLst xmlns:a="http://schemas.openxmlformats.org/drawingml/2006/main">
               <a:ext uri="{FF2B5EF4-FFF2-40B4-BE49-F238E27FC236}">
-                <a16:creationId xmlns:a16="http://schemas.microsoft.com/office/drawing/2014/main" id="{A1A75E8D-5C21-4B43-BF9E-7CC679815457}"/>
+                <a16:creationId xmlns:a16="http://schemas.microsoft.com/office/drawing/2014/main" id="{982CCD67-85CA-413E-8674-3BAAE8B9143E}"/>
               </a:ext>
             </a:extLst>
           </p:cNvPr>
@@ -3460,7 +3460,7 @@
           <p:cNvPr id="7" name="">
             <a:extLst xmlns:a="http://schemas.openxmlformats.org/drawingml/2006/main">
               <a:ext uri="{FF2B5EF4-FFF2-40B4-BE49-F238E27FC236}">
-                <a16:creationId xmlns:a16="http://schemas.microsoft.com/office/drawing/2014/main" id="{C3E861B3-E823-4BD8-A1BD-7E5B94A6C829}"/>
+                <a16:creationId xmlns:a16="http://schemas.microsoft.com/office/drawing/2014/main" id="{C6A3FC08-9A63-4AFE-8613-2776661D2C5E}"/>
               </a:ext>
             </a:extLst>
           </p:cNvPr>
@@ -3574,7 +3574,7 @@
     </p:spTree>
     <p:extLst>
       <p:ext uri="{BB962C8B-B14F-4D97-AF65-F5344CB8AC3E}">
-        <p14:creationId xmlns:p14="http://schemas.microsoft.com/office/powerpoint/2010/main" val="2121934760"/>
+        <p14:creationId xmlns:p14="http://schemas.microsoft.com/office/powerpoint/2010/main" val="998190737"/>
       </p:ext>
     </p:extLst>
   </p:cSld>
@@ -3605,7 +3605,7 @@
           <p:cNvPr id="18" name="">
             <a:extLst xmlns:a="http://schemas.openxmlformats.org/drawingml/2006/main">
               <a:ext uri="{FF2B5EF4-FFF2-40B4-BE49-F238E27FC236}">
-                <a16:creationId xmlns:a16="http://schemas.microsoft.com/office/drawing/2014/main" id="{D2F8D656-B189-4593-B80C-1D3CC76A857B}"/>
+                <a16:creationId xmlns:a16="http://schemas.microsoft.com/office/drawing/2014/main" id="{DEFE3469-C858-4D8A-8681-A5E7037FA54E}"/>
               </a:ext>
             </a:extLst>
           </p:cNvPr>
@@ -3666,7 +3666,7 @@
           <p:cNvPr id="2" name="">
             <a:extLst xmlns:a="http://schemas.openxmlformats.org/drawingml/2006/main">
               <a:ext uri="{FF2B5EF4-FFF2-40B4-BE49-F238E27FC236}">
-                <a16:creationId xmlns:a16="http://schemas.microsoft.com/office/drawing/2014/main" id="{51261C3C-1D0A-4762-8287-ADF45EE5312A}"/>
+                <a16:creationId xmlns:a16="http://schemas.microsoft.com/office/drawing/2014/main" id="{36D8FB82-7C70-4772-BA9B-E7F9411F5D16}"/>
               </a:ext>
             </a:extLst>
           </p:cNvPr>
@@ -3727,7 +3727,7 @@
           <p:cNvPr id="3" name="">
             <a:extLst xmlns:a="http://schemas.openxmlformats.org/drawingml/2006/main">
               <a:ext uri="{FF2B5EF4-FFF2-40B4-BE49-F238E27FC236}">
-                <a16:creationId xmlns:a16="http://schemas.microsoft.com/office/drawing/2014/main" id="{86F03D6B-89A0-4EBE-B8F4-D40A18DE0875}"/>
+                <a16:creationId xmlns:a16="http://schemas.microsoft.com/office/drawing/2014/main" id="{5B4113F4-55BE-4AE8-85AB-806FA9D303EA}"/>
               </a:ext>
             </a:extLst>
           </p:cNvPr>
@@ -3778,7 +3778,7 @@
                 <a:ea typeface="Pretendard"/>
                 <a:cs typeface="Pretendard"/>
               </a:rPr>
-              <a:t>자문을 받은 뒤 수정할 첫 실행 계획.</a:t>
+              <a:t>공동연구 논의를 반영해 수정할 첫 실행 계획.</a:t>
             </a:r>
           </a:p>
         </p:txBody>
@@ -3788,7 +3788,7 @@
           <p:cNvPr id="4" name="">
             <a:extLst xmlns:a="http://schemas.openxmlformats.org/drawingml/2006/main">
               <a:ext uri="{FF2B5EF4-FFF2-40B4-BE49-F238E27FC236}">
-                <a16:creationId xmlns:a16="http://schemas.microsoft.com/office/drawing/2014/main" id="{FB61F5A3-CB30-418A-989A-DAC53CF723BE}"/>
+                <a16:creationId xmlns:a16="http://schemas.microsoft.com/office/drawing/2014/main" id="{6281CAE5-F27E-455C-AD5C-872F06E12CD6}"/>
               </a:ext>
             </a:extLst>
           </p:cNvPr>
@@ -3849,7 +3849,7 @@
           <p:cNvPr id="5" name="">
             <a:extLst xmlns:a="http://schemas.openxmlformats.org/drawingml/2006/main">
               <a:ext uri="{FF2B5EF4-FFF2-40B4-BE49-F238E27FC236}">
-                <a16:creationId xmlns:a16="http://schemas.microsoft.com/office/drawing/2014/main" id="{E8D3C0F1-FE22-439D-A1D8-978283500986}"/>
+                <a16:creationId xmlns:a16="http://schemas.microsoft.com/office/drawing/2014/main" id="{31D54C87-4903-4CDB-A4D5-451A51387208}"/>
               </a:ext>
             </a:extLst>
           </p:cNvPr>
@@ -3942,7 +3942,7 @@
           <p:cNvPr id="6" name="">
             <a:extLst xmlns:a="http://schemas.openxmlformats.org/drawingml/2006/main">
               <a:ext uri="{FF2B5EF4-FFF2-40B4-BE49-F238E27FC236}">
-                <a16:creationId xmlns:a16="http://schemas.microsoft.com/office/drawing/2014/main" id="{8D2839E2-1992-4B9D-A9C5-FDA2B6AC9535}"/>
+                <a16:creationId xmlns:a16="http://schemas.microsoft.com/office/drawing/2014/main" id="{D2988378-91E2-4AD5-9A58-A46AC5486B3C}"/>
               </a:ext>
             </a:extLst>
           </p:cNvPr>
@@ -4036,7 +4036,7 @@
           <p:cNvPr id="7" name="">
             <a:extLst xmlns:a="http://schemas.openxmlformats.org/drawingml/2006/main">
               <a:ext uri="{FF2B5EF4-FFF2-40B4-BE49-F238E27FC236}">
-                <a16:creationId xmlns:a16="http://schemas.microsoft.com/office/drawing/2014/main" id="{94D8281E-532A-4ED6-B091-814D44A861AB}"/>
+                <a16:creationId xmlns:a16="http://schemas.microsoft.com/office/drawing/2014/main" id="{52AF35DA-EDF1-4D31-9D3C-195B3718E023}"/>
               </a:ext>
             </a:extLst>
           </p:cNvPr>
@@ -4129,7 +4129,7 @@
           <p:cNvPr id="8" name="">
             <a:extLst xmlns:a="http://schemas.openxmlformats.org/drawingml/2006/main">
               <a:ext uri="{FF2B5EF4-FFF2-40B4-BE49-F238E27FC236}">
-                <a16:creationId xmlns:a16="http://schemas.microsoft.com/office/drawing/2014/main" id="{85FC06BE-97A6-43F3-A54B-059EB7BB2167}"/>
+                <a16:creationId xmlns:a16="http://schemas.microsoft.com/office/drawing/2014/main" id="{072F657F-DCD0-45CC-B5E3-F67A136B7444}"/>
               </a:ext>
             </a:extLst>
           </p:cNvPr>
@@ -4222,7 +4222,7 @@
           <p:cNvPr id="9" name="">
             <a:extLst xmlns:a="http://schemas.openxmlformats.org/drawingml/2006/main">
               <a:ext uri="{FF2B5EF4-FFF2-40B4-BE49-F238E27FC236}">
-                <a16:creationId xmlns:a16="http://schemas.microsoft.com/office/drawing/2014/main" id="{4E055AC4-766D-42CB-827B-2574F90775B6}"/>
+                <a16:creationId xmlns:a16="http://schemas.microsoft.com/office/drawing/2014/main" id="{1221792C-E75C-4E0D-B0B0-5277D9DEA333}"/>
               </a:ext>
             </a:extLst>
           </p:cNvPr>
@@ -4420,7 +4420,7 @@
           <p:cNvPr id="14" name="">
             <a:extLst xmlns:a="http://schemas.openxmlformats.org/drawingml/2006/main">
               <a:ext uri="{FF2B5EF4-FFF2-40B4-BE49-F238E27FC236}">
-                <a16:creationId xmlns:a16="http://schemas.microsoft.com/office/drawing/2014/main" id="{589EFEFD-3442-4D64-8388-3D49E287E179}"/>
+                <a16:creationId xmlns:a16="http://schemas.microsoft.com/office/drawing/2014/main" id="{05AA1CFA-165F-4DBD-B235-BF1D947FD34C}"/>
               </a:ext>
             </a:extLst>
           </p:cNvPr>
@@ -4481,7 +4481,7 @@
           <p:cNvPr id="15" name="">
             <a:extLst xmlns:a="http://schemas.openxmlformats.org/drawingml/2006/main">
               <a:ext uri="{FF2B5EF4-FFF2-40B4-BE49-F238E27FC236}">
-                <a16:creationId xmlns:a16="http://schemas.microsoft.com/office/drawing/2014/main" id="{399B5D90-6CD2-4696-94E0-1ADCF5EFAF93}"/>
+                <a16:creationId xmlns:a16="http://schemas.microsoft.com/office/drawing/2014/main" id="{A14E447E-9E5F-4CC1-B8D2-3B096881CD28}"/>
               </a:ext>
             </a:extLst>
           </p:cNvPr>
@@ -4512,7 +4512,7 @@
           <p:cNvPr id="16" name="">
             <a:extLst xmlns:a="http://schemas.openxmlformats.org/drawingml/2006/main">
               <a:ext uri="{FF2B5EF4-FFF2-40B4-BE49-F238E27FC236}">
-                <a16:creationId xmlns:a16="http://schemas.microsoft.com/office/drawing/2014/main" id="{ED281928-CECB-488E-836E-77904C7762D8}"/>
+                <a16:creationId xmlns:a16="http://schemas.microsoft.com/office/drawing/2014/main" id="{AC714933-275B-408A-9300-D8E2D53C6646}"/>
               </a:ext>
             </a:extLst>
           </p:cNvPr>
@@ -4573,7 +4573,7 @@
           <p:cNvPr id="17" name="">
             <a:extLst xmlns:a="http://schemas.openxmlformats.org/drawingml/2006/main">
               <a:ext uri="{FF2B5EF4-FFF2-40B4-BE49-F238E27FC236}">
-                <a16:creationId xmlns:a16="http://schemas.microsoft.com/office/drawing/2014/main" id="{96E30252-FD1B-4226-A9A0-25C0C5B1A60E}"/>
+                <a16:creationId xmlns:a16="http://schemas.microsoft.com/office/drawing/2014/main" id="{C2FC0D42-28CB-4500-BD55-7E14EBD89E45}"/>
               </a:ext>
             </a:extLst>
           </p:cNvPr>
@@ -4769,7 +4769,7 @@
     </p:spTree>
     <p:extLst>
       <p:ext uri="{BB962C8B-B14F-4D97-AF65-F5344CB8AC3E}">
-        <p14:creationId xmlns:p14="http://schemas.microsoft.com/office/powerpoint/2010/main" val="476088533"/>
+        <p14:creationId xmlns:p14="http://schemas.microsoft.com/office/powerpoint/2010/main" val="878113904"/>
       </p:ext>
     </p:extLst>
   </p:cSld>
@@ -4800,7 +4800,7 @@
           <p:cNvPr id="21" name="">
             <a:extLst xmlns:a="http://schemas.openxmlformats.org/drawingml/2006/main">
               <a:ext uri="{FF2B5EF4-FFF2-40B4-BE49-F238E27FC236}">
-                <a16:creationId xmlns:a16="http://schemas.microsoft.com/office/drawing/2014/main" id="{F8A54F43-9C02-4860-84B4-48F8545234C3}"/>
+                <a16:creationId xmlns:a16="http://schemas.microsoft.com/office/drawing/2014/main" id="{E3165C7B-5785-4720-A5F4-B748FB1C0962}"/>
               </a:ext>
             </a:extLst>
           </p:cNvPr>
@@ -4851,7 +4851,7 @@
                 <a:ea typeface="Pretendard Medium"/>
                 <a:cs typeface="Pretendard Medium"/>
               </a:rPr>
-              <a:t>자문받고 싶은 내용</a:t>
+              <a:t>공동연구에서 논의할 내용</a:t>
             </a:r>
           </a:p>
         </p:txBody>
@@ -4861,7 +4861,7 @@
           <p:cNvPr id="2" name="">
             <a:extLst xmlns:a="http://schemas.openxmlformats.org/drawingml/2006/main">
               <a:ext uri="{FF2B5EF4-FFF2-40B4-BE49-F238E27FC236}">
-                <a16:creationId xmlns:a16="http://schemas.microsoft.com/office/drawing/2014/main" id="{6AF50FCF-BA23-4D27-B5A8-42237D57F6F0}"/>
+                <a16:creationId xmlns:a16="http://schemas.microsoft.com/office/drawing/2014/main" id="{C7559925-A29A-49E9-9EAE-DDE1260ED103}"/>
               </a:ext>
             </a:extLst>
           </p:cNvPr>
@@ -4912,7 +4912,7 @@
                 <a:ea typeface="Pretendard"/>
                 <a:cs typeface="Pretendard"/>
               </a:rPr>
-              <a:t>질문</a:t>
+              <a:t>공동연구 논의</a:t>
             </a:r>
           </a:p>
         </p:txBody>
@@ -4922,7 +4922,7 @@
           <p:cNvPr id="3" name="">
             <a:extLst xmlns:a="http://schemas.openxmlformats.org/drawingml/2006/main">
               <a:ext uri="{FF2B5EF4-FFF2-40B4-BE49-F238E27FC236}">
-                <a16:creationId xmlns:a16="http://schemas.microsoft.com/office/drawing/2014/main" id="{68F6DC46-A050-49CF-A0E2-C6C8C2D0710D}"/>
+                <a16:creationId xmlns:a16="http://schemas.microsoft.com/office/drawing/2014/main" id="{B0CF6050-7121-4957-B21A-8A539EE32A5F}"/>
               </a:ext>
             </a:extLst>
           </p:cNvPr>
@@ -4973,7 +4973,7 @@
                 <a:ea typeface="Pretendard"/>
                 <a:cs typeface="Pretendard"/>
               </a:rPr>
-              <a:t>연구 범위와 방법론을 구체화하기 위한 질문.</a:t>
+              <a:t>택시와 전기버스 연구를 연결하고 첫 공동실험을 정하기 위한 질문.</a:t>
             </a:r>
           </a:p>
         </p:txBody>
@@ -4983,7 +4983,7 @@
           <p:cNvPr id="4" name="">
             <a:extLst xmlns:a="http://schemas.openxmlformats.org/drawingml/2006/main">
               <a:ext uri="{FF2B5EF4-FFF2-40B4-BE49-F238E27FC236}">
-                <a16:creationId xmlns:a16="http://schemas.microsoft.com/office/drawing/2014/main" id="{06297CAB-6914-464D-9285-443CC8F5005D}"/>
+                <a16:creationId xmlns:a16="http://schemas.microsoft.com/office/drawing/2014/main" id="{B9178EDB-CAAE-4491-9CAB-865DFE016AFC}"/>
               </a:ext>
             </a:extLst>
           </p:cNvPr>
@@ -5044,7 +5044,7 @@
           <p:cNvPr id="5" name="">
             <a:extLst xmlns:a="http://schemas.openxmlformats.org/drawingml/2006/main">
               <a:ext uri="{FF2B5EF4-FFF2-40B4-BE49-F238E27FC236}">
-                <a16:creationId xmlns:a16="http://schemas.microsoft.com/office/drawing/2014/main" id="{62649BDA-F1F0-4877-B44F-92FB17FBF51E}"/>
+                <a16:creationId xmlns:a16="http://schemas.microsoft.com/office/drawing/2014/main" id="{609AFB46-FEA8-4D83-ABB3-1B6A19AB2007}"/>
               </a:ext>
             </a:extLst>
           </p:cNvPr>
@@ -5105,7 +5105,7 @@
           <p:cNvPr id="6" name="">
             <a:extLst xmlns:a="http://schemas.openxmlformats.org/drawingml/2006/main">
               <a:ext uri="{FF2B5EF4-FFF2-40B4-BE49-F238E27FC236}">
-                <a16:creationId xmlns:a16="http://schemas.microsoft.com/office/drawing/2014/main" id="{B1C64AC5-7F94-4E77-A941-127C0E7443E5}"/>
+                <a16:creationId xmlns:a16="http://schemas.microsoft.com/office/drawing/2014/main" id="{1C40428A-AF19-463C-AE6C-01398FBB362F}"/>
               </a:ext>
             </a:extLst>
           </p:cNvPr>
@@ -5156,7 +5156,7 @@
                 <a:ea typeface="Pretendard Medium"/>
                 <a:cs typeface="Pretendard Medium"/>
               </a:rPr>
-              <a:t>데이터</a:t>
+              <a:t>연구 연결</a:t>
             </a:r>
           </a:p>
         </p:txBody>
@@ -5166,7 +5166,7 @@
           <p:cNvPr id="7" name="">
             <a:extLst xmlns:a="http://schemas.openxmlformats.org/drawingml/2006/main">
               <a:ext uri="{FF2B5EF4-FFF2-40B4-BE49-F238E27FC236}">
-                <a16:creationId xmlns:a16="http://schemas.microsoft.com/office/drawing/2014/main" id="{EEA5F2AF-28DF-42FE-AD0D-CAFA8DC01624}"/>
+                <a16:creationId xmlns:a16="http://schemas.microsoft.com/office/drawing/2014/main" id="{8DDA4EBA-78FC-4519-984A-8435223ED920}"/>
               </a:ext>
             </a:extLst>
           </p:cNvPr>
@@ -5217,7 +5217,7 @@
                 <a:ea typeface="Pretendard"/>
                 <a:cs typeface="Pretendard"/>
               </a:rPr>
-              <a:t>GTFS와 BIS를 같이 사용하는 방향이 적절한가요?</a:t>
+              <a:t>건대의 택시 시뮬레이션과 전기버스 시뮬레이션에서</a:t>
             </a:r>
           </a:p>
           <a:p xmlns:a="http://schemas.openxmlformats.org/drawingml/2006/main">
@@ -5244,7 +5244,7 @@
                 <a:ea typeface="Pretendard"/>
                 <a:cs typeface="Pretendard"/>
               </a:rPr>
-              <a:t>처음에는 어느 노선과 기간으로 시작하는 것이 좋을까요?</a:t>
+              <a:t>함께 사용할 수 있는 DTUMOS 구조와 평가지표는 무엇일까요?</a:t>
             </a:r>
           </a:p>
         </p:txBody>
@@ -5254,7 +5254,7 @@
           <p:cNvPr id="8" name="">
             <a:extLst xmlns:a="http://schemas.openxmlformats.org/drawingml/2006/main">
               <a:ext uri="{FF2B5EF4-FFF2-40B4-BE49-F238E27FC236}">
-                <a16:creationId xmlns:a16="http://schemas.microsoft.com/office/drawing/2014/main" id="{F2DD7AE4-09D9-43DB-8E71-F8643FC207B5}"/>
+                <a16:creationId xmlns:a16="http://schemas.microsoft.com/office/drawing/2014/main" id="{34AAE93B-3ACD-4EF6-BE87-C1186F0D183F}"/>
               </a:ext>
             </a:extLst>
           </p:cNvPr>
@@ -5285,7 +5285,7 @@
           <p:cNvPr id="9" name="">
             <a:extLst xmlns:a="http://schemas.openxmlformats.org/drawingml/2006/main">
               <a:ext uri="{FF2B5EF4-FFF2-40B4-BE49-F238E27FC236}">
-                <a16:creationId xmlns:a16="http://schemas.microsoft.com/office/drawing/2014/main" id="{6F21C0A6-EEF2-44E4-863E-18A07A38CB1A}"/>
+                <a16:creationId xmlns:a16="http://schemas.microsoft.com/office/drawing/2014/main" id="{1D07EF28-7663-4D28-8C86-FC878A99DDB2}"/>
               </a:ext>
             </a:extLst>
           </p:cNvPr>
@@ -5346,7 +5346,7 @@
           <p:cNvPr id="10" name="">
             <a:extLst xmlns:a="http://schemas.openxmlformats.org/drawingml/2006/main">
               <a:ext uri="{FF2B5EF4-FFF2-40B4-BE49-F238E27FC236}">
-                <a16:creationId xmlns:a16="http://schemas.microsoft.com/office/drawing/2014/main" id="{CF516EE7-7AD7-41E6-911F-2051E6E8287D}"/>
+                <a16:creationId xmlns:a16="http://schemas.microsoft.com/office/drawing/2014/main" id="{A4DD1E59-4890-487F-931C-BE4EC4F0D6CA}"/>
               </a:ext>
             </a:extLst>
           </p:cNvPr>
@@ -5397,7 +5397,7 @@
                 <a:ea typeface="Pretendard Medium"/>
                 <a:cs typeface="Pretendard Medium"/>
               </a:rPr>
-              <a:t>시뮬레이션</a:t>
+              <a:t>데이터</a:t>
             </a:r>
           </a:p>
         </p:txBody>
@@ -5407,7 +5407,7 @@
           <p:cNvPr id="11" name="">
             <a:extLst xmlns:a="http://schemas.openxmlformats.org/drawingml/2006/main">
               <a:ext uri="{FF2B5EF4-FFF2-40B4-BE49-F238E27FC236}">
-                <a16:creationId xmlns:a16="http://schemas.microsoft.com/office/drawing/2014/main" id="{FF92DFD9-03A6-4600-9A13-C289313AB9AB}"/>
+                <a16:creationId xmlns:a16="http://schemas.microsoft.com/office/drawing/2014/main" id="{CEA6ABF9-28ED-4BFA-B3BE-510B4E973D54}"/>
               </a:ext>
             </a:extLst>
           </p:cNvPr>
@@ -5458,7 +5458,7 @@
                 <a:ea typeface="Pretendard"/>
                 <a:cs typeface="Pretendard"/>
               </a:rPr>
-              <a:t>노선 1개, 버스 약 3대와 충전기 1대로 시작해도 될까요?</a:t>
+              <a:t>두 연구가 같은 서울시 네트워크와 시간 범위를 사용해야 할까요?</a:t>
             </a:r>
           </a:p>
           <a:p xmlns:a="http://schemas.openxmlformats.org/drawingml/2006/main">
@@ -5485,7 +5485,7 @@
                 <a:ea typeface="Pretendard"/>
                 <a:cs typeface="Pretendard"/>
               </a:rPr>
-              <a:t>처음부터 꼭 반영해야 할 운행 조건이 있을까요?</a:t>
+              <a:t>전기버스는 GTFS와 BIS를 어느 범위부터 연결하면 좋을까요?</a:t>
             </a:r>
           </a:p>
         </p:txBody>
@@ -5495,7 +5495,7 @@
           <p:cNvPr id="12" name="">
             <a:extLst xmlns:a="http://schemas.openxmlformats.org/drawingml/2006/main">
               <a:ext uri="{FF2B5EF4-FFF2-40B4-BE49-F238E27FC236}">
-                <a16:creationId xmlns:a16="http://schemas.microsoft.com/office/drawing/2014/main" id="{1FC03228-6E8E-455C-88FC-C66277A495C1}"/>
+                <a16:creationId xmlns:a16="http://schemas.microsoft.com/office/drawing/2014/main" id="{7792A9A1-7D84-43B8-AD4D-76531060B1ED}"/>
               </a:ext>
             </a:extLst>
           </p:cNvPr>
@@ -5526,7 +5526,7 @@
           <p:cNvPr id="13" name="">
             <a:extLst xmlns:a="http://schemas.openxmlformats.org/drawingml/2006/main">
               <a:ext uri="{FF2B5EF4-FFF2-40B4-BE49-F238E27FC236}">
-                <a16:creationId xmlns:a16="http://schemas.microsoft.com/office/drawing/2014/main" id="{6AB11069-404F-439B-BA01-9FDABC75255F}"/>
+                <a16:creationId xmlns:a16="http://schemas.microsoft.com/office/drawing/2014/main" id="{CC49CECA-1B5F-46AE-BCE9-79777CA03204}"/>
               </a:ext>
             </a:extLst>
           </p:cNvPr>
@@ -5587,7 +5587,7 @@
           <p:cNvPr id="14" name="">
             <a:extLst xmlns:a="http://schemas.openxmlformats.org/drawingml/2006/main">
               <a:ext uri="{FF2B5EF4-FFF2-40B4-BE49-F238E27FC236}">
-                <a16:creationId xmlns:a16="http://schemas.microsoft.com/office/drawing/2014/main" id="{89789994-0C9B-4D97-9943-E530EED4F84B}"/>
+                <a16:creationId xmlns:a16="http://schemas.microsoft.com/office/drawing/2014/main" id="{ADEADCD0-F049-4C59-B2B7-406A6F6EAD03}"/>
               </a:ext>
             </a:extLst>
           </p:cNvPr>
@@ -5638,7 +5638,7 @@
                 <a:ea typeface="Pretendard Medium"/>
                 <a:cs typeface="Pretendard Medium"/>
               </a:rPr>
-              <a:t>알고리즘</a:t>
+              <a:t>구현과 비교</a:t>
             </a:r>
           </a:p>
         </p:txBody>
@@ -5648,7 +5648,7 @@
           <p:cNvPr id="15" name="">
             <a:extLst xmlns:a="http://schemas.openxmlformats.org/drawingml/2006/main">
               <a:ext uri="{FF2B5EF4-FFF2-40B4-BE49-F238E27FC236}">
-                <a16:creationId xmlns:a16="http://schemas.microsoft.com/office/drawing/2014/main" id="{F04A98B0-F210-4B72-A3DF-CF966B00D0D8}"/>
+                <a16:creationId xmlns:a16="http://schemas.microsoft.com/office/drawing/2014/main" id="{A6A8EC72-4EB1-4F82-A02C-EA98718D0947}"/>
               </a:ext>
             </a:extLst>
           </p:cNvPr>
@@ -5699,7 +5699,7 @@
                 <a:ea typeface="Pretendard"/>
                 <a:cs typeface="Pretendard"/>
               </a:rPr>
-              <a:t>도착 즉시 충전을 기준으로 단순 규칙을 먼저 비교해도 될까요?</a:t>
+              <a:t>전기버스 작은 예제를 먼저 만든 뒤 DTUMOS에 연결하는 순서가 적절할까요?</a:t>
             </a:r>
           </a:p>
           <a:p xmlns:a="http://schemas.openxmlformats.org/drawingml/2006/main">
@@ -5726,7 +5726,7 @@
                 <a:ea typeface="Pretendard"/>
                 <a:cs typeface="Pretendard"/>
               </a:rPr>
-              <a:t>최적화는 어느 단계에서 시작하는 것이 좋을까요?</a:t>
+              <a:t>첫 비교는 단순 충전 규칙부터 시작해도 될까요?</a:t>
             </a:r>
           </a:p>
         </p:txBody>
@@ -5736,7 +5736,7 @@
           <p:cNvPr id="16" name="">
             <a:extLst xmlns:a="http://schemas.openxmlformats.org/drawingml/2006/main">
               <a:ext uri="{FF2B5EF4-FFF2-40B4-BE49-F238E27FC236}">
-                <a16:creationId xmlns:a16="http://schemas.microsoft.com/office/drawing/2014/main" id="{D5AC98FB-B768-4FDD-BB41-27599F426E8A}"/>
+                <a16:creationId xmlns:a16="http://schemas.microsoft.com/office/drawing/2014/main" id="{65FAFFF2-38C7-4BB2-A08A-1CF6061DB3AB}"/>
               </a:ext>
             </a:extLst>
           </p:cNvPr>
@@ -5767,7 +5767,7 @@
           <p:cNvPr id="17" name="">
             <a:extLst xmlns:a="http://schemas.openxmlformats.org/drawingml/2006/main">
               <a:ext uri="{FF2B5EF4-FFF2-40B4-BE49-F238E27FC236}">
-                <a16:creationId xmlns:a16="http://schemas.microsoft.com/office/drawing/2014/main" id="{BF0A097F-E07C-4BF7-8BFD-63493852F36F}"/>
+                <a16:creationId xmlns:a16="http://schemas.microsoft.com/office/drawing/2014/main" id="{DBA30931-E9E1-431D-A190-1DD0308EECF5}"/>
               </a:ext>
             </a:extLst>
           </p:cNvPr>
@@ -5828,7 +5828,7 @@
           <p:cNvPr id="18" name="">
             <a:extLst xmlns:a="http://schemas.openxmlformats.org/drawingml/2006/main">
               <a:ext uri="{FF2B5EF4-FFF2-40B4-BE49-F238E27FC236}">
-                <a16:creationId xmlns:a16="http://schemas.microsoft.com/office/drawing/2014/main" id="{3598BD58-E873-4498-BF19-1F9214CD304E}"/>
+                <a16:creationId xmlns:a16="http://schemas.microsoft.com/office/drawing/2014/main" id="{3E9E088C-5E34-4595-8C1A-7D404BA2A0E0}"/>
               </a:ext>
             </a:extLst>
           </p:cNvPr>
@@ -5879,7 +5879,7 @@
                 <a:ea typeface="Pretendard Medium"/>
                 <a:cs typeface="Pretendard Medium"/>
               </a:rPr>
-              <a:t>연구 범위</a:t>
+              <a:t>공동논문 범위</a:t>
             </a:r>
           </a:p>
         </p:txBody>
@@ -5889,7 +5889,7 @@
           <p:cNvPr id="19" name="">
             <a:extLst xmlns:a="http://schemas.openxmlformats.org/drawingml/2006/main">
               <a:ext uri="{FF2B5EF4-FFF2-40B4-BE49-F238E27FC236}">
-                <a16:creationId xmlns:a16="http://schemas.microsoft.com/office/drawing/2014/main" id="{A1B6B117-EC12-4FB4-8029-B29596B5C03B}"/>
+                <a16:creationId xmlns:a16="http://schemas.microsoft.com/office/drawing/2014/main" id="{0A0F59B4-4BF0-415F-8D37-B86B26DF1C43}"/>
               </a:ext>
             </a:extLst>
           </p:cNvPr>
@@ -5940,7 +5940,7 @@
                 <a:ea typeface="Pretendard"/>
                 <a:cs typeface="Pretendard"/>
               </a:rPr>
-              <a:t>충전시설·충전 방법·운영 방법을 같이 보는 범위가 너무 넓을까요?</a:t>
+              <a:t>택시와 전기버스 연구를 한 논문에서 어떤 질문으로 묶을 수 있을까요?</a:t>
             </a:r>
           </a:p>
           <a:p xmlns:a="http://schemas.openxmlformats.org/drawingml/2006/main">
@@ -5967,7 +5967,7 @@
                 <a:ea typeface="Pretendard"/>
                 <a:cs typeface="Pretendard"/>
               </a:rPr>
-              <a:t>첫 연구에서 가장 먼저 좁혀야 할 부분은 무엇일까요?</a:t>
+              <a:t>전기버스 부분에서 제가 먼저 맡을 결과는 무엇이 좋을까요?</a:t>
             </a:r>
           </a:p>
         </p:txBody>
@@ -5977,7 +5977,7 @@
           <p:cNvPr id="20" name="">
             <a:extLst xmlns:a="http://schemas.openxmlformats.org/drawingml/2006/main">
               <a:ext uri="{FF2B5EF4-FFF2-40B4-BE49-F238E27FC236}">
-                <a16:creationId xmlns:a16="http://schemas.microsoft.com/office/drawing/2014/main" id="{CE3046CE-B694-47D0-8472-AEA5BD6FB15D}"/>
+                <a16:creationId xmlns:a16="http://schemas.microsoft.com/office/drawing/2014/main" id="{91CE57C0-E5F2-49E6-86E2-5E8A72607352}"/>
               </a:ext>
             </a:extLst>
           </p:cNvPr>
@@ -6028,7 +6028,7 @@
                 <a:ea typeface="Pretendard Medium"/>
                 <a:cs typeface="Pretendard Medium"/>
               </a:rPr>
-              <a:t>오늘 자문을 반영해 연구 질문과 첫 실험 범위를 다시 수정할 예정입니다.</a:t>
+              <a:t>오늘 논의를 바탕으로 공동연구의 역할과 첫 실험 범위를 정리할 예정입니다.</a:t>
             </a:r>
           </a:p>
         </p:txBody>
@@ -6036,7 +6036,7 @@
     </p:spTree>
     <p:extLst>
       <p:ext uri="{BB962C8B-B14F-4D97-AF65-F5344CB8AC3E}">
-        <p14:creationId xmlns:p14="http://schemas.microsoft.com/office/powerpoint/2010/main" val="1784595215"/>
+        <p14:creationId xmlns:p14="http://schemas.microsoft.com/office/powerpoint/2010/main" val="1851159234"/>
       </p:ext>
     </p:extLst>
   </p:cSld>

--- a/전기버스_충전운영_건국대미팅_2026-10-08.pptx
+++ b/전기버스_충전운영_건국대미팅_2026-10-08.pptx
@@ -1,30 +1,124 @@
 
 <file path=ppt/presentation.xml><?xml version="1.0" encoding="utf-8"?>
-<p:presentation xmlns:p="http://schemas.openxmlformats.org/presentationml/2006/main">
+<p:presentation xmlns:a="http://schemas.openxmlformats.org/drawingml/2006/main" xmlns:r="http://schemas.openxmlformats.org/officeDocument/2006/relationships" xmlns:p="http://schemas.openxmlformats.org/presentationml/2006/main">
   <p:sldMasterIdLst>
-    <p:sldMasterId xmlns:r="http://schemas.openxmlformats.org/officeDocument/2006/relationships" id="2147483648" r:id="R34183ac1410b4baa"/>
+    <p:sldMasterId id="2147483648" r:id="rId1"/>
   </p:sldMasterIdLst>
   <p:notesMasterIdLst>
-    <p:notesMasterId xmlns:r="http://schemas.openxmlformats.org/officeDocument/2006/relationships" r:id="R3f654eeab2f04084"/>
+    <p:notesMasterId r:id="rId6"/>
   </p:notesMasterIdLst>
   <p:sldIdLst>
-    <p:sldId xmlns:r="http://schemas.openxmlformats.org/officeDocument/2006/relationships" id="256" r:id="R25e4f22918194be3"/>
-    <p:sldId xmlns:r="http://schemas.openxmlformats.org/officeDocument/2006/relationships" id="257" r:id="R7712735403494663"/>
-    <p:sldId xmlns:r="http://schemas.openxmlformats.org/officeDocument/2006/relationships" id="258" r:id="R29157e6398424a4c"/>
-    <p:sldId xmlns:r="http://schemas.openxmlformats.org/officeDocument/2006/relationships" id="259" r:id="R1de5e7bb431348c3"/>
-    <p:sldId xmlns:r="http://schemas.openxmlformats.org/officeDocument/2006/relationships" id="260" r:id="Rd39215b5c6284ece"/>
+    <p:sldId id="256" r:id="rId2"/>
+    <p:sldId id="257" r:id="rId3"/>
+    <p:sldId id="258" r:id="rId4"/>
+    <p:sldId id="259" r:id="rId5"/>
   </p:sldIdLst>
   <p:sldSz cx="12192000" cy="6858000"/>
   <p:notesSz cx="6858000" cy="9144000"/>
+  <p:defaultTextStyle>
+    <a:defPPr>
+      <a:defRPr lang="ko-KR"/>
+    </a:defPPr>
+    <a:lvl1pPr marL="0" algn="l" defTabSz="914400" rtl="0" eaLnBrk="1" latinLnBrk="1" hangingPunct="1">
+      <a:defRPr sz="1800" kern="1200">
+        <a:solidFill>
+          <a:schemeClr val="tx1"/>
+        </a:solidFill>
+        <a:latin typeface="+mn-lt"/>
+        <a:ea typeface="+mn-ea"/>
+        <a:cs typeface="+mn-cs"/>
+      </a:defRPr>
+    </a:lvl1pPr>
+    <a:lvl2pPr marL="457200" algn="l" defTabSz="914400" rtl="0" eaLnBrk="1" latinLnBrk="1" hangingPunct="1">
+      <a:defRPr sz="1800" kern="1200">
+        <a:solidFill>
+          <a:schemeClr val="tx1"/>
+        </a:solidFill>
+        <a:latin typeface="+mn-lt"/>
+        <a:ea typeface="+mn-ea"/>
+        <a:cs typeface="+mn-cs"/>
+      </a:defRPr>
+    </a:lvl2pPr>
+    <a:lvl3pPr marL="914400" algn="l" defTabSz="914400" rtl="0" eaLnBrk="1" latinLnBrk="1" hangingPunct="1">
+      <a:defRPr sz="1800" kern="1200">
+        <a:solidFill>
+          <a:schemeClr val="tx1"/>
+        </a:solidFill>
+        <a:latin typeface="+mn-lt"/>
+        <a:ea typeface="+mn-ea"/>
+        <a:cs typeface="+mn-cs"/>
+      </a:defRPr>
+    </a:lvl3pPr>
+    <a:lvl4pPr marL="1371600" algn="l" defTabSz="914400" rtl="0" eaLnBrk="1" latinLnBrk="1" hangingPunct="1">
+      <a:defRPr sz="1800" kern="1200">
+        <a:solidFill>
+          <a:schemeClr val="tx1"/>
+        </a:solidFill>
+        <a:latin typeface="+mn-lt"/>
+        <a:ea typeface="+mn-ea"/>
+        <a:cs typeface="+mn-cs"/>
+      </a:defRPr>
+    </a:lvl4pPr>
+    <a:lvl5pPr marL="1828800" algn="l" defTabSz="914400" rtl="0" eaLnBrk="1" latinLnBrk="1" hangingPunct="1">
+      <a:defRPr sz="1800" kern="1200">
+        <a:solidFill>
+          <a:schemeClr val="tx1"/>
+        </a:solidFill>
+        <a:latin typeface="+mn-lt"/>
+        <a:ea typeface="+mn-ea"/>
+        <a:cs typeface="+mn-cs"/>
+      </a:defRPr>
+    </a:lvl5pPr>
+    <a:lvl6pPr marL="2286000" algn="l" defTabSz="914400" rtl="0" eaLnBrk="1" latinLnBrk="1" hangingPunct="1">
+      <a:defRPr sz="1800" kern="1200">
+        <a:solidFill>
+          <a:schemeClr val="tx1"/>
+        </a:solidFill>
+        <a:latin typeface="+mn-lt"/>
+        <a:ea typeface="+mn-ea"/>
+        <a:cs typeface="+mn-cs"/>
+      </a:defRPr>
+    </a:lvl6pPr>
+    <a:lvl7pPr marL="2743200" algn="l" defTabSz="914400" rtl="0" eaLnBrk="1" latinLnBrk="1" hangingPunct="1">
+      <a:defRPr sz="1800" kern="1200">
+        <a:solidFill>
+          <a:schemeClr val="tx1"/>
+        </a:solidFill>
+        <a:latin typeface="+mn-lt"/>
+        <a:ea typeface="+mn-ea"/>
+        <a:cs typeface="+mn-cs"/>
+      </a:defRPr>
+    </a:lvl7pPr>
+    <a:lvl8pPr marL="3200400" algn="l" defTabSz="914400" rtl="0" eaLnBrk="1" latinLnBrk="1" hangingPunct="1">
+      <a:defRPr sz="1800" kern="1200">
+        <a:solidFill>
+          <a:schemeClr val="tx1"/>
+        </a:solidFill>
+        <a:latin typeface="+mn-lt"/>
+        <a:ea typeface="+mn-ea"/>
+        <a:cs typeface="+mn-cs"/>
+      </a:defRPr>
+    </a:lvl8pPr>
+    <a:lvl9pPr marL="3657600" algn="l" defTabSz="914400" rtl="0" eaLnBrk="1" latinLnBrk="1" hangingPunct="1">
+      <a:defRPr sz="1800" kern="1200">
+        <a:solidFill>
+          <a:schemeClr val="tx1"/>
+        </a:solidFill>
+        <a:latin typeface="+mn-lt"/>
+        <a:ea typeface="+mn-ea"/>
+        <a:cs typeface="+mn-cs"/>
+      </a:defRPr>
+    </a:lvl9pPr>
+  </p:defaultTextStyle>
 </p:presentation>
 </file>
 
 <file path=ppt/notesMasters/notesMaster1.xml><?xml version="1.0" encoding="utf-8"?>
-<p:notesMaster xmlns:p="http://schemas.openxmlformats.org/presentationml/2006/main">
+<p:notesMaster xmlns:a="http://schemas.openxmlformats.org/drawingml/2006/main" xmlns:r="http://schemas.openxmlformats.org/officeDocument/2006/relationships" xmlns:p="http://schemas.openxmlformats.org/presentationml/2006/main">
   <p:cSld>
     <p:bg>
       <p:bgRef idx="1001">
-        <a:schemeClr xmlns:a="http://schemas.openxmlformats.org/drawingml/2006/main" val="bg1"/>
+        <a:schemeClr val="bg1"/>
       </p:bgRef>
     </p:bg>
     <p:spTree>
@@ -34,380 +128,164 @@
         <p:nvPr/>
       </p:nvGrpSpPr>
       <p:grpSpPr>
-        <a:xfrm xmlns:a="http://schemas.openxmlformats.org/drawingml/2006/main"/>
+        <a:xfrm>
+          <a:off x="0" y="0"/>
+          <a:ext cx="0" cy="0"/>
+          <a:chOff x="0" y="0"/>
+          <a:chExt cx="0" cy="0"/>
+        </a:xfrm>
       </p:grpSpPr>
       <p:sp>
         <p:nvSpPr>
           <p:cNvPr id="2" name="Header Placeholder"/>
-          <p:cNvSpPr/>
+          <p:cNvSpPr>
+            <a:spLocks noGrp="1"/>
+          </p:cNvSpPr>
           <p:nvPr>
             <p:ph type="hdr" sz="quarter"/>
           </p:nvPr>
         </p:nvSpPr>
         <p:spPr>
-          <a:prstGeom xmlns:a="http://schemas.openxmlformats.org/drawingml/2006/main" prst="rect">
+          <a:prstGeom prst="rect">
             <a:avLst/>
           </a:prstGeom>
         </p:spPr>
         <p:txBody>
-          <a:bodyPr xmlns:a="http://schemas.openxmlformats.org/drawingml/2006/main"/>
-          <a:lstStyle xmlns:a="http://schemas.openxmlformats.org/drawingml/2006/main"/>
-          <a:p xmlns:a="http://schemas.openxmlformats.org/drawingml/2006/main"/>
+          <a:bodyPr/>
+          <a:lstStyle/>
+          <a:p>
+            <a:endParaRPr/>
+          </a:p>
         </p:txBody>
       </p:sp>
       <p:sp>
         <p:nvSpPr>
           <p:cNvPr id="3" name="Date Placeholder"/>
-          <p:cNvSpPr/>
+          <p:cNvSpPr>
+            <a:spLocks noGrp="1"/>
+          </p:cNvSpPr>
           <p:nvPr>
             <p:ph type="dt" sz="quarter" idx="1"/>
           </p:nvPr>
         </p:nvSpPr>
         <p:spPr>
-          <a:prstGeom xmlns:a="http://schemas.openxmlformats.org/drawingml/2006/main" prst="rect">
+          <a:prstGeom prst="rect">
             <a:avLst/>
           </a:prstGeom>
         </p:spPr>
         <p:txBody>
-          <a:bodyPr xmlns:a="http://schemas.openxmlformats.org/drawingml/2006/main"/>
-          <a:lstStyle xmlns:a="http://schemas.openxmlformats.org/drawingml/2006/main"/>
-          <a:p xmlns:a="http://schemas.openxmlformats.org/drawingml/2006/main"/>
+          <a:bodyPr/>
+          <a:lstStyle/>
+          <a:p>
+            <a:endParaRPr/>
+          </a:p>
         </p:txBody>
       </p:sp>
       <p:sp>
         <p:nvSpPr>
           <p:cNvPr id="4" name="Slide Image Placeholder"/>
-          <p:cNvSpPr/>
+          <p:cNvSpPr>
+            <a:spLocks noGrp="1" noRot="1" noChangeAspect="1"/>
+          </p:cNvSpPr>
           <p:nvPr>
             <p:ph type="sldImg" idx="2"/>
           </p:nvPr>
         </p:nvSpPr>
         <p:spPr>
-          <a:prstGeom xmlns:a="http://schemas.openxmlformats.org/drawingml/2006/main" prst="rect">
+          <a:prstGeom prst="rect">
             <a:avLst/>
           </a:prstGeom>
         </p:spPr>
         <p:txBody>
-          <a:bodyPr xmlns:a="http://schemas.openxmlformats.org/drawingml/2006/main"/>
-          <a:lstStyle xmlns:a="http://schemas.openxmlformats.org/drawingml/2006/main"/>
-          <a:p xmlns:a="http://schemas.openxmlformats.org/drawingml/2006/main"/>
+          <a:bodyPr/>
+          <a:lstStyle/>
+          <a:p>
+            <a:endParaRPr/>
+          </a:p>
         </p:txBody>
       </p:sp>
       <p:sp>
         <p:nvSpPr>
           <p:cNvPr id="5" name="Notes Placeholder"/>
-          <p:cNvSpPr/>
+          <p:cNvSpPr>
+            <a:spLocks noGrp="1"/>
+          </p:cNvSpPr>
           <p:nvPr>
             <p:ph type="body" sz="quarter" idx="3"/>
           </p:nvPr>
         </p:nvSpPr>
         <p:spPr>
-          <a:prstGeom xmlns:a="http://schemas.openxmlformats.org/drawingml/2006/main" prst="rect">
+          <a:prstGeom prst="rect">
             <a:avLst/>
           </a:prstGeom>
         </p:spPr>
         <p:txBody>
-          <a:bodyPr xmlns:a="http://schemas.openxmlformats.org/drawingml/2006/main"/>
-          <a:lstStyle xmlns:a="http://schemas.openxmlformats.org/drawingml/2006/main"/>
-          <a:p xmlns:a="http://schemas.openxmlformats.org/drawingml/2006/main"/>
+          <a:bodyPr/>
+          <a:lstStyle/>
+          <a:p>
+            <a:endParaRPr/>
+          </a:p>
         </p:txBody>
       </p:sp>
       <p:sp>
         <p:nvSpPr>
           <p:cNvPr id="6" name="Footer Placeholder"/>
-          <p:cNvSpPr/>
+          <p:cNvSpPr>
+            <a:spLocks noGrp="1"/>
+          </p:cNvSpPr>
           <p:nvPr>
             <p:ph type="ftr" sz="quarter" idx="4"/>
           </p:nvPr>
         </p:nvSpPr>
         <p:spPr>
-          <a:prstGeom xmlns:a="http://schemas.openxmlformats.org/drawingml/2006/main" prst="rect">
+          <a:prstGeom prst="rect">
             <a:avLst/>
           </a:prstGeom>
         </p:spPr>
         <p:txBody>
-          <a:bodyPr xmlns:a="http://schemas.openxmlformats.org/drawingml/2006/main"/>
-          <a:lstStyle xmlns:a="http://schemas.openxmlformats.org/drawingml/2006/main"/>
-          <a:p xmlns:a="http://schemas.openxmlformats.org/drawingml/2006/main"/>
+          <a:bodyPr/>
+          <a:lstStyle/>
+          <a:p>
+            <a:endParaRPr/>
+          </a:p>
         </p:txBody>
       </p:sp>
       <p:sp>
         <p:nvSpPr>
           <p:cNvPr id="7" name="Slide Number Placeholder"/>
-          <p:cNvSpPr/>
+          <p:cNvSpPr>
+            <a:spLocks noGrp="1"/>
+          </p:cNvSpPr>
           <p:nvPr>
             <p:ph type="sldNum" sz="quarter" idx="5"/>
           </p:nvPr>
         </p:nvSpPr>
         <p:spPr>
-          <a:prstGeom xmlns:a="http://schemas.openxmlformats.org/drawingml/2006/main" prst="rect">
+          <a:prstGeom prst="rect">
             <a:avLst/>
           </a:prstGeom>
         </p:spPr>
         <p:txBody>
-          <a:bodyPr xmlns:a="http://schemas.openxmlformats.org/drawingml/2006/main"/>
-          <a:lstStyle xmlns:a="http://schemas.openxmlformats.org/drawingml/2006/main"/>
-          <a:p xmlns:a="http://schemas.openxmlformats.org/drawingml/2006/main"/>
+          <a:bodyPr/>
+          <a:lstStyle/>
+          <a:p>
+            <a:endParaRPr/>
+          </a:p>
         </p:txBody>
       </p:sp>
     </p:spTree>
   </p:cSld>
   <p:clrMap bg1="lt1" tx1="dk1" bg2="lt2" tx2="dk2" accent1="accent1" accent2="accent2" accent3="accent3" accent4="accent4" accent5="accent5" accent6="accent6" hlink="hlink" folHlink="folHlink"/>
   <p:notesStyle>
-    <a:lvl1pPr xmlns:a="http://schemas.openxmlformats.org/drawingml/2006/main" marL="0" algn="l" defTabSz="914400" rtl="0" eaLnBrk="1" latinLnBrk="0" hangingPunct="1">
+    <a:lvl1pPr marL="0" algn="l" defTabSz="914400" rtl="0" eaLnBrk="1" latinLnBrk="0" hangingPunct="1">
       <a:defRPr sz="1200" kern="1200"/>
     </a:lvl1pPr>
   </p:notesStyle>
 </p:notesMaster>
 </file>
 
-<file path=ppt/notesMasters/theme/theme3.xml><?xml version="1.0" encoding="utf-8"?>
-<a:theme xmlns:a="http://schemas.openxmlformats.org/drawingml/2006/main" name="ChatGPT">
-  <a:themeElements>
-    <a:clrScheme name="ChatGPT">
-      <a:dk1>
-        <a:srgbClr val="000000"/>
-      </a:dk1>
-      <a:lt1>
-        <a:srgbClr val="FFFFFF"/>
-      </a:lt1>
-      <a:dk2>
-        <a:srgbClr val="0E2841"/>
-      </a:dk2>
-      <a:lt2>
-        <a:srgbClr val="E8E8E8"/>
-      </a:lt2>
-      <a:accent1>
-        <a:srgbClr val="156082"/>
-      </a:accent1>
-      <a:accent2>
-        <a:srgbClr val="E97132"/>
-      </a:accent2>
-      <a:accent3>
-        <a:srgbClr val="196B24"/>
-      </a:accent3>
-      <a:accent4>
-        <a:srgbClr val="0F9ED5"/>
-      </a:accent4>
-      <a:accent5>
-        <a:srgbClr val="A02B93"/>
-      </a:accent5>
-      <a:accent6>
-        <a:srgbClr val="4EA72E"/>
-      </a:accent6>
-      <a:hlink>
-        <a:srgbClr val="467886"/>
-      </a:hlink>
-      <a:folHlink>
-        <a:srgbClr val="96607D"/>
-      </a:folHlink>
-    </a:clrScheme>
-    <a:fontScheme name="Office">
-      <a:majorFont>
-        <a:latin typeface="Calibri Light"/>
-        <a:ea typeface="Calibri Light"/>
-        <a:cs typeface="Calibri Light"/>
-      </a:majorFont>
-      <a:minorFont>
-        <a:latin typeface="Calibri"/>
-        <a:ea typeface="Calibri"/>
-        <a:cs typeface="Calibri"/>
-      </a:minorFont>
-    </a:fontScheme>
-    <a:fmtScheme name="ChatGPT">
-      <a:fillStyleLst>
-        <a:solidFill>
-          <a:schemeClr val="phClr"/>
-        </a:solidFill>
-        <a:gradFill>
-          <a:gsLst>
-            <a:gs pos="0">
-              <a:schemeClr val="phClr">
-                <a:tint val="67000"/>
-                <a:lumMod val="110000"/>
-                <a:satMod val="105000"/>
-              </a:schemeClr>
-            </a:gs>
-            <a:gs pos="50000">
-              <a:schemeClr val="phClr">
-                <a:tint val="73000"/>
-                <a:lumMod val="105000"/>
-                <a:satMod val="103000"/>
-              </a:schemeClr>
-            </a:gs>
-            <a:gs pos="100000">
-              <a:schemeClr val="phClr">
-                <a:tint val="81000"/>
-                <a:lumMod val="105000"/>
-                <a:satMod val="109000"/>
-              </a:schemeClr>
-            </a:gs>
-          </a:gsLst>
-          <a:lin ang="5400000" scaled="0"/>
-        </a:gradFill>
-        <a:gradFill>
-          <a:gsLst>
-            <a:gs pos="0">
-              <a:schemeClr val="phClr">
-                <a:tint val="94000"/>
-                <a:lumMod val="102000"/>
-                <a:satMod val="103000"/>
-              </a:schemeClr>
-            </a:gs>
-            <a:gs pos="50000">
-              <a:schemeClr val="phClr">
-                <a:shade val="100000"/>
-                <a:lumMod val="100000"/>
-                <a:satMod val="110000"/>
-              </a:schemeClr>
-            </a:gs>
-            <a:gs pos="100000">
-              <a:schemeClr val="phClr">
-                <a:shade val="78000"/>
-                <a:lumMod val="99000"/>
-                <a:satMod val="120000"/>
-              </a:schemeClr>
-            </a:gs>
-          </a:gsLst>
-          <a:lin ang="5400000" scaled="0"/>
-        </a:gradFill>
-      </a:fillStyleLst>
-      <a:lnStyleLst>
-        <a:ln w="12700">
-          <a:solidFill>
-            <a:schemeClr val="phClr"/>
-          </a:solidFill>
-          <a:prstDash val="solid"/>
-        </a:ln>
-        <a:ln w="19050">
-          <a:solidFill>
-            <a:schemeClr val="phClr"/>
-          </a:solidFill>
-          <a:prstDash val="solid"/>
-        </a:ln>
-        <a:ln w="25400">
-          <a:solidFill>
-            <a:schemeClr val="phClr"/>
-          </a:solidFill>
-          <a:prstDash val="solid"/>
-        </a:ln>
-      </a:lnStyleLst>
-      <a:effectStyleLst>
-        <a:effectStyle>
-          <a:effectLst/>
-        </a:effectStyle>
-        <a:effectStyle>
-          <a:effectLst/>
-        </a:effectStyle>
-        <a:effectStyle>
-          <a:effectLst>
-            <a:outerShdw blurRad="57150" dist="19050" dir="5400000">
-              <a:srgbClr val="000000">
-                <a:alpha val="16000"/>
-              </a:srgbClr>
-            </a:outerShdw>
-          </a:effectLst>
-        </a:effectStyle>
-        <a:effectStyle>
-          <a:effectLst>
-            <a:outerShdw blurRad="19050" dist="9525" dir="5400000">
-              <a:srgbClr val="000000">
-                <a:alpha val="6000"/>
-              </a:srgbClr>
-            </a:outerShdw>
-          </a:effectLst>
-        </a:effectStyle>
-        <a:effectStyle>
-          <a:effectLst>
-            <a:outerShdw blurRad="28575" dist="9525" dir="5400000">
-              <a:srgbClr val="000000">
-                <a:alpha val="8000"/>
-              </a:srgbClr>
-            </a:outerShdw>
-          </a:effectLst>
-        </a:effectStyle>
-        <a:effectStyle>
-          <a:effectLst>
-            <a:outerShdw blurRad="57150" dist="19050" dir="5400000">
-              <a:srgbClr val="000000">
-                <a:alpha val="10000"/>
-              </a:srgbClr>
-            </a:outerShdw>
-          </a:effectLst>
-        </a:effectStyle>
-        <a:effectStyle>
-          <a:effectLst>
-            <a:outerShdw blurRad="114300" dist="38100" dir="5400000">
-              <a:srgbClr val="000000">
-                <a:alpha val="12000"/>
-              </a:srgbClr>
-            </a:outerShdw>
-          </a:effectLst>
-        </a:effectStyle>
-        <a:effectStyle>
-          <a:effectLst>
-            <a:outerShdw blurRad="171450" dist="57150" dir="5400000">
-              <a:srgbClr val="000000">
-                <a:alpha val="16000"/>
-              </a:srgbClr>
-            </a:outerShdw>
-          </a:effectLst>
-        </a:effectStyle>
-        <a:effectStyle>
-          <a:effectLst>
-            <a:outerShdw blurRad="266700" dist="95250" dir="5400000">
-              <a:srgbClr val="000000">
-                <a:alpha val="24000"/>
-              </a:srgbClr>
-            </a:outerShdw>
-          </a:effectLst>
-        </a:effectStyle>
-      </a:effectStyleLst>
-      <a:bgFillStyleLst>
-        <a:solidFill>
-          <a:schemeClr val="phClr"/>
-        </a:solidFill>
-        <a:solidFill>
-          <a:schemeClr val="phClr">
-            <a:tint val="95000"/>
-            <a:satMod val="170000"/>
-          </a:schemeClr>
-        </a:solidFill>
-        <a:gradFill>
-          <a:gsLst>
-            <a:gs pos="0">
-              <a:schemeClr val="phClr">
-                <a:tint val="93000"/>
-                <a:shade val="98000"/>
-                <a:lumMod val="102000"/>
-                <a:satMod val="150000"/>
-              </a:schemeClr>
-            </a:gs>
-            <a:gs pos="50000">
-              <a:schemeClr val="phClr">
-                <a:tint val="98000"/>
-                <a:shade val="90000"/>
-                <a:lumMod val="103000"/>
-                <a:satMod val="130000"/>
-              </a:schemeClr>
-            </a:gs>
-            <a:gs pos="100000">
-              <a:schemeClr val="phClr">
-                <a:shade val="63000"/>
-                <a:satMod val="120000"/>
-              </a:schemeClr>
-            </a:gs>
-          </a:gsLst>
-          <a:lin ang="5400000" scaled="0"/>
-        </a:gradFill>
-      </a:bgFillStyleLst>
-    </a:fmtScheme>
-  </a:themeElements>
-</a:theme>
-</file>
-
 <file path=ppt/notesSlides/notesSlide1.xml><?xml version="1.0" encoding="utf-8"?>
-<p:notes xmlns:p="http://schemas.openxmlformats.org/presentationml/2006/main">
+<p:notes xmlns:a="http://schemas.openxmlformats.org/drawingml/2006/main" xmlns:r="http://schemas.openxmlformats.org/officeDocument/2006/relationships" xmlns:p="http://schemas.openxmlformats.org/presentationml/2006/main">
   <p:cSld>
     <p:spTree>
       <p:nvGrpSpPr>
@@ -416,16 +294,21 @@
         <p:nvPr/>
       </p:nvGrpSpPr>
       <p:grpSpPr>
-        <a:xfrm xmlns:a="http://schemas.openxmlformats.org/drawingml/2006/main"/>
+        <a:xfrm>
+          <a:off x="0" y="0"/>
+          <a:ext cx="0" cy="0"/>
+          <a:chOff x="0" y="0"/>
+          <a:chExt cx="0" cy="0"/>
+        </a:xfrm>
       </p:grpSpPr>
       <p:sp>
         <p:nvSpPr>
           <p:cNvPr id="2" name="Slide Image Placeholder 1"/>
           <p:cNvSpPr>
-            <a:spLocks xmlns:a="http://schemas.openxmlformats.org/drawingml/2006/main" noGrp="1"/>
+            <a:spLocks noGrp="1" noRot="1" noChangeAspect="1"/>
           </p:cNvSpPr>
           <p:nvPr>
-            <p:ph type="sldImg" idx="0"/>
+            <p:ph type="sldImg"/>
           </p:nvPr>
         </p:nvSpPr>
         <p:spPr/>
@@ -434,7 +317,7 @@
         <p:nvSpPr>
           <p:cNvPr id="3" name="Notes Placeholder 2"/>
           <p:cNvSpPr>
-            <a:spLocks xmlns:a="http://schemas.openxmlformats.org/drawingml/2006/main" noGrp="1"/>
+            <a:spLocks noGrp="1"/>
           </p:cNvSpPr>
           <p:nvPr>
             <p:ph type="body" idx="1"/>
@@ -442,19 +325,19 @@
         </p:nvSpPr>
         <p:spPr/>
         <p:txBody>
-          <a:bodyPr xmlns:a="http://schemas.openxmlformats.org/drawingml/2006/main"/>
-          <a:lstStyle xmlns:a="http://schemas.openxmlformats.org/drawingml/2006/main"/>
-          <a:p xmlns:a="http://schemas.openxmlformats.org/drawingml/2006/main">
+          <a:bodyPr/>
+          <a:lstStyle/>
+          <a:p>
             <a:r>
               <a:t>[발표 멘트]</a:t>
             </a:r>
           </a:p>
-          <a:p xmlns:a="http://schemas.openxmlformats.org/drawingml/2006/main">
+          <a:p>
             <a:r>
               <a:t>현재 연구 결과가 나온 단계는 아니고, 개인미팅을 통해 연구 문제와 첫 구현 방향을 정리했습니다.</a:t>
             </a:r>
           </a:p>
-          <a:p xmlns:a="http://schemas.openxmlformats.org/drawingml/2006/main">
+          <a:p>
             <a:r>
               <a:t>오늘은 현재까지 정리한 내용을 공유하고, 건대에서 진행 중인 DTUMOS 택시 연구와 제 전기버스 연구를 어떻게 연결하면 좋을지 같이 논의하고 싶습니다.</a:t>
             </a:r>
@@ -465,7 +348,7 @@
         <p:nvSpPr>
           <p:cNvPr id="4" name="Slide Number Placeholder 3"/>
           <p:cNvSpPr>
-            <a:spLocks xmlns:a="http://schemas.openxmlformats.org/drawingml/2006/main" noGrp="1"/>
+            <a:spLocks noGrp="1"/>
           </p:cNvSpPr>
           <p:nvPr>
             <p:ph type="sldNum" idx="5"/>
@@ -473,21 +356,23 @@
         </p:nvSpPr>
         <p:spPr/>
         <p:txBody>
-          <a:bodyPr xmlns:a="http://schemas.openxmlformats.org/drawingml/2006/main"/>
-          <a:lstStyle xmlns:a="http://schemas.openxmlformats.org/drawingml/2006/main"/>
-          <a:p xmlns:a="http://schemas.openxmlformats.org/drawingml/2006/main"/>
+          <a:bodyPr/>
+          <a:lstStyle/>
+          <a:p>
+            <a:endParaRPr/>
+          </a:p>
         </p:txBody>
       </p:sp>
     </p:spTree>
   </p:cSld>
   <p:clrMapOvr>
-    <a:masterClrMapping xmlns:a="http://schemas.openxmlformats.org/drawingml/2006/main"/>
+    <a:masterClrMapping/>
   </p:clrMapOvr>
 </p:notes>
 </file>
 
 <file path=ppt/notesSlides/notesSlide2.xml><?xml version="1.0" encoding="utf-8"?>
-<p:notes xmlns:p="http://schemas.openxmlformats.org/presentationml/2006/main">
+<p:notes xmlns:a="http://schemas.openxmlformats.org/drawingml/2006/main" xmlns:r="http://schemas.openxmlformats.org/officeDocument/2006/relationships" xmlns:p="http://schemas.openxmlformats.org/presentationml/2006/main">
   <p:cSld>
     <p:spTree>
       <p:nvGrpSpPr>
@@ -496,16 +381,21 @@
         <p:nvPr/>
       </p:nvGrpSpPr>
       <p:grpSpPr>
-        <a:xfrm xmlns:a="http://schemas.openxmlformats.org/drawingml/2006/main"/>
+        <a:xfrm>
+          <a:off x="0" y="0"/>
+          <a:ext cx="0" cy="0"/>
+          <a:chOff x="0" y="0"/>
+          <a:chExt cx="0" cy="0"/>
+        </a:xfrm>
       </p:grpSpPr>
       <p:sp>
         <p:nvSpPr>
           <p:cNvPr id="2" name="Slide Image Placeholder 1"/>
           <p:cNvSpPr>
-            <a:spLocks xmlns:a="http://schemas.openxmlformats.org/drawingml/2006/main" noGrp="1"/>
+            <a:spLocks noGrp="1" noRot="1" noChangeAspect="1"/>
           </p:cNvSpPr>
           <p:nvPr>
-            <p:ph type="sldImg" idx="0"/>
+            <p:ph type="sldImg"/>
           </p:nvPr>
         </p:nvSpPr>
         <p:spPr/>
@@ -514,7 +404,7 @@
         <p:nvSpPr>
           <p:cNvPr id="3" name="Notes Placeholder 2"/>
           <p:cNvSpPr>
-            <a:spLocks xmlns:a="http://schemas.openxmlformats.org/drawingml/2006/main" noGrp="1"/>
+            <a:spLocks noGrp="1"/>
           </p:cNvSpPr>
           <p:nvPr>
             <p:ph type="body" idx="1"/>
@@ -522,24 +412,24 @@
         </p:nvSpPr>
         <p:spPr/>
         <p:txBody>
-          <a:bodyPr xmlns:a="http://schemas.openxmlformats.org/drawingml/2006/main"/>
-          <a:lstStyle xmlns:a="http://schemas.openxmlformats.org/drawingml/2006/main"/>
-          <a:p xmlns:a="http://schemas.openxmlformats.org/drawingml/2006/main">
+          <a:bodyPr/>
+          <a:lstStyle/>
+          <a:p>
             <a:r>
               <a:t>[발표 멘트]</a:t>
             </a:r>
           </a:p>
-          <a:p xmlns:a="http://schemas.openxmlformats.org/drawingml/2006/main">
+          <a:p>
             <a:r>
               <a:t>제가 현재 정리한 문제는 공유 충전기의 대기가 실제 버스 출발 지연으로 이어질 수 있다는 점입니다.</a:t>
             </a:r>
           </a:p>
-          <a:p xmlns:a="http://schemas.openxmlformats.org/drawingml/2006/main">
+          <a:p>
             <a:r>
               <a:t>그래서 충전기가 부족한 상황에서 시설을 얼마나 두고 어떤 순서로 충전하며, 지연이 생겼을 때 운행을 어떻게 조정해야 하는지를 보고 싶습니다.</a:t>
             </a:r>
           </a:p>
-          <a:p xmlns:a="http://schemas.openxmlformats.org/drawingml/2006/main">
+          <a:p>
             <a:r>
               <a:t>이 문장은 아직 연구 목적 초안이므로 오늘 자문을 받고 범위를 더 좁히려고 합니다.</a:t>
             </a:r>
@@ -550,7 +440,7 @@
         <p:nvSpPr>
           <p:cNvPr id="4" name="Slide Number Placeholder 3"/>
           <p:cNvSpPr>
-            <a:spLocks xmlns:a="http://schemas.openxmlformats.org/drawingml/2006/main" noGrp="1"/>
+            <a:spLocks noGrp="1"/>
           </p:cNvSpPr>
           <p:nvPr>
             <p:ph type="sldNum" idx="5"/>
@@ -558,21 +448,23 @@
         </p:nvSpPr>
         <p:spPr/>
         <p:txBody>
-          <a:bodyPr xmlns:a="http://schemas.openxmlformats.org/drawingml/2006/main"/>
-          <a:lstStyle xmlns:a="http://schemas.openxmlformats.org/drawingml/2006/main"/>
-          <a:p xmlns:a="http://schemas.openxmlformats.org/drawingml/2006/main"/>
+          <a:bodyPr/>
+          <a:lstStyle/>
+          <a:p>
+            <a:endParaRPr/>
+          </a:p>
         </p:txBody>
       </p:sp>
     </p:spTree>
   </p:cSld>
   <p:clrMapOvr>
-    <a:masterClrMapping xmlns:a="http://schemas.openxmlformats.org/drawingml/2006/main"/>
+    <a:masterClrMapping/>
   </p:clrMapOvr>
 </p:notes>
 </file>
 
 <file path=ppt/notesSlides/notesSlide3.xml><?xml version="1.0" encoding="utf-8"?>
-<p:notes xmlns:p="http://schemas.openxmlformats.org/presentationml/2006/main">
+<p:notes xmlns:a="http://schemas.openxmlformats.org/drawingml/2006/main" xmlns:r="http://schemas.openxmlformats.org/officeDocument/2006/relationships" xmlns:p="http://schemas.openxmlformats.org/presentationml/2006/main">
   <p:cSld>
     <p:spTree>
       <p:nvGrpSpPr>
@@ -581,16 +473,21 @@
         <p:nvPr/>
       </p:nvGrpSpPr>
       <p:grpSpPr>
-        <a:xfrm xmlns:a="http://schemas.openxmlformats.org/drawingml/2006/main"/>
+        <a:xfrm>
+          <a:off x="0" y="0"/>
+          <a:ext cx="0" cy="0"/>
+          <a:chOff x="0" y="0"/>
+          <a:chExt cx="0" cy="0"/>
+        </a:xfrm>
       </p:grpSpPr>
       <p:sp>
         <p:nvSpPr>
           <p:cNvPr id="2" name="Slide Image Placeholder 1"/>
           <p:cNvSpPr>
-            <a:spLocks xmlns:a="http://schemas.openxmlformats.org/drawingml/2006/main" noGrp="1"/>
+            <a:spLocks noGrp="1" noRot="1" noChangeAspect="1"/>
           </p:cNvSpPr>
           <p:nvPr>
-            <p:ph type="sldImg" idx="0"/>
+            <p:ph type="sldImg"/>
           </p:nvPr>
         </p:nvSpPr>
         <p:spPr/>
@@ -599,7 +496,7 @@
         <p:nvSpPr>
           <p:cNvPr id="3" name="Notes Placeholder 2"/>
           <p:cNvSpPr>
-            <a:spLocks xmlns:a="http://schemas.openxmlformats.org/drawingml/2006/main" noGrp="1"/>
+            <a:spLocks noGrp="1"/>
           </p:cNvSpPr>
           <p:nvPr>
             <p:ph type="body" idx="1"/>
@@ -607,24 +504,24 @@
         </p:nvSpPr>
         <p:spPr/>
         <p:txBody>
-          <a:bodyPr xmlns:a="http://schemas.openxmlformats.org/drawingml/2006/main"/>
-          <a:lstStyle xmlns:a="http://schemas.openxmlformats.org/drawingml/2006/main"/>
-          <a:p xmlns:a="http://schemas.openxmlformats.org/drawingml/2006/main">
+          <a:bodyPr/>
+          <a:lstStyle/>
+          <a:p>
             <a:r>
               <a:t>[발표 멘트]</a:t>
             </a:r>
           </a:p>
-          <a:p xmlns:a="http://schemas.openxmlformats.org/drawingml/2006/main">
+          <a:p>
             <a:r>
               <a:t>현재 완료된 것은 연구 문제와 목적 초안을 정리한 것입니다.</a:t>
             </a:r>
           </a:p>
-          <a:p xmlns:a="http://schemas.openxmlformats.org/drawingml/2006/main">
+          <a:p>
             <a:r>
               <a:t>GTFS와 BIS를 같이 쓰는 방향을 생각했지만 사용할 노선과 기간을 정하지 않았고, 실제 데이터를 넣은 시뮬레이션도 아직 없습니다.</a:t>
             </a:r>
           </a:p>
-          <a:p xmlns:a="http://schemas.openxmlformats.org/drawingml/2006/main">
+          <a:p>
             <a:r>
               <a:t>충전 알고리즘도 도착 즉시 충전과 출발시간 우선 충전을 후보로 생각한 단계입니다. 기존 시험 코드는 구조 확인용이며 연구 결과로 사용한 상태가 아닙니다.</a:t>
             </a:r>
@@ -635,7 +532,7 @@
         <p:nvSpPr>
           <p:cNvPr id="4" name="Slide Number Placeholder 3"/>
           <p:cNvSpPr>
-            <a:spLocks xmlns:a="http://schemas.openxmlformats.org/drawingml/2006/main" noGrp="1"/>
+            <a:spLocks noGrp="1"/>
           </p:cNvSpPr>
           <p:nvPr>
             <p:ph type="sldNum" idx="5"/>
@@ -643,21 +540,23 @@
         </p:nvSpPr>
         <p:spPr/>
         <p:txBody>
-          <a:bodyPr xmlns:a="http://schemas.openxmlformats.org/drawingml/2006/main"/>
-          <a:lstStyle xmlns:a="http://schemas.openxmlformats.org/drawingml/2006/main"/>
-          <a:p xmlns:a="http://schemas.openxmlformats.org/drawingml/2006/main"/>
+          <a:bodyPr/>
+          <a:lstStyle/>
+          <a:p>
+            <a:endParaRPr/>
+          </a:p>
         </p:txBody>
       </p:sp>
     </p:spTree>
   </p:cSld>
   <p:clrMapOvr>
-    <a:masterClrMapping xmlns:a="http://schemas.openxmlformats.org/drawingml/2006/main"/>
+    <a:masterClrMapping/>
   </p:clrMapOvr>
 </p:notes>
 </file>
 
 <file path=ppt/notesSlides/notesSlide4.xml><?xml version="1.0" encoding="utf-8"?>
-<p:notes xmlns:p="http://schemas.openxmlformats.org/presentationml/2006/main">
+<p:notes xmlns:a="http://schemas.openxmlformats.org/drawingml/2006/main" xmlns:r="http://schemas.openxmlformats.org/officeDocument/2006/relationships" xmlns:p="http://schemas.openxmlformats.org/presentationml/2006/main">
   <p:cSld>
     <p:spTree>
       <p:nvGrpSpPr>
@@ -666,16 +565,21 @@
         <p:nvPr/>
       </p:nvGrpSpPr>
       <p:grpSpPr>
-        <a:xfrm xmlns:a="http://schemas.openxmlformats.org/drawingml/2006/main"/>
+        <a:xfrm>
+          <a:off x="0" y="0"/>
+          <a:ext cx="0" cy="0"/>
+          <a:chOff x="0" y="0"/>
+          <a:chExt cx="0" cy="0"/>
+        </a:xfrm>
       </p:grpSpPr>
       <p:sp>
         <p:nvSpPr>
           <p:cNvPr id="2" name="Slide Image Placeholder 1"/>
           <p:cNvSpPr>
-            <a:spLocks xmlns:a="http://schemas.openxmlformats.org/drawingml/2006/main" noGrp="1"/>
+            <a:spLocks noGrp="1" noRot="1" noChangeAspect="1"/>
           </p:cNvSpPr>
           <p:nvPr>
-            <p:ph type="sldImg" idx="0"/>
+            <p:ph type="sldImg"/>
           </p:nvPr>
         </p:nvSpPr>
         <p:spPr/>
@@ -684,7 +588,7 @@
         <p:nvSpPr>
           <p:cNvPr id="3" name="Notes Placeholder 2"/>
           <p:cNvSpPr>
-            <a:spLocks xmlns:a="http://schemas.openxmlformats.org/drawingml/2006/main" noGrp="1"/>
+            <a:spLocks noGrp="1"/>
           </p:cNvSpPr>
           <p:nvPr>
             <p:ph type="body" idx="1"/>
@@ -692,24 +596,24 @@
         </p:nvSpPr>
         <p:spPr/>
         <p:txBody>
-          <a:bodyPr xmlns:a="http://schemas.openxmlformats.org/drawingml/2006/main"/>
-          <a:lstStyle xmlns:a="http://schemas.openxmlformats.org/drawingml/2006/main"/>
-          <a:p xmlns:a="http://schemas.openxmlformats.org/drawingml/2006/main">
+          <a:bodyPr/>
+          <a:lstStyle/>
+          <a:p>
             <a:r>
               <a:t>[발표 멘트]</a:t>
             </a:r>
           </a:p>
-          <a:p xmlns:a="http://schemas.openxmlformats.org/drawingml/2006/main">
+          <a:p>
             <a:r>
               <a:t>공동연구 논의 후 첫 사이클은 노선 하나를 정하고, 버스 세 대 정도와 충전기 한 대의 작은 예제를 만드는 것으로 생각하고 있습니다.</a:t>
             </a:r>
           </a:p>
-          <a:p xmlns:a="http://schemas.openxmlformats.org/drawingml/2006/main">
+          <a:p>
             <a:r>
               <a:t>도착 즉시 충전을 기준으로 둔 뒤 다음 출발시간이 가까운 버스를 먼저 충전하는 방법과 비교하려고 합니다.</a:t>
             </a:r>
           </a:p>
-          <a:p xmlns:a="http://schemas.openxmlformats.org/drawingml/2006/main">
+          <a:p>
             <a:r>
               <a:t>다만 데이터 범위, 시뮬레이션의 현실성 수준과 알고리즘 시작점을 아직 정하지 못해 이 부분을 함께 논의하고 싶습니다.</a:t>
             </a:r>
@@ -720,7 +624,7 @@
         <p:nvSpPr>
           <p:cNvPr id="4" name="Slide Number Placeholder 3"/>
           <p:cNvSpPr>
-            <a:spLocks xmlns:a="http://schemas.openxmlformats.org/drawingml/2006/main" noGrp="1"/>
+            <a:spLocks noGrp="1"/>
           </p:cNvSpPr>
           <p:nvPr>
             <p:ph type="sldNum" idx="5"/>
@@ -728,106 +632,23 @@
         </p:nvSpPr>
         <p:spPr/>
         <p:txBody>
-          <a:bodyPr xmlns:a="http://schemas.openxmlformats.org/drawingml/2006/main"/>
-          <a:lstStyle xmlns:a="http://schemas.openxmlformats.org/drawingml/2006/main"/>
-          <a:p xmlns:a="http://schemas.openxmlformats.org/drawingml/2006/main"/>
+          <a:bodyPr/>
+          <a:lstStyle/>
+          <a:p>
+            <a:endParaRPr/>
+          </a:p>
         </p:txBody>
       </p:sp>
     </p:spTree>
   </p:cSld>
   <p:clrMapOvr>
-    <a:masterClrMapping xmlns:a="http://schemas.openxmlformats.org/drawingml/2006/main"/>
-  </p:clrMapOvr>
-</p:notes>
-</file>
-
-<file path=ppt/notesSlides/notesSlide5.xml><?xml version="1.0" encoding="utf-8"?>
-<p:notes xmlns:p="http://schemas.openxmlformats.org/presentationml/2006/main">
-  <p:cSld>
-    <p:spTree>
-      <p:nvGrpSpPr>
-        <p:cNvPr id="1" name=""/>
-        <p:cNvGrpSpPr/>
-        <p:nvPr/>
-      </p:nvGrpSpPr>
-      <p:grpSpPr>
-        <a:xfrm xmlns:a="http://schemas.openxmlformats.org/drawingml/2006/main"/>
-      </p:grpSpPr>
-      <p:sp>
-        <p:nvSpPr>
-          <p:cNvPr id="2" name="Slide Image Placeholder 1"/>
-          <p:cNvSpPr>
-            <a:spLocks xmlns:a="http://schemas.openxmlformats.org/drawingml/2006/main" noGrp="1"/>
-          </p:cNvSpPr>
-          <p:nvPr>
-            <p:ph type="sldImg" idx="0"/>
-          </p:nvPr>
-        </p:nvSpPr>
-        <p:spPr/>
-      </p:sp>
-      <p:sp>
-        <p:nvSpPr>
-          <p:cNvPr id="3" name="Notes Placeholder 2"/>
-          <p:cNvSpPr>
-            <a:spLocks xmlns:a="http://schemas.openxmlformats.org/drawingml/2006/main" noGrp="1"/>
-          </p:cNvSpPr>
-          <p:nvPr>
-            <p:ph type="body" idx="1"/>
-          </p:nvPr>
-        </p:nvSpPr>
-        <p:spPr/>
-        <p:txBody>
-          <a:bodyPr xmlns:a="http://schemas.openxmlformats.org/drawingml/2006/main"/>
-          <a:lstStyle xmlns:a="http://schemas.openxmlformats.org/drawingml/2006/main"/>
-          <a:p xmlns:a="http://schemas.openxmlformats.org/drawingml/2006/main">
-            <a:r>
-              <a:t>[발표 멘트]</a:t>
-            </a:r>
-          </a:p>
-          <a:p xmlns:a="http://schemas.openxmlformats.org/drawingml/2006/main">
-            <a:r>
-              <a:t>공동연구 관점에서 함께 논의하고 싶은 내용은 네 가지입니다.</a:t>
-            </a:r>
-          </a:p>
-          <a:p xmlns:a="http://schemas.openxmlformats.org/drawingml/2006/main">
-            <a:r>
-              <a:t>첫째는 택시와 전기버스 연구가 함께 사용할 DTUMOS 구조와 평가지표입니다. 둘째는 두 연구의 데이터 범위를 어떻게 맞출지입니다.</a:t>
-            </a:r>
-          </a:p>
-          <a:p xmlns:a="http://schemas.openxmlformats.org/drawingml/2006/main">
-            <a:r>
-              <a:t>셋째는 전기버스 시험 구현과 충전 방법 비교의 순서입니다. 넷째는 공동논문의 질문과 제 전기버스 파트의 역할입니다.</a:t>
-            </a:r>
-          </a:p>
-        </p:txBody>
-      </p:sp>
-      <p:sp>
-        <p:nvSpPr>
-          <p:cNvPr id="4" name="Slide Number Placeholder 3"/>
-          <p:cNvSpPr>
-            <a:spLocks xmlns:a="http://schemas.openxmlformats.org/drawingml/2006/main" noGrp="1"/>
-          </p:cNvSpPr>
-          <p:nvPr>
-            <p:ph type="sldNum" idx="5"/>
-          </p:nvPr>
-        </p:nvSpPr>
-        <p:spPr/>
-        <p:txBody>
-          <a:bodyPr xmlns:a="http://schemas.openxmlformats.org/drawingml/2006/main"/>
-          <a:lstStyle xmlns:a="http://schemas.openxmlformats.org/drawingml/2006/main"/>
-          <a:p xmlns:a="http://schemas.openxmlformats.org/drawingml/2006/main"/>
-        </p:txBody>
-      </p:sp>
-    </p:spTree>
-  </p:cSld>
-  <p:clrMapOvr>
-    <a:masterClrMapping xmlns:a="http://schemas.openxmlformats.org/drawingml/2006/main"/>
+    <a:masterClrMapping/>
   </p:clrMapOvr>
 </p:notes>
 </file>
 
 <file path=ppt/slideLayouts/slideLayout1.xml><?xml version="1.0" encoding="utf-8"?>
-<p:sldLayout xmlns:p="http://schemas.openxmlformats.org/presentationml/2006/main" type="title">
+<p:sldLayout xmlns:a="http://schemas.openxmlformats.org/drawingml/2006/main" xmlns:r="http://schemas.openxmlformats.org/officeDocument/2006/relationships" xmlns:p="http://schemas.openxmlformats.org/presentationml/2006/main" type="title">
   <p:cSld name="Title Slide">
     <p:spTree>
       <p:nvGrpSpPr>
@@ -836,19 +657,27 @@
         <p:nvPr/>
       </p:nvGrpSpPr>
       <p:grpSpPr>
-        <a:xfrm xmlns:a="http://schemas.openxmlformats.org/drawingml/2006/main"/>
+        <a:xfrm>
+          <a:off x="0" y="0"/>
+          <a:ext cx="0" cy="0"/>
+          <a:chOff x="0" y="0"/>
+          <a:chExt cx="0" cy="0"/>
+        </a:xfrm>
       </p:grpSpPr>
     </p:spTree>
   </p:cSld>
+  <p:clrMapOvr>
+    <a:masterClrMapping/>
+  </p:clrMapOvr>
 </p:sldLayout>
 </file>
 
 <file path=ppt/slideMasters/slideMaster1.xml><?xml version="1.0" encoding="utf-8"?>
-<p:sldMaster xmlns:p="http://schemas.openxmlformats.org/presentationml/2006/main">
+<p:sldMaster xmlns:a="http://schemas.openxmlformats.org/drawingml/2006/main" xmlns:r="http://schemas.openxmlformats.org/officeDocument/2006/relationships" xmlns:p="http://schemas.openxmlformats.org/presentationml/2006/main">
   <p:cSld name="Master">
     <p:bg>
       <p:bgRef idx="1001">
-        <a:schemeClr xmlns:a="http://schemas.openxmlformats.org/drawingml/2006/main" val="bg1"/>
+        <a:schemeClr val="bg1"/>
       </p:bgRef>
     </p:bg>
     <p:spTree>
@@ -858,17 +687,22 @@
         <p:nvPr/>
       </p:nvGrpSpPr>
       <p:grpSpPr>
-        <a:xfrm xmlns:a="http://schemas.openxmlformats.org/drawingml/2006/main"/>
+        <a:xfrm>
+          <a:off x="0" y="0"/>
+          <a:ext cx="0" cy="0"/>
+          <a:chOff x="0" y="0"/>
+          <a:chExt cx="0" cy="0"/>
+        </a:xfrm>
       </p:grpSpPr>
     </p:spTree>
   </p:cSld>
   <p:clrMap bg1="lt1" tx1="dk1" bg2="lt2" tx2="dk2" accent1="accent1" accent2="accent2" accent3="accent3" accent4="accent4" accent5="accent5" accent6="accent6" hlink="hlink" folHlink="folHlink"/>
   <p:sldLayoutIdLst>
-    <p:sldLayoutId xmlns:r="http://schemas.openxmlformats.org/officeDocument/2006/relationships" id="2147483649" r:id="R250b4037da8e4de4"/>
+    <p:sldLayoutId id="2147483649" r:id="rId1"/>
   </p:sldLayoutIdLst>
   <p:txStyles>
     <p:titleStyle>
-      <a:lvl1pPr xmlns:a="http://schemas.openxmlformats.org/drawingml/2006/main" algn="l">
+      <a:lvl1pPr algn="l">
         <a:lnSpc>
           <a:spcPct val="90000"/>
         </a:lnSpc>
@@ -887,7 +721,7 @@
       </a:lvl1pPr>
     </p:titleStyle>
     <p:bodyStyle>
-      <a:lvl1pPr xmlns:a="http://schemas.openxmlformats.org/drawingml/2006/main" marL="228600" indent="-228600" algn="l">
+      <a:lvl1pPr marL="228600" indent="-228600" algn="l">
         <a:lnSpc>
           <a:spcPct val="90000"/>
         </a:lnSpc>
@@ -904,7 +738,7 @@
           <a:cs typeface="+mn-lt"/>
         </a:defRPr>
       </a:lvl1pPr>
-      <a:lvl2pPr xmlns:a="http://schemas.openxmlformats.org/drawingml/2006/main" marL="685800" indent="-228600" algn="l">
+      <a:lvl2pPr marL="685800" indent="-228600" algn="l">
         <a:lnSpc>
           <a:spcPct val="90000"/>
         </a:lnSpc>
@@ -921,7 +755,7 @@
           <a:cs typeface="+mn-lt"/>
         </a:defRPr>
       </a:lvl2pPr>
-      <a:lvl3pPr xmlns:a="http://schemas.openxmlformats.org/drawingml/2006/main" marL="1143000" indent="-228600" algn="l">
+      <a:lvl3pPr marL="1143000" indent="-228600" algn="l">
         <a:lnSpc>
           <a:spcPct val="90000"/>
         </a:lnSpc>
@@ -938,7 +772,7 @@
           <a:cs typeface="+mn-lt"/>
         </a:defRPr>
       </a:lvl3pPr>
-      <a:lvl4pPr xmlns:a="http://schemas.openxmlformats.org/drawingml/2006/main" marL="1600200" indent="-228600" algn="l">
+      <a:lvl4pPr marL="1600200" indent="-228600" algn="l">
         <a:lnSpc>
           <a:spcPct val="90000"/>
         </a:lnSpc>
@@ -955,7 +789,7 @@
           <a:cs typeface="+mn-lt"/>
         </a:defRPr>
       </a:lvl4pPr>
-      <a:lvl5pPr xmlns:a="http://schemas.openxmlformats.org/drawingml/2006/main" marL="2057400" indent="-228600" algn="l">
+      <a:lvl5pPr marL="2057400" indent="-228600" algn="l">
         <a:lnSpc>
           <a:spcPct val="90000"/>
         </a:lnSpc>
@@ -972,7 +806,7 @@
           <a:cs typeface="+mn-lt"/>
         </a:defRPr>
       </a:lvl5pPr>
-      <a:lvl6pPr xmlns:a="http://schemas.openxmlformats.org/drawingml/2006/main" marL="2514600" indent="-228600" algn="l">
+      <a:lvl6pPr marL="2514600" indent="-228600" algn="l">
         <a:lnSpc>
           <a:spcPct val="90000"/>
         </a:lnSpc>
@@ -989,7 +823,7 @@
           <a:cs typeface="+mn-lt"/>
         </a:defRPr>
       </a:lvl6pPr>
-      <a:lvl7pPr xmlns:a="http://schemas.openxmlformats.org/drawingml/2006/main" marL="2971800" indent="-228600" algn="l">
+      <a:lvl7pPr marL="2971800" indent="-228600" algn="l">
         <a:lnSpc>
           <a:spcPct val="90000"/>
         </a:lnSpc>
@@ -1006,7 +840,7 @@
           <a:cs typeface="+mn-lt"/>
         </a:defRPr>
       </a:lvl7pPr>
-      <a:lvl8pPr xmlns:a="http://schemas.openxmlformats.org/drawingml/2006/main" marL="3429000" indent="-228600" algn="l">
+      <a:lvl8pPr marL="3429000" indent="-228600" algn="l">
         <a:lnSpc>
           <a:spcPct val="90000"/>
         </a:lnSpc>
@@ -1023,7 +857,7 @@
           <a:cs typeface="+mn-lt"/>
         </a:defRPr>
       </a:lvl8pPr>
-      <a:lvl9pPr xmlns:a="http://schemas.openxmlformats.org/drawingml/2006/main" marL="3886200" indent="-228600" algn="l">
+      <a:lvl9pPr marL="3886200" indent="-228600" algn="l">
         <a:lnSpc>
           <a:spcPct val="90000"/>
         </a:lnSpc>
@@ -1042,7 +876,7 @@
       </a:lvl9pPr>
     </p:bodyStyle>
     <p:otherStyle>
-      <a:lvl1pPr xmlns:a="http://schemas.openxmlformats.org/drawingml/2006/main" marL="0" algn="l">
+      <a:lvl1pPr marL="0" algn="l">
         <a:buNone/>
         <a:defRPr sz="1800">
           <a:solidFill>
@@ -1053,7 +887,7 @@
           <a:cs typeface="+mn-lt"/>
         </a:defRPr>
       </a:lvl1pPr>
-      <a:lvl2pPr xmlns:a="http://schemas.openxmlformats.org/drawingml/2006/main" marL="457200" algn="l">
+      <a:lvl2pPr marL="457200" algn="l">
         <a:buNone/>
         <a:defRPr sz="1800">
           <a:solidFill>
@@ -1064,7 +898,7 @@
           <a:cs typeface="+mn-lt"/>
         </a:defRPr>
       </a:lvl2pPr>
-      <a:lvl3pPr xmlns:a="http://schemas.openxmlformats.org/drawingml/2006/main" marL="914400" algn="l">
+      <a:lvl3pPr marL="914400" algn="l">
         <a:buNone/>
         <a:defRPr sz="1800">
           <a:solidFill>
@@ -1075,7 +909,7 @@
           <a:cs typeface="+mn-lt"/>
         </a:defRPr>
       </a:lvl3pPr>
-      <a:lvl4pPr xmlns:a="http://schemas.openxmlformats.org/drawingml/2006/main" marL="1371600" algn="l">
+      <a:lvl4pPr marL="1371600" algn="l">
         <a:buNone/>
         <a:defRPr sz="1800">
           <a:solidFill>
@@ -1086,7 +920,7 @@
           <a:cs typeface="+mn-lt"/>
         </a:defRPr>
       </a:lvl4pPr>
-      <a:lvl5pPr xmlns:a="http://schemas.openxmlformats.org/drawingml/2006/main" marL="1828800" algn="l">
+      <a:lvl5pPr marL="1828800" algn="l">
         <a:buNone/>
         <a:defRPr sz="1800">
           <a:solidFill>
@@ -1097,7 +931,7 @@
           <a:cs typeface="+mn-lt"/>
         </a:defRPr>
       </a:lvl5pPr>
-      <a:lvl6pPr xmlns:a="http://schemas.openxmlformats.org/drawingml/2006/main" marL="2286000" algn="l">
+      <a:lvl6pPr marL="2286000" algn="l">
         <a:buNone/>
         <a:defRPr sz="1800">
           <a:solidFill>
@@ -1108,7 +942,7 @@
           <a:cs typeface="+mn-lt"/>
         </a:defRPr>
       </a:lvl6pPr>
-      <a:lvl7pPr xmlns:a="http://schemas.openxmlformats.org/drawingml/2006/main" marL="2743200" algn="l">
+      <a:lvl7pPr marL="2743200" algn="l">
         <a:buNone/>
         <a:defRPr sz="1800">
           <a:solidFill>
@@ -1119,7 +953,7 @@
           <a:cs typeface="+mn-lt"/>
         </a:defRPr>
       </a:lvl7pPr>
-      <a:lvl8pPr xmlns:a="http://schemas.openxmlformats.org/drawingml/2006/main" marL="3200400" algn="l">
+      <a:lvl8pPr marL="3200400" algn="l">
         <a:buNone/>
         <a:defRPr sz="1800">
           <a:solidFill>
@@ -1130,7 +964,7 @@
           <a:cs typeface="+mn-lt"/>
         </a:defRPr>
       </a:lvl8pPr>
-      <a:lvl9pPr xmlns:a="http://schemas.openxmlformats.org/drawingml/2006/main" marL="3657600" algn="l">
+      <a:lvl9pPr marL="3657600" algn="l">
         <a:buNone/>
         <a:defRPr sz="1800">
           <a:solidFill>
@@ -1146,259 +980,15 @@
 </p:sldMaster>
 </file>
 
-<file path=ppt/slideMasters/theme/theme2.xml><?xml version="1.0" encoding="utf-8"?>
-<a:theme xmlns:a="http://schemas.openxmlformats.org/drawingml/2006/main" name="ChatGPT">
-  <a:themeElements>
-    <a:clrScheme name="ChatGPT">
-      <a:dk1>
-        <a:srgbClr val="000000"/>
-      </a:dk1>
-      <a:lt1>
-        <a:srgbClr val="FFFFFF"/>
-      </a:lt1>
-      <a:dk2>
-        <a:srgbClr val="0E2841"/>
-      </a:dk2>
-      <a:lt2>
-        <a:srgbClr val="E8E8E8"/>
-      </a:lt2>
-      <a:accent1>
-        <a:srgbClr val="156082"/>
-      </a:accent1>
-      <a:accent2>
-        <a:srgbClr val="E97132"/>
-      </a:accent2>
-      <a:accent3>
-        <a:srgbClr val="196B24"/>
-      </a:accent3>
-      <a:accent4>
-        <a:srgbClr val="0F9ED5"/>
-      </a:accent4>
-      <a:accent5>
-        <a:srgbClr val="A02B93"/>
-      </a:accent5>
-      <a:accent6>
-        <a:srgbClr val="4EA72E"/>
-      </a:accent6>
-      <a:hlink>
-        <a:srgbClr val="467886"/>
-      </a:hlink>
-      <a:folHlink>
-        <a:srgbClr val="96607D"/>
-      </a:folHlink>
-    </a:clrScheme>
-    <a:fontScheme name="Office">
-      <a:majorFont>
-        <a:latin typeface="Calibri Light"/>
-        <a:ea typeface="Calibri Light"/>
-        <a:cs typeface="Calibri Light"/>
-      </a:majorFont>
-      <a:minorFont>
-        <a:latin typeface="Calibri"/>
-        <a:ea typeface="Calibri"/>
-        <a:cs typeface="Calibri"/>
-      </a:minorFont>
-    </a:fontScheme>
-    <a:fmtScheme name="ChatGPT">
-      <a:fillStyleLst>
-        <a:solidFill>
-          <a:schemeClr val="phClr"/>
-        </a:solidFill>
-        <a:gradFill>
-          <a:gsLst>
-            <a:gs pos="0">
-              <a:schemeClr val="phClr">
-                <a:tint val="67000"/>
-                <a:lumMod val="110000"/>
-                <a:satMod val="105000"/>
-              </a:schemeClr>
-            </a:gs>
-            <a:gs pos="50000">
-              <a:schemeClr val="phClr">
-                <a:tint val="73000"/>
-                <a:lumMod val="105000"/>
-                <a:satMod val="103000"/>
-              </a:schemeClr>
-            </a:gs>
-            <a:gs pos="100000">
-              <a:schemeClr val="phClr">
-                <a:tint val="81000"/>
-                <a:lumMod val="105000"/>
-                <a:satMod val="109000"/>
-              </a:schemeClr>
-            </a:gs>
-          </a:gsLst>
-          <a:lin ang="5400000" scaled="0"/>
-        </a:gradFill>
-        <a:gradFill>
-          <a:gsLst>
-            <a:gs pos="0">
-              <a:schemeClr val="phClr">
-                <a:tint val="94000"/>
-                <a:lumMod val="102000"/>
-                <a:satMod val="103000"/>
-              </a:schemeClr>
-            </a:gs>
-            <a:gs pos="50000">
-              <a:schemeClr val="phClr">
-                <a:shade val="100000"/>
-                <a:lumMod val="100000"/>
-                <a:satMod val="110000"/>
-              </a:schemeClr>
-            </a:gs>
-            <a:gs pos="100000">
-              <a:schemeClr val="phClr">
-                <a:shade val="78000"/>
-                <a:lumMod val="99000"/>
-                <a:satMod val="120000"/>
-              </a:schemeClr>
-            </a:gs>
-          </a:gsLst>
-          <a:lin ang="5400000" scaled="0"/>
-        </a:gradFill>
-      </a:fillStyleLst>
-      <a:lnStyleLst>
-        <a:ln w="12700">
-          <a:solidFill>
-            <a:schemeClr val="phClr"/>
-          </a:solidFill>
-          <a:prstDash val="solid"/>
-        </a:ln>
-        <a:ln w="19050">
-          <a:solidFill>
-            <a:schemeClr val="phClr"/>
-          </a:solidFill>
-          <a:prstDash val="solid"/>
-        </a:ln>
-        <a:ln w="25400">
-          <a:solidFill>
-            <a:schemeClr val="phClr"/>
-          </a:solidFill>
-          <a:prstDash val="solid"/>
-        </a:ln>
-      </a:lnStyleLst>
-      <a:effectStyleLst>
-        <a:effectStyle>
-          <a:effectLst/>
-        </a:effectStyle>
-        <a:effectStyle>
-          <a:effectLst/>
-        </a:effectStyle>
-        <a:effectStyle>
-          <a:effectLst>
-            <a:outerShdw blurRad="57150" dist="19050" dir="5400000">
-              <a:srgbClr val="000000">
-                <a:alpha val="16000"/>
-              </a:srgbClr>
-            </a:outerShdw>
-          </a:effectLst>
-        </a:effectStyle>
-        <a:effectStyle>
-          <a:effectLst>
-            <a:outerShdw blurRad="19050" dist="9525" dir="5400000">
-              <a:srgbClr val="000000">
-                <a:alpha val="6000"/>
-              </a:srgbClr>
-            </a:outerShdw>
-          </a:effectLst>
-        </a:effectStyle>
-        <a:effectStyle>
-          <a:effectLst>
-            <a:outerShdw blurRad="28575" dist="9525" dir="5400000">
-              <a:srgbClr val="000000">
-                <a:alpha val="8000"/>
-              </a:srgbClr>
-            </a:outerShdw>
-          </a:effectLst>
-        </a:effectStyle>
-        <a:effectStyle>
-          <a:effectLst>
-            <a:outerShdw blurRad="57150" dist="19050" dir="5400000">
-              <a:srgbClr val="000000">
-                <a:alpha val="10000"/>
-              </a:srgbClr>
-            </a:outerShdw>
-          </a:effectLst>
-        </a:effectStyle>
-        <a:effectStyle>
-          <a:effectLst>
-            <a:outerShdw blurRad="114300" dist="38100" dir="5400000">
-              <a:srgbClr val="000000">
-                <a:alpha val="12000"/>
-              </a:srgbClr>
-            </a:outerShdw>
-          </a:effectLst>
-        </a:effectStyle>
-        <a:effectStyle>
-          <a:effectLst>
-            <a:outerShdw blurRad="171450" dist="57150" dir="5400000">
-              <a:srgbClr val="000000">
-                <a:alpha val="16000"/>
-              </a:srgbClr>
-            </a:outerShdw>
-          </a:effectLst>
-        </a:effectStyle>
-        <a:effectStyle>
-          <a:effectLst>
-            <a:outerShdw blurRad="266700" dist="95250" dir="5400000">
-              <a:srgbClr val="000000">
-                <a:alpha val="24000"/>
-              </a:srgbClr>
-            </a:outerShdw>
-          </a:effectLst>
-        </a:effectStyle>
-      </a:effectStyleLst>
-      <a:bgFillStyleLst>
-        <a:solidFill>
-          <a:schemeClr val="phClr"/>
-        </a:solidFill>
-        <a:solidFill>
-          <a:schemeClr val="phClr">
-            <a:tint val="95000"/>
-            <a:satMod val="170000"/>
-          </a:schemeClr>
-        </a:solidFill>
-        <a:gradFill>
-          <a:gsLst>
-            <a:gs pos="0">
-              <a:schemeClr val="phClr">
-                <a:tint val="93000"/>
-                <a:shade val="98000"/>
-                <a:lumMod val="102000"/>
-                <a:satMod val="150000"/>
-              </a:schemeClr>
-            </a:gs>
-            <a:gs pos="50000">
-              <a:schemeClr val="phClr">
-                <a:tint val="98000"/>
-                <a:shade val="90000"/>
-                <a:lumMod val="103000"/>
-                <a:satMod val="130000"/>
-              </a:schemeClr>
-            </a:gs>
-            <a:gs pos="100000">
-              <a:schemeClr val="phClr">
-                <a:shade val="63000"/>
-                <a:satMod val="120000"/>
-              </a:schemeClr>
-            </a:gs>
-          </a:gsLst>
-          <a:lin ang="5400000" scaled="0"/>
-        </a:gradFill>
-      </a:bgFillStyleLst>
-    </a:fmtScheme>
-  </a:themeElements>
-</a:theme>
-</file>
-
 <file path=ppt/slides/slide1.xml><?xml version="1.0" encoding="utf-8"?>
-<p:sld xmlns:p="http://schemas.openxmlformats.org/presentationml/2006/main">
+<p:sld xmlns:a="http://schemas.openxmlformats.org/drawingml/2006/main" xmlns:r="http://schemas.openxmlformats.org/officeDocument/2006/relationships" xmlns:p="http://schemas.openxmlformats.org/presentationml/2006/main">
   <p:cSld>
     <p:bg>
       <p:bgPr>
-        <a:solidFill xmlns:a="http://schemas.openxmlformats.org/drawingml/2006/main">
+        <a:solidFill>
           <a:srgbClr val="FFFFFF"/>
         </a:solidFill>
+        <a:effectLst/>
       </p:bgPr>
     </p:bg>
     <p:spTree>
@@ -1408,41 +998,46 @@
         <p:nvPr/>
       </p:nvGrpSpPr>
       <p:grpSpPr>
-        <a:xfrm xmlns:a="http://schemas.openxmlformats.org/drawingml/2006/main"/>
+        <a:xfrm>
+          <a:off x="0" y="0"/>
+          <a:ext cx="0" cy="0"/>
+          <a:chOff x="0" y="0"/>
+          <a:chExt cx="0" cy="0"/>
+        </a:xfrm>
       </p:grpSpPr>
       <p:sp>
         <p:nvSpPr>
-          <p:cNvPr id="7" name="">
-            <a:extLst xmlns:a="http://schemas.openxmlformats.org/drawingml/2006/main">
+          <p:cNvPr id="7" name="직사각형 6">
+            <a:extLst>
               <a:ext uri="{FF2B5EF4-FFF2-40B4-BE49-F238E27FC236}">
                 <a16:creationId xmlns:a16="http://schemas.microsoft.com/office/drawing/2014/main" id="{914C635D-4597-4749-8455-99BD0CBB9F3B}"/>
               </a:ext>
             </a:extLst>
           </p:cNvPr>
           <p:cNvSpPr>
-            <a:spLocks xmlns:a="http://schemas.openxmlformats.org/drawingml/2006/main" noGrp="1"/>
+            <a:spLocks noGrp="1"/>
           </p:cNvSpPr>
           <p:nvPr/>
         </p:nvSpPr>
         <p:spPr>
-          <a:xfrm xmlns:a="http://schemas.openxmlformats.org/drawingml/2006/main">
+          <a:xfrm>
             <a:off x="742950" y="1628775"/>
             <a:ext cx="10287000" cy="647700"/>
           </a:xfrm>
-          <a:prstGeom xmlns:a="http://schemas.openxmlformats.org/drawingml/2006/main" prst="rect">
+          <a:prstGeom prst="rect">
             <a:avLst/>
           </a:prstGeom>
-          <a:noFill xmlns:a="http://schemas.openxmlformats.org/drawingml/2006/main"/>
-          <a:ln xmlns:a="http://schemas.openxmlformats.org/drawingml/2006/main" w="0">
+          <a:noFill/>
+          <a:ln w="0">
             <a:noFill/>
           </a:ln>
         </p:spPr>
         <p:txBody>
-          <a:bodyPr xmlns:a="http://schemas.openxmlformats.org/drawingml/2006/main" wrap="square" lIns="0" tIns="0" rIns="0" bIns="0" anchor="t">
+          <a:bodyPr wrap="square" lIns="0" tIns="0" rIns="0" bIns="0" anchor="t">
             <a:noAutofit/>
           </a:bodyPr>
-          <a:lstStyle xmlns:a="http://schemas.openxmlformats.org/drawingml/2006/main"/>
-          <a:p xmlns:a="http://schemas.openxmlformats.org/drawingml/2006/main">
+          <a:lstStyle/>
+          <a:p>
             <a:pPr algn="l">
               <a:lnSpc>
                 <a:spcPct val="108000"/>
@@ -1473,37 +1068,37 @@
       </p:sp>
       <p:sp>
         <p:nvSpPr>
-          <p:cNvPr id="2" name="">
-            <a:extLst xmlns:a="http://schemas.openxmlformats.org/drawingml/2006/main">
+          <p:cNvPr id="2" name="직사각형 1">
+            <a:extLst>
               <a:ext uri="{FF2B5EF4-FFF2-40B4-BE49-F238E27FC236}">
                 <a16:creationId xmlns:a16="http://schemas.microsoft.com/office/drawing/2014/main" id="{DB678975-0FF4-4371-9D08-6D582F4A9D9A}"/>
               </a:ext>
             </a:extLst>
           </p:cNvPr>
           <p:cNvSpPr>
-            <a:spLocks xmlns:a="http://schemas.openxmlformats.org/drawingml/2006/main" noGrp="1"/>
+            <a:spLocks noGrp="1"/>
           </p:cNvSpPr>
           <p:nvPr/>
         </p:nvSpPr>
         <p:spPr>
-          <a:xfrm xmlns:a="http://schemas.openxmlformats.org/drawingml/2006/main">
+          <a:xfrm>
             <a:off x="762000" y="2457450"/>
             <a:ext cx="8572500" cy="361950"/>
           </a:xfrm>
-          <a:prstGeom xmlns:a="http://schemas.openxmlformats.org/drawingml/2006/main" prst="rect">
+          <a:prstGeom prst="rect">
             <a:avLst/>
           </a:prstGeom>
-          <a:noFill xmlns:a="http://schemas.openxmlformats.org/drawingml/2006/main"/>
-          <a:ln xmlns:a="http://schemas.openxmlformats.org/drawingml/2006/main" w="0">
+          <a:noFill/>
+          <a:ln w="0">
             <a:noFill/>
           </a:ln>
         </p:spPr>
         <p:txBody>
-          <a:bodyPr xmlns:a="http://schemas.openxmlformats.org/drawingml/2006/main" wrap="square" lIns="0" tIns="0" rIns="0" bIns="0" anchor="t">
+          <a:bodyPr wrap="square" lIns="0" tIns="0" rIns="0" bIns="0" anchor="t">
             <a:noAutofit/>
           </a:bodyPr>
-          <a:lstStyle xmlns:a="http://schemas.openxmlformats.org/drawingml/2006/main"/>
-          <a:p xmlns:a="http://schemas.openxmlformats.org/drawingml/2006/main">
+          <a:lstStyle/>
+          <a:p>
             <a:pPr algn="l">
               <a:lnSpc>
                 <a:spcPct val="108000"/>
@@ -1519,7 +1114,7 @@
               </a:defRPr>
             </a:pPr>
             <a:r>
-              <a:rPr sz="1800" b="0">
+              <a:rPr sz="1800" b="0" dirty="0">
                 <a:solidFill>
                   <a:srgbClr val="666666"/>
                 </a:solidFill>
@@ -1527,75 +1122,101 @@
                 <a:ea typeface="Pretendard"/>
                 <a:cs typeface="Pretendard"/>
               </a:rPr>
-              <a:t>DTUMOS 공동연구 연계와 다음 단계 논의</a:t>
-            </a:r>
+              <a:t>DTUMOS </a:t>
+            </a:r>
+            <a:r>
+              <a:rPr sz="1800" b="0" dirty="0" err="1">
+                <a:solidFill>
+                  <a:srgbClr val="666666"/>
+                </a:solidFill>
+                <a:latin typeface="Pretendard"/>
+                <a:ea typeface="Pretendard"/>
+                <a:cs typeface="Pretendard"/>
+              </a:rPr>
+              <a:t>공동연구</a:t>
+            </a:r>
+            <a:endParaRPr sz="1800" b="0" dirty="0">
+              <a:solidFill>
+                <a:srgbClr val="666666"/>
+              </a:solidFill>
+              <a:latin typeface="Pretendard"/>
+              <a:ea typeface="Pretendard"/>
+              <a:cs typeface="Pretendard"/>
+            </a:endParaRPr>
           </a:p>
         </p:txBody>
       </p:sp>
       <p:sp>
         <p:nvSpPr>
-          <p:cNvPr id="3" name="">
-            <a:extLst xmlns:a="http://schemas.openxmlformats.org/drawingml/2006/main">
+          <p:cNvPr id="3" name="직선 연결선[R] 2">
+            <a:extLst>
               <a:ext uri="{FF2B5EF4-FFF2-40B4-BE49-F238E27FC236}">
                 <a16:creationId xmlns:a16="http://schemas.microsoft.com/office/drawing/2014/main" id="{B544EE49-D174-4F70-89C0-7E7AE43B8ED9}"/>
               </a:ext>
             </a:extLst>
           </p:cNvPr>
           <p:cNvSpPr>
-            <a:spLocks xmlns:a="http://schemas.openxmlformats.org/drawingml/2006/main" noGrp="1"/>
+            <a:spLocks noGrp="1"/>
           </p:cNvSpPr>
           <p:nvPr/>
         </p:nvSpPr>
         <p:spPr>
-          <a:xfrm xmlns:a="http://schemas.openxmlformats.org/drawingml/2006/main">
+          <a:xfrm>
             <a:off x="762000" y="3105150"/>
             <a:ext cx="10668000" cy="0"/>
           </a:xfrm>
-          <a:prstGeom xmlns:a="http://schemas.openxmlformats.org/drawingml/2006/main" prst="line">
+          <a:prstGeom prst="line">
             <a:avLst/>
           </a:prstGeom>
-          <a:noFill xmlns:a="http://schemas.openxmlformats.org/drawingml/2006/main"/>
-          <a:ln xmlns:a="http://schemas.openxmlformats.org/drawingml/2006/main" w="9525">
+          <a:noFill/>
+          <a:ln w="9525">
             <a:solidFill>
               <a:srgbClr val="B8B8B8"/>
             </a:solidFill>
             <a:prstDash val="solid"/>
           </a:ln>
         </p:spPr>
-      </p:sp>
-      <p:sp>
-        <p:nvSpPr>
-          <p:cNvPr id="4" name="">
-            <a:extLst xmlns:a="http://schemas.openxmlformats.org/drawingml/2006/main">
+        <p:txBody>
+          <a:bodyPr/>
+          <a:lstStyle/>
+          <a:p>
+            <a:endParaRPr lang="ko-KR" altLang="en-US"/>
+          </a:p>
+        </p:txBody>
+      </p:sp>
+      <p:sp>
+        <p:nvSpPr>
+          <p:cNvPr id="4" name="직사각형 3">
+            <a:extLst>
               <a:ext uri="{FF2B5EF4-FFF2-40B4-BE49-F238E27FC236}">
                 <a16:creationId xmlns:a16="http://schemas.microsoft.com/office/drawing/2014/main" id="{55523741-D25D-4D12-8969-2A9BE7D709A2}"/>
               </a:ext>
             </a:extLst>
           </p:cNvPr>
           <p:cNvSpPr>
-            <a:spLocks xmlns:a="http://schemas.openxmlformats.org/drawingml/2006/main" noGrp="1"/>
+            <a:spLocks noGrp="1"/>
           </p:cNvSpPr>
           <p:nvPr/>
         </p:nvSpPr>
         <p:spPr>
-          <a:xfrm xmlns:a="http://schemas.openxmlformats.org/drawingml/2006/main">
+          <a:xfrm>
             <a:off x="762000" y="3476625"/>
             <a:ext cx="10191750" cy="895350"/>
           </a:xfrm>
-          <a:prstGeom xmlns:a="http://schemas.openxmlformats.org/drawingml/2006/main" prst="rect">
+          <a:prstGeom prst="rect">
             <a:avLst/>
           </a:prstGeom>
-          <a:noFill xmlns:a="http://schemas.openxmlformats.org/drawingml/2006/main"/>
-          <a:ln xmlns:a="http://schemas.openxmlformats.org/drawingml/2006/main" w="0">
+          <a:noFill/>
+          <a:ln w="0">
             <a:noFill/>
           </a:ln>
         </p:spPr>
         <p:txBody>
-          <a:bodyPr xmlns:a="http://schemas.openxmlformats.org/drawingml/2006/main" wrap="square" lIns="0" tIns="0" rIns="0" bIns="0" anchor="t">
+          <a:bodyPr wrap="square" lIns="0" tIns="0" rIns="0" bIns="0" anchor="t">
             <a:noAutofit/>
           </a:bodyPr>
-          <a:lstStyle xmlns:a="http://schemas.openxmlformats.org/drawingml/2006/main"/>
-          <a:p xmlns:a="http://schemas.openxmlformats.org/drawingml/2006/main">
+          <a:lstStyle/>
+          <a:p>
             <a:pPr algn="l">
               <a:lnSpc>
                 <a:spcPct val="112000"/>
@@ -1611,7 +1232,7 @@
               </a:defRPr>
             </a:pPr>
             <a:r>
-              <a:rPr sz="1875" b="1">
+              <a:rPr sz="1875" b="1" dirty="0" err="1">
                 <a:solidFill>
                   <a:srgbClr val="222222"/>
                 </a:solidFill>
@@ -1619,10 +1240,117 @@
                 <a:ea typeface="Pretendard Medium"/>
                 <a:cs typeface="Pretendard Medium"/>
               </a:rPr>
-              <a:t>연구 문제와 첫 구현 방향을 정리한 상태이며,</a:t>
-            </a:r>
-          </a:p>
-          <a:p xmlns:a="http://schemas.openxmlformats.org/drawingml/2006/main">
+              <a:t>연구</a:t>
+            </a:r>
+            <a:r>
+              <a:rPr sz="1875" b="1" dirty="0">
+                <a:solidFill>
+                  <a:srgbClr val="222222"/>
+                </a:solidFill>
+                <a:latin typeface="Pretendard Medium"/>
+                <a:ea typeface="Pretendard Medium"/>
+                <a:cs typeface="Pretendard Medium"/>
+              </a:rPr>
+              <a:t> </a:t>
+            </a:r>
+            <a:r>
+              <a:rPr sz="1875" b="1" dirty="0" err="1">
+                <a:solidFill>
+                  <a:srgbClr val="222222"/>
+                </a:solidFill>
+                <a:latin typeface="Pretendard Medium"/>
+                <a:ea typeface="Pretendard Medium"/>
+                <a:cs typeface="Pretendard Medium"/>
+              </a:rPr>
+              <a:t>문제와</a:t>
+            </a:r>
+            <a:r>
+              <a:rPr sz="1875" b="1" dirty="0">
+                <a:solidFill>
+                  <a:srgbClr val="222222"/>
+                </a:solidFill>
+                <a:latin typeface="Pretendard Medium"/>
+                <a:ea typeface="Pretendard Medium"/>
+                <a:cs typeface="Pretendard Medium"/>
+              </a:rPr>
+              <a:t> </a:t>
+            </a:r>
+            <a:r>
+              <a:rPr sz="1875" b="1" dirty="0" err="1">
+                <a:solidFill>
+                  <a:srgbClr val="222222"/>
+                </a:solidFill>
+                <a:latin typeface="Pretendard Medium"/>
+                <a:ea typeface="Pretendard Medium"/>
+                <a:cs typeface="Pretendard Medium"/>
+              </a:rPr>
+              <a:t>첫</a:t>
+            </a:r>
+            <a:r>
+              <a:rPr sz="1875" b="1" dirty="0">
+                <a:solidFill>
+                  <a:srgbClr val="222222"/>
+                </a:solidFill>
+                <a:latin typeface="Pretendard Medium"/>
+                <a:ea typeface="Pretendard Medium"/>
+                <a:cs typeface="Pretendard Medium"/>
+              </a:rPr>
+              <a:t> </a:t>
+            </a:r>
+            <a:r>
+              <a:rPr sz="1875" b="1" dirty="0" err="1">
+                <a:solidFill>
+                  <a:srgbClr val="222222"/>
+                </a:solidFill>
+                <a:latin typeface="Pretendard Medium"/>
+                <a:ea typeface="Pretendard Medium"/>
+                <a:cs typeface="Pretendard Medium"/>
+              </a:rPr>
+              <a:t>구현</a:t>
+            </a:r>
+            <a:r>
+              <a:rPr sz="1875" b="1" dirty="0">
+                <a:solidFill>
+                  <a:srgbClr val="222222"/>
+                </a:solidFill>
+                <a:latin typeface="Pretendard Medium"/>
+                <a:ea typeface="Pretendard Medium"/>
+                <a:cs typeface="Pretendard Medium"/>
+              </a:rPr>
+              <a:t> </a:t>
+            </a:r>
+            <a:r>
+              <a:rPr sz="1875" b="1" dirty="0" err="1">
+                <a:solidFill>
+                  <a:srgbClr val="222222"/>
+                </a:solidFill>
+                <a:latin typeface="Pretendard Medium"/>
+                <a:ea typeface="Pretendard Medium"/>
+                <a:cs typeface="Pretendard Medium"/>
+              </a:rPr>
+              <a:t>방향</a:t>
+            </a:r>
+            <a:r>
+              <a:rPr lang="ko-KR" altLang="en-US" sz="1875" b="1" dirty="0">
+                <a:solidFill>
+                  <a:srgbClr val="222222"/>
+                </a:solidFill>
+                <a:latin typeface="Pretendard Medium"/>
+                <a:ea typeface="Pretendard Medium"/>
+                <a:cs typeface="Pretendard Medium"/>
+              </a:rPr>
+              <a:t> 정리한 상태</a:t>
+            </a:r>
+            <a:endParaRPr sz="1875" b="1" dirty="0">
+              <a:solidFill>
+                <a:srgbClr val="222222"/>
+              </a:solidFill>
+              <a:latin typeface="Pretendard Medium"/>
+              <a:ea typeface="Pretendard Medium"/>
+              <a:cs typeface="Pretendard Medium"/>
+            </a:endParaRPr>
+          </a:p>
+          <a:p>
             <a:pPr algn="l">
               <a:lnSpc>
                 <a:spcPct val="112000"/>
@@ -1637,53 +1365,50 @@
                 <a:cs typeface="Pretendard Medium"/>
               </a:defRPr>
             </a:pPr>
-            <a:r>
-              <a:rPr sz="1875" b="1">
-                <a:solidFill>
-                  <a:srgbClr val="222222"/>
-                </a:solidFill>
-                <a:latin typeface="Pretendard Medium"/>
-                <a:ea typeface="Pretendard Medium"/>
-                <a:cs typeface="Pretendard Medium"/>
-              </a:rPr>
-              <a:t>건대의 DTUMOS 연구와 연결 방법을 함께 논의하고자 합니다.</a:t>
-            </a:r>
+            <a:endParaRPr sz="1875" b="1" dirty="0">
+              <a:solidFill>
+                <a:srgbClr val="222222"/>
+              </a:solidFill>
+              <a:latin typeface="Pretendard Medium"/>
+              <a:ea typeface="Pretendard Medium"/>
+              <a:cs typeface="Pretendard Medium"/>
+            </a:endParaRPr>
           </a:p>
         </p:txBody>
       </p:sp>
       <p:sp>
         <p:nvSpPr>
-          <p:cNvPr id="5" name="">
-            <a:extLst xmlns:a="http://schemas.openxmlformats.org/drawingml/2006/main">
+          <p:cNvPr id="5" name="직사각형 4">
+            <a:extLst>
               <a:ext uri="{FF2B5EF4-FFF2-40B4-BE49-F238E27FC236}">
                 <a16:creationId xmlns:a16="http://schemas.microsoft.com/office/drawing/2014/main" id="{C9FB2729-B563-473B-998B-1E6048F16090}"/>
               </a:ext>
             </a:extLst>
           </p:cNvPr>
           <p:cNvSpPr>
-            <a:spLocks xmlns:a="http://schemas.openxmlformats.org/drawingml/2006/main" noGrp="1"/>
+            <a:spLocks noGrp="1"/>
           </p:cNvSpPr>
           <p:nvPr/>
         </p:nvSpPr>
         <p:spPr>
-          <a:xfrm xmlns:a="http://schemas.openxmlformats.org/drawingml/2006/main">
-            <a:off x="762000" y="5534025"/>
+          <a:xfrm>
+            <a:off x="685800" y="6115050"/>
             <a:ext cx="6667500" cy="266700"/>
           </a:xfrm>
-          <a:prstGeom xmlns:a="http://schemas.openxmlformats.org/drawingml/2006/main" prst="rect">
+          <a:prstGeom prst="rect">
             <a:avLst/>
           </a:prstGeom>
-          <a:noFill xmlns:a="http://schemas.openxmlformats.org/drawingml/2006/main"/>
-          <a:ln xmlns:a="http://schemas.openxmlformats.org/drawingml/2006/main" w="0">
+          <a:noFill/>
+          <a:ln w="0">
             <a:noFill/>
           </a:ln>
         </p:spPr>
         <p:txBody>
-          <a:bodyPr xmlns:a="http://schemas.openxmlformats.org/drawingml/2006/main" wrap="square" lIns="0" tIns="0" rIns="0" bIns="0" anchor="t">
+          <a:bodyPr wrap="square" lIns="0" tIns="0" rIns="0" bIns="0" anchor="t">
             <a:noAutofit/>
           </a:bodyPr>
-          <a:lstStyle xmlns:a="http://schemas.openxmlformats.org/drawingml/2006/main"/>
-          <a:p xmlns:a="http://schemas.openxmlformats.org/drawingml/2006/main">
+          <a:lstStyle/>
+          <a:p>
             <a:pPr algn="l">
               <a:lnSpc>
                 <a:spcPct val="108000"/>
@@ -1699,7 +1424,7 @@
               </a:defRPr>
             </a:pPr>
             <a:r>
-              <a:rPr sz="1275" b="0">
+              <a:rPr sz="1275" b="0" dirty="0">
                 <a:solidFill>
                   <a:srgbClr val="666666"/>
                 </a:solidFill>
@@ -1707,44 +1432,44 @@
                 <a:ea typeface="Pretendard"/>
                 <a:cs typeface="Pretendard"/>
               </a:rPr>
-              <a:t>김주원  ·  건국대 미팅  ·  2026.10.08</a:t>
+              <a:t>김주원  ·  2026.10.08</a:t>
             </a:r>
           </a:p>
         </p:txBody>
       </p:sp>
       <p:sp>
         <p:nvSpPr>
-          <p:cNvPr id="6" name="">
-            <a:extLst xmlns:a="http://schemas.openxmlformats.org/drawingml/2006/main">
+          <p:cNvPr id="6" name="직사각형 5">
+            <a:extLst>
               <a:ext uri="{FF2B5EF4-FFF2-40B4-BE49-F238E27FC236}">
                 <a16:creationId xmlns:a16="http://schemas.microsoft.com/office/drawing/2014/main" id="{E2D9EBA8-319C-45BC-8FA4-BBB3B957A4E4}"/>
               </a:ext>
             </a:extLst>
           </p:cNvPr>
           <p:cNvSpPr>
-            <a:spLocks xmlns:a="http://schemas.openxmlformats.org/drawingml/2006/main" noGrp="1"/>
+            <a:spLocks noGrp="1"/>
           </p:cNvSpPr>
           <p:nvPr/>
         </p:nvSpPr>
         <p:spPr>
-          <a:xfrm xmlns:a="http://schemas.openxmlformats.org/drawingml/2006/main">
+          <a:xfrm>
             <a:off x="10591800" y="6381750"/>
             <a:ext cx="914400" cy="209550"/>
           </a:xfrm>
-          <a:prstGeom xmlns:a="http://schemas.openxmlformats.org/drawingml/2006/main" prst="rect">
+          <a:prstGeom prst="rect">
             <a:avLst/>
           </a:prstGeom>
-          <a:noFill xmlns:a="http://schemas.openxmlformats.org/drawingml/2006/main"/>
-          <a:ln xmlns:a="http://schemas.openxmlformats.org/drawingml/2006/main" w="0">
+          <a:noFill/>
+          <a:ln w="0">
             <a:noFill/>
           </a:ln>
         </p:spPr>
         <p:txBody>
-          <a:bodyPr xmlns:a="http://schemas.openxmlformats.org/drawingml/2006/main" wrap="square" lIns="0" tIns="0" rIns="0" bIns="0" anchor="ctr">
+          <a:bodyPr wrap="square" lIns="0" tIns="0" rIns="0" bIns="0" anchor="ctr">
             <a:noAutofit/>
           </a:bodyPr>
-          <a:lstStyle xmlns:a="http://schemas.openxmlformats.org/drawingml/2006/main"/>
-          <a:p xmlns:a="http://schemas.openxmlformats.org/drawingml/2006/main">
+          <a:lstStyle/>
+          <a:p>
             <a:pPr algn="r">
               <a:lnSpc>
                 <a:spcPct val="108000"/>
@@ -1780,17 +1505,21 @@
       </p:ext>
     </p:extLst>
   </p:cSld>
+  <p:clrMapOvr>
+    <a:masterClrMapping/>
+  </p:clrMapOvr>
 </p:sld>
 </file>
 
 <file path=ppt/slides/slide2.xml><?xml version="1.0" encoding="utf-8"?>
-<p:sld xmlns:p="http://schemas.openxmlformats.org/presentationml/2006/main">
+<p:sld xmlns:a="http://schemas.openxmlformats.org/drawingml/2006/main" xmlns:r="http://schemas.openxmlformats.org/officeDocument/2006/relationships" xmlns:p="http://schemas.openxmlformats.org/presentationml/2006/main">
   <p:cSld>
     <p:bg>
       <p:bgPr>
-        <a:solidFill xmlns:a="http://schemas.openxmlformats.org/drawingml/2006/main">
+        <a:solidFill>
           <a:srgbClr val="FFFFFF"/>
         </a:solidFill>
+        <a:effectLst/>
       </p:bgPr>
     </p:bg>
     <p:spTree>
@@ -1800,41 +1529,46 @@
         <p:nvPr/>
       </p:nvGrpSpPr>
       <p:grpSpPr>
-        <a:xfrm xmlns:a="http://schemas.openxmlformats.org/drawingml/2006/main"/>
+        <a:xfrm>
+          <a:off x="0" y="0"/>
+          <a:ext cx="0" cy="0"/>
+          <a:chOff x="0" y="0"/>
+          <a:chExt cx="0" cy="0"/>
+        </a:xfrm>
       </p:grpSpPr>
       <p:sp>
         <p:nvSpPr>
-          <p:cNvPr id="13" name="">
-            <a:extLst xmlns:a="http://schemas.openxmlformats.org/drawingml/2006/main">
+          <p:cNvPr id="13" name="직사각형 12">
+            <a:extLst>
               <a:ext uri="{FF2B5EF4-FFF2-40B4-BE49-F238E27FC236}">
                 <a16:creationId xmlns:a16="http://schemas.microsoft.com/office/drawing/2014/main" id="{8CF56E7E-C54D-4A48-85A9-31CE4044BB15}"/>
               </a:ext>
             </a:extLst>
           </p:cNvPr>
           <p:cNvSpPr>
-            <a:spLocks xmlns:a="http://schemas.openxmlformats.org/drawingml/2006/main" noGrp="1"/>
+            <a:spLocks noGrp="1"/>
           </p:cNvSpPr>
           <p:nvPr/>
         </p:nvSpPr>
         <p:spPr>
-          <a:xfrm xmlns:a="http://schemas.openxmlformats.org/drawingml/2006/main">
+          <a:xfrm>
             <a:off x="685800" y="428625"/>
             <a:ext cx="8858250" cy="685800"/>
           </a:xfrm>
-          <a:prstGeom xmlns:a="http://schemas.openxmlformats.org/drawingml/2006/main" prst="rect">
+          <a:prstGeom prst="rect">
             <a:avLst/>
           </a:prstGeom>
-          <a:noFill xmlns:a="http://schemas.openxmlformats.org/drawingml/2006/main"/>
-          <a:ln xmlns:a="http://schemas.openxmlformats.org/drawingml/2006/main" w="0">
+          <a:noFill/>
+          <a:ln w="0">
             <a:noFill/>
           </a:ln>
         </p:spPr>
         <p:txBody>
-          <a:bodyPr xmlns:a="http://schemas.openxmlformats.org/drawingml/2006/main" wrap="square" lIns="0" tIns="0" rIns="0" bIns="0" anchor="t">
+          <a:bodyPr wrap="square" lIns="0" tIns="0" rIns="0" bIns="0" anchor="t">
             <a:noAutofit/>
           </a:bodyPr>
-          <a:lstStyle xmlns:a="http://schemas.openxmlformats.org/drawingml/2006/main"/>
-          <a:p xmlns:a="http://schemas.openxmlformats.org/drawingml/2006/main">
+          <a:lstStyle/>
+          <a:p>
             <a:pPr algn="l">
               <a:lnSpc>
                 <a:spcPct val="108000"/>
@@ -1865,41 +1599,41 @@
       </p:sp>
       <p:sp>
         <p:nvSpPr>
-          <p:cNvPr id="2" name="">
-            <a:extLst xmlns:a="http://schemas.openxmlformats.org/drawingml/2006/main">
+          <p:cNvPr id="2" name="모서리가 둥근 직사각형 1">
+            <a:extLst>
               <a:ext uri="{FF2B5EF4-FFF2-40B4-BE49-F238E27FC236}">
                 <a16:creationId xmlns:a16="http://schemas.microsoft.com/office/drawing/2014/main" id="{8D690433-8224-48FA-A52A-7C4B43BD791F}"/>
               </a:ext>
             </a:extLst>
           </p:cNvPr>
           <p:cNvSpPr>
-            <a:spLocks xmlns:a="http://schemas.openxmlformats.org/drawingml/2006/main" noGrp="1"/>
+            <a:spLocks noGrp="1"/>
           </p:cNvSpPr>
           <p:nvPr/>
         </p:nvSpPr>
         <p:spPr>
-          <a:xfrm xmlns:a="http://schemas.openxmlformats.org/drawingml/2006/main">
+          <a:xfrm>
             <a:off x="9667875" y="666750"/>
             <a:ext cx="1838325" cy="371475"/>
           </a:xfrm>
-          <a:prstGeom xmlns:a="http://schemas.openxmlformats.org/drawingml/2006/main" prst="roundRect">
+          <a:prstGeom prst="roundRect">
             <a:avLst>
               <a:gd name="adj" fmla="val 50000"/>
             </a:avLst>
           </a:prstGeom>
-          <a:solidFill xmlns:a="http://schemas.openxmlformats.org/drawingml/2006/main">
+          <a:solidFill>
             <a:srgbClr val="F2F2F2"/>
           </a:solidFill>
-          <a:ln xmlns:a="http://schemas.openxmlformats.org/drawingml/2006/main" w="0">
+          <a:ln w="0">
             <a:noFill/>
           </a:ln>
         </p:spPr>
         <p:txBody>
-          <a:bodyPr xmlns:a="http://schemas.openxmlformats.org/drawingml/2006/main" lIns="38100" tIns="0" rIns="38100" bIns="0" anchor="ctr">
+          <a:bodyPr lIns="38100" tIns="0" rIns="38100" bIns="0" anchor="ctr">
             <a:noAutofit/>
           </a:bodyPr>
-          <a:lstStyle xmlns:a="http://schemas.openxmlformats.org/drawingml/2006/main"/>
-          <a:p xmlns:a="http://schemas.openxmlformats.org/drawingml/2006/main">
+          <a:lstStyle/>
+          <a:p>
             <a:pPr algn="ctr">
               <a:defRPr sz="1125">
                 <a:solidFill>
@@ -1926,37 +1660,37 @@
       </p:sp>
       <p:sp>
         <p:nvSpPr>
-          <p:cNvPr id="3" name="">
-            <a:extLst xmlns:a="http://schemas.openxmlformats.org/drawingml/2006/main">
+          <p:cNvPr id="3" name="직사각형 2">
+            <a:extLst>
               <a:ext uri="{FF2B5EF4-FFF2-40B4-BE49-F238E27FC236}">
                 <a16:creationId xmlns:a16="http://schemas.microsoft.com/office/drawing/2014/main" id="{400DB0DB-6206-4CE8-9582-F3145C2A27D3}"/>
               </a:ext>
             </a:extLst>
           </p:cNvPr>
           <p:cNvSpPr>
-            <a:spLocks xmlns:a="http://schemas.openxmlformats.org/drawingml/2006/main" noGrp="1"/>
+            <a:spLocks noGrp="1"/>
           </p:cNvSpPr>
           <p:nvPr/>
         </p:nvSpPr>
         <p:spPr>
-          <a:xfrm xmlns:a="http://schemas.openxmlformats.org/drawingml/2006/main">
+          <a:xfrm>
             <a:off x="685800" y="6419850"/>
             <a:ext cx="9334500" cy="171450"/>
           </a:xfrm>
-          <a:prstGeom xmlns:a="http://schemas.openxmlformats.org/drawingml/2006/main" prst="rect">
+          <a:prstGeom prst="rect">
             <a:avLst/>
           </a:prstGeom>
-          <a:noFill xmlns:a="http://schemas.openxmlformats.org/drawingml/2006/main"/>
-          <a:ln xmlns:a="http://schemas.openxmlformats.org/drawingml/2006/main" w="0">
+          <a:noFill/>
+          <a:ln w="0">
             <a:noFill/>
           </a:ln>
         </p:spPr>
         <p:txBody>
-          <a:bodyPr xmlns:a="http://schemas.openxmlformats.org/drawingml/2006/main" wrap="square" lIns="0" tIns="0" rIns="0" bIns="0" anchor="ctr">
+          <a:bodyPr wrap="square" lIns="0" tIns="0" rIns="0" bIns="0" anchor="ctr">
             <a:noAutofit/>
           </a:bodyPr>
-          <a:lstStyle xmlns:a="http://schemas.openxmlformats.org/drawingml/2006/main"/>
-          <a:p xmlns:a="http://schemas.openxmlformats.org/drawingml/2006/main">
+          <a:lstStyle/>
+          <a:p>
             <a:pPr algn="l">
               <a:lnSpc>
                 <a:spcPct val="108000"/>
@@ -1987,37 +1721,37 @@
       </p:sp>
       <p:sp>
         <p:nvSpPr>
-          <p:cNvPr id="4" name="">
-            <a:extLst xmlns:a="http://schemas.openxmlformats.org/drawingml/2006/main">
+          <p:cNvPr id="4" name="직사각형 3">
+            <a:extLst>
               <a:ext uri="{FF2B5EF4-FFF2-40B4-BE49-F238E27FC236}">
                 <a16:creationId xmlns:a16="http://schemas.microsoft.com/office/drawing/2014/main" id="{3BFD7397-FB30-46F2-9FEC-870AEAF5CA55}"/>
               </a:ext>
             </a:extLst>
           </p:cNvPr>
           <p:cNvSpPr>
-            <a:spLocks xmlns:a="http://schemas.openxmlformats.org/drawingml/2006/main" noGrp="1"/>
+            <a:spLocks noGrp="1"/>
           </p:cNvSpPr>
           <p:nvPr/>
         </p:nvSpPr>
         <p:spPr>
-          <a:xfrm xmlns:a="http://schemas.openxmlformats.org/drawingml/2006/main">
+          <a:xfrm>
             <a:off x="10591800" y="6381750"/>
             <a:ext cx="914400" cy="209550"/>
           </a:xfrm>
-          <a:prstGeom xmlns:a="http://schemas.openxmlformats.org/drawingml/2006/main" prst="rect">
+          <a:prstGeom prst="rect">
             <a:avLst/>
           </a:prstGeom>
-          <a:noFill xmlns:a="http://schemas.openxmlformats.org/drawingml/2006/main"/>
-          <a:ln xmlns:a="http://schemas.openxmlformats.org/drawingml/2006/main" w="0">
+          <a:noFill/>
+          <a:ln w="0">
             <a:noFill/>
           </a:ln>
         </p:spPr>
         <p:txBody>
-          <a:bodyPr xmlns:a="http://schemas.openxmlformats.org/drawingml/2006/main" wrap="square" lIns="0" tIns="0" rIns="0" bIns="0" anchor="ctr">
+          <a:bodyPr wrap="square" lIns="0" tIns="0" rIns="0" bIns="0" anchor="ctr">
             <a:noAutofit/>
           </a:bodyPr>
-          <a:lstStyle xmlns:a="http://schemas.openxmlformats.org/drawingml/2006/main"/>
-          <a:p xmlns:a="http://schemas.openxmlformats.org/drawingml/2006/main">
+          <a:lstStyle/>
+          <a:p>
             <a:pPr algn="r">
               <a:lnSpc>
                 <a:spcPct val="108000"/>
@@ -2048,37 +1782,37 @@
       </p:sp>
       <p:sp>
         <p:nvSpPr>
-          <p:cNvPr id="5" name="">
-            <a:extLst xmlns:a="http://schemas.openxmlformats.org/drawingml/2006/main">
+          <p:cNvPr id="5" name="직사각형 4">
+            <a:extLst>
               <a:ext uri="{FF2B5EF4-FFF2-40B4-BE49-F238E27FC236}">
                 <a16:creationId xmlns:a16="http://schemas.microsoft.com/office/drawing/2014/main" id="{C5E388CA-AD59-45A1-9B8B-51ADFBF8D522}"/>
               </a:ext>
             </a:extLst>
           </p:cNvPr>
           <p:cNvSpPr>
-            <a:spLocks xmlns:a="http://schemas.openxmlformats.org/drawingml/2006/main" noGrp="1"/>
+            <a:spLocks noGrp="1"/>
           </p:cNvSpPr>
           <p:nvPr/>
         </p:nvSpPr>
         <p:spPr>
-          <a:xfrm xmlns:a="http://schemas.openxmlformats.org/drawingml/2006/main">
+          <a:xfrm>
             <a:off x="685800" y="1428750"/>
             <a:ext cx="2000250" cy="285750"/>
           </a:xfrm>
-          <a:prstGeom xmlns:a="http://schemas.openxmlformats.org/drawingml/2006/main" prst="rect">
+          <a:prstGeom prst="rect">
             <a:avLst/>
           </a:prstGeom>
-          <a:noFill xmlns:a="http://schemas.openxmlformats.org/drawingml/2006/main"/>
-          <a:ln xmlns:a="http://schemas.openxmlformats.org/drawingml/2006/main" w="0">
+          <a:noFill/>
+          <a:ln w="0">
             <a:noFill/>
           </a:ln>
         </p:spPr>
         <p:txBody>
-          <a:bodyPr xmlns:a="http://schemas.openxmlformats.org/drawingml/2006/main" wrap="square" lIns="0" tIns="0" rIns="0" bIns="0" anchor="t">
+          <a:bodyPr wrap="square" lIns="0" tIns="0" rIns="0" bIns="0" anchor="t">
             <a:noAutofit/>
           </a:bodyPr>
-          <a:lstStyle xmlns:a="http://schemas.openxmlformats.org/drawingml/2006/main"/>
-          <a:p xmlns:a="http://schemas.openxmlformats.org/drawingml/2006/main">
+          <a:lstStyle/>
+          <a:p>
             <a:pPr algn="l">
               <a:lnSpc>
                 <a:spcPct val="108000"/>
@@ -2109,37 +1843,37 @@
       </p:sp>
       <p:sp>
         <p:nvSpPr>
-          <p:cNvPr id="6" name="">
-            <a:extLst xmlns:a="http://schemas.openxmlformats.org/drawingml/2006/main">
+          <p:cNvPr id="6" name="직사각형 5">
+            <a:extLst>
               <a:ext uri="{FF2B5EF4-FFF2-40B4-BE49-F238E27FC236}">
                 <a16:creationId xmlns:a16="http://schemas.microsoft.com/office/drawing/2014/main" id="{3FDF7708-E3D9-4936-9351-7B6279F3D2D5}"/>
               </a:ext>
             </a:extLst>
           </p:cNvPr>
           <p:cNvSpPr>
-            <a:spLocks xmlns:a="http://schemas.openxmlformats.org/drawingml/2006/main" noGrp="1"/>
+            <a:spLocks noGrp="1"/>
           </p:cNvSpPr>
           <p:nvPr/>
         </p:nvSpPr>
         <p:spPr>
-          <a:xfrm xmlns:a="http://schemas.openxmlformats.org/drawingml/2006/main">
+          <a:xfrm>
             <a:off x="685800" y="1857375"/>
             <a:ext cx="10820400" cy="1381125"/>
           </a:xfrm>
-          <a:prstGeom xmlns:a="http://schemas.openxmlformats.org/drawingml/2006/main" prst="rect">
+          <a:prstGeom prst="rect">
             <a:avLst/>
           </a:prstGeom>
-          <a:noFill xmlns:a="http://schemas.openxmlformats.org/drawingml/2006/main"/>
-          <a:ln xmlns:a="http://schemas.openxmlformats.org/drawingml/2006/main" w="0">
+          <a:noFill/>
+          <a:ln w="0">
             <a:noFill/>
           </a:ln>
         </p:spPr>
         <p:txBody>
-          <a:bodyPr xmlns:a="http://schemas.openxmlformats.org/drawingml/2006/main" wrap="square" lIns="0" tIns="0" rIns="0" bIns="0" anchor="t">
+          <a:bodyPr wrap="square" lIns="0" tIns="0" rIns="0" bIns="0" anchor="t">
             <a:noAutofit/>
           </a:bodyPr>
-          <a:lstStyle xmlns:a="http://schemas.openxmlformats.org/drawingml/2006/main"/>
-          <a:p xmlns:a="http://schemas.openxmlformats.org/drawingml/2006/main">
+          <a:lstStyle/>
+          <a:p>
             <a:pPr marL="203200" indent="-127000" algn="l">
               <a:lnSpc>
                 <a:spcPct val="108000"/>
@@ -2180,7 +1914,7 @@
               <a:t>버스는 앞 운행을 마친 뒤 다음 출발 전까지 충전해야 함</a:t>
             </a:r>
           </a:p>
-          <a:p xmlns:a="http://schemas.openxmlformats.org/drawingml/2006/main">
+          <a:p>
             <a:pPr marL="203200" indent="-127000" algn="l">
               <a:lnSpc>
                 <a:spcPct val="108000"/>
@@ -2221,7 +1955,7 @@
               <a:t>여러 버스가 같은 충전기를 사용하면 대기가 생길 수 있음</a:t>
             </a:r>
           </a:p>
-          <a:p xmlns:a="http://schemas.openxmlformats.org/drawingml/2006/main">
+          <a:p>
             <a:pPr marL="203200" indent="-127000" algn="l">
               <a:lnSpc>
                 <a:spcPct val="108000"/>
@@ -2266,68 +2000,75 @@
       </p:sp>
       <p:sp>
         <p:nvSpPr>
-          <p:cNvPr id="7" name="">
-            <a:extLst xmlns:a="http://schemas.openxmlformats.org/drawingml/2006/main">
+          <p:cNvPr id="7" name="직선 연결선[R] 6">
+            <a:extLst>
               <a:ext uri="{FF2B5EF4-FFF2-40B4-BE49-F238E27FC236}">
                 <a16:creationId xmlns:a16="http://schemas.microsoft.com/office/drawing/2014/main" id="{F5945EE3-63D0-4AEC-B384-2AA2303240B1}"/>
               </a:ext>
             </a:extLst>
           </p:cNvPr>
           <p:cNvSpPr>
-            <a:spLocks xmlns:a="http://schemas.openxmlformats.org/drawingml/2006/main" noGrp="1"/>
+            <a:spLocks noGrp="1"/>
           </p:cNvSpPr>
           <p:nvPr/>
         </p:nvSpPr>
         <p:spPr>
-          <a:xfrm xmlns:a="http://schemas.openxmlformats.org/drawingml/2006/main">
+          <a:xfrm>
             <a:off x="685800" y="3514725"/>
             <a:ext cx="10820400" cy="0"/>
           </a:xfrm>
-          <a:prstGeom xmlns:a="http://schemas.openxmlformats.org/drawingml/2006/main" prst="line">
+          <a:prstGeom prst="line">
             <a:avLst/>
           </a:prstGeom>
-          <a:noFill xmlns:a="http://schemas.openxmlformats.org/drawingml/2006/main"/>
-          <a:ln xmlns:a="http://schemas.openxmlformats.org/drawingml/2006/main" w="9525">
+          <a:noFill/>
+          <a:ln w="9525">
             <a:solidFill>
               <a:srgbClr val="B8B8B8"/>
             </a:solidFill>
             <a:prstDash val="solid"/>
           </a:ln>
         </p:spPr>
-      </p:sp>
-      <p:sp>
-        <p:nvSpPr>
-          <p:cNvPr id="8" name="">
-            <a:extLst xmlns:a="http://schemas.openxmlformats.org/drawingml/2006/main">
+        <p:txBody>
+          <a:bodyPr/>
+          <a:lstStyle/>
+          <a:p>
+            <a:endParaRPr lang="ko-KR" altLang="en-US"/>
+          </a:p>
+        </p:txBody>
+      </p:sp>
+      <p:sp>
+        <p:nvSpPr>
+          <p:cNvPr id="8" name="직사각형 7">
+            <a:extLst>
               <a:ext uri="{FF2B5EF4-FFF2-40B4-BE49-F238E27FC236}">
                 <a16:creationId xmlns:a16="http://schemas.microsoft.com/office/drawing/2014/main" id="{9C8C7196-1C2D-486E-8900-9229240B895A}"/>
               </a:ext>
             </a:extLst>
           </p:cNvPr>
           <p:cNvSpPr>
-            <a:spLocks xmlns:a="http://schemas.openxmlformats.org/drawingml/2006/main" noGrp="1"/>
+            <a:spLocks noGrp="1"/>
           </p:cNvSpPr>
           <p:nvPr/>
         </p:nvSpPr>
         <p:spPr>
-          <a:xfrm xmlns:a="http://schemas.openxmlformats.org/drawingml/2006/main">
+          <a:xfrm>
             <a:off x="685800" y="3857625"/>
             <a:ext cx="2095500" cy="285750"/>
           </a:xfrm>
-          <a:prstGeom xmlns:a="http://schemas.openxmlformats.org/drawingml/2006/main" prst="rect">
+          <a:prstGeom prst="rect">
             <a:avLst/>
           </a:prstGeom>
-          <a:noFill xmlns:a="http://schemas.openxmlformats.org/drawingml/2006/main"/>
-          <a:ln xmlns:a="http://schemas.openxmlformats.org/drawingml/2006/main" w="0">
+          <a:noFill/>
+          <a:ln w="0">
             <a:noFill/>
           </a:ln>
         </p:spPr>
         <p:txBody>
-          <a:bodyPr xmlns:a="http://schemas.openxmlformats.org/drawingml/2006/main" wrap="square" lIns="0" tIns="0" rIns="0" bIns="0" anchor="t">
+          <a:bodyPr wrap="square" lIns="0" tIns="0" rIns="0" bIns="0" anchor="t">
             <a:noAutofit/>
           </a:bodyPr>
-          <a:lstStyle xmlns:a="http://schemas.openxmlformats.org/drawingml/2006/main"/>
-          <a:p xmlns:a="http://schemas.openxmlformats.org/drawingml/2006/main">
+          <a:lstStyle/>
+          <a:p>
             <a:pPr algn="l">
               <a:lnSpc>
                 <a:spcPct val="108000"/>
@@ -2358,37 +2099,37 @@
       </p:sp>
       <p:sp>
         <p:nvSpPr>
-          <p:cNvPr id="9" name="">
-            <a:extLst xmlns:a="http://schemas.openxmlformats.org/drawingml/2006/main">
+          <p:cNvPr id="9" name="직사각형 8">
+            <a:extLst>
               <a:ext uri="{FF2B5EF4-FFF2-40B4-BE49-F238E27FC236}">
                 <a16:creationId xmlns:a16="http://schemas.microsoft.com/office/drawing/2014/main" id="{32B428A1-28F6-43B8-A308-05058A94D689}"/>
               </a:ext>
             </a:extLst>
           </p:cNvPr>
           <p:cNvSpPr>
-            <a:spLocks xmlns:a="http://schemas.openxmlformats.org/drawingml/2006/main" noGrp="1"/>
+            <a:spLocks noGrp="1"/>
           </p:cNvSpPr>
           <p:nvPr/>
         </p:nvSpPr>
         <p:spPr>
-          <a:xfrm xmlns:a="http://schemas.openxmlformats.org/drawingml/2006/main">
+          <a:xfrm>
             <a:off x="685800" y="4267200"/>
             <a:ext cx="10820400" cy="628650"/>
           </a:xfrm>
-          <a:prstGeom xmlns:a="http://schemas.openxmlformats.org/drawingml/2006/main" prst="rect">
+          <a:prstGeom prst="rect">
             <a:avLst/>
           </a:prstGeom>
-          <a:noFill xmlns:a="http://schemas.openxmlformats.org/drawingml/2006/main"/>
-          <a:ln xmlns:a="http://schemas.openxmlformats.org/drawingml/2006/main" w="0">
+          <a:noFill/>
+          <a:ln w="0">
             <a:noFill/>
           </a:ln>
         </p:spPr>
         <p:txBody>
-          <a:bodyPr xmlns:a="http://schemas.openxmlformats.org/drawingml/2006/main" wrap="square" lIns="0" tIns="0" rIns="0" bIns="0" anchor="ctr">
+          <a:bodyPr wrap="square" lIns="0" tIns="0" rIns="0" bIns="0" anchor="ctr">
             <a:noAutofit/>
           </a:bodyPr>
-          <a:lstStyle xmlns:a="http://schemas.openxmlformats.org/drawingml/2006/main"/>
-          <a:p xmlns:a="http://schemas.openxmlformats.org/drawingml/2006/main">
+          <a:lstStyle/>
+          <a:p>
             <a:pPr algn="l">
               <a:lnSpc>
                 <a:spcPct val="108000"/>
@@ -2419,37 +2160,37 @@
       </p:sp>
       <p:sp>
         <p:nvSpPr>
-          <p:cNvPr id="10" name="">
-            <a:extLst xmlns:a="http://schemas.openxmlformats.org/drawingml/2006/main">
+          <p:cNvPr id="10" name="직사각형 9">
+            <a:extLst>
               <a:ext uri="{FF2B5EF4-FFF2-40B4-BE49-F238E27FC236}">
                 <a16:creationId xmlns:a16="http://schemas.microsoft.com/office/drawing/2014/main" id="{330FC96B-E7C1-4D5C-B0ED-8653DDC3D72C}"/>
               </a:ext>
             </a:extLst>
           </p:cNvPr>
           <p:cNvSpPr>
-            <a:spLocks xmlns:a="http://schemas.openxmlformats.org/drawingml/2006/main" noGrp="1"/>
+            <a:spLocks noGrp="1"/>
           </p:cNvSpPr>
           <p:nvPr/>
         </p:nvSpPr>
         <p:spPr>
-          <a:xfrm xmlns:a="http://schemas.openxmlformats.org/drawingml/2006/main">
+          <a:xfrm>
             <a:off x="685800" y="5248275"/>
             <a:ext cx="1714500" cy="266700"/>
           </a:xfrm>
-          <a:prstGeom xmlns:a="http://schemas.openxmlformats.org/drawingml/2006/main" prst="rect">
+          <a:prstGeom prst="rect">
             <a:avLst/>
           </a:prstGeom>
-          <a:noFill xmlns:a="http://schemas.openxmlformats.org/drawingml/2006/main"/>
-          <a:ln xmlns:a="http://schemas.openxmlformats.org/drawingml/2006/main" w="0">
+          <a:noFill/>
+          <a:ln w="0">
             <a:noFill/>
           </a:ln>
         </p:spPr>
         <p:txBody>
-          <a:bodyPr xmlns:a="http://schemas.openxmlformats.org/drawingml/2006/main" wrap="square" lIns="0" tIns="0" rIns="0" bIns="0" anchor="t">
+          <a:bodyPr wrap="square" lIns="0" tIns="0" rIns="0" bIns="0" anchor="t">
             <a:noAutofit/>
           </a:bodyPr>
-          <a:lstStyle xmlns:a="http://schemas.openxmlformats.org/drawingml/2006/main"/>
-          <a:p xmlns:a="http://schemas.openxmlformats.org/drawingml/2006/main">
+          <a:lstStyle/>
+          <a:p>
             <a:pPr algn="l">
               <a:lnSpc>
                 <a:spcPct val="108000"/>
@@ -2480,37 +2221,37 @@
       </p:sp>
       <p:sp>
         <p:nvSpPr>
-          <p:cNvPr id="11" name="">
-            <a:extLst xmlns:a="http://schemas.openxmlformats.org/drawingml/2006/main">
+          <p:cNvPr id="11" name="직사각형 10">
+            <a:extLst>
               <a:ext uri="{FF2B5EF4-FFF2-40B4-BE49-F238E27FC236}">
                 <a16:creationId xmlns:a16="http://schemas.microsoft.com/office/drawing/2014/main" id="{AA7D6D3E-E8BB-4894-A9BD-371B100C4310}"/>
               </a:ext>
             </a:extLst>
           </p:cNvPr>
           <p:cNvSpPr>
-            <a:spLocks xmlns:a="http://schemas.openxmlformats.org/drawingml/2006/main" noGrp="1"/>
+            <a:spLocks noGrp="1"/>
           </p:cNvSpPr>
           <p:nvPr/>
         </p:nvSpPr>
         <p:spPr>
-          <a:xfrm xmlns:a="http://schemas.openxmlformats.org/drawingml/2006/main">
+          <a:xfrm>
             <a:off x="2419350" y="5210175"/>
             <a:ext cx="9086850" cy="361950"/>
           </a:xfrm>
-          <a:prstGeom xmlns:a="http://schemas.openxmlformats.org/drawingml/2006/main" prst="rect">
+          <a:prstGeom prst="rect">
             <a:avLst/>
           </a:prstGeom>
-          <a:noFill xmlns:a="http://schemas.openxmlformats.org/drawingml/2006/main"/>
-          <a:ln xmlns:a="http://schemas.openxmlformats.org/drawingml/2006/main" w="0">
+          <a:noFill/>
+          <a:ln w="0">
             <a:noFill/>
           </a:ln>
         </p:spPr>
         <p:txBody>
-          <a:bodyPr xmlns:a="http://schemas.openxmlformats.org/drawingml/2006/main" wrap="square" lIns="0" tIns="0" rIns="0" bIns="0" anchor="ctr">
+          <a:bodyPr wrap="square" lIns="0" tIns="0" rIns="0" bIns="0" anchor="ctr">
             <a:noAutofit/>
           </a:bodyPr>
-          <a:lstStyle xmlns:a="http://schemas.openxmlformats.org/drawingml/2006/main"/>
-          <a:p xmlns:a="http://schemas.openxmlformats.org/drawingml/2006/main">
+          <a:lstStyle/>
+          <a:p>
             <a:pPr algn="l">
               <a:lnSpc>
                 <a:spcPct val="108000"/>
@@ -2541,37 +2282,37 @@
       </p:sp>
       <p:sp>
         <p:nvSpPr>
-          <p:cNvPr id="12" name="">
-            <a:extLst xmlns:a="http://schemas.openxmlformats.org/drawingml/2006/main">
+          <p:cNvPr id="12" name="직사각형 11">
+            <a:extLst>
               <a:ext uri="{FF2B5EF4-FFF2-40B4-BE49-F238E27FC236}">
                 <a16:creationId xmlns:a16="http://schemas.microsoft.com/office/drawing/2014/main" id="{13140680-BBA8-4D1F-838D-18B4A521A0F4}"/>
               </a:ext>
             </a:extLst>
           </p:cNvPr>
           <p:cNvSpPr>
-            <a:spLocks xmlns:a="http://schemas.openxmlformats.org/drawingml/2006/main" noGrp="1"/>
+            <a:spLocks noGrp="1"/>
           </p:cNvSpPr>
           <p:nvPr/>
         </p:nvSpPr>
         <p:spPr>
-          <a:xfrm xmlns:a="http://schemas.openxmlformats.org/drawingml/2006/main">
+          <a:xfrm>
             <a:off x="685800" y="5848350"/>
             <a:ext cx="10820400" cy="285750"/>
           </a:xfrm>
-          <a:prstGeom xmlns:a="http://schemas.openxmlformats.org/drawingml/2006/main" prst="rect">
+          <a:prstGeom prst="rect">
             <a:avLst/>
           </a:prstGeom>
-          <a:noFill xmlns:a="http://schemas.openxmlformats.org/drawingml/2006/main"/>
-          <a:ln xmlns:a="http://schemas.openxmlformats.org/drawingml/2006/main" w="0">
+          <a:noFill/>
+          <a:ln w="0">
             <a:noFill/>
           </a:ln>
         </p:spPr>
         <p:txBody>
-          <a:bodyPr xmlns:a="http://schemas.openxmlformats.org/drawingml/2006/main" wrap="square" lIns="0" tIns="0" rIns="0" bIns="0" anchor="ctr">
+          <a:bodyPr wrap="square" lIns="0" tIns="0" rIns="0" bIns="0" anchor="ctr">
             <a:noAutofit/>
           </a:bodyPr>
-          <a:lstStyle xmlns:a="http://schemas.openxmlformats.org/drawingml/2006/main"/>
-          <a:p xmlns:a="http://schemas.openxmlformats.org/drawingml/2006/main">
+          <a:lstStyle/>
+          <a:p>
             <a:pPr algn="ctr">
               <a:lnSpc>
                 <a:spcPct val="108000"/>
@@ -2607,17 +2348,21 @@
       </p:ext>
     </p:extLst>
   </p:cSld>
+  <p:clrMapOvr>
+    <a:masterClrMapping/>
+  </p:clrMapOvr>
 </p:sld>
 </file>
 
 <file path=ppt/slides/slide3.xml><?xml version="1.0" encoding="utf-8"?>
-<p:sld xmlns:p="http://schemas.openxmlformats.org/presentationml/2006/main">
+<p:sld xmlns:a="http://schemas.openxmlformats.org/drawingml/2006/main" xmlns:r="http://schemas.openxmlformats.org/officeDocument/2006/relationships" xmlns:p="http://schemas.openxmlformats.org/presentationml/2006/main">
   <p:cSld>
     <p:bg>
       <p:bgPr>
-        <a:solidFill xmlns:a="http://schemas.openxmlformats.org/drawingml/2006/main">
+        <a:solidFill>
           <a:srgbClr val="FFFFFF"/>
         </a:solidFill>
+        <a:effectLst/>
       </p:bgPr>
     </p:bg>
     <p:spTree>
@@ -2627,41 +2372,46 @@
         <p:nvPr/>
       </p:nvGrpSpPr>
       <p:grpSpPr>
-        <a:xfrm xmlns:a="http://schemas.openxmlformats.org/drawingml/2006/main"/>
+        <a:xfrm>
+          <a:off x="0" y="0"/>
+          <a:ext cx="0" cy="0"/>
+          <a:chOff x="0" y="0"/>
+          <a:chExt cx="0" cy="0"/>
+        </a:xfrm>
       </p:grpSpPr>
       <p:sp>
         <p:nvSpPr>
-          <p:cNvPr id="8" name="">
-            <a:extLst xmlns:a="http://schemas.openxmlformats.org/drawingml/2006/main">
+          <p:cNvPr id="8" name="직사각형 7">
+            <a:extLst>
               <a:ext uri="{FF2B5EF4-FFF2-40B4-BE49-F238E27FC236}">
                 <a16:creationId xmlns:a16="http://schemas.microsoft.com/office/drawing/2014/main" id="{0ECDEEFB-C017-4AF3-AC45-3C7DAA1B19BF}"/>
               </a:ext>
             </a:extLst>
           </p:cNvPr>
           <p:cNvSpPr>
-            <a:spLocks xmlns:a="http://schemas.openxmlformats.org/drawingml/2006/main" noGrp="1"/>
+            <a:spLocks noGrp="1"/>
           </p:cNvSpPr>
           <p:nvPr/>
         </p:nvSpPr>
         <p:spPr>
-          <a:xfrm xmlns:a="http://schemas.openxmlformats.org/drawingml/2006/main">
+          <a:xfrm>
             <a:off x="685800" y="428625"/>
             <a:ext cx="8858250" cy="685800"/>
           </a:xfrm>
-          <a:prstGeom xmlns:a="http://schemas.openxmlformats.org/drawingml/2006/main" prst="rect">
+          <a:prstGeom prst="rect">
             <a:avLst/>
           </a:prstGeom>
-          <a:noFill xmlns:a="http://schemas.openxmlformats.org/drawingml/2006/main"/>
-          <a:ln xmlns:a="http://schemas.openxmlformats.org/drawingml/2006/main" w="0">
+          <a:noFill/>
+          <a:ln w="0">
             <a:noFill/>
           </a:ln>
         </p:spPr>
         <p:txBody>
-          <a:bodyPr xmlns:a="http://schemas.openxmlformats.org/drawingml/2006/main" wrap="square" lIns="0" tIns="0" rIns="0" bIns="0" anchor="t">
+          <a:bodyPr wrap="square" lIns="0" tIns="0" rIns="0" bIns="0" anchor="t">
             <a:noAutofit/>
           </a:bodyPr>
-          <a:lstStyle xmlns:a="http://schemas.openxmlformats.org/drawingml/2006/main"/>
-          <a:p xmlns:a="http://schemas.openxmlformats.org/drawingml/2006/main">
+          <a:lstStyle/>
+          <a:p>
             <a:pPr algn="l">
               <a:lnSpc>
                 <a:spcPct val="108000"/>
@@ -2692,41 +2442,41 @@
       </p:sp>
       <p:sp>
         <p:nvSpPr>
-          <p:cNvPr id="2" name="">
-            <a:extLst xmlns:a="http://schemas.openxmlformats.org/drawingml/2006/main">
+          <p:cNvPr id="2" name="모서리가 둥근 직사각형 1">
+            <a:extLst>
               <a:ext uri="{FF2B5EF4-FFF2-40B4-BE49-F238E27FC236}">
                 <a16:creationId xmlns:a16="http://schemas.microsoft.com/office/drawing/2014/main" id="{67B58328-C25B-4B1F-9907-0AAEF8FF28A1}"/>
               </a:ext>
             </a:extLst>
           </p:cNvPr>
           <p:cNvSpPr>
-            <a:spLocks xmlns:a="http://schemas.openxmlformats.org/drawingml/2006/main" noGrp="1"/>
+            <a:spLocks noGrp="1"/>
           </p:cNvSpPr>
           <p:nvPr/>
         </p:nvSpPr>
         <p:spPr>
-          <a:xfrm xmlns:a="http://schemas.openxmlformats.org/drawingml/2006/main">
+          <a:xfrm>
             <a:off x="9667875" y="666750"/>
             <a:ext cx="1838325" cy="371475"/>
           </a:xfrm>
-          <a:prstGeom xmlns:a="http://schemas.openxmlformats.org/drawingml/2006/main" prst="roundRect">
+          <a:prstGeom prst="roundRect">
             <a:avLst>
               <a:gd name="adj" fmla="val 50000"/>
             </a:avLst>
           </a:prstGeom>
-          <a:solidFill xmlns:a="http://schemas.openxmlformats.org/drawingml/2006/main">
+          <a:solidFill>
             <a:srgbClr val="F2F2F2"/>
           </a:solidFill>
-          <a:ln xmlns:a="http://schemas.openxmlformats.org/drawingml/2006/main" w="0">
+          <a:ln w="0">
             <a:noFill/>
           </a:ln>
         </p:spPr>
         <p:txBody>
-          <a:bodyPr xmlns:a="http://schemas.openxmlformats.org/drawingml/2006/main" lIns="38100" tIns="0" rIns="38100" bIns="0" anchor="ctr">
+          <a:bodyPr lIns="38100" tIns="0" rIns="38100" bIns="0" anchor="ctr">
             <a:noAutofit/>
           </a:bodyPr>
-          <a:lstStyle xmlns:a="http://schemas.openxmlformats.org/drawingml/2006/main"/>
-          <a:p xmlns:a="http://schemas.openxmlformats.org/drawingml/2006/main">
+          <a:lstStyle/>
+          <a:p>
             <a:pPr algn="ctr">
               <a:defRPr sz="1125">
                 <a:solidFill>
@@ -2753,37 +2503,37 @@
       </p:sp>
       <p:sp>
         <p:nvSpPr>
-          <p:cNvPr id="3" name="">
-            <a:extLst xmlns:a="http://schemas.openxmlformats.org/drawingml/2006/main">
+          <p:cNvPr id="3" name="직사각형 2">
+            <a:extLst>
               <a:ext uri="{FF2B5EF4-FFF2-40B4-BE49-F238E27FC236}">
                 <a16:creationId xmlns:a16="http://schemas.microsoft.com/office/drawing/2014/main" id="{3490DEAE-5E8A-42E6-8363-C15FF437DCF0}"/>
               </a:ext>
             </a:extLst>
           </p:cNvPr>
           <p:cNvSpPr>
-            <a:spLocks xmlns:a="http://schemas.openxmlformats.org/drawingml/2006/main" noGrp="1"/>
+            <a:spLocks noGrp="1"/>
           </p:cNvSpPr>
           <p:nvPr/>
         </p:nvSpPr>
         <p:spPr>
-          <a:xfrm xmlns:a="http://schemas.openxmlformats.org/drawingml/2006/main">
+          <a:xfrm>
             <a:off x="685800" y="6419850"/>
             <a:ext cx="9334500" cy="171450"/>
           </a:xfrm>
-          <a:prstGeom xmlns:a="http://schemas.openxmlformats.org/drawingml/2006/main" prst="rect">
+          <a:prstGeom prst="rect">
             <a:avLst/>
           </a:prstGeom>
-          <a:noFill xmlns:a="http://schemas.openxmlformats.org/drawingml/2006/main"/>
-          <a:ln xmlns:a="http://schemas.openxmlformats.org/drawingml/2006/main" w="0">
+          <a:noFill/>
+          <a:ln w="0">
             <a:noFill/>
           </a:ln>
         </p:spPr>
         <p:txBody>
-          <a:bodyPr xmlns:a="http://schemas.openxmlformats.org/drawingml/2006/main" wrap="square" lIns="0" tIns="0" rIns="0" bIns="0" anchor="ctr">
+          <a:bodyPr wrap="square" lIns="0" tIns="0" rIns="0" bIns="0" anchor="ctr">
             <a:noAutofit/>
           </a:bodyPr>
-          <a:lstStyle xmlns:a="http://schemas.openxmlformats.org/drawingml/2006/main"/>
-          <a:p xmlns:a="http://schemas.openxmlformats.org/drawingml/2006/main">
+          <a:lstStyle/>
+          <a:p>
             <a:pPr algn="l">
               <a:lnSpc>
                 <a:spcPct val="108000"/>
@@ -2814,37 +2564,37 @@
       </p:sp>
       <p:sp>
         <p:nvSpPr>
-          <p:cNvPr id="4" name="">
-            <a:extLst xmlns:a="http://schemas.openxmlformats.org/drawingml/2006/main">
+          <p:cNvPr id="4" name="직사각형 3">
+            <a:extLst>
               <a:ext uri="{FF2B5EF4-FFF2-40B4-BE49-F238E27FC236}">
                 <a16:creationId xmlns:a16="http://schemas.microsoft.com/office/drawing/2014/main" id="{1DAC46AB-F596-453A-ADCB-89F018DDEFE7}"/>
               </a:ext>
             </a:extLst>
           </p:cNvPr>
           <p:cNvSpPr>
-            <a:spLocks xmlns:a="http://schemas.openxmlformats.org/drawingml/2006/main" noGrp="1"/>
+            <a:spLocks noGrp="1"/>
           </p:cNvSpPr>
           <p:nvPr/>
         </p:nvSpPr>
         <p:spPr>
-          <a:xfrm xmlns:a="http://schemas.openxmlformats.org/drawingml/2006/main">
+          <a:xfrm>
             <a:off x="10591800" y="6381750"/>
             <a:ext cx="914400" cy="209550"/>
           </a:xfrm>
-          <a:prstGeom xmlns:a="http://schemas.openxmlformats.org/drawingml/2006/main" prst="rect">
+          <a:prstGeom prst="rect">
             <a:avLst/>
           </a:prstGeom>
-          <a:noFill xmlns:a="http://schemas.openxmlformats.org/drawingml/2006/main"/>
-          <a:ln xmlns:a="http://schemas.openxmlformats.org/drawingml/2006/main" w="0">
+          <a:noFill/>
+          <a:ln w="0">
             <a:noFill/>
           </a:ln>
         </p:spPr>
         <p:txBody>
-          <a:bodyPr xmlns:a="http://schemas.openxmlformats.org/drawingml/2006/main" wrap="square" lIns="0" tIns="0" rIns="0" bIns="0" anchor="ctr">
+          <a:bodyPr wrap="square" lIns="0" tIns="0" rIns="0" bIns="0" anchor="ctr">
             <a:noAutofit/>
           </a:bodyPr>
-          <a:lstStyle xmlns:a="http://schemas.openxmlformats.org/drawingml/2006/main"/>
-          <a:p xmlns:a="http://schemas.openxmlformats.org/drawingml/2006/main">
+          <a:lstStyle/>
+          <a:p>
             <a:pPr algn="r">
               <a:lnSpc>
                 <a:spcPct val="108000"/>
@@ -2875,29 +2625,45 @@
       </p:sp>
       <p:graphicFrame>
         <p:nvGraphicFramePr>
-          <p:cNvPr id="12" name=""/>
+          <p:cNvPr id="12" name="표 11"/>
           <p:cNvGraphicFramePr/>
           <p:nvPr/>
         </p:nvGraphicFramePr>
         <p:xfrm>
-          <a:off xmlns:a="http://schemas.openxmlformats.org/drawingml/2006/main" x="685800" y="1362075"/>
-          <a:ext xmlns:a="http://schemas.openxmlformats.org/drawingml/2006/main" cx="10820400" cy="3143250"/>
+          <a:off x="685800" y="1362075"/>
+          <a:ext cx="10820400" cy="3114675"/>
         </p:xfrm>
-        <a:graphic xmlns:a="http://schemas.openxmlformats.org/drawingml/2006/main">
+        <a:graphic>
           <a:graphicData uri="http://schemas.openxmlformats.org/drawingml/2006/table">
             <a:tbl>
               <a:tblPr/>
               <a:tblGrid>
-                <a:gridCol w="1762125"/>
-                <a:gridCol w="1476375"/>
-                <a:gridCol w="7581900"/>
+                <a:gridCol w="1762125">
+                  <a:extLst>
+                    <a:ext uri="{9D8B030D-6E8A-4147-A177-3AD203B41FA5}">
+                      <a16:colId xmlns:a16="http://schemas.microsoft.com/office/drawing/2014/main" val="20000"/>
+                    </a:ext>
+                  </a:extLst>
+                </a:gridCol>
+                <a:gridCol w="1476375">
+                  <a:extLst>
+                    <a:ext uri="{9D8B030D-6E8A-4147-A177-3AD203B41FA5}">
+                      <a16:colId xmlns:a16="http://schemas.microsoft.com/office/drawing/2014/main" val="20001"/>
+                    </a:ext>
+                  </a:extLst>
+                </a:gridCol>
+                <a:gridCol w="7581900">
+                  <a:extLst>
+                    <a:ext uri="{9D8B030D-6E8A-4147-A177-3AD203B41FA5}">
+                      <a16:colId xmlns:a16="http://schemas.microsoft.com/office/drawing/2014/main" val="20002"/>
+                    </a:ext>
+                  </a:extLst>
+                </a:gridCol>
               </a:tblGrid>
               <a:tr h="400050">
                 <a:tc>
                   <a:txBody>
-                    <a:bodyPr wrap="square" lIns="76200" tIns="38100" rIns="76200" bIns="38100">
-                      <a:noAutofit/>
-                    </a:bodyPr>
+                    <a:bodyPr/>
                     <a:lstStyle/>
                     <a:p>
                       <a:pPr algn="ctr"/>
@@ -2914,7 +2680,7 @@
                       </a:r>
                     </a:p>
                   </a:txBody>
-                  <a:tcPr marL="91440" marR="91440" marT="45720" marB="45720" anchor="ctr">
+                  <a:tcPr anchor="ctr">
                     <a:solidFill>
                       <a:srgbClr val="000000"/>
                     </a:solidFill>
@@ -2922,9 +2688,7 @@
                 </a:tc>
                 <a:tc>
                   <a:txBody>
-                    <a:bodyPr wrap="square" lIns="76200" tIns="38100" rIns="76200" bIns="38100">
-                      <a:noAutofit/>
-                    </a:bodyPr>
+                    <a:bodyPr/>
                     <a:lstStyle/>
                     <a:p>
                       <a:pPr algn="ctr"/>
@@ -2941,7 +2705,7 @@
                       </a:r>
                     </a:p>
                   </a:txBody>
-                  <a:tcPr marL="91440" marR="91440" marT="45720" marB="45720" anchor="ctr">
+                  <a:tcPr anchor="ctr">
                     <a:solidFill>
                       <a:srgbClr val="000000"/>
                     </a:solidFill>
@@ -2949,9 +2713,7 @@
                 </a:tc>
                 <a:tc>
                   <a:txBody>
-                    <a:bodyPr wrap="square" lIns="76200" tIns="38100" rIns="76200" bIns="38100">
-                      <a:noAutofit/>
-                    </a:bodyPr>
+                    <a:bodyPr/>
                     <a:lstStyle/>
                     <a:p>
                       <a:pPr algn="l"/>
@@ -2968,19 +2730,22 @@
                       </a:r>
                     </a:p>
                   </a:txBody>
-                  <a:tcPr marL="91440" marR="91440" marT="45720" marB="45720" anchor="ctr">
+                  <a:tcPr anchor="ctr">
                     <a:solidFill>
                       <a:srgbClr val="000000"/>
                     </a:solidFill>
                   </a:tcPr>
                 </a:tc>
+                <a:extLst>
+                  <a:ext uri="{0D108BD9-81ED-4DB2-BD59-A6C34878D82A}">
+                    <a16:rowId xmlns:a16="http://schemas.microsoft.com/office/drawing/2014/main" val="10000"/>
+                  </a:ext>
+                </a:extLst>
               </a:tr>
               <a:tr h="542925">
                 <a:tc>
                   <a:txBody>
-                    <a:bodyPr wrap="square" lIns="76200" tIns="38100" rIns="76200" bIns="38100">
-                      <a:noAutofit/>
-                    </a:bodyPr>
+                    <a:bodyPr/>
                     <a:lstStyle/>
                     <a:p>
                       <a:pPr algn="ctr"/>
@@ -2997,7 +2762,7 @@
                       </a:r>
                     </a:p>
                   </a:txBody>
-                  <a:tcPr marL="91440" marR="91440" marT="45720" marB="45720" anchor="ctr">
+                  <a:tcPr anchor="ctr">
                     <a:solidFill>
                       <a:srgbClr val="FFFFFF"/>
                     </a:solidFill>
@@ -3005,9 +2770,7 @@
                 </a:tc>
                 <a:tc>
                   <a:txBody>
-                    <a:bodyPr wrap="square" lIns="76200" tIns="38100" rIns="76200" bIns="38100">
-                      <a:noAutofit/>
-                    </a:bodyPr>
+                    <a:bodyPr/>
                     <a:lstStyle/>
                     <a:p>
                       <a:pPr algn="ctr"/>
@@ -3024,7 +2787,7 @@
                       </a:r>
                     </a:p>
                   </a:txBody>
-                  <a:tcPr marL="91440" marR="91440" marT="45720" marB="45720" anchor="ctr">
+                  <a:tcPr anchor="ctr">
                     <a:solidFill>
                       <a:srgbClr val="FFFFFF"/>
                     </a:solidFill>
@@ -3032,9 +2795,7 @@
                 </a:tc>
                 <a:tc>
                   <a:txBody>
-                    <a:bodyPr wrap="square" lIns="76200" tIns="38100" rIns="76200" bIns="38100">
-                      <a:noAutofit/>
-                    </a:bodyPr>
+                    <a:bodyPr/>
                     <a:lstStyle/>
                     <a:p>
                       <a:pPr algn="l"/>
@@ -3051,19 +2812,22 @@
                       </a:r>
                     </a:p>
                   </a:txBody>
-                  <a:tcPr marL="91440" marR="91440" marT="45720" marB="45720" anchor="ctr">
+                  <a:tcPr anchor="ctr">
                     <a:solidFill>
                       <a:srgbClr val="FFFFFF"/>
                     </a:solidFill>
                   </a:tcPr>
                 </a:tc>
+                <a:extLst>
+                  <a:ext uri="{0D108BD9-81ED-4DB2-BD59-A6C34878D82A}">
+                    <a16:rowId xmlns:a16="http://schemas.microsoft.com/office/drawing/2014/main" val="10001"/>
+                  </a:ext>
+                </a:extLst>
               </a:tr>
               <a:tr h="542925">
                 <a:tc>
                   <a:txBody>
-                    <a:bodyPr wrap="square" lIns="76200" tIns="38100" rIns="76200" bIns="38100">
-                      <a:noAutofit/>
-                    </a:bodyPr>
+                    <a:bodyPr/>
                     <a:lstStyle/>
                     <a:p>
                       <a:pPr algn="ctr"/>
@@ -3080,7 +2844,7 @@
                       </a:r>
                     </a:p>
                   </a:txBody>
-                  <a:tcPr marL="91440" marR="91440" marT="45720" marB="45720" anchor="ctr">
+                  <a:tcPr anchor="ctr">
                     <a:solidFill>
                       <a:srgbClr val="FFFFFF"/>
                     </a:solidFill>
@@ -3088,9 +2852,7 @@
                 </a:tc>
                 <a:tc>
                   <a:txBody>
-                    <a:bodyPr wrap="square" lIns="76200" tIns="38100" rIns="76200" bIns="38100">
-                      <a:noAutofit/>
-                    </a:bodyPr>
+                    <a:bodyPr/>
                     <a:lstStyle/>
                     <a:p>
                       <a:pPr algn="ctr"/>
@@ -3107,7 +2869,7 @@
                       </a:r>
                     </a:p>
                   </a:txBody>
-                  <a:tcPr marL="91440" marR="91440" marT="45720" marB="45720" anchor="ctr">
+                  <a:tcPr anchor="ctr">
                     <a:solidFill>
                       <a:srgbClr val="FFFFFF"/>
                     </a:solidFill>
@@ -3115,9 +2877,7 @@
                 </a:tc>
                 <a:tc>
                   <a:txBody>
-                    <a:bodyPr wrap="square" lIns="76200" tIns="38100" rIns="76200" bIns="38100">
-                      <a:noAutofit/>
-                    </a:bodyPr>
+                    <a:bodyPr/>
                     <a:lstStyle/>
                     <a:p>
                       <a:pPr algn="l"/>
@@ -3134,19 +2894,22 @@
                       </a:r>
                     </a:p>
                   </a:txBody>
-                  <a:tcPr marL="91440" marR="91440" marT="45720" marB="45720" anchor="ctr">
+                  <a:tcPr anchor="ctr">
                     <a:solidFill>
                       <a:srgbClr val="FFFFFF"/>
                     </a:solidFill>
                   </a:tcPr>
                 </a:tc>
+                <a:extLst>
+                  <a:ext uri="{0D108BD9-81ED-4DB2-BD59-A6C34878D82A}">
+                    <a16:rowId xmlns:a16="http://schemas.microsoft.com/office/drawing/2014/main" val="10002"/>
+                  </a:ext>
+                </a:extLst>
               </a:tr>
               <a:tr h="542925">
                 <a:tc>
                   <a:txBody>
-                    <a:bodyPr wrap="square" lIns="76200" tIns="38100" rIns="76200" bIns="38100">
-                      <a:noAutofit/>
-                    </a:bodyPr>
+                    <a:bodyPr/>
                     <a:lstStyle/>
                     <a:p>
                       <a:pPr algn="ctr"/>
@@ -3163,7 +2926,7 @@
                       </a:r>
                     </a:p>
                   </a:txBody>
-                  <a:tcPr marL="91440" marR="91440" marT="45720" marB="45720" anchor="ctr">
+                  <a:tcPr anchor="ctr">
                     <a:solidFill>
                       <a:srgbClr val="FFFFFF"/>
                     </a:solidFill>
@@ -3171,9 +2934,7 @@
                 </a:tc>
                 <a:tc>
                   <a:txBody>
-                    <a:bodyPr wrap="square" lIns="76200" tIns="38100" rIns="76200" bIns="38100">
-                      <a:noAutofit/>
-                    </a:bodyPr>
+                    <a:bodyPr/>
                     <a:lstStyle/>
                     <a:p>
                       <a:pPr algn="ctr"/>
@@ -3190,7 +2951,7 @@
                       </a:r>
                     </a:p>
                   </a:txBody>
-                  <a:tcPr marL="91440" marR="91440" marT="45720" marB="45720" anchor="ctr">
+                  <a:tcPr anchor="ctr">
                     <a:solidFill>
                       <a:srgbClr val="FFFFFF"/>
                     </a:solidFill>
@@ -3198,9 +2959,7 @@
                 </a:tc>
                 <a:tc>
                   <a:txBody>
-                    <a:bodyPr wrap="square" lIns="76200" tIns="38100" rIns="76200" bIns="38100">
-                      <a:noAutofit/>
-                    </a:bodyPr>
+                    <a:bodyPr/>
                     <a:lstStyle/>
                     <a:p>
                       <a:pPr algn="l"/>
@@ -3217,19 +2976,22 @@
                       </a:r>
                     </a:p>
                   </a:txBody>
-                  <a:tcPr marL="91440" marR="91440" marT="45720" marB="45720" anchor="ctr">
+                  <a:tcPr anchor="ctr">
                     <a:solidFill>
                       <a:srgbClr val="FFFFFF"/>
                     </a:solidFill>
                   </a:tcPr>
                 </a:tc>
+                <a:extLst>
+                  <a:ext uri="{0D108BD9-81ED-4DB2-BD59-A6C34878D82A}">
+                    <a16:rowId xmlns:a16="http://schemas.microsoft.com/office/drawing/2014/main" val="10003"/>
+                  </a:ext>
+                </a:extLst>
               </a:tr>
               <a:tr h="542925">
                 <a:tc>
                   <a:txBody>
-                    <a:bodyPr wrap="square" lIns="76200" tIns="38100" rIns="76200" bIns="38100">
-                      <a:noAutofit/>
-                    </a:bodyPr>
+                    <a:bodyPr/>
                     <a:lstStyle/>
                     <a:p>
                       <a:pPr algn="ctr"/>
@@ -3246,7 +3008,7 @@
                       </a:r>
                     </a:p>
                   </a:txBody>
-                  <a:tcPr marL="91440" marR="91440" marT="45720" marB="45720" anchor="ctr">
+                  <a:tcPr anchor="ctr">
                     <a:solidFill>
                       <a:srgbClr val="FFFFFF"/>
                     </a:solidFill>
@@ -3254,9 +3016,7 @@
                 </a:tc>
                 <a:tc>
                   <a:txBody>
-                    <a:bodyPr wrap="square" lIns="76200" tIns="38100" rIns="76200" bIns="38100">
-                      <a:noAutofit/>
-                    </a:bodyPr>
+                    <a:bodyPr/>
                     <a:lstStyle/>
                     <a:p>
                       <a:pPr algn="ctr"/>
@@ -3273,7 +3033,7 @@
                       </a:r>
                     </a:p>
                   </a:txBody>
-                  <a:tcPr marL="91440" marR="91440" marT="45720" marB="45720" anchor="ctr">
+                  <a:tcPr anchor="ctr">
                     <a:solidFill>
                       <a:srgbClr val="FFFFFF"/>
                     </a:solidFill>
@@ -3281,9 +3041,7 @@
                 </a:tc>
                 <a:tc>
                   <a:txBody>
-                    <a:bodyPr wrap="square" lIns="76200" tIns="38100" rIns="76200" bIns="38100">
-                      <a:noAutofit/>
-                    </a:bodyPr>
+                    <a:bodyPr/>
                     <a:lstStyle/>
                     <a:p>
                       <a:pPr algn="l"/>
@@ -3300,19 +3058,22 @@
                       </a:r>
                     </a:p>
                   </a:txBody>
-                  <a:tcPr marL="91440" marR="91440" marT="45720" marB="45720" anchor="ctr">
+                  <a:tcPr anchor="ctr">
                     <a:solidFill>
                       <a:srgbClr val="FFFFFF"/>
                     </a:solidFill>
                   </a:tcPr>
                 </a:tc>
+                <a:extLst>
+                  <a:ext uri="{0D108BD9-81ED-4DB2-BD59-A6C34878D82A}">
+                    <a16:rowId xmlns:a16="http://schemas.microsoft.com/office/drawing/2014/main" val="10004"/>
+                  </a:ext>
+                </a:extLst>
               </a:tr>
               <a:tr h="542925">
                 <a:tc>
                   <a:txBody>
-                    <a:bodyPr wrap="square" lIns="76200" tIns="38100" rIns="76200" bIns="38100">
-                      <a:noAutofit/>
-                    </a:bodyPr>
+                    <a:bodyPr/>
                     <a:lstStyle/>
                     <a:p>
                       <a:pPr algn="ctr"/>
@@ -3329,7 +3090,7 @@
                       </a:r>
                     </a:p>
                   </a:txBody>
-                  <a:tcPr marL="91440" marR="91440" marT="45720" marB="45720" anchor="ctr">
+                  <a:tcPr anchor="ctr">
                     <a:solidFill>
                       <a:srgbClr val="FFFFFF"/>
                     </a:solidFill>
@@ -3337,9 +3098,7 @@
                 </a:tc>
                 <a:tc>
                   <a:txBody>
-                    <a:bodyPr wrap="square" lIns="76200" tIns="38100" rIns="76200" bIns="38100">
-                      <a:noAutofit/>
-                    </a:bodyPr>
+                    <a:bodyPr/>
                     <a:lstStyle/>
                     <a:p>
                       <a:pPr algn="ctr"/>
@@ -3356,7 +3115,7 @@
                       </a:r>
                     </a:p>
                   </a:txBody>
-                  <a:tcPr marL="91440" marR="91440" marT="45720" marB="45720" anchor="ctr">
+                  <a:tcPr anchor="ctr">
                     <a:solidFill>
                       <a:srgbClr val="FFFFFF"/>
                     </a:solidFill>
@@ -3364,9 +3123,7 @@
                 </a:tc>
                 <a:tc>
                   <a:txBody>
-                    <a:bodyPr wrap="square" lIns="76200" tIns="38100" rIns="76200" bIns="38100">
-                      <a:noAutofit/>
-                    </a:bodyPr>
+                    <a:bodyPr/>
                     <a:lstStyle/>
                     <a:p>
                       <a:pPr algn="l"/>
@@ -3383,12 +3140,17 @@
                       </a:r>
                     </a:p>
                   </a:txBody>
-                  <a:tcPr marL="91440" marR="91440" marT="45720" marB="45720" anchor="ctr">
+                  <a:tcPr anchor="ctr">
                     <a:solidFill>
                       <a:srgbClr val="FFFFFF"/>
                     </a:solidFill>
                   </a:tcPr>
                 </a:tc>
+                <a:extLst>
+                  <a:ext uri="{0D108BD9-81ED-4DB2-BD59-A6C34878D82A}">
+                    <a16:rowId xmlns:a16="http://schemas.microsoft.com/office/drawing/2014/main" val="10005"/>
+                  </a:ext>
+                </a:extLst>
               </a:tr>
             </a:tbl>
           </a:graphicData>
@@ -3396,37 +3158,37 @@
       </p:graphicFrame>
       <p:sp>
         <p:nvSpPr>
-          <p:cNvPr id="6" name="">
-            <a:extLst xmlns:a="http://schemas.openxmlformats.org/drawingml/2006/main">
+          <p:cNvPr id="6" name="직사각형 5">
+            <a:extLst>
               <a:ext uri="{FF2B5EF4-FFF2-40B4-BE49-F238E27FC236}">
                 <a16:creationId xmlns:a16="http://schemas.microsoft.com/office/drawing/2014/main" id="{982CCD67-85CA-413E-8674-3BAAE8B9143E}"/>
               </a:ext>
             </a:extLst>
           </p:cNvPr>
           <p:cNvSpPr>
-            <a:spLocks xmlns:a="http://schemas.openxmlformats.org/drawingml/2006/main" noGrp="1"/>
+            <a:spLocks noGrp="1"/>
           </p:cNvSpPr>
           <p:nvPr/>
         </p:nvSpPr>
         <p:spPr>
-          <a:xfrm xmlns:a="http://schemas.openxmlformats.org/drawingml/2006/main">
+          <a:xfrm>
             <a:off x="685800" y="4905375"/>
             <a:ext cx="2095500" cy="266700"/>
           </a:xfrm>
-          <a:prstGeom xmlns:a="http://schemas.openxmlformats.org/drawingml/2006/main" prst="rect">
+          <a:prstGeom prst="rect">
             <a:avLst/>
           </a:prstGeom>
-          <a:noFill xmlns:a="http://schemas.openxmlformats.org/drawingml/2006/main"/>
-          <a:ln xmlns:a="http://schemas.openxmlformats.org/drawingml/2006/main" w="0">
+          <a:noFill/>
+          <a:ln w="0">
             <a:noFill/>
           </a:ln>
         </p:spPr>
         <p:txBody>
-          <a:bodyPr xmlns:a="http://schemas.openxmlformats.org/drawingml/2006/main" wrap="square" lIns="0" tIns="0" rIns="0" bIns="0" anchor="t">
+          <a:bodyPr wrap="square" lIns="0" tIns="0" rIns="0" bIns="0" anchor="t">
             <a:noAutofit/>
           </a:bodyPr>
-          <a:lstStyle xmlns:a="http://schemas.openxmlformats.org/drawingml/2006/main"/>
-          <a:p xmlns:a="http://schemas.openxmlformats.org/drawingml/2006/main">
+          <a:lstStyle/>
+          <a:p>
             <a:pPr algn="l">
               <a:lnSpc>
                 <a:spcPct val="108000"/>
@@ -3457,37 +3219,37 @@
       </p:sp>
       <p:sp>
         <p:nvSpPr>
-          <p:cNvPr id="7" name="">
-            <a:extLst xmlns:a="http://schemas.openxmlformats.org/drawingml/2006/main">
+          <p:cNvPr id="7" name="직사각형 6">
+            <a:extLst>
               <a:ext uri="{FF2B5EF4-FFF2-40B4-BE49-F238E27FC236}">
                 <a16:creationId xmlns:a16="http://schemas.microsoft.com/office/drawing/2014/main" id="{C6A3FC08-9A63-4AFE-8613-2776661D2C5E}"/>
               </a:ext>
             </a:extLst>
           </p:cNvPr>
           <p:cNvSpPr>
-            <a:spLocks xmlns:a="http://schemas.openxmlformats.org/drawingml/2006/main" noGrp="1"/>
+            <a:spLocks noGrp="1"/>
           </p:cNvSpPr>
           <p:nvPr/>
         </p:nvSpPr>
         <p:spPr>
-          <a:xfrm xmlns:a="http://schemas.openxmlformats.org/drawingml/2006/main">
+          <a:xfrm>
             <a:off x="685800" y="5276850"/>
             <a:ext cx="10820400" cy="742950"/>
           </a:xfrm>
-          <a:prstGeom xmlns:a="http://schemas.openxmlformats.org/drawingml/2006/main" prst="rect">
+          <a:prstGeom prst="rect">
             <a:avLst/>
           </a:prstGeom>
-          <a:noFill xmlns:a="http://schemas.openxmlformats.org/drawingml/2006/main"/>
-          <a:ln xmlns:a="http://schemas.openxmlformats.org/drawingml/2006/main" w="0">
+          <a:noFill/>
+          <a:ln w="0">
             <a:noFill/>
           </a:ln>
         </p:spPr>
         <p:txBody>
-          <a:bodyPr xmlns:a="http://schemas.openxmlformats.org/drawingml/2006/main" wrap="square" lIns="0" tIns="0" rIns="0" bIns="0" anchor="t">
+          <a:bodyPr wrap="square" lIns="0" tIns="0" rIns="0" bIns="0" anchor="t">
             <a:noAutofit/>
           </a:bodyPr>
-          <a:lstStyle xmlns:a="http://schemas.openxmlformats.org/drawingml/2006/main"/>
-          <a:p xmlns:a="http://schemas.openxmlformats.org/drawingml/2006/main">
+          <a:lstStyle/>
+          <a:p>
             <a:pPr marL="203200" indent="-127000" algn="l">
               <a:lnSpc>
                 <a:spcPct val="106000"/>
@@ -3528,7 +3290,7 @@
               <a:t>DTUMOS Energy에 연구 목적과 첫 실험 범위를 문서로 정리</a:t>
             </a:r>
           </a:p>
-          <a:p xmlns:a="http://schemas.openxmlformats.org/drawingml/2006/main">
+          <a:p>
             <a:pPr marL="203200" indent="-127000" algn="l">
               <a:lnSpc>
                 <a:spcPct val="106000"/>
@@ -3578,17 +3340,21 @@
       </p:ext>
     </p:extLst>
   </p:cSld>
+  <p:clrMapOvr>
+    <a:masterClrMapping/>
+  </p:clrMapOvr>
 </p:sld>
 </file>
 
 <file path=ppt/slides/slide4.xml><?xml version="1.0" encoding="utf-8"?>
-<p:sld xmlns:p="http://schemas.openxmlformats.org/presentationml/2006/main">
+<p:sld xmlns:a="http://schemas.openxmlformats.org/drawingml/2006/main" xmlns:r="http://schemas.openxmlformats.org/officeDocument/2006/relationships" xmlns:p="http://schemas.openxmlformats.org/presentationml/2006/main">
   <p:cSld>
     <p:bg>
       <p:bgPr>
-        <a:solidFill xmlns:a="http://schemas.openxmlformats.org/drawingml/2006/main">
+        <a:solidFill>
           <a:srgbClr val="FFFFFF"/>
         </a:solidFill>
+        <a:effectLst/>
       </p:bgPr>
     </p:bg>
     <p:spTree>
@@ -3598,41 +3364,46 @@
         <p:nvPr/>
       </p:nvGrpSpPr>
       <p:grpSpPr>
-        <a:xfrm xmlns:a="http://schemas.openxmlformats.org/drawingml/2006/main"/>
+        <a:xfrm>
+          <a:off x="0" y="0"/>
+          <a:ext cx="0" cy="0"/>
+          <a:chOff x="0" y="0"/>
+          <a:chExt cx="0" cy="0"/>
+        </a:xfrm>
       </p:grpSpPr>
       <p:sp>
         <p:nvSpPr>
-          <p:cNvPr id="18" name="">
-            <a:extLst xmlns:a="http://schemas.openxmlformats.org/drawingml/2006/main">
+          <p:cNvPr id="18" name="직사각형 17">
+            <a:extLst>
               <a:ext uri="{FF2B5EF4-FFF2-40B4-BE49-F238E27FC236}">
                 <a16:creationId xmlns:a16="http://schemas.microsoft.com/office/drawing/2014/main" id="{DEFE3469-C858-4D8A-8681-A5E7037FA54E}"/>
               </a:ext>
             </a:extLst>
           </p:cNvPr>
           <p:cNvSpPr>
-            <a:spLocks xmlns:a="http://schemas.openxmlformats.org/drawingml/2006/main" noGrp="1"/>
+            <a:spLocks noGrp="1"/>
           </p:cNvSpPr>
           <p:nvPr/>
         </p:nvSpPr>
         <p:spPr>
-          <a:xfrm xmlns:a="http://schemas.openxmlformats.org/drawingml/2006/main">
+          <a:xfrm>
             <a:off x="685800" y="428625"/>
             <a:ext cx="8858250" cy="685800"/>
           </a:xfrm>
-          <a:prstGeom xmlns:a="http://schemas.openxmlformats.org/drawingml/2006/main" prst="rect">
+          <a:prstGeom prst="rect">
             <a:avLst/>
           </a:prstGeom>
-          <a:noFill xmlns:a="http://schemas.openxmlformats.org/drawingml/2006/main"/>
-          <a:ln xmlns:a="http://schemas.openxmlformats.org/drawingml/2006/main" w="0">
+          <a:noFill/>
+          <a:ln w="0">
             <a:noFill/>
           </a:ln>
         </p:spPr>
         <p:txBody>
-          <a:bodyPr xmlns:a="http://schemas.openxmlformats.org/drawingml/2006/main" wrap="square" lIns="0" tIns="0" rIns="0" bIns="0" anchor="t">
+          <a:bodyPr wrap="square" lIns="0" tIns="0" rIns="0" bIns="0" anchor="t">
             <a:noAutofit/>
           </a:bodyPr>
-          <a:lstStyle xmlns:a="http://schemas.openxmlformats.org/drawingml/2006/main"/>
-          <a:p xmlns:a="http://schemas.openxmlformats.org/drawingml/2006/main">
+          <a:lstStyle/>
+          <a:p>
             <a:pPr algn="l">
               <a:lnSpc>
                 <a:spcPct val="108000"/>
@@ -3663,41 +3434,41 @@
       </p:sp>
       <p:sp>
         <p:nvSpPr>
-          <p:cNvPr id="2" name="">
-            <a:extLst xmlns:a="http://schemas.openxmlformats.org/drawingml/2006/main">
+          <p:cNvPr id="2" name="모서리가 둥근 직사각형 1">
+            <a:extLst>
               <a:ext uri="{FF2B5EF4-FFF2-40B4-BE49-F238E27FC236}">
                 <a16:creationId xmlns:a16="http://schemas.microsoft.com/office/drawing/2014/main" id="{36D8FB82-7C70-4772-BA9B-E7F9411F5D16}"/>
               </a:ext>
             </a:extLst>
           </p:cNvPr>
           <p:cNvSpPr>
-            <a:spLocks xmlns:a="http://schemas.openxmlformats.org/drawingml/2006/main" noGrp="1"/>
+            <a:spLocks noGrp="1"/>
           </p:cNvSpPr>
           <p:nvPr/>
         </p:nvSpPr>
         <p:spPr>
-          <a:xfrm xmlns:a="http://schemas.openxmlformats.org/drawingml/2006/main">
+          <a:xfrm>
             <a:off x="9667875" y="666750"/>
             <a:ext cx="1838325" cy="371475"/>
           </a:xfrm>
-          <a:prstGeom xmlns:a="http://schemas.openxmlformats.org/drawingml/2006/main" prst="roundRect">
+          <a:prstGeom prst="roundRect">
             <a:avLst>
               <a:gd name="adj" fmla="val 50000"/>
             </a:avLst>
           </a:prstGeom>
-          <a:solidFill xmlns:a="http://schemas.openxmlformats.org/drawingml/2006/main">
+          <a:solidFill>
             <a:srgbClr val="F2F2F2"/>
           </a:solidFill>
-          <a:ln xmlns:a="http://schemas.openxmlformats.org/drawingml/2006/main" w="0">
+          <a:ln w="0">
             <a:noFill/>
           </a:ln>
         </p:spPr>
         <p:txBody>
-          <a:bodyPr xmlns:a="http://schemas.openxmlformats.org/drawingml/2006/main" lIns="38100" tIns="0" rIns="38100" bIns="0" anchor="ctr">
+          <a:bodyPr lIns="38100" tIns="0" rIns="38100" bIns="0" anchor="ctr">
             <a:noAutofit/>
           </a:bodyPr>
-          <a:lstStyle xmlns:a="http://schemas.openxmlformats.org/drawingml/2006/main"/>
-          <a:p xmlns:a="http://schemas.openxmlformats.org/drawingml/2006/main">
+          <a:lstStyle/>
+          <a:p>
             <a:pPr algn="ctr">
               <a:defRPr sz="1125">
                 <a:solidFill>
@@ -3724,37 +3495,37 @@
       </p:sp>
       <p:sp>
         <p:nvSpPr>
-          <p:cNvPr id="3" name="">
-            <a:extLst xmlns:a="http://schemas.openxmlformats.org/drawingml/2006/main">
+          <p:cNvPr id="3" name="직사각형 2">
+            <a:extLst>
               <a:ext uri="{FF2B5EF4-FFF2-40B4-BE49-F238E27FC236}">
                 <a16:creationId xmlns:a16="http://schemas.microsoft.com/office/drawing/2014/main" id="{5B4113F4-55BE-4AE8-85AB-806FA9D303EA}"/>
               </a:ext>
             </a:extLst>
           </p:cNvPr>
           <p:cNvSpPr>
-            <a:spLocks xmlns:a="http://schemas.openxmlformats.org/drawingml/2006/main" noGrp="1"/>
+            <a:spLocks noGrp="1"/>
           </p:cNvSpPr>
           <p:nvPr/>
         </p:nvSpPr>
         <p:spPr>
-          <a:xfrm xmlns:a="http://schemas.openxmlformats.org/drawingml/2006/main">
+          <a:xfrm>
             <a:off x="685800" y="6419850"/>
             <a:ext cx="9334500" cy="171450"/>
           </a:xfrm>
-          <a:prstGeom xmlns:a="http://schemas.openxmlformats.org/drawingml/2006/main" prst="rect">
+          <a:prstGeom prst="rect">
             <a:avLst/>
           </a:prstGeom>
-          <a:noFill xmlns:a="http://schemas.openxmlformats.org/drawingml/2006/main"/>
-          <a:ln xmlns:a="http://schemas.openxmlformats.org/drawingml/2006/main" w="0">
+          <a:noFill/>
+          <a:ln w="0">
             <a:noFill/>
           </a:ln>
         </p:spPr>
         <p:txBody>
-          <a:bodyPr xmlns:a="http://schemas.openxmlformats.org/drawingml/2006/main" wrap="square" lIns="0" tIns="0" rIns="0" bIns="0" anchor="ctr">
+          <a:bodyPr wrap="square" lIns="0" tIns="0" rIns="0" bIns="0" anchor="ctr">
             <a:noAutofit/>
           </a:bodyPr>
-          <a:lstStyle xmlns:a="http://schemas.openxmlformats.org/drawingml/2006/main"/>
-          <a:p xmlns:a="http://schemas.openxmlformats.org/drawingml/2006/main">
+          <a:lstStyle/>
+          <a:p>
             <a:pPr algn="l">
               <a:lnSpc>
                 <a:spcPct val="108000"/>
@@ -3785,37 +3556,37 @@
       </p:sp>
       <p:sp>
         <p:nvSpPr>
-          <p:cNvPr id="4" name="">
-            <a:extLst xmlns:a="http://schemas.openxmlformats.org/drawingml/2006/main">
+          <p:cNvPr id="4" name="직사각형 3">
+            <a:extLst>
               <a:ext uri="{FF2B5EF4-FFF2-40B4-BE49-F238E27FC236}">
                 <a16:creationId xmlns:a16="http://schemas.microsoft.com/office/drawing/2014/main" id="{6281CAE5-F27E-455C-AD5C-872F06E12CD6}"/>
               </a:ext>
             </a:extLst>
           </p:cNvPr>
           <p:cNvSpPr>
-            <a:spLocks xmlns:a="http://schemas.openxmlformats.org/drawingml/2006/main" noGrp="1"/>
+            <a:spLocks noGrp="1"/>
           </p:cNvSpPr>
           <p:nvPr/>
         </p:nvSpPr>
         <p:spPr>
-          <a:xfrm xmlns:a="http://schemas.openxmlformats.org/drawingml/2006/main">
+          <a:xfrm>
             <a:off x="10591800" y="6381750"/>
             <a:ext cx="914400" cy="209550"/>
           </a:xfrm>
-          <a:prstGeom xmlns:a="http://schemas.openxmlformats.org/drawingml/2006/main" prst="rect">
+          <a:prstGeom prst="rect">
             <a:avLst/>
           </a:prstGeom>
-          <a:noFill xmlns:a="http://schemas.openxmlformats.org/drawingml/2006/main"/>
-          <a:ln xmlns:a="http://schemas.openxmlformats.org/drawingml/2006/main" w="0">
+          <a:noFill/>
+          <a:ln w="0">
             <a:noFill/>
           </a:ln>
         </p:spPr>
         <p:txBody>
-          <a:bodyPr xmlns:a="http://schemas.openxmlformats.org/drawingml/2006/main" wrap="square" lIns="0" tIns="0" rIns="0" bIns="0" anchor="ctr">
+          <a:bodyPr wrap="square" lIns="0" tIns="0" rIns="0" bIns="0" anchor="ctr">
             <a:noAutofit/>
           </a:bodyPr>
-          <a:lstStyle xmlns:a="http://schemas.openxmlformats.org/drawingml/2006/main"/>
-          <a:p xmlns:a="http://schemas.openxmlformats.org/drawingml/2006/main">
+          <a:lstStyle/>
+          <a:p>
             <a:pPr algn="r">
               <a:lnSpc>
                 <a:spcPct val="108000"/>
@@ -3846,30 +3617,30 @@
       </p:sp>
       <p:sp>
         <p:nvSpPr>
-          <p:cNvPr id="5" name="">
-            <a:extLst xmlns:a="http://schemas.openxmlformats.org/drawingml/2006/main">
+          <p:cNvPr id="5" name="직사각형 4">
+            <a:extLst>
               <a:ext uri="{FF2B5EF4-FFF2-40B4-BE49-F238E27FC236}">
                 <a16:creationId xmlns:a16="http://schemas.microsoft.com/office/drawing/2014/main" id="{31D54C87-4903-4CDB-A4D5-451A51387208}"/>
               </a:ext>
             </a:extLst>
           </p:cNvPr>
           <p:cNvSpPr>
-            <a:spLocks xmlns:a="http://schemas.openxmlformats.org/drawingml/2006/main" noGrp="1"/>
+            <a:spLocks noGrp="1"/>
           </p:cNvSpPr>
           <p:nvPr/>
         </p:nvSpPr>
         <p:spPr>
-          <a:xfrm xmlns:a="http://schemas.openxmlformats.org/drawingml/2006/main">
+          <a:xfrm>
             <a:off x="685800" y="1571625"/>
             <a:ext cx="1809750" cy="1095375"/>
           </a:xfrm>
-          <a:prstGeom xmlns:a="http://schemas.openxmlformats.org/drawingml/2006/main" prst="rect">
+          <a:prstGeom prst="rect">
             <a:avLst/>
           </a:prstGeom>
-          <a:solidFill xmlns:a="http://schemas.openxmlformats.org/drawingml/2006/main">
+          <a:solidFill>
             <a:srgbClr val="F2F2F2"/>
           </a:solidFill>
-          <a:ln xmlns:a="http://schemas.openxmlformats.org/drawingml/2006/main" w="15240">
+          <a:ln w="15240">
             <a:solidFill>
               <a:srgbClr val="000000"/>
             </a:solidFill>
@@ -3877,11 +3648,11 @@
           </a:ln>
         </p:spPr>
         <p:txBody>
-          <a:bodyPr xmlns:a="http://schemas.openxmlformats.org/drawingml/2006/main" lIns="95250" tIns="66675" rIns="95250" bIns="66675" anchor="ctr">
+          <a:bodyPr lIns="95250" tIns="66675" rIns="95250" bIns="66675" anchor="ctr">
             <a:noAutofit/>
           </a:bodyPr>
-          <a:lstStyle xmlns:a="http://schemas.openxmlformats.org/drawingml/2006/main"/>
-          <a:p xmlns:a="http://schemas.openxmlformats.org/drawingml/2006/main">
+          <a:lstStyle/>
+          <a:p>
             <a:pPr algn="ctr">
               <a:lnSpc>
                 <a:spcPct val="105000"/>
@@ -3908,7 +3679,7 @@
               <a:t>1. 데이터 선정</a:t>
             </a:r>
           </a:p>
-          <a:p xmlns:a="http://schemas.openxmlformats.org/drawingml/2006/main">
+          <a:p>
             <a:pPr algn="ctr">
               <a:lnSpc>
                 <a:spcPct val="105000"/>
@@ -3939,30 +3710,30 @@
       </p:sp>
       <p:sp>
         <p:nvSpPr>
-          <p:cNvPr id="6" name="">
-            <a:extLst xmlns:a="http://schemas.openxmlformats.org/drawingml/2006/main">
+          <p:cNvPr id="6" name="직사각형 5">
+            <a:extLst>
               <a:ext uri="{FF2B5EF4-FFF2-40B4-BE49-F238E27FC236}">
                 <a16:creationId xmlns:a16="http://schemas.microsoft.com/office/drawing/2014/main" id="{D2988378-91E2-4AD5-9A58-A46AC5486B3C}"/>
               </a:ext>
             </a:extLst>
           </p:cNvPr>
           <p:cNvSpPr>
-            <a:spLocks xmlns:a="http://schemas.openxmlformats.org/drawingml/2006/main" noGrp="1"/>
+            <a:spLocks noGrp="1"/>
           </p:cNvSpPr>
           <p:nvPr/>
         </p:nvSpPr>
         <p:spPr>
-          <a:xfrm xmlns:a="http://schemas.openxmlformats.org/drawingml/2006/main">
+          <a:xfrm>
             <a:off x="2876550" y="1571625"/>
             <a:ext cx="1809750" cy="1095375"/>
           </a:xfrm>
-          <a:prstGeom xmlns:a="http://schemas.openxmlformats.org/drawingml/2006/main" prst="rect">
+          <a:prstGeom prst="rect">
             <a:avLst/>
           </a:prstGeom>
-          <a:solidFill xmlns:a="http://schemas.openxmlformats.org/drawingml/2006/main">
+          <a:solidFill>
             <a:srgbClr val="FFFFFF"/>
           </a:solidFill>
-          <a:ln xmlns:a="http://schemas.openxmlformats.org/drawingml/2006/main" w="9525">
+          <a:ln w="9525">
             <a:solidFill>
               <a:srgbClr val="B8B8B8"/>
             </a:solidFill>
@@ -3970,11 +3741,11 @@
           </a:ln>
         </p:spPr>
         <p:txBody>
-          <a:bodyPr xmlns:a="http://schemas.openxmlformats.org/drawingml/2006/main" lIns="95250" tIns="66675" rIns="95250" bIns="66675" anchor="ctr">
+          <a:bodyPr lIns="95250" tIns="66675" rIns="95250" bIns="66675" anchor="ctr">
             <a:noAutofit/>
           </a:bodyPr>
-          <a:lstStyle xmlns:a="http://schemas.openxmlformats.org/drawingml/2006/main"/>
-          <a:p xmlns:a="http://schemas.openxmlformats.org/drawingml/2006/main">
+          <a:lstStyle/>
+          <a:p>
             <a:pPr algn="ctr">
               <a:lnSpc>
                 <a:spcPct val="105000"/>
@@ -4001,7 +3772,7 @@
               <a:t>2. 기본 시뮬레이션</a:t>
             </a:r>
           </a:p>
-          <a:p xmlns:a="http://schemas.openxmlformats.org/drawingml/2006/main">
+          <a:p>
             <a:pPr algn="ctr">
               <a:lnSpc>
                 <a:spcPct val="105000"/>
@@ -4033,30 +3804,30 @@
       </p:sp>
       <p:sp>
         <p:nvSpPr>
-          <p:cNvPr id="7" name="">
-            <a:extLst xmlns:a="http://schemas.openxmlformats.org/drawingml/2006/main">
+          <p:cNvPr id="7" name="직사각형 6">
+            <a:extLst>
               <a:ext uri="{FF2B5EF4-FFF2-40B4-BE49-F238E27FC236}">
                 <a16:creationId xmlns:a16="http://schemas.microsoft.com/office/drawing/2014/main" id="{52AF35DA-EDF1-4D31-9D3C-195B3718E023}"/>
               </a:ext>
             </a:extLst>
           </p:cNvPr>
           <p:cNvSpPr>
-            <a:spLocks xmlns:a="http://schemas.openxmlformats.org/drawingml/2006/main" noGrp="1"/>
+            <a:spLocks noGrp="1"/>
           </p:cNvSpPr>
           <p:nvPr/>
         </p:nvSpPr>
         <p:spPr>
-          <a:xfrm xmlns:a="http://schemas.openxmlformats.org/drawingml/2006/main">
+          <a:xfrm>
             <a:off x="5067300" y="1571625"/>
             <a:ext cx="1809750" cy="1095375"/>
           </a:xfrm>
-          <a:prstGeom xmlns:a="http://schemas.openxmlformats.org/drawingml/2006/main" prst="rect">
+          <a:prstGeom prst="rect">
             <a:avLst/>
           </a:prstGeom>
-          <a:solidFill xmlns:a="http://schemas.openxmlformats.org/drawingml/2006/main">
+          <a:solidFill>
             <a:srgbClr val="FFFFFF"/>
           </a:solidFill>
-          <a:ln xmlns:a="http://schemas.openxmlformats.org/drawingml/2006/main" w="9525">
+          <a:ln w="9525">
             <a:solidFill>
               <a:srgbClr val="B8B8B8"/>
             </a:solidFill>
@@ -4064,11 +3835,11 @@
           </a:ln>
         </p:spPr>
         <p:txBody>
-          <a:bodyPr xmlns:a="http://schemas.openxmlformats.org/drawingml/2006/main" lIns="95250" tIns="66675" rIns="95250" bIns="66675" anchor="ctr">
+          <a:bodyPr lIns="95250" tIns="66675" rIns="95250" bIns="66675" anchor="ctr">
             <a:noAutofit/>
           </a:bodyPr>
-          <a:lstStyle xmlns:a="http://schemas.openxmlformats.org/drawingml/2006/main"/>
-          <a:p xmlns:a="http://schemas.openxmlformats.org/drawingml/2006/main">
+          <a:lstStyle/>
+          <a:p>
             <a:pPr algn="ctr">
               <a:lnSpc>
                 <a:spcPct val="105000"/>
@@ -4095,7 +3866,7 @@
               <a:t>3. 기준 충전 방법</a:t>
             </a:r>
           </a:p>
-          <a:p xmlns:a="http://schemas.openxmlformats.org/drawingml/2006/main">
+          <a:p>
             <a:pPr algn="ctr">
               <a:lnSpc>
                 <a:spcPct val="105000"/>
@@ -4126,30 +3897,30 @@
       </p:sp>
       <p:sp>
         <p:nvSpPr>
-          <p:cNvPr id="8" name="">
-            <a:extLst xmlns:a="http://schemas.openxmlformats.org/drawingml/2006/main">
+          <p:cNvPr id="8" name="직사각형 7">
+            <a:extLst>
               <a:ext uri="{FF2B5EF4-FFF2-40B4-BE49-F238E27FC236}">
                 <a16:creationId xmlns:a16="http://schemas.microsoft.com/office/drawing/2014/main" id="{072F657F-DCD0-45CC-B5E3-F67A136B7444}"/>
               </a:ext>
             </a:extLst>
           </p:cNvPr>
           <p:cNvSpPr>
-            <a:spLocks xmlns:a="http://schemas.openxmlformats.org/drawingml/2006/main" noGrp="1"/>
+            <a:spLocks noGrp="1"/>
           </p:cNvSpPr>
           <p:nvPr/>
         </p:nvSpPr>
         <p:spPr>
-          <a:xfrm xmlns:a="http://schemas.openxmlformats.org/drawingml/2006/main">
+          <a:xfrm>
             <a:off x="7258050" y="1571625"/>
             <a:ext cx="1809750" cy="1095375"/>
           </a:xfrm>
-          <a:prstGeom xmlns:a="http://schemas.openxmlformats.org/drawingml/2006/main" prst="rect">
+          <a:prstGeom prst="rect">
             <a:avLst/>
           </a:prstGeom>
-          <a:solidFill xmlns:a="http://schemas.openxmlformats.org/drawingml/2006/main">
+          <a:solidFill>
             <a:srgbClr val="FFFFFF"/>
           </a:solidFill>
-          <a:ln xmlns:a="http://schemas.openxmlformats.org/drawingml/2006/main" w="9525">
+          <a:ln w="9525">
             <a:solidFill>
               <a:srgbClr val="B8B8B8"/>
             </a:solidFill>
@@ -4157,11 +3928,11 @@
           </a:ln>
         </p:spPr>
         <p:txBody>
-          <a:bodyPr xmlns:a="http://schemas.openxmlformats.org/drawingml/2006/main" lIns="95250" tIns="66675" rIns="95250" bIns="66675" anchor="ctr">
+          <a:bodyPr lIns="95250" tIns="66675" rIns="95250" bIns="66675" anchor="ctr">
             <a:noAutofit/>
           </a:bodyPr>
-          <a:lstStyle xmlns:a="http://schemas.openxmlformats.org/drawingml/2006/main"/>
-          <a:p xmlns:a="http://schemas.openxmlformats.org/drawingml/2006/main">
+          <a:lstStyle/>
+          <a:p>
             <a:pPr algn="ctr">
               <a:lnSpc>
                 <a:spcPct val="105000"/>
@@ -4188,7 +3959,7 @@
               <a:t>4. 비교 방법</a:t>
             </a:r>
           </a:p>
-          <a:p xmlns:a="http://schemas.openxmlformats.org/drawingml/2006/main">
+          <a:p>
             <a:pPr algn="ctr">
               <a:lnSpc>
                 <a:spcPct val="105000"/>
@@ -4219,30 +3990,30 @@
       </p:sp>
       <p:sp>
         <p:nvSpPr>
-          <p:cNvPr id="9" name="">
-            <a:extLst xmlns:a="http://schemas.openxmlformats.org/drawingml/2006/main">
+          <p:cNvPr id="9" name="직사각형 8">
+            <a:extLst>
               <a:ext uri="{FF2B5EF4-FFF2-40B4-BE49-F238E27FC236}">
                 <a16:creationId xmlns:a16="http://schemas.microsoft.com/office/drawing/2014/main" id="{1221792C-E75C-4E0D-B0B0-5277D9DEA333}"/>
               </a:ext>
             </a:extLst>
           </p:cNvPr>
           <p:cNvSpPr>
-            <a:spLocks xmlns:a="http://schemas.openxmlformats.org/drawingml/2006/main" noGrp="1"/>
+            <a:spLocks noGrp="1"/>
           </p:cNvSpPr>
           <p:nvPr/>
         </p:nvSpPr>
         <p:spPr>
-          <a:xfrm xmlns:a="http://schemas.openxmlformats.org/drawingml/2006/main">
+          <a:xfrm>
             <a:off x="9448800" y="1571625"/>
             <a:ext cx="1809750" cy="1095375"/>
           </a:xfrm>
-          <a:prstGeom xmlns:a="http://schemas.openxmlformats.org/drawingml/2006/main" prst="rect">
+          <a:prstGeom prst="rect">
             <a:avLst/>
           </a:prstGeom>
-          <a:solidFill xmlns:a="http://schemas.openxmlformats.org/drawingml/2006/main">
+          <a:solidFill>
             <a:srgbClr val="FFFFFF"/>
           </a:solidFill>
-          <a:ln xmlns:a="http://schemas.openxmlformats.org/drawingml/2006/main" w="9525">
+          <a:ln w="9525">
             <a:solidFill>
               <a:srgbClr val="B8B8B8"/>
             </a:solidFill>
@@ -4250,11 +4021,11 @@
           </a:ln>
         </p:spPr>
         <p:txBody>
-          <a:bodyPr xmlns:a="http://schemas.openxmlformats.org/drawingml/2006/main" lIns="95250" tIns="66675" rIns="95250" bIns="66675" anchor="ctr">
+          <a:bodyPr lIns="95250" tIns="66675" rIns="95250" bIns="66675" anchor="ctr">
             <a:noAutofit/>
           </a:bodyPr>
-          <a:lstStyle xmlns:a="http://schemas.openxmlformats.org/drawingml/2006/main"/>
-          <a:p xmlns:a="http://schemas.openxmlformats.org/drawingml/2006/main">
+          <a:lstStyle/>
+          <a:p>
             <a:pPr algn="ctr">
               <a:lnSpc>
                 <a:spcPct val="105000"/>
@@ -4281,7 +4052,7 @@
               <a:t>5. 결과 해석</a:t>
             </a:r>
           </a:p>
-          <a:p xmlns:a="http://schemas.openxmlformats.org/drawingml/2006/main">
+          <a:p>
             <a:pPr algn="ctr">
               <a:lnSpc>
                 <a:spcPct val="105000"/>
@@ -4313,22 +4084,22 @@
       </p:sp>
       <p:cxnSp>
         <p:nvCxnSpPr>
-          <p:cNvPr id="27" name=""/>
+          <p:cNvPr id="27" name="직선 화살표 연결선 26"/>
           <p:cNvCxnSpPr>
-            <a:stCxn xmlns:a="http://schemas.openxmlformats.org/drawingml/2006/main" id="5" idx="3"/>
-            <a:endCxn xmlns:a="http://schemas.openxmlformats.org/drawingml/2006/main" id="6" idx="1"/>
+            <a:stCxn id="5" idx="3"/>
+            <a:endCxn id="6" idx="1"/>
           </p:cNvCxnSpPr>
           <p:nvPr/>
         </p:nvCxnSpPr>
         <p:spPr>
-          <a:xfrm xmlns:a="http://schemas.openxmlformats.org/drawingml/2006/main">
+          <a:xfrm>
             <a:off x="2495550" y="2119313"/>
             <a:ext cx="381000" cy="0"/>
           </a:xfrm>
-          <a:prstGeom xmlns:a="http://schemas.openxmlformats.org/drawingml/2006/main" prst="straightConnector1">
+          <a:prstGeom prst="straightConnector1">
             <a:avLst/>
           </a:prstGeom>
-          <a:ln xmlns:a="http://schemas.openxmlformats.org/drawingml/2006/main" w="12383">
+          <a:ln w="12383">
             <a:solidFill>
               <a:srgbClr val="666666"/>
             </a:solidFill>
@@ -4339,22 +4110,22 @@
       </p:cxnSp>
       <p:cxnSp>
         <p:nvCxnSpPr>
-          <p:cNvPr id="28" name=""/>
+          <p:cNvPr id="28" name="직선 화살표 연결선 27"/>
           <p:cNvCxnSpPr>
-            <a:stCxn xmlns:a="http://schemas.openxmlformats.org/drawingml/2006/main" id="6" idx="3"/>
-            <a:endCxn xmlns:a="http://schemas.openxmlformats.org/drawingml/2006/main" id="7" idx="1"/>
+            <a:stCxn id="6" idx="3"/>
+            <a:endCxn id="7" idx="1"/>
           </p:cNvCxnSpPr>
           <p:nvPr/>
         </p:nvCxnSpPr>
         <p:spPr>
-          <a:xfrm xmlns:a="http://schemas.openxmlformats.org/drawingml/2006/main">
+          <a:xfrm>
             <a:off x="4686300" y="2119313"/>
             <a:ext cx="381000" cy="0"/>
           </a:xfrm>
-          <a:prstGeom xmlns:a="http://schemas.openxmlformats.org/drawingml/2006/main" prst="straightConnector1">
+          <a:prstGeom prst="straightConnector1">
             <a:avLst/>
           </a:prstGeom>
-          <a:ln xmlns:a="http://schemas.openxmlformats.org/drawingml/2006/main" w="12383">
+          <a:ln w="12383">
             <a:solidFill>
               <a:srgbClr val="666666"/>
             </a:solidFill>
@@ -4365,22 +4136,22 @@
       </p:cxnSp>
       <p:cxnSp>
         <p:nvCxnSpPr>
-          <p:cNvPr id="29" name=""/>
+          <p:cNvPr id="29" name="직선 화살표 연결선 28"/>
           <p:cNvCxnSpPr>
-            <a:stCxn xmlns:a="http://schemas.openxmlformats.org/drawingml/2006/main" id="7" idx="3"/>
-            <a:endCxn xmlns:a="http://schemas.openxmlformats.org/drawingml/2006/main" id="8" idx="1"/>
+            <a:stCxn id="7" idx="3"/>
+            <a:endCxn id="8" idx="1"/>
           </p:cNvCxnSpPr>
           <p:nvPr/>
         </p:nvCxnSpPr>
         <p:spPr>
-          <a:xfrm xmlns:a="http://schemas.openxmlformats.org/drawingml/2006/main">
+          <a:xfrm>
             <a:off x="6877050" y="2119313"/>
             <a:ext cx="381000" cy="0"/>
           </a:xfrm>
-          <a:prstGeom xmlns:a="http://schemas.openxmlformats.org/drawingml/2006/main" prst="straightConnector1">
+          <a:prstGeom prst="straightConnector1">
             <a:avLst/>
           </a:prstGeom>
-          <a:ln xmlns:a="http://schemas.openxmlformats.org/drawingml/2006/main" w="12383">
+          <a:ln w="12383">
             <a:solidFill>
               <a:srgbClr val="666666"/>
             </a:solidFill>
@@ -4391,22 +4162,22 @@
       </p:cxnSp>
       <p:cxnSp>
         <p:nvCxnSpPr>
-          <p:cNvPr id="30" name=""/>
+          <p:cNvPr id="30" name="직선 화살표 연결선 29"/>
           <p:cNvCxnSpPr>
-            <a:stCxn xmlns:a="http://schemas.openxmlformats.org/drawingml/2006/main" id="8" idx="3"/>
-            <a:endCxn xmlns:a="http://schemas.openxmlformats.org/drawingml/2006/main" id="9" idx="1"/>
+            <a:stCxn id="8" idx="3"/>
+            <a:endCxn id="9" idx="1"/>
           </p:cNvCxnSpPr>
           <p:nvPr/>
         </p:nvCxnSpPr>
         <p:spPr>
-          <a:xfrm xmlns:a="http://schemas.openxmlformats.org/drawingml/2006/main">
+          <a:xfrm>
             <a:off x="9067800" y="2119313"/>
             <a:ext cx="381000" cy="0"/>
           </a:xfrm>
-          <a:prstGeom xmlns:a="http://schemas.openxmlformats.org/drawingml/2006/main" prst="straightConnector1">
+          <a:prstGeom prst="straightConnector1">
             <a:avLst/>
           </a:prstGeom>
-          <a:ln xmlns:a="http://schemas.openxmlformats.org/drawingml/2006/main" w="12383">
+          <a:ln w="12383">
             <a:solidFill>
               <a:srgbClr val="666666"/>
             </a:solidFill>
@@ -4417,37 +4188,37 @@
       </p:cxnSp>
       <p:sp>
         <p:nvSpPr>
-          <p:cNvPr id="14" name="">
-            <a:extLst xmlns:a="http://schemas.openxmlformats.org/drawingml/2006/main">
+          <p:cNvPr id="14" name="직사각형 13">
+            <a:extLst>
               <a:ext uri="{FF2B5EF4-FFF2-40B4-BE49-F238E27FC236}">
                 <a16:creationId xmlns:a16="http://schemas.microsoft.com/office/drawing/2014/main" id="{05AA1CFA-165F-4DBD-B235-BF1D947FD34C}"/>
               </a:ext>
             </a:extLst>
           </p:cNvPr>
           <p:cNvSpPr>
-            <a:spLocks xmlns:a="http://schemas.openxmlformats.org/drawingml/2006/main" noGrp="1"/>
+            <a:spLocks noGrp="1"/>
           </p:cNvSpPr>
           <p:nvPr/>
         </p:nvSpPr>
         <p:spPr>
-          <a:xfrm xmlns:a="http://schemas.openxmlformats.org/drawingml/2006/main">
+          <a:xfrm>
             <a:off x="685800" y="3038475"/>
             <a:ext cx="10820400" cy="361950"/>
           </a:xfrm>
-          <a:prstGeom xmlns:a="http://schemas.openxmlformats.org/drawingml/2006/main" prst="rect">
+          <a:prstGeom prst="rect">
             <a:avLst/>
           </a:prstGeom>
-          <a:noFill xmlns:a="http://schemas.openxmlformats.org/drawingml/2006/main"/>
-          <a:ln xmlns:a="http://schemas.openxmlformats.org/drawingml/2006/main" w="0">
+          <a:noFill/>
+          <a:ln w="0">
             <a:noFill/>
           </a:ln>
         </p:spPr>
         <p:txBody>
-          <a:bodyPr xmlns:a="http://schemas.openxmlformats.org/drawingml/2006/main" wrap="square" lIns="0" tIns="0" rIns="0" bIns="0" anchor="ctr">
+          <a:bodyPr wrap="square" lIns="0" tIns="0" rIns="0" bIns="0" anchor="ctr">
             <a:noAutofit/>
           </a:bodyPr>
-          <a:lstStyle xmlns:a="http://schemas.openxmlformats.org/drawingml/2006/main"/>
-          <a:p xmlns:a="http://schemas.openxmlformats.org/drawingml/2006/main">
+          <a:lstStyle/>
+          <a:p>
             <a:pPr algn="ctr">
               <a:lnSpc>
                 <a:spcPct val="108000"/>
@@ -4478,68 +4249,75 @@
       </p:sp>
       <p:sp>
         <p:nvSpPr>
-          <p:cNvPr id="15" name="">
-            <a:extLst xmlns:a="http://schemas.openxmlformats.org/drawingml/2006/main">
+          <p:cNvPr id="15" name="직선 연결선[R] 14">
+            <a:extLst>
               <a:ext uri="{FF2B5EF4-FFF2-40B4-BE49-F238E27FC236}">
                 <a16:creationId xmlns:a16="http://schemas.microsoft.com/office/drawing/2014/main" id="{A14E447E-9E5F-4CC1-B8D2-3B096881CD28}"/>
               </a:ext>
             </a:extLst>
           </p:cNvPr>
           <p:cNvSpPr>
-            <a:spLocks xmlns:a="http://schemas.openxmlformats.org/drawingml/2006/main" noGrp="1"/>
+            <a:spLocks noGrp="1"/>
           </p:cNvSpPr>
           <p:nvPr/>
         </p:nvSpPr>
         <p:spPr>
-          <a:xfrm xmlns:a="http://schemas.openxmlformats.org/drawingml/2006/main">
+          <a:xfrm>
             <a:off x="685800" y="3676650"/>
             <a:ext cx="10820400" cy="0"/>
           </a:xfrm>
-          <a:prstGeom xmlns:a="http://schemas.openxmlformats.org/drawingml/2006/main" prst="line">
+          <a:prstGeom prst="line">
             <a:avLst/>
           </a:prstGeom>
-          <a:noFill xmlns:a="http://schemas.openxmlformats.org/drawingml/2006/main"/>
-          <a:ln xmlns:a="http://schemas.openxmlformats.org/drawingml/2006/main" w="9525">
+          <a:noFill/>
+          <a:ln w="9525">
             <a:solidFill>
               <a:srgbClr val="B8B8B8"/>
             </a:solidFill>
             <a:prstDash val="solid"/>
           </a:ln>
         </p:spPr>
-      </p:sp>
-      <p:sp>
-        <p:nvSpPr>
-          <p:cNvPr id="16" name="">
-            <a:extLst xmlns:a="http://schemas.openxmlformats.org/drawingml/2006/main">
+        <p:txBody>
+          <a:bodyPr/>
+          <a:lstStyle/>
+          <a:p>
+            <a:endParaRPr lang="ko-KR" altLang="en-US"/>
+          </a:p>
+        </p:txBody>
+      </p:sp>
+      <p:sp>
+        <p:nvSpPr>
+          <p:cNvPr id="16" name="직사각형 15">
+            <a:extLst>
               <a:ext uri="{FF2B5EF4-FFF2-40B4-BE49-F238E27FC236}">
                 <a16:creationId xmlns:a16="http://schemas.microsoft.com/office/drawing/2014/main" id="{AC714933-275B-408A-9300-D8E2D53C6646}"/>
               </a:ext>
             </a:extLst>
           </p:cNvPr>
           <p:cNvSpPr>
-            <a:spLocks xmlns:a="http://schemas.openxmlformats.org/drawingml/2006/main" noGrp="1"/>
+            <a:spLocks noGrp="1"/>
           </p:cNvSpPr>
           <p:nvPr/>
         </p:nvSpPr>
         <p:spPr>
-          <a:xfrm xmlns:a="http://schemas.openxmlformats.org/drawingml/2006/main">
+          <a:xfrm>
             <a:off x="685800" y="4029075"/>
             <a:ext cx="3429000" cy="285750"/>
           </a:xfrm>
-          <a:prstGeom xmlns:a="http://schemas.openxmlformats.org/drawingml/2006/main" prst="rect">
+          <a:prstGeom prst="rect">
             <a:avLst/>
           </a:prstGeom>
-          <a:noFill xmlns:a="http://schemas.openxmlformats.org/drawingml/2006/main"/>
-          <a:ln xmlns:a="http://schemas.openxmlformats.org/drawingml/2006/main" w="0">
+          <a:noFill/>
+          <a:ln w="0">
             <a:noFill/>
           </a:ln>
         </p:spPr>
         <p:txBody>
-          <a:bodyPr xmlns:a="http://schemas.openxmlformats.org/drawingml/2006/main" wrap="square" lIns="0" tIns="0" rIns="0" bIns="0" anchor="t">
+          <a:bodyPr wrap="square" lIns="0" tIns="0" rIns="0" bIns="0" anchor="t">
             <a:noAutofit/>
           </a:bodyPr>
-          <a:lstStyle xmlns:a="http://schemas.openxmlformats.org/drawingml/2006/main"/>
-          <a:p xmlns:a="http://schemas.openxmlformats.org/drawingml/2006/main">
+          <a:lstStyle/>
+          <a:p>
             <a:pPr algn="l">
               <a:lnSpc>
                 <a:spcPct val="108000"/>
@@ -4570,37 +4348,37 @@
       </p:sp>
       <p:sp>
         <p:nvSpPr>
-          <p:cNvPr id="17" name="">
-            <a:extLst xmlns:a="http://schemas.openxmlformats.org/drawingml/2006/main">
+          <p:cNvPr id="17" name="직사각형 16">
+            <a:extLst>
               <a:ext uri="{FF2B5EF4-FFF2-40B4-BE49-F238E27FC236}">
                 <a16:creationId xmlns:a16="http://schemas.microsoft.com/office/drawing/2014/main" id="{C2FC0D42-28CB-4500-BD55-7E14EBD89E45}"/>
               </a:ext>
             </a:extLst>
           </p:cNvPr>
           <p:cNvSpPr>
-            <a:spLocks xmlns:a="http://schemas.openxmlformats.org/drawingml/2006/main" noGrp="1"/>
+            <a:spLocks noGrp="1"/>
           </p:cNvSpPr>
           <p:nvPr/>
         </p:nvSpPr>
         <p:spPr>
-          <a:xfrm xmlns:a="http://schemas.openxmlformats.org/drawingml/2006/main">
+          <a:xfrm>
             <a:off x="685800" y="4438650"/>
             <a:ext cx="10820400" cy="1466850"/>
           </a:xfrm>
-          <a:prstGeom xmlns:a="http://schemas.openxmlformats.org/drawingml/2006/main" prst="rect">
+          <a:prstGeom prst="rect">
             <a:avLst/>
           </a:prstGeom>
-          <a:noFill xmlns:a="http://schemas.openxmlformats.org/drawingml/2006/main"/>
-          <a:ln xmlns:a="http://schemas.openxmlformats.org/drawingml/2006/main" w="0">
+          <a:noFill/>
+          <a:ln w="0">
             <a:noFill/>
           </a:ln>
         </p:spPr>
         <p:txBody>
-          <a:bodyPr xmlns:a="http://schemas.openxmlformats.org/drawingml/2006/main" wrap="square" lIns="0" tIns="0" rIns="0" bIns="0" anchor="t">
+          <a:bodyPr wrap="square" lIns="0" tIns="0" rIns="0" bIns="0" anchor="t">
             <a:noAutofit/>
           </a:bodyPr>
-          <a:lstStyle xmlns:a="http://schemas.openxmlformats.org/drawingml/2006/main"/>
-          <a:p xmlns:a="http://schemas.openxmlformats.org/drawingml/2006/main">
+          <a:lstStyle/>
+          <a:p>
             <a:pPr marL="203200" indent="-127000" algn="l">
               <a:lnSpc>
                 <a:spcPct val="107000"/>
@@ -4641,7 +4419,7 @@
               <a:t>사용할 서울시 노선, 기간, GTFS와 BIS의 연결 기준</a:t>
             </a:r>
           </a:p>
-          <a:p xmlns:a="http://schemas.openxmlformats.org/drawingml/2006/main">
+          <a:p>
             <a:pPr marL="203200" indent="-127000" algn="l">
               <a:lnSpc>
                 <a:spcPct val="107000"/>
@@ -4682,7 +4460,7 @@
               <a:t>어느 수준의 실제 운행과 배터리 사용량을 반영할지</a:t>
             </a:r>
           </a:p>
-          <a:p xmlns:a="http://schemas.openxmlformats.org/drawingml/2006/main">
+          <a:p>
             <a:pPr marL="203200" indent="-127000" algn="l">
               <a:lnSpc>
                 <a:spcPct val="107000"/>
@@ -4723,7 +4501,7 @@
               <a:t>단순 충전 규칙부터 비교할지, 처음부터 최적화 문제로 만들지</a:t>
             </a:r>
           </a:p>
-          <a:p xmlns:a="http://schemas.openxmlformats.org/drawingml/2006/main">
+          <a:p>
             <a:pPr marL="203200" indent="-127000" algn="l">
               <a:lnSpc>
                 <a:spcPct val="107000"/>
@@ -4773,1273 +4551,9 @@
       </p:ext>
     </p:extLst>
   </p:cSld>
-</p:sld>
-</file>
-
-<file path=ppt/slides/slide5.xml><?xml version="1.0" encoding="utf-8"?>
-<p:sld xmlns:p="http://schemas.openxmlformats.org/presentationml/2006/main">
-  <p:cSld>
-    <p:bg>
-      <p:bgPr>
-        <a:solidFill xmlns:a="http://schemas.openxmlformats.org/drawingml/2006/main">
-          <a:srgbClr val="FFFFFF"/>
-        </a:solidFill>
-      </p:bgPr>
-    </p:bg>
-    <p:spTree>
-      <p:nvGrpSpPr>
-        <p:cNvPr id="1" name=""/>
-        <p:cNvGrpSpPr/>
-        <p:nvPr/>
-      </p:nvGrpSpPr>
-      <p:grpSpPr>
-        <a:xfrm xmlns:a="http://schemas.openxmlformats.org/drawingml/2006/main"/>
-      </p:grpSpPr>
-      <p:sp>
-        <p:nvSpPr>
-          <p:cNvPr id="21" name="">
-            <a:extLst xmlns:a="http://schemas.openxmlformats.org/drawingml/2006/main">
-              <a:ext uri="{FF2B5EF4-FFF2-40B4-BE49-F238E27FC236}">
-                <a16:creationId xmlns:a16="http://schemas.microsoft.com/office/drawing/2014/main" id="{E3165C7B-5785-4720-A5F4-B748FB1C0962}"/>
-              </a:ext>
-            </a:extLst>
-          </p:cNvPr>
-          <p:cNvSpPr>
-            <a:spLocks xmlns:a="http://schemas.openxmlformats.org/drawingml/2006/main" noGrp="1"/>
-          </p:cNvSpPr>
-          <p:nvPr/>
-        </p:nvSpPr>
-        <p:spPr>
-          <a:xfrm xmlns:a="http://schemas.openxmlformats.org/drawingml/2006/main">
-            <a:off x="685800" y="428625"/>
-            <a:ext cx="8858250" cy="685800"/>
-          </a:xfrm>
-          <a:prstGeom xmlns:a="http://schemas.openxmlformats.org/drawingml/2006/main" prst="rect">
-            <a:avLst/>
-          </a:prstGeom>
-          <a:noFill xmlns:a="http://schemas.openxmlformats.org/drawingml/2006/main"/>
-          <a:ln xmlns:a="http://schemas.openxmlformats.org/drawingml/2006/main" w="0">
-            <a:noFill/>
-          </a:ln>
-        </p:spPr>
-        <p:txBody>
-          <a:bodyPr xmlns:a="http://schemas.openxmlformats.org/drawingml/2006/main" wrap="square" lIns="0" tIns="0" rIns="0" bIns="0" anchor="t">
-            <a:noAutofit/>
-          </a:bodyPr>
-          <a:lstStyle xmlns:a="http://schemas.openxmlformats.org/drawingml/2006/main"/>
-          <a:p xmlns:a="http://schemas.openxmlformats.org/drawingml/2006/main">
-            <a:pPr algn="l">
-              <a:lnSpc>
-                <a:spcPct val="108000"/>
-              </a:lnSpc>
-              <a:buNone/>
-              <a:defRPr sz="2775" b="1">
-                <a:solidFill>
-                  <a:srgbClr val="000000"/>
-                </a:solidFill>
-                <a:latin typeface="Pretendard Medium"/>
-                <a:ea typeface="Pretendard Medium"/>
-                <a:cs typeface="Pretendard Medium"/>
-              </a:defRPr>
-            </a:pPr>
-            <a:r>
-              <a:rPr sz="2775" b="1">
-                <a:solidFill>
-                  <a:srgbClr val="000000"/>
-                </a:solidFill>
-                <a:latin typeface="Pretendard Medium"/>
-                <a:ea typeface="Pretendard Medium"/>
-                <a:cs typeface="Pretendard Medium"/>
-              </a:rPr>
-              <a:t>공동연구에서 논의할 내용</a:t>
-            </a:r>
-          </a:p>
-        </p:txBody>
-      </p:sp>
-      <p:sp>
-        <p:nvSpPr>
-          <p:cNvPr id="2" name="">
-            <a:extLst xmlns:a="http://schemas.openxmlformats.org/drawingml/2006/main">
-              <a:ext uri="{FF2B5EF4-FFF2-40B4-BE49-F238E27FC236}">
-                <a16:creationId xmlns:a16="http://schemas.microsoft.com/office/drawing/2014/main" id="{C7559925-A29A-49E9-9EAE-DDE1260ED103}"/>
-              </a:ext>
-            </a:extLst>
-          </p:cNvPr>
-          <p:cNvSpPr>
-            <a:spLocks xmlns:a="http://schemas.openxmlformats.org/drawingml/2006/main" noGrp="1"/>
-          </p:cNvSpPr>
-          <p:nvPr/>
-        </p:nvSpPr>
-        <p:spPr>
-          <a:xfrm xmlns:a="http://schemas.openxmlformats.org/drawingml/2006/main">
-            <a:off x="9667875" y="666750"/>
-            <a:ext cx="1838325" cy="371475"/>
-          </a:xfrm>
-          <a:prstGeom xmlns:a="http://schemas.openxmlformats.org/drawingml/2006/main" prst="roundRect">
-            <a:avLst>
-              <a:gd name="adj" fmla="val 50000"/>
-            </a:avLst>
-          </a:prstGeom>
-          <a:solidFill xmlns:a="http://schemas.openxmlformats.org/drawingml/2006/main">
-            <a:srgbClr val="F2F2F2"/>
-          </a:solidFill>
-          <a:ln xmlns:a="http://schemas.openxmlformats.org/drawingml/2006/main" w="0">
-            <a:noFill/>
-          </a:ln>
-        </p:spPr>
-        <p:txBody>
-          <a:bodyPr xmlns:a="http://schemas.openxmlformats.org/drawingml/2006/main" lIns="38100" tIns="0" rIns="38100" bIns="0" anchor="ctr">
-            <a:noAutofit/>
-          </a:bodyPr>
-          <a:lstStyle xmlns:a="http://schemas.openxmlformats.org/drawingml/2006/main"/>
-          <a:p xmlns:a="http://schemas.openxmlformats.org/drawingml/2006/main">
-            <a:pPr algn="ctr">
-              <a:defRPr sz="1125">
-                <a:solidFill>
-                  <a:srgbClr val="222222"/>
-                </a:solidFill>
-                <a:latin typeface="Pretendard"/>
-                <a:ea typeface="Pretendard"/>
-                <a:cs typeface="Pretendard"/>
-              </a:defRPr>
-            </a:pPr>
-            <a:r>
-              <a:rPr sz="1125">
-                <a:solidFill>
-                  <a:srgbClr val="222222"/>
-                </a:solidFill>
-                <a:latin typeface="Pretendard"/>
-                <a:ea typeface="Pretendard"/>
-                <a:cs typeface="Pretendard"/>
-              </a:rPr>
-              <a:t>공동연구 논의</a:t>
-            </a:r>
-          </a:p>
-        </p:txBody>
-      </p:sp>
-      <p:sp>
-        <p:nvSpPr>
-          <p:cNvPr id="3" name="">
-            <a:extLst xmlns:a="http://schemas.openxmlformats.org/drawingml/2006/main">
-              <a:ext uri="{FF2B5EF4-FFF2-40B4-BE49-F238E27FC236}">
-                <a16:creationId xmlns:a16="http://schemas.microsoft.com/office/drawing/2014/main" id="{B0CF6050-7121-4957-B21A-8A539EE32A5F}"/>
-              </a:ext>
-            </a:extLst>
-          </p:cNvPr>
-          <p:cNvSpPr>
-            <a:spLocks xmlns:a="http://schemas.openxmlformats.org/drawingml/2006/main" noGrp="1"/>
-          </p:cNvSpPr>
-          <p:nvPr/>
-        </p:nvSpPr>
-        <p:spPr>
-          <a:xfrm xmlns:a="http://schemas.openxmlformats.org/drawingml/2006/main">
-            <a:off x="685800" y="6419850"/>
-            <a:ext cx="9334500" cy="171450"/>
-          </a:xfrm>
-          <a:prstGeom xmlns:a="http://schemas.openxmlformats.org/drawingml/2006/main" prst="rect">
-            <a:avLst/>
-          </a:prstGeom>
-          <a:noFill xmlns:a="http://schemas.openxmlformats.org/drawingml/2006/main"/>
-          <a:ln xmlns:a="http://schemas.openxmlformats.org/drawingml/2006/main" w="0">
-            <a:noFill/>
-          </a:ln>
-        </p:spPr>
-        <p:txBody>
-          <a:bodyPr xmlns:a="http://schemas.openxmlformats.org/drawingml/2006/main" wrap="square" lIns="0" tIns="0" rIns="0" bIns="0" anchor="ctr">
-            <a:noAutofit/>
-          </a:bodyPr>
-          <a:lstStyle xmlns:a="http://schemas.openxmlformats.org/drawingml/2006/main"/>
-          <a:p xmlns:a="http://schemas.openxmlformats.org/drawingml/2006/main">
-            <a:pPr algn="l">
-              <a:lnSpc>
-                <a:spcPct val="108000"/>
-              </a:lnSpc>
-              <a:buNone/>
-              <a:defRPr sz="863" b="0">
-                <a:solidFill>
-                  <a:srgbClr val="AFAFAF"/>
-                </a:solidFill>
-                <a:latin typeface="Pretendard"/>
-                <a:ea typeface="Pretendard"/>
-                <a:cs typeface="Pretendard"/>
-              </a:defRPr>
-            </a:pPr>
-            <a:r>
-              <a:rPr sz="863" b="0">
-                <a:solidFill>
-                  <a:srgbClr val="AFAFAF"/>
-                </a:solidFill>
-                <a:latin typeface="Pretendard"/>
-                <a:ea typeface="Pretendard"/>
-                <a:cs typeface="Pretendard"/>
-              </a:rPr>
-              <a:t>택시와 전기버스 연구를 연결하고 첫 공동실험을 정하기 위한 질문.</a:t>
-            </a:r>
-          </a:p>
-        </p:txBody>
-      </p:sp>
-      <p:sp>
-        <p:nvSpPr>
-          <p:cNvPr id="4" name="">
-            <a:extLst xmlns:a="http://schemas.openxmlformats.org/drawingml/2006/main">
-              <a:ext uri="{FF2B5EF4-FFF2-40B4-BE49-F238E27FC236}">
-                <a16:creationId xmlns:a16="http://schemas.microsoft.com/office/drawing/2014/main" id="{B9178EDB-CAAE-4491-9CAB-865DFE016AFC}"/>
-              </a:ext>
-            </a:extLst>
-          </p:cNvPr>
-          <p:cNvSpPr>
-            <a:spLocks xmlns:a="http://schemas.openxmlformats.org/drawingml/2006/main" noGrp="1"/>
-          </p:cNvSpPr>
-          <p:nvPr/>
-        </p:nvSpPr>
-        <p:spPr>
-          <a:xfrm xmlns:a="http://schemas.openxmlformats.org/drawingml/2006/main">
-            <a:off x="10591800" y="6381750"/>
-            <a:ext cx="914400" cy="209550"/>
-          </a:xfrm>
-          <a:prstGeom xmlns:a="http://schemas.openxmlformats.org/drawingml/2006/main" prst="rect">
-            <a:avLst/>
-          </a:prstGeom>
-          <a:noFill xmlns:a="http://schemas.openxmlformats.org/drawingml/2006/main"/>
-          <a:ln xmlns:a="http://schemas.openxmlformats.org/drawingml/2006/main" w="0">
-            <a:noFill/>
-          </a:ln>
-        </p:spPr>
-        <p:txBody>
-          <a:bodyPr xmlns:a="http://schemas.openxmlformats.org/drawingml/2006/main" wrap="square" lIns="0" tIns="0" rIns="0" bIns="0" anchor="ctr">
-            <a:noAutofit/>
-          </a:bodyPr>
-          <a:lstStyle xmlns:a="http://schemas.openxmlformats.org/drawingml/2006/main"/>
-          <a:p xmlns:a="http://schemas.openxmlformats.org/drawingml/2006/main">
-            <a:pPr algn="r">
-              <a:lnSpc>
-                <a:spcPct val="108000"/>
-              </a:lnSpc>
-              <a:buNone/>
-              <a:defRPr sz="900" b="0">
-                <a:solidFill>
-                  <a:srgbClr val="AFAFAF"/>
-                </a:solidFill>
-                <a:latin typeface="Pretendard"/>
-                <a:ea typeface="Pretendard"/>
-                <a:cs typeface="Pretendard"/>
-              </a:defRPr>
-            </a:pPr>
-            <a:r>
-              <a:rPr sz="900" b="0">
-                <a:solidFill>
-                  <a:srgbClr val="AFAFAF"/>
-                </a:solidFill>
-                <a:latin typeface="Pretendard"/>
-                <a:ea typeface="Pretendard"/>
-                <a:cs typeface="Pretendard"/>
-              </a:rPr>
-              <a:t>5</a:t>
-            </a:r>
-          </a:p>
-        </p:txBody>
-      </p:sp>
-      <p:sp>
-        <p:nvSpPr>
-          <p:cNvPr id="5" name="">
-            <a:extLst xmlns:a="http://schemas.openxmlformats.org/drawingml/2006/main">
-              <a:ext uri="{FF2B5EF4-FFF2-40B4-BE49-F238E27FC236}">
-                <a16:creationId xmlns:a16="http://schemas.microsoft.com/office/drawing/2014/main" id="{609AFB46-FEA8-4D83-ABB3-1B6A19AB2007}"/>
-              </a:ext>
-            </a:extLst>
-          </p:cNvPr>
-          <p:cNvSpPr>
-            <a:spLocks xmlns:a="http://schemas.openxmlformats.org/drawingml/2006/main" noGrp="1"/>
-          </p:cNvSpPr>
-          <p:nvPr/>
-        </p:nvSpPr>
-        <p:spPr>
-          <a:xfrm xmlns:a="http://schemas.openxmlformats.org/drawingml/2006/main">
-            <a:off x="685800" y="1381125"/>
-            <a:ext cx="514350" cy="590550"/>
-          </a:xfrm>
-          <a:prstGeom xmlns:a="http://schemas.openxmlformats.org/drawingml/2006/main" prst="rect">
-            <a:avLst/>
-          </a:prstGeom>
-          <a:noFill xmlns:a="http://schemas.openxmlformats.org/drawingml/2006/main"/>
-          <a:ln xmlns:a="http://schemas.openxmlformats.org/drawingml/2006/main" w="0">
-            <a:noFill/>
-          </a:ln>
-        </p:spPr>
-        <p:txBody>
-          <a:bodyPr xmlns:a="http://schemas.openxmlformats.org/drawingml/2006/main" wrap="square" lIns="0" tIns="0" rIns="0" bIns="0" anchor="ctr">
-            <a:noAutofit/>
-          </a:bodyPr>
-          <a:lstStyle xmlns:a="http://schemas.openxmlformats.org/drawingml/2006/main"/>
-          <a:p xmlns:a="http://schemas.openxmlformats.org/drawingml/2006/main">
-            <a:pPr algn="ctr">
-              <a:lnSpc>
-                <a:spcPct val="108000"/>
-              </a:lnSpc>
-              <a:buNone/>
-              <a:defRPr sz="2250" b="1">
-                <a:solidFill>
-                  <a:srgbClr val="000000"/>
-                </a:solidFill>
-                <a:latin typeface="Pretendard Medium"/>
-                <a:ea typeface="Pretendard Medium"/>
-                <a:cs typeface="Pretendard Medium"/>
-              </a:defRPr>
-            </a:pPr>
-            <a:r>
-              <a:rPr sz="2250" b="1">
-                <a:solidFill>
-                  <a:srgbClr val="000000"/>
-                </a:solidFill>
-                <a:latin typeface="Pretendard Medium"/>
-                <a:ea typeface="Pretendard Medium"/>
-                <a:cs typeface="Pretendard Medium"/>
-              </a:rPr>
-              <a:t>1</a:t>
-            </a:r>
-          </a:p>
-        </p:txBody>
-      </p:sp>
-      <p:sp>
-        <p:nvSpPr>
-          <p:cNvPr id="6" name="">
-            <a:extLst xmlns:a="http://schemas.openxmlformats.org/drawingml/2006/main">
-              <a:ext uri="{FF2B5EF4-FFF2-40B4-BE49-F238E27FC236}">
-                <a16:creationId xmlns:a16="http://schemas.microsoft.com/office/drawing/2014/main" id="{1C40428A-AF19-463C-AE6C-01398FBB362F}"/>
-              </a:ext>
-            </a:extLst>
-          </p:cNvPr>
-          <p:cNvSpPr>
-            <a:spLocks xmlns:a="http://schemas.openxmlformats.org/drawingml/2006/main" noGrp="1"/>
-          </p:cNvSpPr>
-          <p:nvPr/>
-        </p:nvSpPr>
-        <p:spPr>
-          <a:xfrm xmlns:a="http://schemas.openxmlformats.org/drawingml/2006/main">
-            <a:off x="1409700" y="1400175"/>
-            <a:ext cx="1619250" cy="285750"/>
-          </a:xfrm>
-          <a:prstGeom xmlns:a="http://schemas.openxmlformats.org/drawingml/2006/main" prst="rect">
-            <a:avLst/>
-          </a:prstGeom>
-          <a:noFill xmlns:a="http://schemas.openxmlformats.org/drawingml/2006/main"/>
-          <a:ln xmlns:a="http://schemas.openxmlformats.org/drawingml/2006/main" w="0">
-            <a:noFill/>
-          </a:ln>
-        </p:spPr>
-        <p:txBody>
-          <a:bodyPr xmlns:a="http://schemas.openxmlformats.org/drawingml/2006/main" wrap="square" lIns="0" tIns="0" rIns="0" bIns="0" anchor="t">
-            <a:noAutofit/>
-          </a:bodyPr>
-          <a:lstStyle xmlns:a="http://schemas.openxmlformats.org/drawingml/2006/main"/>
-          <a:p xmlns:a="http://schemas.openxmlformats.org/drawingml/2006/main">
-            <a:pPr algn="l">
-              <a:lnSpc>
-                <a:spcPct val="108000"/>
-              </a:lnSpc>
-              <a:buNone/>
-              <a:defRPr sz="1500" b="1">
-                <a:solidFill>
-                  <a:srgbClr val="000000"/>
-                </a:solidFill>
-                <a:latin typeface="Pretendard Medium"/>
-                <a:ea typeface="Pretendard Medium"/>
-                <a:cs typeface="Pretendard Medium"/>
-              </a:defRPr>
-            </a:pPr>
-            <a:r>
-              <a:rPr sz="1500" b="1">
-                <a:solidFill>
-                  <a:srgbClr val="000000"/>
-                </a:solidFill>
-                <a:latin typeface="Pretendard Medium"/>
-                <a:ea typeface="Pretendard Medium"/>
-                <a:cs typeface="Pretendard Medium"/>
-              </a:rPr>
-              <a:t>연구 연결</a:t>
-            </a:r>
-          </a:p>
-        </p:txBody>
-      </p:sp>
-      <p:sp>
-        <p:nvSpPr>
-          <p:cNvPr id="7" name="">
-            <a:extLst xmlns:a="http://schemas.openxmlformats.org/drawingml/2006/main">
-              <a:ext uri="{FF2B5EF4-FFF2-40B4-BE49-F238E27FC236}">
-                <a16:creationId xmlns:a16="http://schemas.microsoft.com/office/drawing/2014/main" id="{8DDA4EBA-78FC-4519-984A-8435223ED920}"/>
-              </a:ext>
-            </a:extLst>
-          </p:cNvPr>
-          <p:cNvSpPr>
-            <a:spLocks xmlns:a="http://schemas.openxmlformats.org/drawingml/2006/main" noGrp="1"/>
-          </p:cNvSpPr>
-          <p:nvPr/>
-        </p:nvSpPr>
-        <p:spPr>
-          <a:xfrm xmlns:a="http://schemas.openxmlformats.org/drawingml/2006/main">
-            <a:off x="3048000" y="1381125"/>
-            <a:ext cx="8458200" cy="666750"/>
-          </a:xfrm>
-          <a:prstGeom xmlns:a="http://schemas.openxmlformats.org/drawingml/2006/main" prst="rect">
-            <a:avLst/>
-          </a:prstGeom>
-          <a:noFill xmlns:a="http://schemas.openxmlformats.org/drawingml/2006/main"/>
-          <a:ln xmlns:a="http://schemas.openxmlformats.org/drawingml/2006/main" w="0">
-            <a:noFill/>
-          </a:ln>
-        </p:spPr>
-        <p:txBody>
-          <a:bodyPr xmlns:a="http://schemas.openxmlformats.org/drawingml/2006/main" wrap="square" lIns="0" tIns="0" rIns="0" bIns="0" anchor="ctr">
-            <a:noAutofit/>
-          </a:bodyPr>
-          <a:lstStyle xmlns:a="http://schemas.openxmlformats.org/drawingml/2006/main"/>
-          <a:p xmlns:a="http://schemas.openxmlformats.org/drawingml/2006/main">
-            <a:pPr algn="l">
-              <a:lnSpc>
-                <a:spcPct val="108000"/>
-              </a:lnSpc>
-              <a:buNone/>
-              <a:defRPr sz="1388" b="0">
-                <a:solidFill>
-                  <a:srgbClr val="222222"/>
-                </a:solidFill>
-                <a:latin typeface="Pretendard"/>
-                <a:ea typeface="Pretendard"/>
-                <a:cs typeface="Pretendard"/>
-              </a:defRPr>
-            </a:pPr>
-            <a:r>
-              <a:rPr sz="1388" b="0">
-                <a:solidFill>
-                  <a:srgbClr val="222222"/>
-                </a:solidFill>
-                <a:latin typeface="Pretendard"/>
-                <a:ea typeface="Pretendard"/>
-                <a:cs typeface="Pretendard"/>
-              </a:rPr>
-              <a:t>건대의 택시 시뮬레이션과 전기버스 시뮬레이션에서</a:t>
-            </a:r>
-          </a:p>
-          <a:p xmlns:a="http://schemas.openxmlformats.org/drawingml/2006/main">
-            <a:pPr algn="l">
-              <a:lnSpc>
-                <a:spcPct val="108000"/>
-              </a:lnSpc>
-              <a:buNone/>
-              <a:defRPr sz="1388" b="0">
-                <a:solidFill>
-                  <a:srgbClr val="222222"/>
-                </a:solidFill>
-                <a:latin typeface="Pretendard"/>
-                <a:ea typeface="Pretendard"/>
-                <a:cs typeface="Pretendard"/>
-              </a:defRPr>
-            </a:pPr>
-            <a:r>
-              <a:rPr sz="1388" b="0">
-                <a:solidFill>
-                  <a:srgbClr val="222222"/>
-                </a:solidFill>
-                <a:latin typeface="Pretendard"/>
-                <a:ea typeface="Pretendard"/>
-                <a:cs typeface="Pretendard"/>
-              </a:rPr>
-              <a:t>함께 사용할 수 있는 DTUMOS 구조와 평가지표는 무엇일까요?</a:t>
-            </a:r>
-          </a:p>
-        </p:txBody>
-      </p:sp>
-      <p:sp>
-        <p:nvSpPr>
-          <p:cNvPr id="8" name="">
-            <a:extLst xmlns:a="http://schemas.openxmlformats.org/drawingml/2006/main">
-              <a:ext uri="{FF2B5EF4-FFF2-40B4-BE49-F238E27FC236}">
-                <a16:creationId xmlns:a16="http://schemas.microsoft.com/office/drawing/2014/main" id="{34AAE93B-3ACD-4EF6-BE87-C1186F0D183F}"/>
-              </a:ext>
-            </a:extLst>
-          </p:cNvPr>
-          <p:cNvSpPr>
-            <a:spLocks xmlns:a="http://schemas.openxmlformats.org/drawingml/2006/main" noGrp="1"/>
-          </p:cNvSpPr>
-          <p:nvPr/>
-        </p:nvSpPr>
-        <p:spPr>
-          <a:xfrm xmlns:a="http://schemas.openxmlformats.org/drawingml/2006/main">
-            <a:off x="1409700" y="2219325"/>
-            <a:ext cx="10096500" cy="0"/>
-          </a:xfrm>
-          <a:prstGeom xmlns:a="http://schemas.openxmlformats.org/drawingml/2006/main" prst="line">
-            <a:avLst/>
-          </a:prstGeom>
-          <a:noFill xmlns:a="http://schemas.openxmlformats.org/drawingml/2006/main"/>
-          <a:ln xmlns:a="http://schemas.openxmlformats.org/drawingml/2006/main" w="9525">
-            <a:solidFill>
-              <a:srgbClr val="B8B8B8"/>
-            </a:solidFill>
-            <a:prstDash val="solid"/>
-          </a:ln>
-        </p:spPr>
-      </p:sp>
-      <p:sp>
-        <p:nvSpPr>
-          <p:cNvPr id="9" name="">
-            <a:extLst xmlns:a="http://schemas.openxmlformats.org/drawingml/2006/main">
-              <a:ext uri="{FF2B5EF4-FFF2-40B4-BE49-F238E27FC236}">
-                <a16:creationId xmlns:a16="http://schemas.microsoft.com/office/drawing/2014/main" id="{1D07EF28-7663-4D28-8C86-FC878A99DDB2}"/>
-              </a:ext>
-            </a:extLst>
-          </p:cNvPr>
-          <p:cNvSpPr>
-            <a:spLocks xmlns:a="http://schemas.openxmlformats.org/drawingml/2006/main" noGrp="1"/>
-          </p:cNvSpPr>
-          <p:nvPr/>
-        </p:nvSpPr>
-        <p:spPr>
-          <a:xfrm xmlns:a="http://schemas.openxmlformats.org/drawingml/2006/main">
-            <a:off x="685800" y="2505075"/>
-            <a:ext cx="514350" cy="590550"/>
-          </a:xfrm>
-          <a:prstGeom xmlns:a="http://schemas.openxmlformats.org/drawingml/2006/main" prst="rect">
-            <a:avLst/>
-          </a:prstGeom>
-          <a:noFill xmlns:a="http://schemas.openxmlformats.org/drawingml/2006/main"/>
-          <a:ln xmlns:a="http://schemas.openxmlformats.org/drawingml/2006/main" w="0">
-            <a:noFill/>
-          </a:ln>
-        </p:spPr>
-        <p:txBody>
-          <a:bodyPr xmlns:a="http://schemas.openxmlformats.org/drawingml/2006/main" wrap="square" lIns="0" tIns="0" rIns="0" bIns="0" anchor="ctr">
-            <a:noAutofit/>
-          </a:bodyPr>
-          <a:lstStyle xmlns:a="http://schemas.openxmlformats.org/drawingml/2006/main"/>
-          <a:p xmlns:a="http://schemas.openxmlformats.org/drawingml/2006/main">
-            <a:pPr algn="ctr">
-              <a:lnSpc>
-                <a:spcPct val="108000"/>
-              </a:lnSpc>
-              <a:buNone/>
-              <a:defRPr sz="2250" b="1">
-                <a:solidFill>
-                  <a:srgbClr val="000000"/>
-                </a:solidFill>
-                <a:latin typeface="Pretendard Medium"/>
-                <a:ea typeface="Pretendard Medium"/>
-                <a:cs typeface="Pretendard Medium"/>
-              </a:defRPr>
-            </a:pPr>
-            <a:r>
-              <a:rPr sz="2250" b="1">
-                <a:solidFill>
-                  <a:srgbClr val="000000"/>
-                </a:solidFill>
-                <a:latin typeface="Pretendard Medium"/>
-                <a:ea typeface="Pretendard Medium"/>
-                <a:cs typeface="Pretendard Medium"/>
-              </a:rPr>
-              <a:t>2</a:t>
-            </a:r>
-          </a:p>
-        </p:txBody>
-      </p:sp>
-      <p:sp>
-        <p:nvSpPr>
-          <p:cNvPr id="10" name="">
-            <a:extLst xmlns:a="http://schemas.openxmlformats.org/drawingml/2006/main">
-              <a:ext uri="{FF2B5EF4-FFF2-40B4-BE49-F238E27FC236}">
-                <a16:creationId xmlns:a16="http://schemas.microsoft.com/office/drawing/2014/main" id="{A4DD1E59-4890-487F-931C-BE4EC4F0D6CA}"/>
-              </a:ext>
-            </a:extLst>
-          </p:cNvPr>
-          <p:cNvSpPr>
-            <a:spLocks xmlns:a="http://schemas.openxmlformats.org/drawingml/2006/main" noGrp="1"/>
-          </p:cNvSpPr>
-          <p:nvPr/>
-        </p:nvSpPr>
-        <p:spPr>
-          <a:xfrm xmlns:a="http://schemas.openxmlformats.org/drawingml/2006/main">
-            <a:off x="1409700" y="2524125"/>
-            <a:ext cx="1619250" cy="285750"/>
-          </a:xfrm>
-          <a:prstGeom xmlns:a="http://schemas.openxmlformats.org/drawingml/2006/main" prst="rect">
-            <a:avLst/>
-          </a:prstGeom>
-          <a:noFill xmlns:a="http://schemas.openxmlformats.org/drawingml/2006/main"/>
-          <a:ln xmlns:a="http://schemas.openxmlformats.org/drawingml/2006/main" w="0">
-            <a:noFill/>
-          </a:ln>
-        </p:spPr>
-        <p:txBody>
-          <a:bodyPr xmlns:a="http://schemas.openxmlformats.org/drawingml/2006/main" wrap="square" lIns="0" tIns="0" rIns="0" bIns="0" anchor="t">
-            <a:noAutofit/>
-          </a:bodyPr>
-          <a:lstStyle xmlns:a="http://schemas.openxmlformats.org/drawingml/2006/main"/>
-          <a:p xmlns:a="http://schemas.openxmlformats.org/drawingml/2006/main">
-            <a:pPr algn="l">
-              <a:lnSpc>
-                <a:spcPct val="108000"/>
-              </a:lnSpc>
-              <a:buNone/>
-              <a:defRPr sz="1500" b="1">
-                <a:solidFill>
-                  <a:srgbClr val="000000"/>
-                </a:solidFill>
-                <a:latin typeface="Pretendard Medium"/>
-                <a:ea typeface="Pretendard Medium"/>
-                <a:cs typeface="Pretendard Medium"/>
-              </a:defRPr>
-            </a:pPr>
-            <a:r>
-              <a:rPr sz="1500" b="1">
-                <a:solidFill>
-                  <a:srgbClr val="000000"/>
-                </a:solidFill>
-                <a:latin typeface="Pretendard Medium"/>
-                <a:ea typeface="Pretendard Medium"/>
-                <a:cs typeface="Pretendard Medium"/>
-              </a:rPr>
-              <a:t>데이터</a:t>
-            </a:r>
-          </a:p>
-        </p:txBody>
-      </p:sp>
-      <p:sp>
-        <p:nvSpPr>
-          <p:cNvPr id="11" name="">
-            <a:extLst xmlns:a="http://schemas.openxmlformats.org/drawingml/2006/main">
-              <a:ext uri="{FF2B5EF4-FFF2-40B4-BE49-F238E27FC236}">
-                <a16:creationId xmlns:a16="http://schemas.microsoft.com/office/drawing/2014/main" id="{CEA6ABF9-28ED-4BFA-B3BE-510B4E973D54}"/>
-              </a:ext>
-            </a:extLst>
-          </p:cNvPr>
-          <p:cNvSpPr>
-            <a:spLocks xmlns:a="http://schemas.openxmlformats.org/drawingml/2006/main" noGrp="1"/>
-          </p:cNvSpPr>
-          <p:nvPr/>
-        </p:nvSpPr>
-        <p:spPr>
-          <a:xfrm xmlns:a="http://schemas.openxmlformats.org/drawingml/2006/main">
-            <a:off x="3048000" y="2505075"/>
-            <a:ext cx="8458200" cy="666750"/>
-          </a:xfrm>
-          <a:prstGeom xmlns:a="http://schemas.openxmlformats.org/drawingml/2006/main" prst="rect">
-            <a:avLst/>
-          </a:prstGeom>
-          <a:noFill xmlns:a="http://schemas.openxmlformats.org/drawingml/2006/main"/>
-          <a:ln xmlns:a="http://schemas.openxmlformats.org/drawingml/2006/main" w="0">
-            <a:noFill/>
-          </a:ln>
-        </p:spPr>
-        <p:txBody>
-          <a:bodyPr xmlns:a="http://schemas.openxmlformats.org/drawingml/2006/main" wrap="square" lIns="0" tIns="0" rIns="0" bIns="0" anchor="ctr">
-            <a:noAutofit/>
-          </a:bodyPr>
-          <a:lstStyle xmlns:a="http://schemas.openxmlformats.org/drawingml/2006/main"/>
-          <a:p xmlns:a="http://schemas.openxmlformats.org/drawingml/2006/main">
-            <a:pPr algn="l">
-              <a:lnSpc>
-                <a:spcPct val="108000"/>
-              </a:lnSpc>
-              <a:buNone/>
-              <a:defRPr sz="1388" b="0">
-                <a:solidFill>
-                  <a:srgbClr val="222222"/>
-                </a:solidFill>
-                <a:latin typeface="Pretendard"/>
-                <a:ea typeface="Pretendard"/>
-                <a:cs typeface="Pretendard"/>
-              </a:defRPr>
-            </a:pPr>
-            <a:r>
-              <a:rPr sz="1388" b="0">
-                <a:solidFill>
-                  <a:srgbClr val="222222"/>
-                </a:solidFill>
-                <a:latin typeface="Pretendard"/>
-                <a:ea typeface="Pretendard"/>
-                <a:cs typeface="Pretendard"/>
-              </a:rPr>
-              <a:t>두 연구가 같은 서울시 네트워크와 시간 범위를 사용해야 할까요?</a:t>
-            </a:r>
-          </a:p>
-          <a:p xmlns:a="http://schemas.openxmlformats.org/drawingml/2006/main">
-            <a:pPr algn="l">
-              <a:lnSpc>
-                <a:spcPct val="108000"/>
-              </a:lnSpc>
-              <a:buNone/>
-              <a:defRPr sz="1388" b="0">
-                <a:solidFill>
-                  <a:srgbClr val="222222"/>
-                </a:solidFill>
-                <a:latin typeface="Pretendard"/>
-                <a:ea typeface="Pretendard"/>
-                <a:cs typeface="Pretendard"/>
-              </a:defRPr>
-            </a:pPr>
-            <a:r>
-              <a:rPr sz="1388" b="0">
-                <a:solidFill>
-                  <a:srgbClr val="222222"/>
-                </a:solidFill>
-                <a:latin typeface="Pretendard"/>
-                <a:ea typeface="Pretendard"/>
-                <a:cs typeface="Pretendard"/>
-              </a:rPr>
-              <a:t>전기버스는 GTFS와 BIS를 어느 범위부터 연결하면 좋을까요?</a:t>
-            </a:r>
-          </a:p>
-        </p:txBody>
-      </p:sp>
-      <p:sp>
-        <p:nvSpPr>
-          <p:cNvPr id="12" name="">
-            <a:extLst xmlns:a="http://schemas.openxmlformats.org/drawingml/2006/main">
-              <a:ext uri="{FF2B5EF4-FFF2-40B4-BE49-F238E27FC236}">
-                <a16:creationId xmlns:a16="http://schemas.microsoft.com/office/drawing/2014/main" id="{7792A9A1-7D84-43B8-AD4D-76531060B1ED}"/>
-              </a:ext>
-            </a:extLst>
-          </p:cNvPr>
-          <p:cNvSpPr>
-            <a:spLocks xmlns:a="http://schemas.openxmlformats.org/drawingml/2006/main" noGrp="1"/>
-          </p:cNvSpPr>
-          <p:nvPr/>
-        </p:nvSpPr>
-        <p:spPr>
-          <a:xfrm xmlns:a="http://schemas.openxmlformats.org/drawingml/2006/main">
-            <a:off x="1409700" y="3343275"/>
-            <a:ext cx="10096500" cy="0"/>
-          </a:xfrm>
-          <a:prstGeom xmlns:a="http://schemas.openxmlformats.org/drawingml/2006/main" prst="line">
-            <a:avLst/>
-          </a:prstGeom>
-          <a:noFill xmlns:a="http://schemas.openxmlformats.org/drawingml/2006/main"/>
-          <a:ln xmlns:a="http://schemas.openxmlformats.org/drawingml/2006/main" w="9525">
-            <a:solidFill>
-              <a:srgbClr val="B8B8B8"/>
-            </a:solidFill>
-            <a:prstDash val="solid"/>
-          </a:ln>
-        </p:spPr>
-      </p:sp>
-      <p:sp>
-        <p:nvSpPr>
-          <p:cNvPr id="13" name="">
-            <a:extLst xmlns:a="http://schemas.openxmlformats.org/drawingml/2006/main">
-              <a:ext uri="{FF2B5EF4-FFF2-40B4-BE49-F238E27FC236}">
-                <a16:creationId xmlns:a16="http://schemas.microsoft.com/office/drawing/2014/main" id="{CC49CECA-1B5F-46AE-BCE9-79777CA03204}"/>
-              </a:ext>
-            </a:extLst>
-          </p:cNvPr>
-          <p:cNvSpPr>
-            <a:spLocks xmlns:a="http://schemas.openxmlformats.org/drawingml/2006/main" noGrp="1"/>
-          </p:cNvSpPr>
-          <p:nvPr/>
-        </p:nvSpPr>
-        <p:spPr>
-          <a:xfrm xmlns:a="http://schemas.openxmlformats.org/drawingml/2006/main">
-            <a:off x="685800" y="3629025"/>
-            <a:ext cx="514350" cy="590550"/>
-          </a:xfrm>
-          <a:prstGeom xmlns:a="http://schemas.openxmlformats.org/drawingml/2006/main" prst="rect">
-            <a:avLst/>
-          </a:prstGeom>
-          <a:noFill xmlns:a="http://schemas.openxmlformats.org/drawingml/2006/main"/>
-          <a:ln xmlns:a="http://schemas.openxmlformats.org/drawingml/2006/main" w="0">
-            <a:noFill/>
-          </a:ln>
-        </p:spPr>
-        <p:txBody>
-          <a:bodyPr xmlns:a="http://schemas.openxmlformats.org/drawingml/2006/main" wrap="square" lIns="0" tIns="0" rIns="0" bIns="0" anchor="ctr">
-            <a:noAutofit/>
-          </a:bodyPr>
-          <a:lstStyle xmlns:a="http://schemas.openxmlformats.org/drawingml/2006/main"/>
-          <a:p xmlns:a="http://schemas.openxmlformats.org/drawingml/2006/main">
-            <a:pPr algn="ctr">
-              <a:lnSpc>
-                <a:spcPct val="108000"/>
-              </a:lnSpc>
-              <a:buNone/>
-              <a:defRPr sz="2250" b="1">
-                <a:solidFill>
-                  <a:srgbClr val="000000"/>
-                </a:solidFill>
-                <a:latin typeface="Pretendard Medium"/>
-                <a:ea typeface="Pretendard Medium"/>
-                <a:cs typeface="Pretendard Medium"/>
-              </a:defRPr>
-            </a:pPr>
-            <a:r>
-              <a:rPr sz="2250" b="1">
-                <a:solidFill>
-                  <a:srgbClr val="000000"/>
-                </a:solidFill>
-                <a:latin typeface="Pretendard Medium"/>
-                <a:ea typeface="Pretendard Medium"/>
-                <a:cs typeface="Pretendard Medium"/>
-              </a:rPr>
-              <a:t>3</a:t>
-            </a:r>
-          </a:p>
-        </p:txBody>
-      </p:sp>
-      <p:sp>
-        <p:nvSpPr>
-          <p:cNvPr id="14" name="">
-            <a:extLst xmlns:a="http://schemas.openxmlformats.org/drawingml/2006/main">
-              <a:ext uri="{FF2B5EF4-FFF2-40B4-BE49-F238E27FC236}">
-                <a16:creationId xmlns:a16="http://schemas.microsoft.com/office/drawing/2014/main" id="{ADEADCD0-F049-4C59-B2B7-406A6F6EAD03}"/>
-              </a:ext>
-            </a:extLst>
-          </p:cNvPr>
-          <p:cNvSpPr>
-            <a:spLocks xmlns:a="http://schemas.openxmlformats.org/drawingml/2006/main" noGrp="1"/>
-          </p:cNvSpPr>
-          <p:nvPr/>
-        </p:nvSpPr>
-        <p:spPr>
-          <a:xfrm xmlns:a="http://schemas.openxmlformats.org/drawingml/2006/main">
-            <a:off x="1409700" y="3648075"/>
-            <a:ext cx="1619250" cy="285750"/>
-          </a:xfrm>
-          <a:prstGeom xmlns:a="http://schemas.openxmlformats.org/drawingml/2006/main" prst="rect">
-            <a:avLst/>
-          </a:prstGeom>
-          <a:noFill xmlns:a="http://schemas.openxmlformats.org/drawingml/2006/main"/>
-          <a:ln xmlns:a="http://schemas.openxmlformats.org/drawingml/2006/main" w="0">
-            <a:noFill/>
-          </a:ln>
-        </p:spPr>
-        <p:txBody>
-          <a:bodyPr xmlns:a="http://schemas.openxmlformats.org/drawingml/2006/main" wrap="square" lIns="0" tIns="0" rIns="0" bIns="0" anchor="t">
-            <a:noAutofit/>
-          </a:bodyPr>
-          <a:lstStyle xmlns:a="http://schemas.openxmlformats.org/drawingml/2006/main"/>
-          <a:p xmlns:a="http://schemas.openxmlformats.org/drawingml/2006/main">
-            <a:pPr algn="l">
-              <a:lnSpc>
-                <a:spcPct val="108000"/>
-              </a:lnSpc>
-              <a:buNone/>
-              <a:defRPr sz="1500" b="1">
-                <a:solidFill>
-                  <a:srgbClr val="000000"/>
-                </a:solidFill>
-                <a:latin typeface="Pretendard Medium"/>
-                <a:ea typeface="Pretendard Medium"/>
-                <a:cs typeface="Pretendard Medium"/>
-              </a:defRPr>
-            </a:pPr>
-            <a:r>
-              <a:rPr sz="1500" b="1">
-                <a:solidFill>
-                  <a:srgbClr val="000000"/>
-                </a:solidFill>
-                <a:latin typeface="Pretendard Medium"/>
-                <a:ea typeface="Pretendard Medium"/>
-                <a:cs typeface="Pretendard Medium"/>
-              </a:rPr>
-              <a:t>구현과 비교</a:t>
-            </a:r>
-          </a:p>
-        </p:txBody>
-      </p:sp>
-      <p:sp>
-        <p:nvSpPr>
-          <p:cNvPr id="15" name="">
-            <a:extLst xmlns:a="http://schemas.openxmlformats.org/drawingml/2006/main">
-              <a:ext uri="{FF2B5EF4-FFF2-40B4-BE49-F238E27FC236}">
-                <a16:creationId xmlns:a16="http://schemas.microsoft.com/office/drawing/2014/main" id="{A6A8EC72-4EB1-4F82-A02C-EA98718D0947}"/>
-              </a:ext>
-            </a:extLst>
-          </p:cNvPr>
-          <p:cNvSpPr>
-            <a:spLocks xmlns:a="http://schemas.openxmlformats.org/drawingml/2006/main" noGrp="1"/>
-          </p:cNvSpPr>
-          <p:nvPr/>
-        </p:nvSpPr>
-        <p:spPr>
-          <a:xfrm xmlns:a="http://schemas.openxmlformats.org/drawingml/2006/main">
-            <a:off x="3048000" y="3629025"/>
-            <a:ext cx="8458200" cy="666750"/>
-          </a:xfrm>
-          <a:prstGeom xmlns:a="http://schemas.openxmlformats.org/drawingml/2006/main" prst="rect">
-            <a:avLst/>
-          </a:prstGeom>
-          <a:noFill xmlns:a="http://schemas.openxmlformats.org/drawingml/2006/main"/>
-          <a:ln xmlns:a="http://schemas.openxmlformats.org/drawingml/2006/main" w="0">
-            <a:noFill/>
-          </a:ln>
-        </p:spPr>
-        <p:txBody>
-          <a:bodyPr xmlns:a="http://schemas.openxmlformats.org/drawingml/2006/main" wrap="square" lIns="0" tIns="0" rIns="0" bIns="0" anchor="ctr">
-            <a:noAutofit/>
-          </a:bodyPr>
-          <a:lstStyle xmlns:a="http://schemas.openxmlformats.org/drawingml/2006/main"/>
-          <a:p xmlns:a="http://schemas.openxmlformats.org/drawingml/2006/main">
-            <a:pPr algn="l">
-              <a:lnSpc>
-                <a:spcPct val="108000"/>
-              </a:lnSpc>
-              <a:buNone/>
-              <a:defRPr sz="1388" b="0">
-                <a:solidFill>
-                  <a:srgbClr val="222222"/>
-                </a:solidFill>
-                <a:latin typeface="Pretendard"/>
-                <a:ea typeface="Pretendard"/>
-                <a:cs typeface="Pretendard"/>
-              </a:defRPr>
-            </a:pPr>
-            <a:r>
-              <a:rPr sz="1388" b="0">
-                <a:solidFill>
-                  <a:srgbClr val="222222"/>
-                </a:solidFill>
-                <a:latin typeface="Pretendard"/>
-                <a:ea typeface="Pretendard"/>
-                <a:cs typeface="Pretendard"/>
-              </a:rPr>
-              <a:t>전기버스 작은 예제를 먼저 만든 뒤 DTUMOS에 연결하는 순서가 적절할까요?</a:t>
-            </a:r>
-          </a:p>
-          <a:p xmlns:a="http://schemas.openxmlformats.org/drawingml/2006/main">
-            <a:pPr algn="l">
-              <a:lnSpc>
-                <a:spcPct val="108000"/>
-              </a:lnSpc>
-              <a:buNone/>
-              <a:defRPr sz="1388" b="0">
-                <a:solidFill>
-                  <a:srgbClr val="222222"/>
-                </a:solidFill>
-                <a:latin typeface="Pretendard"/>
-                <a:ea typeface="Pretendard"/>
-                <a:cs typeface="Pretendard"/>
-              </a:defRPr>
-            </a:pPr>
-            <a:r>
-              <a:rPr sz="1388" b="0">
-                <a:solidFill>
-                  <a:srgbClr val="222222"/>
-                </a:solidFill>
-                <a:latin typeface="Pretendard"/>
-                <a:ea typeface="Pretendard"/>
-                <a:cs typeface="Pretendard"/>
-              </a:rPr>
-              <a:t>첫 비교는 단순 충전 규칙부터 시작해도 될까요?</a:t>
-            </a:r>
-          </a:p>
-        </p:txBody>
-      </p:sp>
-      <p:sp>
-        <p:nvSpPr>
-          <p:cNvPr id="16" name="">
-            <a:extLst xmlns:a="http://schemas.openxmlformats.org/drawingml/2006/main">
-              <a:ext uri="{FF2B5EF4-FFF2-40B4-BE49-F238E27FC236}">
-                <a16:creationId xmlns:a16="http://schemas.microsoft.com/office/drawing/2014/main" id="{65FAFFF2-38C7-4BB2-A08A-1CF6061DB3AB}"/>
-              </a:ext>
-            </a:extLst>
-          </p:cNvPr>
-          <p:cNvSpPr>
-            <a:spLocks xmlns:a="http://schemas.openxmlformats.org/drawingml/2006/main" noGrp="1"/>
-          </p:cNvSpPr>
-          <p:nvPr/>
-        </p:nvSpPr>
-        <p:spPr>
-          <a:xfrm xmlns:a="http://schemas.openxmlformats.org/drawingml/2006/main">
-            <a:off x="1409700" y="4467225"/>
-            <a:ext cx="10096500" cy="0"/>
-          </a:xfrm>
-          <a:prstGeom xmlns:a="http://schemas.openxmlformats.org/drawingml/2006/main" prst="line">
-            <a:avLst/>
-          </a:prstGeom>
-          <a:noFill xmlns:a="http://schemas.openxmlformats.org/drawingml/2006/main"/>
-          <a:ln xmlns:a="http://schemas.openxmlformats.org/drawingml/2006/main" w="9525">
-            <a:solidFill>
-              <a:srgbClr val="B8B8B8"/>
-            </a:solidFill>
-            <a:prstDash val="solid"/>
-          </a:ln>
-        </p:spPr>
-      </p:sp>
-      <p:sp>
-        <p:nvSpPr>
-          <p:cNvPr id="17" name="">
-            <a:extLst xmlns:a="http://schemas.openxmlformats.org/drawingml/2006/main">
-              <a:ext uri="{FF2B5EF4-FFF2-40B4-BE49-F238E27FC236}">
-                <a16:creationId xmlns:a16="http://schemas.microsoft.com/office/drawing/2014/main" id="{DBA30931-E9E1-431D-A190-1DD0308EECF5}"/>
-              </a:ext>
-            </a:extLst>
-          </p:cNvPr>
-          <p:cNvSpPr>
-            <a:spLocks xmlns:a="http://schemas.openxmlformats.org/drawingml/2006/main" noGrp="1"/>
-          </p:cNvSpPr>
-          <p:nvPr/>
-        </p:nvSpPr>
-        <p:spPr>
-          <a:xfrm xmlns:a="http://schemas.openxmlformats.org/drawingml/2006/main">
-            <a:off x="685800" y="4752975"/>
-            <a:ext cx="514350" cy="590550"/>
-          </a:xfrm>
-          <a:prstGeom xmlns:a="http://schemas.openxmlformats.org/drawingml/2006/main" prst="rect">
-            <a:avLst/>
-          </a:prstGeom>
-          <a:noFill xmlns:a="http://schemas.openxmlformats.org/drawingml/2006/main"/>
-          <a:ln xmlns:a="http://schemas.openxmlformats.org/drawingml/2006/main" w="0">
-            <a:noFill/>
-          </a:ln>
-        </p:spPr>
-        <p:txBody>
-          <a:bodyPr xmlns:a="http://schemas.openxmlformats.org/drawingml/2006/main" wrap="square" lIns="0" tIns="0" rIns="0" bIns="0" anchor="ctr">
-            <a:noAutofit/>
-          </a:bodyPr>
-          <a:lstStyle xmlns:a="http://schemas.openxmlformats.org/drawingml/2006/main"/>
-          <a:p xmlns:a="http://schemas.openxmlformats.org/drawingml/2006/main">
-            <a:pPr algn="ctr">
-              <a:lnSpc>
-                <a:spcPct val="108000"/>
-              </a:lnSpc>
-              <a:buNone/>
-              <a:defRPr sz="2250" b="1">
-                <a:solidFill>
-                  <a:srgbClr val="000000"/>
-                </a:solidFill>
-                <a:latin typeface="Pretendard Medium"/>
-                <a:ea typeface="Pretendard Medium"/>
-                <a:cs typeface="Pretendard Medium"/>
-              </a:defRPr>
-            </a:pPr>
-            <a:r>
-              <a:rPr sz="2250" b="1">
-                <a:solidFill>
-                  <a:srgbClr val="000000"/>
-                </a:solidFill>
-                <a:latin typeface="Pretendard Medium"/>
-                <a:ea typeface="Pretendard Medium"/>
-                <a:cs typeface="Pretendard Medium"/>
-              </a:rPr>
-              <a:t>4</a:t>
-            </a:r>
-          </a:p>
-        </p:txBody>
-      </p:sp>
-      <p:sp>
-        <p:nvSpPr>
-          <p:cNvPr id="18" name="">
-            <a:extLst xmlns:a="http://schemas.openxmlformats.org/drawingml/2006/main">
-              <a:ext uri="{FF2B5EF4-FFF2-40B4-BE49-F238E27FC236}">
-                <a16:creationId xmlns:a16="http://schemas.microsoft.com/office/drawing/2014/main" id="{3E9E088C-5E34-4595-8C1A-7D404BA2A0E0}"/>
-              </a:ext>
-            </a:extLst>
-          </p:cNvPr>
-          <p:cNvSpPr>
-            <a:spLocks xmlns:a="http://schemas.openxmlformats.org/drawingml/2006/main" noGrp="1"/>
-          </p:cNvSpPr>
-          <p:nvPr/>
-        </p:nvSpPr>
-        <p:spPr>
-          <a:xfrm xmlns:a="http://schemas.openxmlformats.org/drawingml/2006/main">
-            <a:off x="1409700" y="4772025"/>
-            <a:ext cx="1619250" cy="285750"/>
-          </a:xfrm>
-          <a:prstGeom xmlns:a="http://schemas.openxmlformats.org/drawingml/2006/main" prst="rect">
-            <a:avLst/>
-          </a:prstGeom>
-          <a:noFill xmlns:a="http://schemas.openxmlformats.org/drawingml/2006/main"/>
-          <a:ln xmlns:a="http://schemas.openxmlformats.org/drawingml/2006/main" w="0">
-            <a:noFill/>
-          </a:ln>
-        </p:spPr>
-        <p:txBody>
-          <a:bodyPr xmlns:a="http://schemas.openxmlformats.org/drawingml/2006/main" wrap="square" lIns="0" tIns="0" rIns="0" bIns="0" anchor="t">
-            <a:noAutofit/>
-          </a:bodyPr>
-          <a:lstStyle xmlns:a="http://schemas.openxmlformats.org/drawingml/2006/main"/>
-          <a:p xmlns:a="http://schemas.openxmlformats.org/drawingml/2006/main">
-            <a:pPr algn="l">
-              <a:lnSpc>
-                <a:spcPct val="108000"/>
-              </a:lnSpc>
-              <a:buNone/>
-              <a:defRPr sz="1500" b="1">
-                <a:solidFill>
-                  <a:srgbClr val="000000"/>
-                </a:solidFill>
-                <a:latin typeface="Pretendard Medium"/>
-                <a:ea typeface="Pretendard Medium"/>
-                <a:cs typeface="Pretendard Medium"/>
-              </a:defRPr>
-            </a:pPr>
-            <a:r>
-              <a:rPr sz="1500" b="1">
-                <a:solidFill>
-                  <a:srgbClr val="000000"/>
-                </a:solidFill>
-                <a:latin typeface="Pretendard Medium"/>
-                <a:ea typeface="Pretendard Medium"/>
-                <a:cs typeface="Pretendard Medium"/>
-              </a:rPr>
-              <a:t>공동논문 범위</a:t>
-            </a:r>
-          </a:p>
-        </p:txBody>
-      </p:sp>
-      <p:sp>
-        <p:nvSpPr>
-          <p:cNvPr id="19" name="">
-            <a:extLst xmlns:a="http://schemas.openxmlformats.org/drawingml/2006/main">
-              <a:ext uri="{FF2B5EF4-FFF2-40B4-BE49-F238E27FC236}">
-                <a16:creationId xmlns:a16="http://schemas.microsoft.com/office/drawing/2014/main" id="{0A0F59B4-4BF0-415F-8D37-B86B26DF1C43}"/>
-              </a:ext>
-            </a:extLst>
-          </p:cNvPr>
-          <p:cNvSpPr>
-            <a:spLocks xmlns:a="http://schemas.openxmlformats.org/drawingml/2006/main" noGrp="1"/>
-          </p:cNvSpPr>
-          <p:nvPr/>
-        </p:nvSpPr>
-        <p:spPr>
-          <a:xfrm xmlns:a="http://schemas.openxmlformats.org/drawingml/2006/main">
-            <a:off x="3048000" y="4752975"/>
-            <a:ext cx="8458200" cy="666750"/>
-          </a:xfrm>
-          <a:prstGeom xmlns:a="http://schemas.openxmlformats.org/drawingml/2006/main" prst="rect">
-            <a:avLst/>
-          </a:prstGeom>
-          <a:noFill xmlns:a="http://schemas.openxmlformats.org/drawingml/2006/main"/>
-          <a:ln xmlns:a="http://schemas.openxmlformats.org/drawingml/2006/main" w="0">
-            <a:noFill/>
-          </a:ln>
-        </p:spPr>
-        <p:txBody>
-          <a:bodyPr xmlns:a="http://schemas.openxmlformats.org/drawingml/2006/main" wrap="square" lIns="0" tIns="0" rIns="0" bIns="0" anchor="ctr">
-            <a:noAutofit/>
-          </a:bodyPr>
-          <a:lstStyle xmlns:a="http://schemas.openxmlformats.org/drawingml/2006/main"/>
-          <a:p xmlns:a="http://schemas.openxmlformats.org/drawingml/2006/main">
-            <a:pPr algn="l">
-              <a:lnSpc>
-                <a:spcPct val="108000"/>
-              </a:lnSpc>
-              <a:buNone/>
-              <a:defRPr sz="1388" b="0">
-                <a:solidFill>
-                  <a:srgbClr val="222222"/>
-                </a:solidFill>
-                <a:latin typeface="Pretendard"/>
-                <a:ea typeface="Pretendard"/>
-                <a:cs typeface="Pretendard"/>
-              </a:defRPr>
-            </a:pPr>
-            <a:r>
-              <a:rPr sz="1388" b="0">
-                <a:solidFill>
-                  <a:srgbClr val="222222"/>
-                </a:solidFill>
-                <a:latin typeface="Pretendard"/>
-                <a:ea typeface="Pretendard"/>
-                <a:cs typeface="Pretendard"/>
-              </a:rPr>
-              <a:t>택시와 전기버스 연구를 한 논문에서 어떤 질문으로 묶을 수 있을까요?</a:t>
-            </a:r>
-          </a:p>
-          <a:p xmlns:a="http://schemas.openxmlformats.org/drawingml/2006/main">
-            <a:pPr algn="l">
-              <a:lnSpc>
-                <a:spcPct val="108000"/>
-              </a:lnSpc>
-              <a:buNone/>
-              <a:defRPr sz="1388" b="0">
-                <a:solidFill>
-                  <a:srgbClr val="222222"/>
-                </a:solidFill>
-                <a:latin typeface="Pretendard"/>
-                <a:ea typeface="Pretendard"/>
-                <a:cs typeface="Pretendard"/>
-              </a:defRPr>
-            </a:pPr>
-            <a:r>
-              <a:rPr sz="1388" b="0">
-                <a:solidFill>
-                  <a:srgbClr val="222222"/>
-                </a:solidFill>
-                <a:latin typeface="Pretendard"/>
-                <a:ea typeface="Pretendard"/>
-                <a:cs typeface="Pretendard"/>
-              </a:rPr>
-              <a:t>전기버스 부분에서 제가 먼저 맡을 결과는 무엇이 좋을까요?</a:t>
-            </a:r>
-          </a:p>
-        </p:txBody>
-      </p:sp>
-      <p:sp>
-        <p:nvSpPr>
-          <p:cNvPr id="20" name="">
-            <a:extLst xmlns:a="http://schemas.openxmlformats.org/drawingml/2006/main">
-              <a:ext uri="{FF2B5EF4-FFF2-40B4-BE49-F238E27FC236}">
-                <a16:creationId xmlns:a16="http://schemas.microsoft.com/office/drawing/2014/main" id="{91CE57C0-E5F2-49E6-86E2-5E8A72607352}"/>
-              </a:ext>
-            </a:extLst>
-          </p:cNvPr>
-          <p:cNvSpPr>
-            <a:spLocks xmlns:a="http://schemas.openxmlformats.org/drawingml/2006/main" noGrp="1"/>
-          </p:cNvSpPr>
-          <p:nvPr/>
-        </p:nvSpPr>
-        <p:spPr>
-          <a:xfrm xmlns:a="http://schemas.openxmlformats.org/drawingml/2006/main">
-            <a:off x="685800" y="5876925"/>
-            <a:ext cx="10820400" cy="323850"/>
-          </a:xfrm>
-          <a:prstGeom xmlns:a="http://schemas.openxmlformats.org/drawingml/2006/main" prst="rect">
-            <a:avLst/>
-          </a:prstGeom>
-          <a:noFill xmlns:a="http://schemas.openxmlformats.org/drawingml/2006/main"/>
-          <a:ln xmlns:a="http://schemas.openxmlformats.org/drawingml/2006/main" w="0">
-            <a:noFill/>
-          </a:ln>
-        </p:spPr>
-        <p:txBody>
-          <a:bodyPr xmlns:a="http://schemas.openxmlformats.org/drawingml/2006/main" wrap="square" lIns="0" tIns="0" rIns="0" bIns="0" anchor="ctr">
-            <a:noAutofit/>
-          </a:bodyPr>
-          <a:lstStyle xmlns:a="http://schemas.openxmlformats.org/drawingml/2006/main"/>
-          <a:p xmlns:a="http://schemas.openxmlformats.org/drawingml/2006/main">
-            <a:pPr algn="ctr">
-              <a:lnSpc>
-                <a:spcPct val="108000"/>
-              </a:lnSpc>
-              <a:buNone/>
-              <a:defRPr sz="1500" b="1">
-                <a:solidFill>
-                  <a:srgbClr val="222222"/>
-                </a:solidFill>
-                <a:latin typeface="Pretendard Medium"/>
-                <a:ea typeface="Pretendard Medium"/>
-                <a:cs typeface="Pretendard Medium"/>
-              </a:defRPr>
-            </a:pPr>
-            <a:r>
-              <a:rPr sz="1500" b="1">
-                <a:solidFill>
-                  <a:srgbClr val="222222"/>
-                </a:solidFill>
-                <a:latin typeface="Pretendard Medium"/>
-                <a:ea typeface="Pretendard Medium"/>
-                <a:cs typeface="Pretendard Medium"/>
-              </a:rPr>
-              <a:t>오늘 논의를 바탕으로 공동연구의 역할과 첫 실험 범위를 정리할 예정입니다.</a:t>
-            </a:r>
-          </a:p>
-        </p:txBody>
-      </p:sp>
-    </p:spTree>
-    <p:extLst>
-      <p:ext uri="{BB962C8B-B14F-4D97-AF65-F5344CB8AC3E}">
-        <p14:creationId xmlns:p14="http://schemas.microsoft.com/office/powerpoint/2010/main" val="1851159234"/>
-      </p:ext>
-    </p:extLst>
-  </p:cSld>
+  <p:clrMapOvr>
+    <a:masterClrMapping/>
+  </p:clrMapOvr>
 </p:sld>
 </file>
 
@@ -6285,5 +4799,254 @@
       </a:bgFillStyleLst>
     </a:fmtScheme>
   </a:themeElements>
+  <a:objectDefaults/>
+  <a:extraClrSchemeLst/>
+</a:theme>
+</file>
+
+<file path=ppt/theme/theme2.xml><?xml version="1.0" encoding="utf-8"?>
+<a:theme xmlns:a="http://schemas.openxmlformats.org/drawingml/2006/main" name="ChatGPT">
+  <a:themeElements>
+    <a:clrScheme name="ChatGPT">
+      <a:dk1>
+        <a:srgbClr val="000000"/>
+      </a:dk1>
+      <a:lt1>
+        <a:srgbClr val="FFFFFF"/>
+      </a:lt1>
+      <a:dk2>
+        <a:srgbClr val="0E2841"/>
+      </a:dk2>
+      <a:lt2>
+        <a:srgbClr val="E8E8E8"/>
+      </a:lt2>
+      <a:accent1>
+        <a:srgbClr val="156082"/>
+      </a:accent1>
+      <a:accent2>
+        <a:srgbClr val="E97132"/>
+      </a:accent2>
+      <a:accent3>
+        <a:srgbClr val="196B24"/>
+      </a:accent3>
+      <a:accent4>
+        <a:srgbClr val="0F9ED5"/>
+      </a:accent4>
+      <a:accent5>
+        <a:srgbClr val="A02B93"/>
+      </a:accent5>
+      <a:accent6>
+        <a:srgbClr val="4EA72E"/>
+      </a:accent6>
+      <a:hlink>
+        <a:srgbClr val="467886"/>
+      </a:hlink>
+      <a:folHlink>
+        <a:srgbClr val="96607D"/>
+      </a:folHlink>
+    </a:clrScheme>
+    <a:fontScheme name="Office">
+      <a:majorFont>
+        <a:latin typeface="Calibri Light"/>
+        <a:ea typeface="Calibri Light"/>
+        <a:cs typeface="Calibri Light"/>
+      </a:majorFont>
+      <a:minorFont>
+        <a:latin typeface="Calibri"/>
+        <a:ea typeface="Calibri"/>
+        <a:cs typeface="Calibri"/>
+      </a:minorFont>
+    </a:fontScheme>
+    <a:fmtScheme name="ChatGPT">
+      <a:fillStyleLst>
+        <a:solidFill>
+          <a:schemeClr val="phClr"/>
+        </a:solidFill>
+        <a:gradFill>
+          <a:gsLst>
+            <a:gs pos="0">
+              <a:schemeClr val="phClr">
+                <a:tint val="67000"/>
+                <a:lumMod val="110000"/>
+                <a:satMod val="105000"/>
+              </a:schemeClr>
+            </a:gs>
+            <a:gs pos="50000">
+              <a:schemeClr val="phClr">
+                <a:tint val="73000"/>
+                <a:lumMod val="105000"/>
+                <a:satMod val="103000"/>
+              </a:schemeClr>
+            </a:gs>
+            <a:gs pos="100000">
+              <a:schemeClr val="phClr">
+                <a:tint val="81000"/>
+                <a:lumMod val="105000"/>
+                <a:satMod val="109000"/>
+              </a:schemeClr>
+            </a:gs>
+          </a:gsLst>
+          <a:lin ang="5400000" scaled="0"/>
+        </a:gradFill>
+        <a:gradFill>
+          <a:gsLst>
+            <a:gs pos="0">
+              <a:schemeClr val="phClr">
+                <a:tint val="94000"/>
+                <a:lumMod val="102000"/>
+                <a:satMod val="103000"/>
+              </a:schemeClr>
+            </a:gs>
+            <a:gs pos="50000">
+              <a:schemeClr val="phClr">
+                <a:shade val="100000"/>
+                <a:lumMod val="100000"/>
+                <a:satMod val="110000"/>
+              </a:schemeClr>
+            </a:gs>
+            <a:gs pos="100000">
+              <a:schemeClr val="phClr">
+                <a:shade val="78000"/>
+                <a:lumMod val="99000"/>
+                <a:satMod val="120000"/>
+              </a:schemeClr>
+            </a:gs>
+          </a:gsLst>
+          <a:lin ang="5400000" scaled="0"/>
+        </a:gradFill>
+      </a:fillStyleLst>
+      <a:lnStyleLst>
+        <a:ln w="12700">
+          <a:solidFill>
+            <a:schemeClr val="phClr"/>
+          </a:solidFill>
+          <a:prstDash val="solid"/>
+        </a:ln>
+        <a:ln w="19050">
+          <a:solidFill>
+            <a:schemeClr val="phClr"/>
+          </a:solidFill>
+          <a:prstDash val="solid"/>
+        </a:ln>
+        <a:ln w="25400">
+          <a:solidFill>
+            <a:schemeClr val="phClr"/>
+          </a:solidFill>
+          <a:prstDash val="solid"/>
+        </a:ln>
+      </a:lnStyleLst>
+      <a:effectStyleLst>
+        <a:effectStyle>
+          <a:effectLst/>
+        </a:effectStyle>
+        <a:effectStyle>
+          <a:effectLst/>
+        </a:effectStyle>
+        <a:effectStyle>
+          <a:effectLst>
+            <a:outerShdw blurRad="57150" dist="19050" dir="5400000">
+              <a:srgbClr val="000000">
+                <a:alpha val="16000"/>
+              </a:srgbClr>
+            </a:outerShdw>
+          </a:effectLst>
+        </a:effectStyle>
+        <a:effectStyle>
+          <a:effectLst>
+            <a:outerShdw blurRad="19050" dist="9525" dir="5400000">
+              <a:srgbClr val="000000">
+                <a:alpha val="6000"/>
+              </a:srgbClr>
+            </a:outerShdw>
+          </a:effectLst>
+        </a:effectStyle>
+        <a:effectStyle>
+          <a:effectLst>
+            <a:outerShdw blurRad="28575" dist="9525" dir="5400000">
+              <a:srgbClr val="000000">
+                <a:alpha val="8000"/>
+              </a:srgbClr>
+            </a:outerShdw>
+          </a:effectLst>
+        </a:effectStyle>
+        <a:effectStyle>
+          <a:effectLst>
+            <a:outerShdw blurRad="57150" dist="19050" dir="5400000">
+              <a:srgbClr val="000000">
+                <a:alpha val="10000"/>
+              </a:srgbClr>
+            </a:outerShdw>
+          </a:effectLst>
+        </a:effectStyle>
+        <a:effectStyle>
+          <a:effectLst>
+            <a:outerShdw blurRad="114300" dist="38100" dir="5400000">
+              <a:srgbClr val="000000">
+                <a:alpha val="12000"/>
+              </a:srgbClr>
+            </a:outerShdw>
+          </a:effectLst>
+        </a:effectStyle>
+        <a:effectStyle>
+          <a:effectLst>
+            <a:outerShdw blurRad="171450" dist="57150" dir="5400000">
+              <a:srgbClr val="000000">
+                <a:alpha val="16000"/>
+              </a:srgbClr>
+            </a:outerShdw>
+          </a:effectLst>
+        </a:effectStyle>
+        <a:effectStyle>
+          <a:effectLst>
+            <a:outerShdw blurRad="266700" dist="95250" dir="5400000">
+              <a:srgbClr val="000000">
+                <a:alpha val="24000"/>
+              </a:srgbClr>
+            </a:outerShdw>
+          </a:effectLst>
+        </a:effectStyle>
+      </a:effectStyleLst>
+      <a:bgFillStyleLst>
+        <a:solidFill>
+          <a:schemeClr val="phClr"/>
+        </a:solidFill>
+        <a:solidFill>
+          <a:schemeClr val="phClr">
+            <a:tint val="95000"/>
+            <a:satMod val="170000"/>
+          </a:schemeClr>
+        </a:solidFill>
+        <a:gradFill>
+          <a:gsLst>
+            <a:gs pos="0">
+              <a:schemeClr val="phClr">
+                <a:tint val="93000"/>
+                <a:shade val="98000"/>
+                <a:lumMod val="102000"/>
+                <a:satMod val="150000"/>
+              </a:schemeClr>
+            </a:gs>
+            <a:gs pos="50000">
+              <a:schemeClr val="phClr">
+                <a:tint val="98000"/>
+                <a:shade val="90000"/>
+                <a:lumMod val="103000"/>
+                <a:satMod val="130000"/>
+              </a:schemeClr>
+            </a:gs>
+            <a:gs pos="100000">
+              <a:schemeClr val="phClr">
+                <a:shade val="63000"/>
+                <a:satMod val="120000"/>
+              </a:schemeClr>
+            </a:gs>
+          </a:gsLst>
+          <a:lin ang="5400000" scaled="0"/>
+        </a:gradFill>
+      </a:bgFillStyleLst>
+    </a:fmtScheme>
+  </a:themeElements>
+  <a:objectDefaults/>
+  <a:extraClrSchemeLst/>
 </a:theme>
 </file>